--- a/test_corretion_elements_graphiques.pptx
+++ b/test_corretion_elements_graphiques.pptx
@@ -3162,20 +3162,6 @@
             <a:noFill/>
           </a:ln>
         </p:spPr>
-        <p:style>
-          <a:lnRef idx="1">
-            <a:schemeClr val="accent1"/>
-          </a:lnRef>
-          <a:fillRef idx="3">
-            <a:schemeClr val="accent1"/>
-          </a:fillRef>
-          <a:effectRef idx="2">
-            <a:schemeClr val="accent1"/>
-          </a:effectRef>
-          <a:fontRef idx="minor">
-            <a:schemeClr val="lt1"/>
-          </a:fontRef>
-        </p:style>
         <p:txBody>
           <a:bodyPr rtlCol="0" anchor="ctr"/>
           <a:lstStyle/>
@@ -3205,20 +3191,6 @@
             <a:noFill/>
           </a:ln>
         </p:spPr>
-        <p:style>
-          <a:lnRef idx="1">
-            <a:schemeClr val="accent1"/>
-          </a:lnRef>
-          <a:fillRef idx="3">
-            <a:schemeClr val="accent1"/>
-          </a:fillRef>
-          <a:effectRef idx="2">
-            <a:schemeClr val="accent1"/>
-          </a:effectRef>
-          <a:fontRef idx="minor">
-            <a:schemeClr val="lt1"/>
-          </a:fontRef>
-        </p:style>
         <p:txBody>
           <a:bodyPr rtlCol="0" anchor="ctr"/>
           <a:lstStyle/>
@@ -3318,20 +3290,6 @@
             <a:noFill/>
           </a:ln>
         </p:spPr>
-        <p:style>
-          <a:lnRef idx="1">
-            <a:schemeClr val="accent1"/>
-          </a:lnRef>
-          <a:fillRef idx="3">
-            <a:schemeClr val="accent1"/>
-          </a:fillRef>
-          <a:effectRef idx="2">
-            <a:schemeClr val="accent1"/>
-          </a:effectRef>
-          <a:fontRef idx="minor">
-            <a:schemeClr val="lt1"/>
-          </a:fontRef>
-        </p:style>
         <p:txBody>
           <a:bodyPr rtlCol="0" anchor="ctr"/>
           <a:lstStyle/>
@@ -3547,20 +3505,6 @@
             <a:noFill/>
           </a:ln>
         </p:spPr>
-        <p:style>
-          <a:lnRef idx="1">
-            <a:schemeClr val="accent1"/>
-          </a:lnRef>
-          <a:fillRef idx="3">
-            <a:schemeClr val="accent1"/>
-          </a:fillRef>
-          <a:effectRef idx="2">
-            <a:schemeClr val="accent1"/>
-          </a:effectRef>
-          <a:fontRef idx="minor">
-            <a:schemeClr val="lt1"/>
-          </a:fontRef>
-        </p:style>
         <p:txBody>
           <a:bodyPr rtlCol="0" anchor="ctr"/>
           <a:lstStyle/>
@@ -3713,20 +3657,6 @@
             <a:noFill/>
           </a:ln>
         </p:spPr>
-        <p:style>
-          <a:lnRef idx="1">
-            <a:schemeClr val="accent1"/>
-          </a:lnRef>
-          <a:fillRef idx="3">
-            <a:schemeClr val="accent1"/>
-          </a:fillRef>
-          <a:effectRef idx="2">
-            <a:schemeClr val="accent1"/>
-          </a:effectRef>
-          <a:fontRef idx="minor">
-            <a:schemeClr val="lt1"/>
-          </a:fontRef>
-        </p:style>
         <p:txBody>
           <a:bodyPr rtlCol="0" anchor="ctr"/>
           <a:lstStyle/>
@@ -3879,20 +3809,6 @@
             <a:noFill/>
           </a:ln>
         </p:spPr>
-        <p:style>
-          <a:lnRef idx="1">
-            <a:schemeClr val="accent1"/>
-          </a:lnRef>
-          <a:fillRef idx="3">
-            <a:schemeClr val="accent1"/>
-          </a:fillRef>
-          <a:effectRef idx="2">
-            <a:schemeClr val="accent1"/>
-          </a:effectRef>
-          <a:fontRef idx="minor">
-            <a:schemeClr val="lt1"/>
-          </a:fontRef>
-        </p:style>
         <p:txBody>
           <a:bodyPr rtlCol="0" anchor="ctr"/>
           <a:lstStyle/>
@@ -4065,20 +3981,6 @@
             <a:noFill/>
           </a:ln>
         </p:spPr>
-        <p:style>
-          <a:lnRef idx="1">
-            <a:schemeClr val="accent1"/>
-          </a:lnRef>
-          <a:fillRef idx="3">
-            <a:schemeClr val="accent1"/>
-          </a:fillRef>
-          <a:effectRef idx="2">
-            <a:schemeClr val="accent1"/>
-          </a:effectRef>
-          <a:fontRef idx="minor">
-            <a:schemeClr val="lt1"/>
-          </a:fontRef>
-        </p:style>
         <p:txBody>
           <a:bodyPr rtlCol="0" anchor="ctr"/>
           <a:lstStyle/>
@@ -4213,20 +4115,6 @@
             <a:noFill/>
           </a:ln>
         </p:spPr>
-        <p:style>
-          <a:lnRef idx="1">
-            <a:schemeClr val="accent1"/>
-          </a:lnRef>
-          <a:fillRef idx="3">
-            <a:schemeClr val="accent1"/>
-          </a:fillRef>
-          <a:effectRef idx="2">
-            <a:schemeClr val="accent1"/>
-          </a:effectRef>
-          <a:fontRef idx="minor">
-            <a:schemeClr val="lt1"/>
-          </a:fontRef>
-        </p:style>
         <p:txBody>
           <a:bodyPr rtlCol="0" anchor="ctr"/>
           <a:lstStyle/>
@@ -4256,20 +4144,6 @@
             <a:noFill/>
           </a:ln>
         </p:spPr>
-        <p:style>
-          <a:lnRef idx="1">
-            <a:schemeClr val="accent1"/>
-          </a:lnRef>
-          <a:fillRef idx="3">
-            <a:schemeClr val="accent1"/>
-          </a:fillRef>
-          <a:effectRef idx="2">
-            <a:schemeClr val="accent1"/>
-          </a:effectRef>
-          <a:fontRef idx="minor">
-            <a:schemeClr val="lt1"/>
-          </a:fontRef>
-        </p:style>
         <p:txBody>
           <a:bodyPr rtlCol="0" anchor="ctr"/>
           <a:lstStyle/>
@@ -4415,20 +4289,6 @@
             </a:solidFill>
           </a:ln>
         </p:spPr>
-        <p:style>
-          <a:lnRef idx="1">
-            <a:schemeClr val="accent1"/>
-          </a:lnRef>
-          <a:fillRef idx="3">
-            <a:schemeClr val="accent1"/>
-          </a:fillRef>
-          <a:effectRef idx="2">
-            <a:schemeClr val="accent1"/>
-          </a:effectRef>
-          <a:fontRef idx="minor">
-            <a:schemeClr val="lt1"/>
-          </a:fontRef>
-        </p:style>
         <p:txBody>
           <a:bodyPr rtlCol="0" anchor="ctr"/>
           <a:lstStyle/>
@@ -4458,20 +4318,6 @@
             <a:noFill/>
           </a:ln>
         </p:spPr>
-        <p:style>
-          <a:lnRef idx="1">
-            <a:schemeClr val="accent1"/>
-          </a:lnRef>
-          <a:fillRef idx="3">
-            <a:schemeClr val="accent1"/>
-          </a:fillRef>
-          <a:effectRef idx="2">
-            <a:schemeClr val="accent1"/>
-          </a:effectRef>
-          <a:fontRef idx="minor">
-            <a:schemeClr val="lt1"/>
-          </a:fontRef>
-        </p:style>
         <p:txBody>
           <a:bodyPr rtlCol="0" anchor="ctr"/>
           <a:lstStyle/>
@@ -4615,20 +4461,6 @@
             <a:noFill/>
           </a:ln>
         </p:spPr>
-        <p:style>
-          <a:lnRef idx="1">
-            <a:schemeClr val="accent1"/>
-          </a:lnRef>
-          <a:fillRef idx="3">
-            <a:schemeClr val="accent1"/>
-          </a:fillRef>
-          <a:effectRef idx="2">
-            <a:schemeClr val="accent1"/>
-          </a:effectRef>
-          <a:fontRef idx="minor">
-            <a:schemeClr val="lt1"/>
-          </a:fontRef>
-        </p:style>
         <p:txBody>
           <a:bodyPr rtlCol="0" anchor="ctr"/>
           <a:lstStyle/>
@@ -4754,20 +4586,6 @@
             </a:solidFill>
           </a:ln>
         </p:spPr>
-        <p:style>
-          <a:lnRef idx="2">
-            <a:schemeClr val="accent1"/>
-          </a:lnRef>
-          <a:fillRef idx="0">
-            <a:schemeClr val="accent1"/>
-          </a:fillRef>
-          <a:effectRef idx="1">
-            <a:schemeClr val="accent1"/>
-          </a:effectRef>
-          <a:fontRef idx="minor">
-            <a:schemeClr val="tx1"/>
-          </a:fontRef>
-        </p:style>
       </p:cxnSp>
       <p:sp>
         <p:nvSpPr>
@@ -4790,20 +4608,6 @@
             <a:noFill/>
           </a:ln>
         </p:spPr>
-        <p:style>
-          <a:lnRef idx="1">
-            <a:schemeClr val="accent1"/>
-          </a:lnRef>
-          <a:fillRef idx="3">
-            <a:schemeClr val="accent1"/>
-          </a:fillRef>
-          <a:effectRef idx="2">
-            <a:schemeClr val="accent1"/>
-          </a:effectRef>
-          <a:fontRef idx="minor">
-            <a:schemeClr val="lt1"/>
-          </a:fontRef>
-        </p:style>
         <p:txBody>
           <a:bodyPr rtlCol="0" anchor="ctr"/>
           <a:lstStyle/>
@@ -4929,20 +4733,6 @@
             </a:solidFill>
           </a:ln>
         </p:spPr>
-        <p:style>
-          <a:lnRef idx="2">
-            <a:schemeClr val="accent1"/>
-          </a:lnRef>
-          <a:fillRef idx="0">
-            <a:schemeClr val="accent1"/>
-          </a:fillRef>
-          <a:effectRef idx="1">
-            <a:schemeClr val="accent1"/>
-          </a:effectRef>
-          <a:fontRef idx="minor">
-            <a:schemeClr val="tx1"/>
-          </a:fontRef>
-        </p:style>
       </p:cxnSp>
       <p:sp>
         <p:nvSpPr>
@@ -4965,20 +4755,6 @@
             <a:noFill/>
           </a:ln>
         </p:spPr>
-        <p:style>
-          <a:lnRef idx="1">
-            <a:schemeClr val="accent1"/>
-          </a:lnRef>
-          <a:fillRef idx="3">
-            <a:schemeClr val="accent1"/>
-          </a:fillRef>
-          <a:effectRef idx="2">
-            <a:schemeClr val="accent1"/>
-          </a:effectRef>
-          <a:fontRef idx="minor">
-            <a:schemeClr val="lt1"/>
-          </a:fontRef>
-        </p:style>
         <p:txBody>
           <a:bodyPr rtlCol="0" anchor="ctr"/>
           <a:lstStyle/>
@@ -5107,20 +4883,6 @@
             </a:solidFill>
           </a:ln>
         </p:spPr>
-        <p:style>
-          <a:lnRef idx="1">
-            <a:schemeClr val="accent1"/>
-          </a:lnRef>
-          <a:fillRef idx="3">
-            <a:schemeClr val="accent1"/>
-          </a:fillRef>
-          <a:effectRef idx="2">
-            <a:schemeClr val="accent1"/>
-          </a:effectRef>
-          <a:fontRef idx="minor">
-            <a:schemeClr val="lt1"/>
-          </a:fontRef>
-        </p:style>
         <p:txBody>
           <a:bodyPr rtlCol="0" anchor="ctr"/>
           <a:lstStyle/>
@@ -5150,20 +4912,6 @@
             <a:noFill/>
           </a:ln>
         </p:spPr>
-        <p:style>
-          <a:lnRef idx="1">
-            <a:schemeClr val="accent1"/>
-          </a:lnRef>
-          <a:fillRef idx="3">
-            <a:schemeClr val="accent1"/>
-          </a:fillRef>
-          <a:effectRef idx="2">
-            <a:schemeClr val="accent1"/>
-          </a:effectRef>
-          <a:fontRef idx="minor">
-            <a:schemeClr val="lt1"/>
-          </a:fontRef>
-        </p:style>
         <p:txBody>
           <a:bodyPr rtlCol="0" anchor="ctr"/>
           <a:lstStyle/>
@@ -5307,20 +5055,6 @@
             <a:noFill/>
           </a:ln>
         </p:spPr>
-        <p:style>
-          <a:lnRef idx="1">
-            <a:schemeClr val="accent1"/>
-          </a:lnRef>
-          <a:fillRef idx="3">
-            <a:schemeClr val="accent1"/>
-          </a:fillRef>
-          <a:effectRef idx="2">
-            <a:schemeClr val="accent1"/>
-          </a:effectRef>
-          <a:fontRef idx="minor">
-            <a:schemeClr val="lt1"/>
-          </a:fontRef>
-        </p:style>
         <p:txBody>
           <a:bodyPr rtlCol="0" anchor="ctr"/>
           <a:lstStyle/>
@@ -5446,20 +5180,6 @@
             </a:solidFill>
           </a:ln>
         </p:spPr>
-        <p:style>
-          <a:lnRef idx="2">
-            <a:schemeClr val="accent1"/>
-          </a:lnRef>
-          <a:fillRef idx="0">
-            <a:schemeClr val="accent1"/>
-          </a:fillRef>
-          <a:effectRef idx="1">
-            <a:schemeClr val="accent1"/>
-          </a:effectRef>
-          <a:fontRef idx="minor">
-            <a:schemeClr val="tx1"/>
-          </a:fontRef>
-        </p:style>
       </p:cxnSp>
       <p:sp>
         <p:nvSpPr>
@@ -5482,20 +5202,6 @@
             <a:noFill/>
           </a:ln>
         </p:spPr>
-        <p:style>
-          <a:lnRef idx="1">
-            <a:schemeClr val="accent1"/>
-          </a:lnRef>
-          <a:fillRef idx="3">
-            <a:schemeClr val="accent1"/>
-          </a:fillRef>
-          <a:effectRef idx="2">
-            <a:schemeClr val="accent1"/>
-          </a:effectRef>
-          <a:fontRef idx="minor">
-            <a:schemeClr val="lt1"/>
-          </a:fontRef>
-        </p:style>
         <p:txBody>
           <a:bodyPr rtlCol="0" anchor="ctr"/>
           <a:lstStyle/>
@@ -5621,20 +5327,6 @@
             </a:solidFill>
           </a:ln>
         </p:spPr>
-        <p:style>
-          <a:lnRef idx="2">
-            <a:schemeClr val="accent1"/>
-          </a:lnRef>
-          <a:fillRef idx="0">
-            <a:schemeClr val="accent1"/>
-          </a:fillRef>
-          <a:effectRef idx="1">
-            <a:schemeClr val="accent1"/>
-          </a:effectRef>
-          <a:fontRef idx="minor">
-            <a:schemeClr val="tx1"/>
-          </a:fontRef>
-        </p:style>
       </p:cxnSp>
       <p:sp>
         <p:nvSpPr>
@@ -5657,20 +5349,6 @@
             <a:noFill/>
           </a:ln>
         </p:spPr>
-        <p:style>
-          <a:lnRef idx="1">
-            <a:schemeClr val="accent1"/>
-          </a:lnRef>
-          <a:fillRef idx="3">
-            <a:schemeClr val="accent1"/>
-          </a:fillRef>
-          <a:effectRef idx="2">
-            <a:schemeClr val="accent1"/>
-          </a:effectRef>
-          <a:fontRef idx="minor">
-            <a:schemeClr val="lt1"/>
-          </a:fontRef>
-        </p:style>
         <p:txBody>
           <a:bodyPr rtlCol="0" anchor="ctr"/>
           <a:lstStyle/>
@@ -5799,20 +5477,6 @@
             </a:solidFill>
           </a:ln>
         </p:spPr>
-        <p:style>
-          <a:lnRef idx="1">
-            <a:schemeClr val="accent1"/>
-          </a:lnRef>
-          <a:fillRef idx="3">
-            <a:schemeClr val="accent1"/>
-          </a:fillRef>
-          <a:effectRef idx="2">
-            <a:schemeClr val="accent1"/>
-          </a:effectRef>
-          <a:fontRef idx="minor">
-            <a:schemeClr val="lt1"/>
-          </a:fontRef>
-        </p:style>
         <p:txBody>
           <a:bodyPr rtlCol="0" anchor="ctr"/>
           <a:lstStyle/>
@@ -5842,20 +5506,6 @@
             <a:noFill/>
           </a:ln>
         </p:spPr>
-        <p:style>
-          <a:lnRef idx="1">
-            <a:schemeClr val="accent1"/>
-          </a:lnRef>
-          <a:fillRef idx="3">
-            <a:schemeClr val="accent1"/>
-          </a:fillRef>
-          <a:effectRef idx="2">
-            <a:schemeClr val="accent1"/>
-          </a:effectRef>
-          <a:fontRef idx="minor">
-            <a:schemeClr val="lt1"/>
-          </a:fontRef>
-        </p:style>
         <p:txBody>
           <a:bodyPr rtlCol="0" anchor="ctr"/>
           <a:lstStyle/>
@@ -5990,20 +5640,6 @@
             <a:noFill/>
           </a:ln>
         </p:spPr>
-        <p:style>
-          <a:lnRef idx="1">
-            <a:schemeClr val="accent1"/>
-          </a:lnRef>
-          <a:fillRef idx="3">
-            <a:schemeClr val="accent1"/>
-          </a:fillRef>
-          <a:effectRef idx="2">
-            <a:schemeClr val="accent1"/>
-          </a:effectRef>
-          <a:fontRef idx="minor">
-            <a:schemeClr val="lt1"/>
-          </a:fontRef>
-        </p:style>
         <p:txBody>
           <a:bodyPr rtlCol="0" anchor="ctr"/>
           <a:lstStyle/>
@@ -6129,20 +5765,6 @@
             </a:solidFill>
           </a:ln>
         </p:spPr>
-        <p:style>
-          <a:lnRef idx="2">
-            <a:schemeClr val="accent1"/>
-          </a:lnRef>
-          <a:fillRef idx="0">
-            <a:schemeClr val="accent1"/>
-          </a:fillRef>
-          <a:effectRef idx="1">
-            <a:schemeClr val="accent1"/>
-          </a:effectRef>
-          <a:fontRef idx="minor">
-            <a:schemeClr val="tx1"/>
-          </a:fontRef>
-        </p:style>
       </p:cxnSp>
       <p:sp>
         <p:nvSpPr>
@@ -6165,20 +5787,6 @@
             <a:noFill/>
           </a:ln>
         </p:spPr>
-        <p:style>
-          <a:lnRef idx="1">
-            <a:schemeClr val="accent1"/>
-          </a:lnRef>
-          <a:fillRef idx="3">
-            <a:schemeClr val="accent1"/>
-          </a:fillRef>
-          <a:effectRef idx="2">
-            <a:schemeClr val="accent1"/>
-          </a:effectRef>
-          <a:fontRef idx="minor">
-            <a:schemeClr val="lt1"/>
-          </a:fontRef>
-        </p:style>
         <p:txBody>
           <a:bodyPr rtlCol="0" anchor="ctr"/>
           <a:lstStyle/>
@@ -6304,20 +5912,6 @@
             </a:solidFill>
           </a:ln>
         </p:spPr>
-        <p:style>
-          <a:lnRef idx="2">
-            <a:schemeClr val="accent1"/>
-          </a:lnRef>
-          <a:fillRef idx="0">
-            <a:schemeClr val="accent1"/>
-          </a:fillRef>
-          <a:effectRef idx="1">
-            <a:schemeClr val="accent1"/>
-          </a:effectRef>
-          <a:fontRef idx="minor">
-            <a:schemeClr val="tx1"/>
-          </a:fontRef>
-        </p:style>
       </p:cxnSp>
       <p:sp>
         <p:nvSpPr>
@@ -6340,20 +5934,6 @@
             <a:noFill/>
           </a:ln>
         </p:spPr>
-        <p:style>
-          <a:lnRef idx="1">
-            <a:schemeClr val="accent1"/>
-          </a:lnRef>
-          <a:fillRef idx="3">
-            <a:schemeClr val="accent1"/>
-          </a:fillRef>
-          <a:effectRef idx="2">
-            <a:schemeClr val="accent1"/>
-          </a:effectRef>
-          <a:fontRef idx="minor">
-            <a:schemeClr val="lt1"/>
-          </a:fontRef>
-        </p:style>
         <p:txBody>
           <a:bodyPr rtlCol="0" anchor="ctr"/>
           <a:lstStyle/>
@@ -6491,20 +6071,6 @@
             <a:noFill/>
           </a:ln>
         </p:spPr>
-        <p:style>
-          <a:lnRef idx="1">
-            <a:schemeClr val="accent1"/>
-          </a:lnRef>
-          <a:fillRef idx="3">
-            <a:schemeClr val="accent1"/>
-          </a:fillRef>
-          <a:effectRef idx="2">
-            <a:schemeClr val="accent1"/>
-          </a:effectRef>
-          <a:fontRef idx="minor">
-            <a:schemeClr val="lt1"/>
-          </a:fontRef>
-        </p:style>
         <p:txBody>
           <a:bodyPr rtlCol="0" anchor="ctr"/>
           <a:lstStyle/>
@@ -6639,20 +6205,6 @@
             <a:noFill/>
           </a:ln>
         </p:spPr>
-        <p:style>
-          <a:lnRef idx="1">
-            <a:schemeClr val="accent1"/>
-          </a:lnRef>
-          <a:fillRef idx="3">
-            <a:schemeClr val="accent1"/>
-          </a:fillRef>
-          <a:effectRef idx="2">
-            <a:schemeClr val="accent1"/>
-          </a:effectRef>
-          <a:fontRef idx="minor">
-            <a:schemeClr val="lt1"/>
-          </a:fontRef>
-        </p:style>
         <p:txBody>
           <a:bodyPr rtlCol="0" anchor="ctr"/>
           <a:lstStyle/>
@@ -6682,20 +6234,6 @@
             <a:noFill/>
           </a:ln>
         </p:spPr>
-        <p:style>
-          <a:lnRef idx="1">
-            <a:schemeClr val="accent1"/>
-          </a:lnRef>
-          <a:fillRef idx="3">
-            <a:schemeClr val="accent1"/>
-          </a:fillRef>
-          <a:effectRef idx="2">
-            <a:schemeClr val="accent1"/>
-          </a:effectRef>
-          <a:fontRef idx="minor">
-            <a:schemeClr val="lt1"/>
-          </a:fontRef>
-        </p:style>
         <p:txBody>
           <a:bodyPr rtlCol="0" anchor="ctr"/>
           <a:lstStyle/>
@@ -6795,20 +6333,6 @@
             <a:noFill/>
           </a:ln>
         </p:spPr>
-        <p:style>
-          <a:lnRef idx="1">
-            <a:schemeClr val="accent1"/>
-          </a:lnRef>
-          <a:fillRef idx="3">
-            <a:schemeClr val="accent1"/>
-          </a:fillRef>
-          <a:effectRef idx="2">
-            <a:schemeClr val="accent1"/>
-          </a:effectRef>
-          <a:fontRef idx="minor">
-            <a:schemeClr val="lt1"/>
-          </a:fontRef>
-        </p:style>
         <p:txBody>
           <a:bodyPr rtlCol="0" anchor="ctr"/>
           <a:lstStyle/>
@@ -7003,20 +6527,6 @@
             <a:noFill/>
           </a:ln>
         </p:spPr>
-        <p:style>
-          <a:lnRef idx="1">
-            <a:schemeClr val="accent1"/>
-          </a:lnRef>
-          <a:fillRef idx="3">
-            <a:schemeClr val="accent1"/>
-          </a:fillRef>
-          <a:effectRef idx="2">
-            <a:schemeClr val="accent1"/>
-          </a:effectRef>
-          <a:fontRef idx="minor">
-            <a:schemeClr val="lt1"/>
-          </a:fontRef>
-        </p:style>
         <p:txBody>
           <a:bodyPr rtlCol="0" anchor="ctr"/>
           <a:lstStyle/>
@@ -7202,20 +6712,6 @@
             <a:noFill/>
           </a:ln>
         </p:spPr>
-        <p:style>
-          <a:lnRef idx="1">
-            <a:schemeClr val="accent1"/>
-          </a:lnRef>
-          <a:fillRef idx="3">
-            <a:schemeClr val="accent1"/>
-          </a:fillRef>
-          <a:effectRef idx="2">
-            <a:schemeClr val="accent1"/>
-          </a:effectRef>
-          <a:fontRef idx="minor">
-            <a:schemeClr val="lt1"/>
-          </a:fontRef>
-        </p:style>
         <p:txBody>
           <a:bodyPr rtlCol="0" anchor="ctr"/>
           <a:lstStyle/>
@@ -7421,20 +6917,6 @@
             <a:noFill/>
           </a:ln>
         </p:spPr>
-        <p:style>
-          <a:lnRef idx="1">
-            <a:schemeClr val="accent1"/>
-          </a:lnRef>
-          <a:fillRef idx="3">
-            <a:schemeClr val="accent1"/>
-          </a:fillRef>
-          <a:effectRef idx="2">
-            <a:schemeClr val="accent1"/>
-          </a:effectRef>
-          <a:fontRef idx="minor">
-            <a:schemeClr val="lt1"/>
-          </a:fontRef>
-        </p:style>
         <p:txBody>
           <a:bodyPr rtlCol="0" anchor="ctr"/>
           <a:lstStyle/>
@@ -7578,20 +7060,6 @@
             <a:noFill/>
           </a:ln>
         </p:spPr>
-        <p:style>
-          <a:lnRef idx="1">
-            <a:schemeClr val="accent1"/>
-          </a:lnRef>
-          <a:fillRef idx="3">
-            <a:schemeClr val="accent1"/>
-          </a:fillRef>
-          <a:effectRef idx="2">
-            <a:schemeClr val="accent1"/>
-          </a:effectRef>
-          <a:fontRef idx="minor">
-            <a:schemeClr val="lt1"/>
-          </a:fontRef>
-        </p:style>
         <p:txBody>
           <a:bodyPr rtlCol="0" anchor="ctr"/>
           <a:lstStyle/>
@@ -7621,20 +7089,6 @@
             <a:noFill/>
           </a:ln>
         </p:spPr>
-        <p:style>
-          <a:lnRef idx="1">
-            <a:schemeClr val="accent1"/>
-          </a:lnRef>
-          <a:fillRef idx="3">
-            <a:schemeClr val="accent1"/>
-          </a:fillRef>
-          <a:effectRef idx="2">
-            <a:schemeClr val="accent1"/>
-          </a:effectRef>
-          <a:fontRef idx="minor">
-            <a:schemeClr val="lt1"/>
-          </a:fontRef>
-        </p:style>
         <p:txBody>
           <a:bodyPr rtlCol="0" anchor="ctr"/>
           <a:lstStyle/>
@@ -7734,20 +7188,6 @@
             <a:noFill/>
           </a:ln>
         </p:spPr>
-        <p:style>
-          <a:lnRef idx="1">
-            <a:schemeClr val="accent1"/>
-          </a:lnRef>
-          <a:fillRef idx="3">
-            <a:schemeClr val="accent1"/>
-          </a:fillRef>
-          <a:effectRef idx="2">
-            <a:schemeClr val="accent1"/>
-          </a:effectRef>
-          <a:fontRef idx="minor">
-            <a:schemeClr val="lt1"/>
-          </a:fontRef>
-        </p:style>
         <p:txBody>
           <a:bodyPr rtlCol="0" anchor="ctr"/>
           <a:lstStyle/>
@@ -7896,20 +7336,6 @@
             <a:noFill/>
           </a:ln>
         </p:spPr>
-        <p:style>
-          <a:lnRef idx="1">
-            <a:schemeClr val="accent1"/>
-          </a:lnRef>
-          <a:fillRef idx="3">
-            <a:schemeClr val="accent1"/>
-          </a:fillRef>
-          <a:effectRef idx="2">
-            <a:schemeClr val="accent1"/>
-          </a:effectRef>
-          <a:fontRef idx="minor">
-            <a:schemeClr val="lt1"/>
-          </a:fontRef>
-        </p:style>
         <p:txBody>
           <a:bodyPr rtlCol="0" anchor="ctr"/>
           <a:lstStyle/>
@@ -8058,20 +7484,6 @@
             <a:noFill/>
           </a:ln>
         </p:spPr>
-        <p:style>
-          <a:lnRef idx="1">
-            <a:schemeClr val="accent1"/>
-          </a:lnRef>
-          <a:fillRef idx="3">
-            <a:schemeClr val="accent1"/>
-          </a:fillRef>
-          <a:effectRef idx="2">
-            <a:schemeClr val="accent1"/>
-          </a:effectRef>
-          <a:fontRef idx="minor">
-            <a:schemeClr val="lt1"/>
-          </a:fontRef>
-        </p:style>
         <p:txBody>
           <a:bodyPr rtlCol="0" anchor="ctr"/>
           <a:lstStyle/>
@@ -8281,20 +7693,6 @@
             <a:noFill/>
           </a:ln>
         </p:spPr>
-        <p:style>
-          <a:lnRef idx="1">
-            <a:schemeClr val="accent1"/>
-          </a:lnRef>
-          <a:fillRef idx="3">
-            <a:schemeClr val="accent1"/>
-          </a:fillRef>
-          <a:effectRef idx="2">
-            <a:schemeClr val="accent1"/>
-          </a:effectRef>
-          <a:fontRef idx="minor">
-            <a:schemeClr val="lt1"/>
-          </a:fontRef>
-        </p:style>
         <p:txBody>
           <a:bodyPr rtlCol="0" anchor="ctr"/>
           <a:lstStyle/>
@@ -8324,20 +7722,6 @@
             <a:noFill/>
           </a:ln>
         </p:spPr>
-        <p:style>
-          <a:lnRef idx="1">
-            <a:schemeClr val="accent1"/>
-          </a:lnRef>
-          <a:fillRef idx="3">
-            <a:schemeClr val="accent1"/>
-          </a:fillRef>
-          <a:effectRef idx="2">
-            <a:schemeClr val="accent1"/>
-          </a:effectRef>
-          <a:fontRef idx="minor">
-            <a:schemeClr val="lt1"/>
-          </a:fontRef>
-        </p:style>
         <p:txBody>
           <a:bodyPr rtlCol="0" anchor="ctr"/>
           <a:lstStyle/>
@@ -8437,20 +7821,6 @@
             <a:noFill/>
           </a:ln>
         </p:spPr>
-        <p:style>
-          <a:lnRef idx="1">
-            <a:schemeClr val="accent1"/>
-          </a:lnRef>
-          <a:fillRef idx="3">
-            <a:schemeClr val="accent1"/>
-          </a:fillRef>
-          <a:effectRef idx="2">
-            <a:schemeClr val="accent1"/>
-          </a:effectRef>
-          <a:fontRef idx="minor">
-            <a:schemeClr val="lt1"/>
-          </a:fontRef>
-        </p:style>
         <p:txBody>
           <a:bodyPr rtlCol="0" anchor="ctr"/>
           <a:lstStyle/>
@@ -8524,20 +7894,6 @@
             <a:noFill/>
           </a:ln>
         </p:spPr>
-        <p:style>
-          <a:lnRef idx="1">
-            <a:schemeClr val="accent1"/>
-          </a:lnRef>
-          <a:fillRef idx="3">
-            <a:schemeClr val="accent1"/>
-          </a:fillRef>
-          <a:effectRef idx="2">
-            <a:schemeClr val="accent1"/>
-          </a:effectRef>
-          <a:fontRef idx="minor">
-            <a:schemeClr val="lt1"/>
-          </a:fontRef>
-        </p:style>
         <p:txBody>
           <a:bodyPr rtlCol="0" anchor="ctr"/>
           <a:lstStyle/>
@@ -8611,20 +7967,6 @@
             <a:noFill/>
           </a:ln>
         </p:spPr>
-        <p:style>
-          <a:lnRef idx="1">
-            <a:schemeClr val="accent1"/>
-          </a:lnRef>
-          <a:fillRef idx="3">
-            <a:schemeClr val="accent1"/>
-          </a:fillRef>
-          <a:effectRef idx="2">
-            <a:schemeClr val="accent1"/>
-          </a:effectRef>
-          <a:fontRef idx="minor">
-            <a:schemeClr val="lt1"/>
-          </a:fontRef>
-        </p:style>
         <p:txBody>
           <a:bodyPr rtlCol="0" anchor="ctr"/>
           <a:lstStyle/>
@@ -8698,20 +8040,6 @@
             <a:noFill/>
           </a:ln>
         </p:spPr>
-        <p:style>
-          <a:lnRef idx="1">
-            <a:schemeClr val="accent1"/>
-          </a:lnRef>
-          <a:fillRef idx="3">
-            <a:schemeClr val="accent1"/>
-          </a:fillRef>
-          <a:effectRef idx="2">
-            <a:schemeClr val="accent1"/>
-          </a:effectRef>
-          <a:fontRef idx="minor">
-            <a:schemeClr val="lt1"/>
-          </a:fontRef>
-        </p:style>
         <p:txBody>
           <a:bodyPr rtlCol="0" anchor="ctr"/>
           <a:lstStyle/>
@@ -8785,20 +8113,6 @@
             <a:noFill/>
           </a:ln>
         </p:spPr>
-        <p:style>
-          <a:lnRef idx="1">
-            <a:schemeClr val="accent1"/>
-          </a:lnRef>
-          <a:fillRef idx="3">
-            <a:schemeClr val="accent1"/>
-          </a:fillRef>
-          <a:effectRef idx="2">
-            <a:schemeClr val="accent1"/>
-          </a:effectRef>
-          <a:fontRef idx="minor">
-            <a:schemeClr val="lt1"/>
-          </a:fontRef>
-        </p:style>
         <p:txBody>
           <a:bodyPr rtlCol="0" anchor="ctr"/>
           <a:lstStyle/>
@@ -8872,20 +8186,6 @@
             <a:noFill/>
           </a:ln>
         </p:spPr>
-        <p:style>
-          <a:lnRef idx="1">
-            <a:schemeClr val="accent1"/>
-          </a:lnRef>
-          <a:fillRef idx="3">
-            <a:schemeClr val="accent1"/>
-          </a:fillRef>
-          <a:effectRef idx="2">
-            <a:schemeClr val="accent1"/>
-          </a:effectRef>
-          <a:fontRef idx="minor">
-            <a:schemeClr val="lt1"/>
-          </a:fontRef>
-        </p:style>
         <p:txBody>
           <a:bodyPr rtlCol="0" anchor="ctr"/>
           <a:lstStyle/>
@@ -8979,20 +8279,6 @@
             <a:noFill/>
           </a:ln>
         </p:spPr>
-        <p:style>
-          <a:lnRef idx="1">
-            <a:schemeClr val="accent1"/>
-          </a:lnRef>
-          <a:fillRef idx="3">
-            <a:schemeClr val="accent1"/>
-          </a:fillRef>
-          <a:effectRef idx="2">
-            <a:schemeClr val="accent1"/>
-          </a:effectRef>
-          <a:fontRef idx="minor">
-            <a:schemeClr val="lt1"/>
-          </a:fontRef>
-        </p:style>
         <p:txBody>
           <a:bodyPr rtlCol="0" anchor="ctr"/>
           <a:lstStyle/>
@@ -9151,20 +8437,6 @@
             <a:noFill/>
           </a:ln>
         </p:spPr>
-        <p:style>
-          <a:lnRef idx="1">
-            <a:schemeClr val="accent1"/>
-          </a:lnRef>
-          <a:fillRef idx="3">
-            <a:schemeClr val="accent1"/>
-          </a:fillRef>
-          <a:effectRef idx="2">
-            <a:schemeClr val="accent1"/>
-          </a:effectRef>
-          <a:fontRef idx="minor">
-            <a:schemeClr val="lt1"/>
-          </a:fontRef>
-        </p:style>
         <p:txBody>
           <a:bodyPr rtlCol="0" anchor="ctr"/>
           <a:lstStyle/>
@@ -9194,20 +8466,6 @@
             <a:noFill/>
           </a:ln>
         </p:spPr>
-        <p:style>
-          <a:lnRef idx="1">
-            <a:schemeClr val="accent1"/>
-          </a:lnRef>
-          <a:fillRef idx="3">
-            <a:schemeClr val="accent1"/>
-          </a:fillRef>
-          <a:effectRef idx="2">
-            <a:schemeClr val="accent1"/>
-          </a:effectRef>
-          <a:fontRef idx="minor">
-            <a:schemeClr val="lt1"/>
-          </a:fontRef>
-        </p:style>
         <p:txBody>
           <a:bodyPr rtlCol="0" anchor="ctr"/>
           <a:lstStyle/>
@@ -9564,20 +8822,6 @@
             <a:noFill/>
           </a:ln>
         </p:spPr>
-        <p:style>
-          <a:lnRef idx="1">
-            <a:schemeClr val="accent1"/>
-          </a:lnRef>
-          <a:fillRef idx="3">
-            <a:schemeClr val="accent1"/>
-          </a:fillRef>
-          <a:effectRef idx="2">
-            <a:schemeClr val="accent1"/>
-          </a:effectRef>
-          <a:fontRef idx="minor">
-            <a:schemeClr val="lt1"/>
-          </a:fontRef>
-        </p:style>
         <p:txBody>
           <a:bodyPr rtlCol="0" anchor="ctr"/>
           <a:lstStyle/>
@@ -9712,20 +8956,6 @@
             <a:noFill/>
           </a:ln>
         </p:spPr>
-        <p:style>
-          <a:lnRef idx="1">
-            <a:schemeClr val="accent1"/>
-          </a:lnRef>
-          <a:fillRef idx="3">
-            <a:schemeClr val="accent1"/>
-          </a:fillRef>
-          <a:effectRef idx="2">
-            <a:schemeClr val="accent1"/>
-          </a:effectRef>
-          <a:fontRef idx="minor">
-            <a:schemeClr val="lt1"/>
-          </a:fontRef>
-        </p:style>
         <p:txBody>
           <a:bodyPr rtlCol="0" anchor="ctr"/>
           <a:lstStyle/>
@@ -9755,20 +8985,6 @@
             <a:noFill/>
           </a:ln>
         </p:spPr>
-        <p:style>
-          <a:lnRef idx="1">
-            <a:schemeClr val="accent1"/>
-          </a:lnRef>
-          <a:fillRef idx="3">
-            <a:schemeClr val="accent1"/>
-          </a:fillRef>
-          <a:effectRef idx="2">
-            <a:schemeClr val="accent1"/>
-          </a:effectRef>
-          <a:fontRef idx="minor">
-            <a:schemeClr val="lt1"/>
-          </a:fontRef>
-        </p:style>
         <p:txBody>
           <a:bodyPr rtlCol="0" anchor="ctr"/>
           <a:lstStyle/>
@@ -9867,20 +9083,6 @@
             </a:solidFill>
           </a:ln>
         </p:spPr>
-        <p:style>
-          <a:lnRef idx="2">
-            <a:schemeClr val="accent1"/>
-          </a:lnRef>
-          <a:fillRef idx="0">
-            <a:schemeClr val="accent1"/>
-          </a:fillRef>
-          <a:effectRef idx="1">
-            <a:schemeClr val="accent1"/>
-          </a:effectRef>
-          <a:fontRef idx="minor">
-            <a:schemeClr val="tx1"/>
-          </a:fontRef>
-        </p:style>
       </p:cxnSp>
       <p:cxnSp>
         <p:nvCxnSpPr>
@@ -9902,20 +9104,6 @@
             </a:solidFill>
           </a:ln>
         </p:spPr>
-        <p:style>
-          <a:lnRef idx="2">
-            <a:schemeClr val="accent1"/>
-          </a:lnRef>
-          <a:fillRef idx="0">
-            <a:schemeClr val="accent1"/>
-          </a:fillRef>
-          <a:effectRef idx="1">
-            <a:schemeClr val="accent1"/>
-          </a:effectRef>
-          <a:fontRef idx="minor">
-            <a:schemeClr val="tx1"/>
-          </a:fontRef>
-        </p:style>
       </p:cxnSp>
       <p:cxnSp>
         <p:nvCxnSpPr>
@@ -9937,20 +9125,6 @@
             </a:solidFill>
           </a:ln>
         </p:spPr>
-        <p:style>
-          <a:lnRef idx="2">
-            <a:schemeClr val="accent1"/>
-          </a:lnRef>
-          <a:fillRef idx="0">
-            <a:schemeClr val="accent1"/>
-          </a:fillRef>
-          <a:effectRef idx="1">
-            <a:schemeClr val="accent1"/>
-          </a:effectRef>
-          <a:fontRef idx="minor">
-            <a:schemeClr val="tx1"/>
-          </a:fontRef>
-        </p:style>
       </p:cxnSp>
       <p:sp>
         <p:nvSpPr>
@@ -9973,20 +9147,6 @@
             <a:noFill/>
           </a:ln>
         </p:spPr>
-        <p:style>
-          <a:lnRef idx="1">
-            <a:schemeClr val="accent1"/>
-          </a:lnRef>
-          <a:fillRef idx="3">
-            <a:schemeClr val="accent1"/>
-          </a:fillRef>
-          <a:effectRef idx="2">
-            <a:schemeClr val="accent1"/>
-          </a:effectRef>
-          <a:fontRef idx="minor">
-            <a:schemeClr val="lt1"/>
-          </a:fontRef>
-        </p:style>
         <p:txBody>
           <a:bodyPr rtlCol="0" anchor="ctr"/>
           <a:lstStyle/>
@@ -10205,20 +9365,6 @@
             <a:noFill/>
           </a:ln>
         </p:spPr>
-        <p:style>
-          <a:lnRef idx="1">
-            <a:schemeClr val="accent1"/>
-          </a:lnRef>
-          <a:fillRef idx="3">
-            <a:schemeClr val="accent1"/>
-          </a:fillRef>
-          <a:effectRef idx="2">
-            <a:schemeClr val="accent1"/>
-          </a:effectRef>
-          <a:fontRef idx="minor">
-            <a:schemeClr val="lt1"/>
-          </a:fontRef>
-        </p:style>
         <p:txBody>
           <a:bodyPr rtlCol="0" anchor="ctr"/>
           <a:lstStyle/>
@@ -10437,20 +9583,6 @@
             <a:noFill/>
           </a:ln>
         </p:spPr>
-        <p:style>
-          <a:lnRef idx="1">
-            <a:schemeClr val="accent1"/>
-          </a:lnRef>
-          <a:fillRef idx="3">
-            <a:schemeClr val="accent1"/>
-          </a:fillRef>
-          <a:effectRef idx="2">
-            <a:schemeClr val="accent1"/>
-          </a:effectRef>
-          <a:fontRef idx="minor">
-            <a:schemeClr val="lt1"/>
-          </a:fontRef>
-        </p:style>
         <p:txBody>
           <a:bodyPr rtlCol="0" anchor="ctr"/>
           <a:lstStyle/>
@@ -10669,20 +9801,6 @@
             <a:noFill/>
           </a:ln>
         </p:spPr>
-        <p:style>
-          <a:lnRef idx="1">
-            <a:schemeClr val="accent1"/>
-          </a:lnRef>
-          <a:fillRef idx="3">
-            <a:schemeClr val="accent1"/>
-          </a:fillRef>
-          <a:effectRef idx="2">
-            <a:schemeClr val="accent1"/>
-          </a:effectRef>
-          <a:fontRef idx="minor">
-            <a:schemeClr val="lt1"/>
-          </a:fontRef>
-        </p:style>
         <p:txBody>
           <a:bodyPr rtlCol="0" anchor="ctr"/>
           <a:lstStyle/>
@@ -10962,20 +10080,6 @@
             <a:noFill/>
           </a:ln>
         </p:spPr>
-        <p:style>
-          <a:lnRef idx="1">
-            <a:schemeClr val="accent1"/>
-          </a:lnRef>
-          <a:fillRef idx="3">
-            <a:schemeClr val="accent1"/>
-          </a:fillRef>
-          <a:effectRef idx="2">
-            <a:schemeClr val="accent1"/>
-          </a:effectRef>
-          <a:fontRef idx="minor">
-            <a:schemeClr val="lt1"/>
-          </a:fontRef>
-        </p:style>
         <p:txBody>
           <a:bodyPr rtlCol="0" anchor="ctr"/>
           <a:lstStyle/>
@@ -11005,20 +10109,6 @@
             <a:noFill/>
           </a:ln>
         </p:spPr>
-        <p:style>
-          <a:lnRef idx="1">
-            <a:schemeClr val="accent1"/>
-          </a:lnRef>
-          <a:fillRef idx="3">
-            <a:schemeClr val="accent1"/>
-          </a:fillRef>
-          <a:effectRef idx="2">
-            <a:schemeClr val="accent1"/>
-          </a:effectRef>
-          <a:fontRef idx="minor">
-            <a:schemeClr val="lt1"/>
-          </a:fontRef>
-        </p:style>
         <p:txBody>
           <a:bodyPr rtlCol="0" anchor="ctr"/>
           <a:lstStyle/>
@@ -11106,7 +10196,7 @@
         <p:spPr>
           <a:xfrm>
             <a:off x="547200" y="1897199"/>
-            <a:ext cx="3416400" cy="255600"/>
+            <a:ext cx="3625200" cy="457200"/>
           </a:xfrm>
           <a:prstGeom prst="rect">
             <a:avLst/>
@@ -11118,20 +10208,6 @@
             <a:noFill/>
           </a:ln>
         </p:spPr>
-        <p:style>
-          <a:lnRef idx="1">
-            <a:schemeClr val="accent1"/>
-          </a:lnRef>
-          <a:fillRef idx="3">
-            <a:schemeClr val="accent1"/>
-          </a:fillRef>
-          <a:effectRef idx="2">
-            <a:schemeClr val="accent1"/>
-          </a:effectRef>
-          <a:fontRef idx="minor">
-            <a:schemeClr val="lt1"/>
-          </a:fontRef>
-        </p:style>
         <p:txBody>
           <a:bodyPr rtlCol="0" anchor="ctr"/>
           <a:lstStyle/>
@@ -11149,7 +10225,7 @@
         <p:spPr>
           <a:xfrm>
             <a:off x="547200" y="1897199"/>
-            <a:ext cx="3416400" cy="255600"/>
+            <a:ext cx="3625200" cy="457200"/>
           </a:xfrm>
           <a:prstGeom prst="rect">
             <a:avLst/>
@@ -11162,7 +10238,7 @@
           </a:bodyPr>
           <a:lstStyle/>
           <a:p>
-            <a:pPr algn="ctr"/>
+            <a:pPr algn="l"/>
             <a:r>
               <a:rPr sz="1600" b="1" i="0">
                 <a:solidFill>
@@ -11184,7 +10260,7 @@
         <p:spPr>
           <a:xfrm>
             <a:off x="4172400" y="1897199"/>
-            <a:ext cx="1828800" cy="255600"/>
+            <a:ext cx="2095200" cy="457200"/>
           </a:xfrm>
           <a:prstGeom prst="rect">
             <a:avLst/>
@@ -11196,20 +10272,6 @@
             <a:noFill/>
           </a:ln>
         </p:spPr>
-        <p:style>
-          <a:lnRef idx="1">
-            <a:schemeClr val="accent1"/>
-          </a:lnRef>
-          <a:fillRef idx="3">
-            <a:schemeClr val="accent1"/>
-          </a:fillRef>
-          <a:effectRef idx="2">
-            <a:schemeClr val="accent1"/>
-          </a:effectRef>
-          <a:fontRef idx="minor">
-            <a:schemeClr val="lt1"/>
-          </a:fontRef>
-        </p:style>
         <p:txBody>
           <a:bodyPr rtlCol="0" anchor="ctr"/>
           <a:lstStyle/>
@@ -11227,7 +10289,7 @@
         <p:spPr>
           <a:xfrm>
             <a:off x="4172400" y="1897199"/>
-            <a:ext cx="1828800" cy="255600"/>
+            <a:ext cx="2095200" cy="457200"/>
           </a:xfrm>
           <a:prstGeom prst="rect">
             <a:avLst/>
@@ -11240,7 +10302,7 @@
           </a:bodyPr>
           <a:lstStyle/>
           <a:p>
-            <a:pPr algn="ctr"/>
+            <a:pPr algn="l"/>
             <a:r>
               <a:rPr sz="1600" b="1" i="0">
                 <a:solidFill>
@@ -11262,7 +10324,7 @@
         <p:spPr>
           <a:xfrm>
             <a:off x="6256800" y="1897199"/>
-            <a:ext cx="1494000" cy="255600"/>
+            <a:ext cx="1764000" cy="457200"/>
           </a:xfrm>
           <a:prstGeom prst="rect">
             <a:avLst/>
@@ -11274,20 +10336,6 @@
             <a:noFill/>
           </a:ln>
         </p:spPr>
-        <p:style>
-          <a:lnRef idx="1">
-            <a:schemeClr val="accent1"/>
-          </a:lnRef>
-          <a:fillRef idx="3">
-            <a:schemeClr val="accent1"/>
-          </a:fillRef>
-          <a:effectRef idx="2">
-            <a:schemeClr val="accent1"/>
-          </a:effectRef>
-          <a:fontRef idx="minor">
-            <a:schemeClr val="lt1"/>
-          </a:fontRef>
-        </p:style>
         <p:txBody>
           <a:bodyPr rtlCol="0" anchor="ctr"/>
           <a:lstStyle/>
@@ -11305,7 +10353,7 @@
         <p:spPr>
           <a:xfrm>
             <a:off x="6256800" y="1897199"/>
-            <a:ext cx="1494000" cy="255600"/>
+            <a:ext cx="1764000" cy="457200"/>
           </a:xfrm>
           <a:prstGeom prst="rect">
             <a:avLst/>
@@ -11318,7 +10366,7 @@
           </a:bodyPr>
           <a:lstStyle/>
           <a:p>
-            <a:pPr algn="ctr"/>
+            <a:pPr algn="l"/>
             <a:r>
               <a:rPr sz="1600" b="1" i="0">
                 <a:solidFill>
@@ -11340,7 +10388,7 @@
         <p:spPr>
           <a:xfrm>
             <a:off x="8013600" y="1897199"/>
-            <a:ext cx="2070000" cy="255600"/>
+            <a:ext cx="2329200" cy="457200"/>
           </a:xfrm>
           <a:prstGeom prst="rect">
             <a:avLst/>
@@ -11352,20 +10400,6 @@
             <a:noFill/>
           </a:ln>
         </p:spPr>
-        <p:style>
-          <a:lnRef idx="1">
-            <a:schemeClr val="accent1"/>
-          </a:lnRef>
-          <a:fillRef idx="3">
-            <a:schemeClr val="accent1"/>
-          </a:fillRef>
-          <a:effectRef idx="2">
-            <a:schemeClr val="accent1"/>
-          </a:effectRef>
-          <a:fontRef idx="minor">
-            <a:schemeClr val="lt1"/>
-          </a:fontRef>
-        </p:style>
         <p:txBody>
           <a:bodyPr rtlCol="0" anchor="ctr"/>
           <a:lstStyle/>
@@ -11383,7 +10417,7 @@
         <p:spPr>
           <a:xfrm>
             <a:off x="8013600" y="1897199"/>
-            <a:ext cx="2070000" cy="255600"/>
+            <a:ext cx="2329200" cy="457200"/>
           </a:xfrm>
           <a:prstGeom prst="rect">
             <a:avLst/>
@@ -11396,7 +10430,7 @@
           </a:bodyPr>
           <a:lstStyle/>
           <a:p>
-            <a:pPr algn="ctr"/>
+            <a:pPr algn="l"/>
             <a:r>
               <a:rPr sz="1600" b="1" i="0">
                 <a:solidFill>
@@ -11418,7 +10452,7 @@
         <p:spPr>
           <a:xfrm>
             <a:off x="10332000" y="1897199"/>
-            <a:ext cx="1364400" cy="255600"/>
+            <a:ext cx="1627199" cy="457200"/>
           </a:xfrm>
           <a:prstGeom prst="rect">
             <a:avLst/>
@@ -11430,20 +10464,6 @@
             <a:noFill/>
           </a:ln>
         </p:spPr>
-        <p:style>
-          <a:lnRef idx="1">
-            <a:schemeClr val="accent1"/>
-          </a:lnRef>
-          <a:fillRef idx="3">
-            <a:schemeClr val="accent1"/>
-          </a:fillRef>
-          <a:effectRef idx="2">
-            <a:schemeClr val="accent1"/>
-          </a:effectRef>
-          <a:fontRef idx="minor">
-            <a:schemeClr val="lt1"/>
-          </a:fontRef>
-        </p:style>
         <p:txBody>
           <a:bodyPr rtlCol="0" anchor="ctr"/>
           <a:lstStyle/>
@@ -11461,7 +10481,7 @@
         <p:spPr>
           <a:xfrm>
             <a:off x="10332000" y="1897199"/>
-            <a:ext cx="1364400" cy="255600"/>
+            <a:ext cx="1627199" cy="457200"/>
           </a:xfrm>
           <a:prstGeom prst="rect">
             <a:avLst/>
@@ -11474,7 +10494,7 @@
           </a:bodyPr>
           <a:lstStyle/>
           <a:p>
-            <a:pPr algn="ctr"/>
+            <a:pPr algn="l"/>
             <a:r>
               <a:rPr sz="1600" b="1" i="0">
                 <a:solidFill>
@@ -11496,7 +10516,325 @@
         <p:spPr>
           <a:xfrm>
             <a:off x="547200" y="2361600"/>
-            <a:ext cx="10173600" cy="288000"/>
+            <a:ext cx="11383200" cy="503999"/>
+          </a:xfrm>
+          <a:prstGeom prst="rect">
+            <a:avLst/>
+          </a:prstGeom>
+          <a:solidFill>
+            <a:srgbClr val="FFFFFF"/>
+          </a:solidFill>
+          <a:ln>
+            <a:noFill/>
+          </a:ln>
+        </p:spPr>
+        <p:txBody>
+          <a:bodyPr rtlCol="0" anchor="ctr"/>
+          <a:lstStyle/>
+          <a:p>
+            <a:pPr algn="ctr"/>
+          </a:p>
+        </p:txBody>
+      </p:sp>
+      <p:sp>
+        <p:nvSpPr>
+          <p:cNvPr id="18" name="S06_R1C1"/>
+          <p:cNvSpPr txBox="1"/>
+          <p:nvPr/>
+        </p:nvSpPr>
+        <p:spPr>
+          <a:xfrm>
+            <a:off x="547200" y="2361600"/>
+            <a:ext cx="3625200" cy="503999"/>
+          </a:xfrm>
+          <a:prstGeom prst="rect">
+            <a:avLst/>
+          </a:prstGeom>
+          <a:noFill/>
+        </p:spPr>
+        <p:txBody>
+          <a:bodyPr wrap="square" lIns="45720" rIns="45720" anchor="ctr">
+            <a:spAutoFit/>
+          </a:bodyPr>
+          <a:lstStyle/>
+          <a:p>
+            <a:pPr algn="l"/>
+            <a:r>
+              <a:rPr sz="1400" b="1" i="0">
+                <a:solidFill>
+                  <a:srgbClr val="070E1D"/>
+                </a:solidFill>
+                <a:latin typeface="Segoe UI"/>
+              </a:rPr>
+              <a:t>A - </a:t>
+            </a:r>
+            <a:r>
+              <a:rPr sz="1400" b="1" i="0">
+                <a:solidFill>
+                  <a:srgbClr val="070E1D"/>
+                </a:solidFill>
+                <a:latin typeface="Segoe UI"/>
+              </a:rPr>
+              <a:t>Statu quo</a:t>
+            </a:r>
+          </a:p>
+        </p:txBody>
+      </p:sp>
+      <p:cxnSp>
+        <p:nvCxnSpPr>
+          <p:cNvPr id="19" name="Connector 18"/>
+          <p:cNvCxnSpPr/>
+          <p:nvPr/>
+        </p:nvCxnSpPr>
+        <p:spPr>
+          <a:xfrm>
+            <a:off x="547200" y="2865599"/>
+            <a:ext cx="11383200" cy="0"/>
+          </a:xfrm>
+          <a:prstGeom prst="line">
+            <a:avLst/>
+          </a:prstGeom>
+          <a:ln w="9525">
+            <a:solidFill>
+              <a:srgbClr val="D8DBE8"/>
+            </a:solidFill>
+          </a:ln>
+        </p:spPr>
+      </p:cxnSp>
+      <p:sp>
+        <p:nvSpPr>
+          <p:cNvPr id="20" name="S06_R1C2"/>
+          <p:cNvSpPr txBox="1"/>
+          <p:nvPr/>
+        </p:nvSpPr>
+        <p:spPr>
+          <a:xfrm>
+            <a:off x="4172400" y="2361600"/>
+            <a:ext cx="2095200" cy="503999"/>
+          </a:xfrm>
+          <a:prstGeom prst="rect">
+            <a:avLst/>
+          </a:prstGeom>
+          <a:noFill/>
+        </p:spPr>
+        <p:txBody>
+          <a:bodyPr wrap="square" lIns="45720" rIns="45720" anchor="ctr">
+            <a:spAutoFit/>
+          </a:bodyPr>
+          <a:lstStyle/>
+          <a:p>
+            <a:pPr algn="l"/>
+            <a:r>
+              <a:rPr sz="1400" b="0" i="0">
+                <a:solidFill>
+                  <a:srgbClr val="474E67"/>
+                </a:solidFill>
+                <a:latin typeface="Segoe UI"/>
+              </a:rPr>
+              <a:t>0,5 M€</a:t>
+            </a:r>
+          </a:p>
+        </p:txBody>
+      </p:sp>
+      <p:cxnSp>
+        <p:nvCxnSpPr>
+          <p:cNvPr id="21" name="Connector 20"/>
+          <p:cNvCxnSpPr/>
+          <p:nvPr/>
+        </p:nvCxnSpPr>
+        <p:spPr>
+          <a:xfrm>
+            <a:off x="547200" y="2865599"/>
+            <a:ext cx="11383200" cy="0"/>
+          </a:xfrm>
+          <a:prstGeom prst="line">
+            <a:avLst/>
+          </a:prstGeom>
+          <a:ln w="9525">
+            <a:solidFill>
+              <a:srgbClr val="D8DBE8"/>
+            </a:solidFill>
+          </a:ln>
+        </p:spPr>
+      </p:cxnSp>
+      <p:sp>
+        <p:nvSpPr>
+          <p:cNvPr id="22" name="S06_R1C3"/>
+          <p:cNvSpPr txBox="1"/>
+          <p:nvPr/>
+        </p:nvSpPr>
+        <p:spPr>
+          <a:xfrm>
+            <a:off x="6256800" y="2361600"/>
+            <a:ext cx="1764000" cy="503999"/>
+          </a:xfrm>
+          <a:prstGeom prst="rect">
+            <a:avLst/>
+          </a:prstGeom>
+          <a:noFill/>
+        </p:spPr>
+        <p:txBody>
+          <a:bodyPr wrap="square" lIns="45720" rIns="45720" anchor="ctr">
+            <a:spAutoFit/>
+          </a:bodyPr>
+          <a:lstStyle/>
+          <a:p>
+            <a:pPr algn="l"/>
+            <a:r>
+              <a:rPr sz="1400" b="0" i="0">
+                <a:solidFill>
+                  <a:srgbClr val="474E67"/>
+                </a:solidFill>
+                <a:latin typeface="Segoe UI"/>
+              </a:rPr>
+              <a:t>6 mois</a:t>
+            </a:r>
+          </a:p>
+        </p:txBody>
+      </p:sp>
+      <p:cxnSp>
+        <p:nvCxnSpPr>
+          <p:cNvPr id="23" name="Connector 22"/>
+          <p:cNvCxnSpPr/>
+          <p:nvPr/>
+        </p:nvCxnSpPr>
+        <p:spPr>
+          <a:xfrm>
+            <a:off x="547200" y="2865599"/>
+            <a:ext cx="11383200" cy="0"/>
+          </a:xfrm>
+          <a:prstGeom prst="line">
+            <a:avLst/>
+          </a:prstGeom>
+          <a:ln w="9525">
+            <a:solidFill>
+              <a:srgbClr val="D8DBE8"/>
+            </a:solidFill>
+          </a:ln>
+        </p:spPr>
+      </p:cxnSp>
+      <p:sp>
+        <p:nvSpPr>
+          <p:cNvPr id="24" name="S06_R1C4"/>
+          <p:cNvSpPr txBox="1"/>
+          <p:nvPr/>
+        </p:nvSpPr>
+        <p:spPr>
+          <a:xfrm>
+            <a:off x="8013600" y="2361600"/>
+            <a:ext cx="2329200" cy="503999"/>
+          </a:xfrm>
+          <a:prstGeom prst="rect">
+            <a:avLst/>
+          </a:prstGeom>
+          <a:noFill/>
+        </p:spPr>
+        <p:txBody>
+          <a:bodyPr wrap="square" lIns="45720" rIns="45720" anchor="ctr">
+            <a:spAutoFit/>
+          </a:bodyPr>
+          <a:lstStyle/>
+          <a:p>
+            <a:pPr algn="l"/>
+            <a:r>
+              <a:rPr sz="1400" b="1" i="0">
+                <a:solidFill>
+                  <a:srgbClr val="6A5D79"/>
+                </a:solidFill>
+                <a:latin typeface="Segoe UI"/>
+              </a:rPr>
+              <a:t>Faible</a:t>
+            </a:r>
+          </a:p>
+        </p:txBody>
+      </p:sp>
+      <p:cxnSp>
+        <p:nvCxnSpPr>
+          <p:cNvPr id="25" name="Connector 24"/>
+          <p:cNvCxnSpPr/>
+          <p:nvPr/>
+        </p:nvCxnSpPr>
+        <p:spPr>
+          <a:xfrm>
+            <a:off x="547200" y="2865599"/>
+            <a:ext cx="11383200" cy="0"/>
+          </a:xfrm>
+          <a:prstGeom prst="line">
+            <a:avLst/>
+          </a:prstGeom>
+          <a:ln w="9525">
+            <a:solidFill>
+              <a:srgbClr val="D8DBE8"/>
+            </a:solidFill>
+          </a:ln>
+        </p:spPr>
+      </p:cxnSp>
+      <p:sp>
+        <p:nvSpPr>
+          <p:cNvPr id="26" name="S06_R1C5"/>
+          <p:cNvSpPr txBox="1"/>
+          <p:nvPr/>
+        </p:nvSpPr>
+        <p:spPr>
+          <a:xfrm>
+            <a:off x="10332000" y="2361600"/>
+            <a:ext cx="1627199" cy="503999"/>
+          </a:xfrm>
+          <a:prstGeom prst="rect">
+            <a:avLst/>
+          </a:prstGeom>
+          <a:noFill/>
+        </p:spPr>
+        <p:txBody>
+          <a:bodyPr wrap="square" lIns="45720" rIns="45720" anchor="ctr">
+            <a:spAutoFit/>
+          </a:bodyPr>
+          <a:lstStyle/>
+          <a:p>
+            <a:pPr algn="l"/>
+            <a:r>
+              <a:rPr sz="1400" b="1" i="0">
+                <a:solidFill>
+                  <a:srgbClr val="474E67"/>
+                </a:solidFill>
+                <a:latin typeface="Segoe UI"/>
+              </a:rPr>
+              <a:t>★★</a:t>
+            </a:r>
+          </a:p>
+        </p:txBody>
+      </p:sp>
+      <p:cxnSp>
+        <p:nvCxnSpPr>
+          <p:cNvPr id="27" name="Connector 26"/>
+          <p:cNvCxnSpPr/>
+          <p:nvPr/>
+        </p:nvCxnSpPr>
+        <p:spPr>
+          <a:xfrm>
+            <a:off x="547200" y="2865599"/>
+            <a:ext cx="11383200" cy="0"/>
+          </a:xfrm>
+          <a:prstGeom prst="line">
+            <a:avLst/>
+          </a:prstGeom>
+          <a:ln w="9525">
+            <a:solidFill>
+              <a:srgbClr val="D8DBE8"/>
+            </a:solidFill>
+          </a:ln>
+        </p:spPr>
+      </p:cxnSp>
+      <p:sp>
+        <p:nvSpPr>
+          <p:cNvPr id="28" name="S06_R2_BG"/>
+          <p:cNvSpPr/>
+          <p:nvPr/>
+        </p:nvSpPr>
+        <p:spPr>
+          <a:xfrm>
+            <a:off x="547200" y="2869200"/>
+            <a:ext cx="11383200" cy="503999"/>
           </a:xfrm>
           <a:prstGeom prst="rect">
             <a:avLst/>
@@ -11508,20 +10846,6 @@
             <a:noFill/>
           </a:ln>
         </p:spPr>
-        <p:style>
-          <a:lnRef idx="1">
-            <a:schemeClr val="accent1"/>
-          </a:lnRef>
-          <a:fillRef idx="3">
-            <a:schemeClr val="accent1"/>
-          </a:fillRef>
-          <a:effectRef idx="2">
-            <a:schemeClr val="accent1"/>
-          </a:effectRef>
-          <a:fontRef idx="minor">
-            <a:schemeClr val="lt1"/>
-          </a:fontRef>
-        </p:style>
         <p:txBody>
           <a:bodyPr rtlCol="0" anchor="ctr"/>
           <a:lstStyle/>
@@ -11532,14 +10856,14 @@
       </p:sp>
       <p:sp>
         <p:nvSpPr>
-          <p:cNvPr id="18" name="S06_R1C1"/>
-          <p:cNvSpPr txBox="1"/>
-          <p:nvPr/>
-        </p:nvSpPr>
-        <p:spPr>
-          <a:xfrm>
-            <a:off x="547200" y="2361600"/>
-            <a:ext cx="3416400" cy="288000"/>
+          <p:cNvPr id="29" name="S06_R2C1"/>
+          <p:cNvSpPr txBox="1"/>
+          <p:nvPr/>
+        </p:nvSpPr>
+        <p:spPr>
+          <a:xfrm>
+            <a:off x="547200" y="2869200"/>
+            <a:ext cx="3625200" cy="503999"/>
           </a:xfrm>
           <a:prstGeom prst="rect">
             <a:avLst/>
@@ -11552,7 +10876,7 @@
           </a:bodyPr>
           <a:lstStyle/>
           <a:p>
-            <a:pPr algn="ctr"/>
+            <a:pPr algn="l"/>
             <a:r>
               <a:rPr sz="1400" b="1" i="0">
                 <a:solidFill>
@@ -11560,7 +10884,7 @@
                 </a:solidFill>
                 <a:latin typeface="Segoe UI"/>
               </a:rPr>
-              <a:t>A - </a:t>
+              <a:t>B - </a:t>
             </a:r>
             <a:r>
               <a:rPr sz="1400" b="1" i="0">
@@ -11569,21 +10893,42 @@
                 </a:solidFill>
                 <a:latin typeface="Segoe UI"/>
               </a:rPr>
-              <a:t>Statu quo</a:t>
-            </a:r>
-          </a:p>
-        </p:txBody>
-      </p:sp>
-      <p:sp>
-        <p:nvSpPr>
-          <p:cNvPr id="19" name="S06_R1C2"/>
-          <p:cNvSpPr txBox="1"/>
-          <p:nvPr/>
-        </p:nvSpPr>
-        <p:spPr>
-          <a:xfrm>
-            <a:off x="4172400" y="2361600"/>
-            <a:ext cx="1828800" cy="288000"/>
+              <a:t>Pilote ciblé</a:t>
+            </a:r>
+          </a:p>
+        </p:txBody>
+      </p:sp>
+      <p:cxnSp>
+        <p:nvCxnSpPr>
+          <p:cNvPr id="30" name="Connector 29"/>
+          <p:cNvCxnSpPr/>
+          <p:nvPr/>
+        </p:nvCxnSpPr>
+        <p:spPr>
+          <a:xfrm>
+            <a:off x="547200" y="3373199"/>
+            <a:ext cx="11383200" cy="0"/>
+          </a:xfrm>
+          <a:prstGeom prst="line">
+            <a:avLst/>
+          </a:prstGeom>
+          <a:ln w="9525">
+            <a:solidFill>
+              <a:srgbClr val="D8DBE8"/>
+            </a:solidFill>
+          </a:ln>
+        </p:spPr>
+      </p:cxnSp>
+      <p:sp>
+        <p:nvSpPr>
+          <p:cNvPr id="31" name="S06_R2C2"/>
+          <p:cNvSpPr txBox="1"/>
+          <p:nvPr/>
+        </p:nvSpPr>
+        <p:spPr>
+          <a:xfrm>
+            <a:off x="4172400" y="2869200"/>
+            <a:ext cx="2095200" cy="503999"/>
           </a:xfrm>
           <a:prstGeom prst="rect">
             <a:avLst/>
@@ -11596,7 +10941,7 @@
           </a:bodyPr>
           <a:lstStyle/>
           <a:p>
-            <a:pPr algn="ctr"/>
+            <a:pPr algn="l"/>
             <a:r>
               <a:rPr sz="1400" b="0" i="0">
                 <a:solidFill>
@@ -11604,21 +10949,42 @@
                 </a:solidFill>
                 <a:latin typeface="Segoe UI"/>
               </a:rPr>
-              <a:t>0,5 M€</a:t>
-            </a:r>
-          </a:p>
-        </p:txBody>
-      </p:sp>
-      <p:sp>
-        <p:nvSpPr>
-          <p:cNvPr id="20" name="S06_R1C3"/>
-          <p:cNvSpPr txBox="1"/>
-          <p:nvPr/>
-        </p:nvSpPr>
-        <p:spPr>
-          <a:xfrm>
-            <a:off x="6256800" y="2361600"/>
-            <a:ext cx="1494000" cy="288000"/>
+              <a:t>1,2 M€</a:t>
+            </a:r>
+          </a:p>
+        </p:txBody>
+      </p:sp>
+      <p:cxnSp>
+        <p:nvCxnSpPr>
+          <p:cNvPr id="32" name="Connector 31"/>
+          <p:cNvCxnSpPr/>
+          <p:nvPr/>
+        </p:nvCxnSpPr>
+        <p:spPr>
+          <a:xfrm>
+            <a:off x="547200" y="3373199"/>
+            <a:ext cx="11383200" cy="0"/>
+          </a:xfrm>
+          <a:prstGeom prst="line">
+            <a:avLst/>
+          </a:prstGeom>
+          <a:ln w="9525">
+            <a:solidFill>
+              <a:srgbClr val="D8DBE8"/>
+            </a:solidFill>
+          </a:ln>
+        </p:spPr>
+      </p:cxnSp>
+      <p:sp>
+        <p:nvSpPr>
+          <p:cNvPr id="33" name="S06_R2C3"/>
+          <p:cNvSpPr txBox="1"/>
+          <p:nvPr/>
+        </p:nvSpPr>
+        <p:spPr>
+          <a:xfrm>
+            <a:off x="6256800" y="2869200"/>
+            <a:ext cx="1764000" cy="503999"/>
           </a:xfrm>
           <a:prstGeom prst="rect">
             <a:avLst/>
@@ -11631,7 +10997,7 @@
           </a:bodyPr>
           <a:lstStyle/>
           <a:p>
-            <a:pPr algn="ctr"/>
+            <a:pPr algn="l"/>
             <a:r>
               <a:rPr sz="1400" b="0" i="0">
                 <a:solidFill>
@@ -11639,21 +11005,42 @@
                 </a:solidFill>
                 <a:latin typeface="Segoe UI"/>
               </a:rPr>
-              <a:t>6 mois</a:t>
-            </a:r>
-          </a:p>
-        </p:txBody>
-      </p:sp>
-      <p:sp>
-        <p:nvSpPr>
-          <p:cNvPr id="21" name="S06_R1C4"/>
-          <p:cNvSpPr txBox="1"/>
-          <p:nvPr/>
-        </p:nvSpPr>
-        <p:spPr>
-          <a:xfrm>
-            <a:off x="8013600" y="2361600"/>
-            <a:ext cx="2070000" cy="288000"/>
+              <a:t>9 mois</a:t>
+            </a:r>
+          </a:p>
+        </p:txBody>
+      </p:sp>
+      <p:cxnSp>
+        <p:nvCxnSpPr>
+          <p:cNvPr id="34" name="Connector 33"/>
+          <p:cNvCxnSpPr/>
+          <p:nvPr/>
+        </p:nvCxnSpPr>
+        <p:spPr>
+          <a:xfrm>
+            <a:off x="547200" y="3373199"/>
+            <a:ext cx="11383200" cy="0"/>
+          </a:xfrm>
+          <a:prstGeom prst="line">
+            <a:avLst/>
+          </a:prstGeom>
+          <a:ln w="9525">
+            <a:solidFill>
+              <a:srgbClr val="D8DBE8"/>
+            </a:solidFill>
+          </a:ln>
+        </p:spPr>
+      </p:cxnSp>
+      <p:sp>
+        <p:nvSpPr>
+          <p:cNvPr id="35" name="S06_R2C4"/>
+          <p:cNvSpPr txBox="1"/>
+          <p:nvPr/>
+        </p:nvSpPr>
+        <p:spPr>
+          <a:xfrm>
+            <a:off x="8013600" y="2869200"/>
+            <a:ext cx="2329200" cy="503999"/>
           </a:xfrm>
           <a:prstGeom prst="rect">
             <a:avLst/>
@@ -11666,7 +11053,7 @@
           </a:bodyPr>
           <a:lstStyle/>
           <a:p>
-            <a:pPr algn="ctr"/>
+            <a:pPr algn="l"/>
             <a:r>
               <a:rPr sz="1400" b="1" i="0">
                 <a:solidFill>
@@ -11674,21 +11061,42 @@
                 </a:solidFill>
                 <a:latin typeface="Segoe UI"/>
               </a:rPr>
-              <a:t>Faible</a:t>
-            </a:r>
-          </a:p>
-        </p:txBody>
-      </p:sp>
-      <p:sp>
-        <p:nvSpPr>
-          <p:cNvPr id="22" name="S06_R1C5"/>
-          <p:cNvSpPr txBox="1"/>
-          <p:nvPr/>
-        </p:nvSpPr>
-        <p:spPr>
-          <a:xfrm>
-            <a:off x="10332000" y="2361600"/>
-            <a:ext cx="1364400" cy="288000"/>
+              <a:t>Moyen</a:t>
+            </a:r>
+          </a:p>
+        </p:txBody>
+      </p:sp>
+      <p:cxnSp>
+        <p:nvCxnSpPr>
+          <p:cNvPr id="36" name="Connector 35"/>
+          <p:cNvCxnSpPr/>
+          <p:nvPr/>
+        </p:nvCxnSpPr>
+        <p:spPr>
+          <a:xfrm>
+            <a:off x="547200" y="3373199"/>
+            <a:ext cx="11383200" cy="0"/>
+          </a:xfrm>
+          <a:prstGeom prst="line">
+            <a:avLst/>
+          </a:prstGeom>
+          <a:ln w="9525">
+            <a:solidFill>
+              <a:srgbClr val="D8DBE8"/>
+            </a:solidFill>
+          </a:ln>
+        </p:spPr>
+      </p:cxnSp>
+      <p:sp>
+        <p:nvSpPr>
+          <p:cNvPr id="37" name="S06_R2C5"/>
+          <p:cNvSpPr txBox="1"/>
+          <p:nvPr/>
+        </p:nvSpPr>
+        <p:spPr>
+          <a:xfrm>
+            <a:off x="10332000" y="2869200"/>
+            <a:ext cx="1627199" cy="503999"/>
           </a:xfrm>
           <a:prstGeom prst="rect">
             <a:avLst/>
@@ -11701,7 +11109,7 @@
           </a:bodyPr>
           <a:lstStyle/>
           <a:p>
-            <a:pPr algn="ctr"/>
+            <a:pPr algn="l"/>
             <a:r>
               <a:rPr sz="1400" b="1" i="0">
                 <a:solidFill>
@@ -11709,21 +11117,42 @@
                 </a:solidFill>
                 <a:latin typeface="Segoe UI"/>
               </a:rPr>
-              <a:t>★★</a:t>
-            </a:r>
-          </a:p>
-        </p:txBody>
-      </p:sp>
-      <p:sp>
-        <p:nvSpPr>
-          <p:cNvPr id="23" name="S06_R2_BG"/>
+              <a:t>★★★★</a:t>
+            </a:r>
+          </a:p>
+        </p:txBody>
+      </p:sp>
+      <p:cxnSp>
+        <p:nvCxnSpPr>
+          <p:cNvPr id="38" name="Connector 37"/>
+          <p:cNvCxnSpPr/>
+          <p:nvPr/>
+        </p:nvCxnSpPr>
+        <p:spPr>
+          <a:xfrm>
+            <a:off x="547200" y="3373199"/>
+            <a:ext cx="11383200" cy="0"/>
+          </a:xfrm>
+          <a:prstGeom prst="line">
+            <a:avLst/>
+          </a:prstGeom>
+          <a:ln w="9525">
+            <a:solidFill>
+              <a:srgbClr val="D8DBE8"/>
+            </a:solidFill>
+          </a:ln>
+        </p:spPr>
+      </p:cxnSp>
+      <p:sp>
+        <p:nvSpPr>
+          <p:cNvPr id="39" name="S06_R3_BG"/>
           <p:cNvSpPr/>
           <p:nvPr/>
         </p:nvSpPr>
         <p:spPr>
           <a:xfrm>
-            <a:off x="547200" y="2869200"/>
-            <a:ext cx="10173600" cy="288000"/>
+            <a:off x="547200" y="3376800"/>
+            <a:ext cx="11383200" cy="503999"/>
           </a:xfrm>
           <a:prstGeom prst="rect">
             <a:avLst/>
@@ -11735,20 +11164,6 @@
             <a:noFill/>
           </a:ln>
         </p:spPr>
-        <p:style>
-          <a:lnRef idx="1">
-            <a:schemeClr val="accent1"/>
-          </a:lnRef>
-          <a:fillRef idx="3">
-            <a:schemeClr val="accent1"/>
-          </a:fillRef>
-          <a:effectRef idx="2">
-            <a:schemeClr val="accent1"/>
-          </a:effectRef>
-          <a:fontRef idx="minor">
-            <a:schemeClr val="lt1"/>
-          </a:fontRef>
-        </p:style>
         <p:txBody>
           <a:bodyPr rtlCol="0" anchor="ctr"/>
           <a:lstStyle/>
@@ -11759,14 +11174,14 @@
       </p:sp>
       <p:sp>
         <p:nvSpPr>
-          <p:cNvPr id="24" name="S06_R2C1"/>
-          <p:cNvSpPr txBox="1"/>
-          <p:nvPr/>
-        </p:nvSpPr>
-        <p:spPr>
-          <a:xfrm>
-            <a:off x="547200" y="2869200"/>
-            <a:ext cx="3416400" cy="288000"/>
+          <p:cNvPr id="40" name="S06_R3C1"/>
+          <p:cNvSpPr txBox="1"/>
+          <p:nvPr/>
+        </p:nvSpPr>
+        <p:spPr>
+          <a:xfrm>
+            <a:off x="547200" y="3376800"/>
+            <a:ext cx="3625200" cy="503999"/>
           </a:xfrm>
           <a:prstGeom prst="rect">
             <a:avLst/>
@@ -11779,7 +11194,7 @@
           </a:bodyPr>
           <a:lstStyle/>
           <a:p>
-            <a:pPr algn="ctr"/>
+            <a:pPr algn="l"/>
             <a:r>
               <a:rPr sz="1400" b="1" i="0">
                 <a:solidFill>
@@ -11787,7 +11202,7 @@
                 </a:solidFill>
                 <a:latin typeface="Segoe UI"/>
               </a:rPr>
-              <a:t>B - </a:t>
+              <a:t>C - Transformation </a:t>
             </a:r>
             <a:r>
               <a:rPr sz="1400" b="1" i="0">
@@ -11796,21 +11211,42 @@
                 </a:solidFill>
                 <a:latin typeface="Segoe UI"/>
               </a:rPr>
-              <a:t>Pilote ciblé</a:t>
-            </a:r>
-          </a:p>
-        </p:txBody>
-      </p:sp>
-      <p:sp>
-        <p:nvSpPr>
-          <p:cNvPr id="25" name="S06_R2C2"/>
-          <p:cNvSpPr txBox="1"/>
-          <p:nvPr/>
-        </p:nvSpPr>
-        <p:spPr>
-          <a:xfrm>
-            <a:off x="4172400" y="2869200"/>
-            <a:ext cx="1828800" cy="288000"/>
+              <a:t>totale</a:t>
+            </a:r>
+          </a:p>
+        </p:txBody>
+      </p:sp>
+      <p:cxnSp>
+        <p:nvCxnSpPr>
+          <p:cNvPr id="41" name="Connector 40"/>
+          <p:cNvCxnSpPr/>
+          <p:nvPr/>
+        </p:nvCxnSpPr>
+        <p:spPr>
+          <a:xfrm>
+            <a:off x="547200" y="3880800"/>
+            <a:ext cx="11383200" cy="0"/>
+          </a:xfrm>
+          <a:prstGeom prst="line">
+            <a:avLst/>
+          </a:prstGeom>
+          <a:ln w="9525">
+            <a:solidFill>
+              <a:srgbClr val="D8DBE8"/>
+            </a:solidFill>
+          </a:ln>
+        </p:spPr>
+      </p:cxnSp>
+      <p:sp>
+        <p:nvSpPr>
+          <p:cNvPr id="42" name="S06_R3C2"/>
+          <p:cNvSpPr txBox="1"/>
+          <p:nvPr/>
+        </p:nvSpPr>
+        <p:spPr>
+          <a:xfrm>
+            <a:off x="4172400" y="3376800"/>
+            <a:ext cx="2095200" cy="503999"/>
           </a:xfrm>
           <a:prstGeom prst="rect">
             <a:avLst/>
@@ -11823,7 +11259,7 @@
           </a:bodyPr>
           <a:lstStyle/>
           <a:p>
-            <a:pPr algn="ctr"/>
+            <a:pPr algn="l"/>
             <a:r>
               <a:rPr sz="1400" b="0" i="0">
                 <a:solidFill>
@@ -11831,21 +11267,42 @@
                 </a:solidFill>
                 <a:latin typeface="Segoe UI"/>
               </a:rPr>
-              <a:t>1,2 M€</a:t>
-            </a:r>
-          </a:p>
-        </p:txBody>
-      </p:sp>
-      <p:sp>
-        <p:nvSpPr>
-          <p:cNvPr id="26" name="S06_R2C3"/>
-          <p:cNvSpPr txBox="1"/>
-          <p:nvPr/>
-        </p:nvSpPr>
-        <p:spPr>
-          <a:xfrm>
-            <a:off x="6256800" y="2869200"/>
-            <a:ext cx="1494000" cy="288000"/>
+              <a:t>4,0 M€</a:t>
+            </a:r>
+          </a:p>
+        </p:txBody>
+      </p:sp>
+      <p:cxnSp>
+        <p:nvCxnSpPr>
+          <p:cNvPr id="43" name="Connector 42"/>
+          <p:cNvCxnSpPr/>
+          <p:nvPr/>
+        </p:nvCxnSpPr>
+        <p:spPr>
+          <a:xfrm>
+            <a:off x="547200" y="3880800"/>
+            <a:ext cx="11383200" cy="0"/>
+          </a:xfrm>
+          <a:prstGeom prst="line">
+            <a:avLst/>
+          </a:prstGeom>
+          <a:ln w="9525">
+            <a:solidFill>
+              <a:srgbClr val="D8DBE8"/>
+            </a:solidFill>
+          </a:ln>
+        </p:spPr>
+      </p:cxnSp>
+      <p:sp>
+        <p:nvSpPr>
+          <p:cNvPr id="44" name="S06_R3C3"/>
+          <p:cNvSpPr txBox="1"/>
+          <p:nvPr/>
+        </p:nvSpPr>
+        <p:spPr>
+          <a:xfrm>
+            <a:off x="6256800" y="3376800"/>
+            <a:ext cx="1764000" cy="503999"/>
           </a:xfrm>
           <a:prstGeom prst="rect">
             <a:avLst/>
@@ -11858,7 +11315,7 @@
           </a:bodyPr>
           <a:lstStyle/>
           <a:p>
-            <a:pPr algn="ctr"/>
+            <a:pPr algn="l"/>
             <a:r>
               <a:rPr sz="1400" b="0" i="0">
                 <a:solidFill>
@@ -11866,21 +11323,42 @@
                 </a:solidFill>
                 <a:latin typeface="Segoe UI"/>
               </a:rPr>
-              <a:t>9 mois</a:t>
-            </a:r>
-          </a:p>
-        </p:txBody>
-      </p:sp>
-      <p:sp>
-        <p:nvSpPr>
-          <p:cNvPr id="27" name="S06_R2C4"/>
-          <p:cNvSpPr txBox="1"/>
-          <p:nvPr/>
-        </p:nvSpPr>
-        <p:spPr>
-          <a:xfrm>
-            <a:off x="8013600" y="2869200"/>
-            <a:ext cx="2070000" cy="288000"/>
+              <a:t>24 mois</a:t>
+            </a:r>
+          </a:p>
+        </p:txBody>
+      </p:sp>
+      <p:cxnSp>
+        <p:nvCxnSpPr>
+          <p:cNvPr id="45" name="Connector 44"/>
+          <p:cNvCxnSpPr/>
+          <p:nvPr/>
+        </p:nvCxnSpPr>
+        <p:spPr>
+          <a:xfrm>
+            <a:off x="547200" y="3880800"/>
+            <a:ext cx="11383200" cy="0"/>
+          </a:xfrm>
+          <a:prstGeom prst="line">
+            <a:avLst/>
+          </a:prstGeom>
+          <a:ln w="9525">
+            <a:solidFill>
+              <a:srgbClr val="D8DBE8"/>
+            </a:solidFill>
+          </a:ln>
+        </p:spPr>
+      </p:cxnSp>
+      <p:sp>
+        <p:nvSpPr>
+          <p:cNvPr id="46" name="S06_R3C4"/>
+          <p:cNvSpPr txBox="1"/>
+          <p:nvPr/>
+        </p:nvSpPr>
+        <p:spPr>
+          <a:xfrm>
+            <a:off x="8013600" y="3376800"/>
+            <a:ext cx="2329200" cy="503999"/>
           </a:xfrm>
           <a:prstGeom prst="rect">
             <a:avLst/>
@@ -11893,7 +11371,7 @@
           </a:bodyPr>
           <a:lstStyle/>
           <a:p>
-            <a:pPr algn="ctr"/>
+            <a:pPr algn="l"/>
             <a:r>
               <a:rPr sz="1400" b="1" i="0">
                 <a:solidFill>
@@ -11901,21 +11379,42 @@
                 </a:solidFill>
                 <a:latin typeface="Segoe UI"/>
               </a:rPr>
-              <a:t>Moyen</a:t>
-            </a:r>
-          </a:p>
-        </p:txBody>
-      </p:sp>
-      <p:sp>
-        <p:nvSpPr>
-          <p:cNvPr id="28" name="S06_R2C5"/>
-          <p:cNvSpPr txBox="1"/>
-          <p:nvPr/>
-        </p:nvSpPr>
-        <p:spPr>
-          <a:xfrm>
-            <a:off x="10332000" y="2869200"/>
-            <a:ext cx="1364400" cy="288000"/>
+              <a:t>Elevé</a:t>
+            </a:r>
+          </a:p>
+        </p:txBody>
+      </p:sp>
+      <p:cxnSp>
+        <p:nvCxnSpPr>
+          <p:cNvPr id="47" name="Connector 46"/>
+          <p:cNvCxnSpPr/>
+          <p:nvPr/>
+        </p:nvCxnSpPr>
+        <p:spPr>
+          <a:xfrm>
+            <a:off x="547200" y="3880800"/>
+            <a:ext cx="11383200" cy="0"/>
+          </a:xfrm>
+          <a:prstGeom prst="line">
+            <a:avLst/>
+          </a:prstGeom>
+          <a:ln w="9525">
+            <a:solidFill>
+              <a:srgbClr val="D8DBE8"/>
+            </a:solidFill>
+          </a:ln>
+        </p:spPr>
+      </p:cxnSp>
+      <p:sp>
+        <p:nvSpPr>
+          <p:cNvPr id="48" name="S06_R3C5"/>
+          <p:cNvSpPr txBox="1"/>
+          <p:nvPr/>
+        </p:nvSpPr>
+        <p:spPr>
+          <a:xfrm>
+            <a:off x="10332000" y="3376800"/>
+            <a:ext cx="1627199" cy="503999"/>
           </a:xfrm>
           <a:prstGeom prst="rect">
             <a:avLst/>
@@ -11928,7 +11427,7 @@
           </a:bodyPr>
           <a:lstStyle/>
           <a:p>
-            <a:pPr algn="ctr"/>
+            <a:pPr algn="l"/>
             <a:r>
               <a:rPr sz="1400" b="1" i="0">
                 <a:solidFill>
@@ -11936,21 +11435,42 @@
                 </a:solidFill>
                 <a:latin typeface="Segoe UI"/>
               </a:rPr>
-              <a:t>★★★★</a:t>
-            </a:r>
-          </a:p>
-        </p:txBody>
-      </p:sp>
-      <p:sp>
-        <p:nvSpPr>
-          <p:cNvPr id="29" name="S06_R3_BG"/>
+              <a:t>★★★</a:t>
+            </a:r>
+          </a:p>
+        </p:txBody>
+      </p:sp>
+      <p:cxnSp>
+        <p:nvCxnSpPr>
+          <p:cNvPr id="49" name="Connector 48"/>
+          <p:cNvCxnSpPr/>
+          <p:nvPr/>
+        </p:nvCxnSpPr>
+        <p:spPr>
+          <a:xfrm>
+            <a:off x="547200" y="3880800"/>
+            <a:ext cx="11383200" cy="0"/>
+          </a:xfrm>
+          <a:prstGeom prst="line">
+            <a:avLst/>
+          </a:prstGeom>
+          <a:ln w="9525">
+            <a:solidFill>
+              <a:srgbClr val="D8DBE8"/>
+            </a:solidFill>
+          </a:ln>
+        </p:spPr>
+      </p:cxnSp>
+      <p:sp>
+        <p:nvSpPr>
+          <p:cNvPr id="50" name="S06_R4_BG"/>
           <p:cNvSpPr/>
           <p:nvPr/>
         </p:nvSpPr>
         <p:spPr>
           <a:xfrm>
-            <a:off x="547200" y="3376800"/>
-            <a:ext cx="10173600" cy="288000"/>
+            <a:off x="547200" y="3884399"/>
+            <a:ext cx="11383200" cy="503999"/>
           </a:xfrm>
           <a:prstGeom prst="rect">
             <a:avLst/>
@@ -11962,20 +11482,6 @@
             <a:noFill/>
           </a:ln>
         </p:spPr>
-        <p:style>
-          <a:lnRef idx="1">
-            <a:schemeClr val="accent1"/>
-          </a:lnRef>
-          <a:fillRef idx="3">
-            <a:schemeClr val="accent1"/>
-          </a:fillRef>
-          <a:effectRef idx="2">
-            <a:schemeClr val="accent1"/>
-          </a:effectRef>
-          <a:fontRef idx="minor">
-            <a:schemeClr val="lt1"/>
-          </a:fontRef>
-        </p:style>
         <p:txBody>
           <a:bodyPr rtlCol="0" anchor="ctr"/>
           <a:lstStyle/>
@@ -11986,14 +11492,14 @@
       </p:sp>
       <p:sp>
         <p:nvSpPr>
-          <p:cNvPr id="30" name="S06_R3C1"/>
-          <p:cNvSpPr txBox="1"/>
-          <p:nvPr/>
-        </p:nvSpPr>
-        <p:spPr>
-          <a:xfrm>
-            <a:off x="547200" y="3376800"/>
-            <a:ext cx="3416400" cy="288000"/>
+          <p:cNvPr id="51" name="S06_R4C1"/>
+          <p:cNvSpPr txBox="1"/>
+          <p:nvPr/>
+        </p:nvSpPr>
+        <p:spPr>
+          <a:xfrm>
+            <a:off x="547200" y="3884399"/>
+            <a:ext cx="3625200" cy="503999"/>
           </a:xfrm>
           <a:prstGeom prst="rect">
             <a:avLst/>
@@ -12006,7 +11512,7 @@
           </a:bodyPr>
           <a:lstStyle/>
           <a:p>
-            <a:pPr algn="ctr"/>
+            <a:pPr algn="l"/>
             <a:r>
               <a:rPr sz="1400" b="1" i="0">
                 <a:solidFill>
@@ -12014,7 +11520,7 @@
                 </a:solidFill>
                 <a:latin typeface="Segoe UI"/>
               </a:rPr>
-              <a:t>C - Transformation </a:t>
+              <a:t>D - </a:t>
             </a:r>
             <a:r>
               <a:rPr sz="1400" b="1" i="0">
@@ -12023,21 +11529,42 @@
                 </a:solidFill>
                 <a:latin typeface="Segoe UI"/>
               </a:rPr>
-              <a:t>totale</a:t>
-            </a:r>
-          </a:p>
-        </p:txBody>
-      </p:sp>
-      <p:sp>
-        <p:nvSpPr>
-          <p:cNvPr id="31" name="S06_R3C2"/>
-          <p:cNvSpPr txBox="1"/>
-          <p:nvPr/>
-        </p:nvSpPr>
-        <p:spPr>
-          <a:xfrm>
-            <a:off x="4172400" y="3376800"/>
-            <a:ext cx="1828800" cy="288000"/>
+              <a:t>Externalisation</a:t>
+            </a:r>
+          </a:p>
+        </p:txBody>
+      </p:sp>
+      <p:cxnSp>
+        <p:nvCxnSpPr>
+          <p:cNvPr id="52" name="Connector 51"/>
+          <p:cNvCxnSpPr/>
+          <p:nvPr/>
+        </p:nvCxnSpPr>
+        <p:spPr>
+          <a:xfrm>
+            <a:off x="547200" y="4388400"/>
+            <a:ext cx="11383200" cy="0"/>
+          </a:xfrm>
+          <a:prstGeom prst="line">
+            <a:avLst/>
+          </a:prstGeom>
+          <a:ln w="9525">
+            <a:solidFill>
+              <a:srgbClr val="D8DBE8"/>
+            </a:solidFill>
+          </a:ln>
+        </p:spPr>
+      </p:cxnSp>
+      <p:sp>
+        <p:nvSpPr>
+          <p:cNvPr id="53" name="S06_R4C2"/>
+          <p:cNvSpPr txBox="1"/>
+          <p:nvPr/>
+        </p:nvSpPr>
+        <p:spPr>
+          <a:xfrm>
+            <a:off x="4172400" y="3884399"/>
+            <a:ext cx="2095200" cy="503999"/>
           </a:xfrm>
           <a:prstGeom prst="rect">
             <a:avLst/>
@@ -12050,7 +11577,7 @@
           </a:bodyPr>
           <a:lstStyle/>
           <a:p>
-            <a:pPr algn="ctr"/>
+            <a:pPr algn="l"/>
             <a:r>
               <a:rPr sz="1400" b="0" i="0">
                 <a:solidFill>
@@ -12058,21 +11585,42 @@
                 </a:solidFill>
                 <a:latin typeface="Segoe UI"/>
               </a:rPr>
-              <a:t>4,0 M€</a:t>
-            </a:r>
-          </a:p>
-        </p:txBody>
-      </p:sp>
-      <p:sp>
-        <p:nvSpPr>
-          <p:cNvPr id="32" name="S06_R3C3"/>
-          <p:cNvSpPr txBox="1"/>
-          <p:nvPr/>
-        </p:nvSpPr>
-        <p:spPr>
-          <a:xfrm>
-            <a:off x="6256800" y="3376800"/>
-            <a:ext cx="1494000" cy="288000"/>
+              <a:t>2,5 M€</a:t>
+            </a:r>
+          </a:p>
+        </p:txBody>
+      </p:sp>
+      <p:cxnSp>
+        <p:nvCxnSpPr>
+          <p:cNvPr id="54" name="Connector 53"/>
+          <p:cNvCxnSpPr/>
+          <p:nvPr/>
+        </p:nvCxnSpPr>
+        <p:spPr>
+          <a:xfrm>
+            <a:off x="547200" y="4388400"/>
+            <a:ext cx="11383200" cy="0"/>
+          </a:xfrm>
+          <a:prstGeom prst="line">
+            <a:avLst/>
+          </a:prstGeom>
+          <a:ln w="9525">
+            <a:solidFill>
+              <a:srgbClr val="D8DBE8"/>
+            </a:solidFill>
+          </a:ln>
+        </p:spPr>
+      </p:cxnSp>
+      <p:sp>
+        <p:nvSpPr>
+          <p:cNvPr id="55" name="S06_R4C3"/>
+          <p:cNvSpPr txBox="1"/>
+          <p:nvPr/>
+        </p:nvSpPr>
+        <p:spPr>
+          <a:xfrm>
+            <a:off x="6256800" y="3884399"/>
+            <a:ext cx="1764000" cy="503999"/>
           </a:xfrm>
           <a:prstGeom prst="rect">
             <a:avLst/>
@@ -12085,7 +11633,7 @@
           </a:bodyPr>
           <a:lstStyle/>
           <a:p>
-            <a:pPr algn="ctr"/>
+            <a:pPr algn="l"/>
             <a:r>
               <a:rPr sz="1400" b="0" i="0">
                 <a:solidFill>
@@ -12093,21 +11641,42 @@
                 </a:solidFill>
                 <a:latin typeface="Segoe UI"/>
               </a:rPr>
-              <a:t>24 mois</a:t>
-            </a:r>
-          </a:p>
-        </p:txBody>
-      </p:sp>
-      <p:sp>
-        <p:nvSpPr>
-          <p:cNvPr id="33" name="S06_R3C4"/>
-          <p:cNvSpPr txBox="1"/>
-          <p:nvPr/>
-        </p:nvSpPr>
-        <p:spPr>
-          <a:xfrm>
-            <a:off x="8013600" y="3376800"/>
-            <a:ext cx="2070000" cy="288000"/>
+              <a:t>12 mois</a:t>
+            </a:r>
+          </a:p>
+        </p:txBody>
+      </p:sp>
+      <p:cxnSp>
+        <p:nvCxnSpPr>
+          <p:cNvPr id="56" name="Connector 55"/>
+          <p:cNvCxnSpPr/>
+          <p:nvPr/>
+        </p:nvCxnSpPr>
+        <p:spPr>
+          <a:xfrm>
+            <a:off x="547200" y="4388400"/>
+            <a:ext cx="11383200" cy="0"/>
+          </a:xfrm>
+          <a:prstGeom prst="line">
+            <a:avLst/>
+          </a:prstGeom>
+          <a:ln w="9525">
+            <a:solidFill>
+              <a:srgbClr val="D8DBE8"/>
+            </a:solidFill>
+          </a:ln>
+        </p:spPr>
+      </p:cxnSp>
+      <p:sp>
+        <p:nvSpPr>
+          <p:cNvPr id="57" name="S06_R4C4"/>
+          <p:cNvSpPr txBox="1"/>
+          <p:nvPr/>
+        </p:nvSpPr>
+        <p:spPr>
+          <a:xfrm>
+            <a:off x="8013600" y="3884399"/>
+            <a:ext cx="2329200" cy="503999"/>
           </a:xfrm>
           <a:prstGeom prst="rect">
             <a:avLst/>
@@ -12120,7 +11689,7 @@
           </a:bodyPr>
           <a:lstStyle/>
           <a:p>
-            <a:pPr algn="ctr"/>
+            <a:pPr algn="l"/>
             <a:r>
               <a:rPr sz="1400" b="1" i="0">
                 <a:solidFill>
@@ -12128,21 +11697,42 @@
                 </a:solidFill>
                 <a:latin typeface="Segoe UI"/>
               </a:rPr>
-              <a:t>Elevé</a:t>
-            </a:r>
-          </a:p>
-        </p:txBody>
-      </p:sp>
-      <p:sp>
-        <p:nvSpPr>
-          <p:cNvPr id="34" name="S06_R3C5"/>
-          <p:cNvSpPr txBox="1"/>
-          <p:nvPr/>
-        </p:nvSpPr>
-        <p:spPr>
-          <a:xfrm>
-            <a:off x="10332000" y="3376800"/>
-            <a:ext cx="1364400" cy="288000"/>
+              <a:t>Moyen</a:t>
+            </a:r>
+          </a:p>
+        </p:txBody>
+      </p:sp>
+      <p:cxnSp>
+        <p:nvCxnSpPr>
+          <p:cNvPr id="58" name="Connector 57"/>
+          <p:cNvCxnSpPr/>
+          <p:nvPr/>
+        </p:nvCxnSpPr>
+        <p:spPr>
+          <a:xfrm>
+            <a:off x="547200" y="4388400"/>
+            <a:ext cx="11383200" cy="0"/>
+          </a:xfrm>
+          <a:prstGeom prst="line">
+            <a:avLst/>
+          </a:prstGeom>
+          <a:ln w="9525">
+            <a:solidFill>
+              <a:srgbClr val="D8DBE8"/>
+            </a:solidFill>
+          </a:ln>
+        </p:spPr>
+      </p:cxnSp>
+      <p:sp>
+        <p:nvSpPr>
+          <p:cNvPr id="59" name="S06_R4C5"/>
+          <p:cNvSpPr txBox="1"/>
+          <p:nvPr/>
+        </p:nvSpPr>
+        <p:spPr>
+          <a:xfrm>
+            <a:off x="10332000" y="3884399"/>
+            <a:ext cx="1627199" cy="503999"/>
           </a:xfrm>
           <a:prstGeom prst="rect">
             <a:avLst/>
@@ -12155,7 +11745,7 @@
           </a:bodyPr>
           <a:lstStyle/>
           <a:p>
-            <a:pPr algn="ctr"/>
+            <a:pPr algn="l"/>
             <a:r>
               <a:rPr sz="1400" b="1" i="0">
                 <a:solidFill>
@@ -12163,241 +11753,35 @@
                 </a:solidFill>
                 <a:latin typeface="Segoe UI"/>
               </a:rPr>
-              <a:t>★★★</a:t>
-            </a:r>
-          </a:p>
-        </p:txBody>
-      </p:sp>
-      <p:sp>
-        <p:nvSpPr>
-          <p:cNvPr id="35" name="S06_R4_BG"/>
-          <p:cNvSpPr/>
-          <p:nvPr/>
-        </p:nvSpPr>
-        <p:spPr>
-          <a:xfrm>
-            <a:off x="547200" y="3884399"/>
-            <a:ext cx="10173600" cy="288000"/>
-          </a:xfrm>
-          <a:prstGeom prst="rect">
-            <a:avLst/>
-          </a:prstGeom>
-          <a:solidFill>
-            <a:srgbClr val="FFFFFF"/>
-          </a:solidFill>
-          <a:ln>
-            <a:noFill/>
+              <a:t>★★</a:t>
+            </a:r>
+          </a:p>
+        </p:txBody>
+      </p:sp>
+      <p:cxnSp>
+        <p:nvCxnSpPr>
+          <p:cNvPr id="60" name="Connector 59"/>
+          <p:cNvCxnSpPr/>
+          <p:nvPr/>
+        </p:nvCxnSpPr>
+        <p:spPr>
+          <a:xfrm>
+            <a:off x="547200" y="4388400"/>
+            <a:ext cx="11383200" cy="0"/>
+          </a:xfrm>
+          <a:prstGeom prst="line">
+            <a:avLst/>
+          </a:prstGeom>
+          <a:ln w="9525">
+            <a:solidFill>
+              <a:srgbClr val="D8DBE8"/>
+            </a:solidFill>
           </a:ln>
         </p:spPr>
-        <p:style>
-          <a:lnRef idx="1">
-            <a:schemeClr val="accent1"/>
-          </a:lnRef>
-          <a:fillRef idx="3">
-            <a:schemeClr val="accent1"/>
-          </a:fillRef>
-          <a:effectRef idx="2">
-            <a:schemeClr val="accent1"/>
-          </a:effectRef>
-          <a:fontRef idx="minor">
-            <a:schemeClr val="lt1"/>
-          </a:fontRef>
-        </p:style>
-        <p:txBody>
-          <a:bodyPr rtlCol="0" anchor="ctr"/>
-          <a:lstStyle/>
-          <a:p>
-            <a:pPr algn="ctr"/>
-          </a:p>
-        </p:txBody>
-      </p:sp>
-      <p:sp>
-        <p:nvSpPr>
-          <p:cNvPr id="36" name="S06_R4C1"/>
-          <p:cNvSpPr txBox="1"/>
-          <p:nvPr/>
-        </p:nvSpPr>
-        <p:spPr>
-          <a:xfrm>
-            <a:off x="547200" y="3884399"/>
-            <a:ext cx="3416400" cy="288000"/>
-          </a:xfrm>
-          <a:prstGeom prst="rect">
-            <a:avLst/>
-          </a:prstGeom>
-          <a:noFill/>
-        </p:spPr>
-        <p:txBody>
-          <a:bodyPr wrap="square" lIns="45720" rIns="45720" anchor="ctr">
-            <a:spAutoFit/>
-          </a:bodyPr>
-          <a:lstStyle/>
-          <a:p>
-            <a:pPr algn="ctr"/>
-            <a:r>
-              <a:rPr sz="1400" b="1" i="0">
-                <a:solidFill>
-                  <a:srgbClr val="070E1D"/>
-                </a:solidFill>
-                <a:latin typeface="Segoe UI"/>
-              </a:rPr>
-              <a:t>D - </a:t>
-            </a:r>
-            <a:r>
-              <a:rPr sz="1400" b="1" i="0">
-                <a:solidFill>
-                  <a:srgbClr val="070E1D"/>
-                </a:solidFill>
-                <a:latin typeface="Segoe UI"/>
-              </a:rPr>
-              <a:t>Externalisation</a:t>
-            </a:r>
-          </a:p>
-        </p:txBody>
-      </p:sp>
-      <p:sp>
-        <p:nvSpPr>
-          <p:cNvPr id="37" name="S06_R4C2"/>
-          <p:cNvSpPr txBox="1"/>
-          <p:nvPr/>
-        </p:nvSpPr>
-        <p:spPr>
-          <a:xfrm>
-            <a:off x="4172400" y="3884399"/>
-            <a:ext cx="1828800" cy="288000"/>
-          </a:xfrm>
-          <a:prstGeom prst="rect">
-            <a:avLst/>
-          </a:prstGeom>
-          <a:noFill/>
-        </p:spPr>
-        <p:txBody>
-          <a:bodyPr wrap="square" lIns="45720" rIns="45720" anchor="ctr">
-            <a:spAutoFit/>
-          </a:bodyPr>
-          <a:lstStyle/>
-          <a:p>
-            <a:pPr algn="ctr"/>
-            <a:r>
-              <a:rPr sz="1400" b="0" i="0">
-                <a:solidFill>
-                  <a:srgbClr val="474E67"/>
-                </a:solidFill>
-                <a:latin typeface="Segoe UI"/>
-              </a:rPr>
-              <a:t>2,5 M€</a:t>
-            </a:r>
-          </a:p>
-        </p:txBody>
-      </p:sp>
-      <p:sp>
-        <p:nvSpPr>
-          <p:cNvPr id="38" name="S06_R4C3"/>
-          <p:cNvSpPr txBox="1"/>
-          <p:nvPr/>
-        </p:nvSpPr>
-        <p:spPr>
-          <a:xfrm>
-            <a:off x="6256800" y="3884399"/>
-            <a:ext cx="1494000" cy="288000"/>
-          </a:xfrm>
-          <a:prstGeom prst="rect">
-            <a:avLst/>
-          </a:prstGeom>
-          <a:noFill/>
-        </p:spPr>
-        <p:txBody>
-          <a:bodyPr wrap="square" lIns="45720" rIns="45720" anchor="ctr">
-            <a:spAutoFit/>
-          </a:bodyPr>
-          <a:lstStyle/>
-          <a:p>
-            <a:pPr algn="ctr"/>
-            <a:r>
-              <a:rPr sz="1400" b="0" i="0">
-                <a:solidFill>
-                  <a:srgbClr val="474E67"/>
-                </a:solidFill>
-                <a:latin typeface="Segoe UI"/>
-              </a:rPr>
-              <a:t>12 mois</a:t>
-            </a:r>
-          </a:p>
-        </p:txBody>
-      </p:sp>
-      <p:sp>
-        <p:nvSpPr>
-          <p:cNvPr id="39" name="S06_R4C4"/>
-          <p:cNvSpPr txBox="1"/>
-          <p:nvPr/>
-        </p:nvSpPr>
-        <p:spPr>
-          <a:xfrm>
-            <a:off x="8013600" y="3884399"/>
-            <a:ext cx="2070000" cy="288000"/>
-          </a:xfrm>
-          <a:prstGeom prst="rect">
-            <a:avLst/>
-          </a:prstGeom>
-          <a:noFill/>
-        </p:spPr>
-        <p:txBody>
-          <a:bodyPr wrap="square" lIns="45720" rIns="45720" anchor="ctr">
-            <a:spAutoFit/>
-          </a:bodyPr>
-          <a:lstStyle/>
-          <a:p>
-            <a:pPr algn="ctr"/>
-            <a:r>
-              <a:rPr sz="1400" b="1" i="0">
-                <a:solidFill>
-                  <a:srgbClr val="6A5D79"/>
-                </a:solidFill>
-                <a:latin typeface="Segoe UI"/>
-              </a:rPr>
-              <a:t>Moyen</a:t>
-            </a:r>
-          </a:p>
-        </p:txBody>
-      </p:sp>
-      <p:sp>
-        <p:nvSpPr>
-          <p:cNvPr id="40" name="S06_R4C5"/>
-          <p:cNvSpPr txBox="1"/>
-          <p:nvPr/>
-        </p:nvSpPr>
-        <p:spPr>
-          <a:xfrm>
-            <a:off x="10332000" y="3884399"/>
-            <a:ext cx="1364400" cy="288000"/>
-          </a:xfrm>
-          <a:prstGeom prst="rect">
-            <a:avLst/>
-          </a:prstGeom>
-          <a:noFill/>
-        </p:spPr>
-        <p:txBody>
-          <a:bodyPr wrap="square" lIns="45720" rIns="45720" anchor="ctr">
-            <a:spAutoFit/>
-          </a:bodyPr>
-          <a:lstStyle/>
-          <a:p>
-            <a:pPr algn="ctr"/>
-            <a:r>
-              <a:rPr sz="1400" b="1" i="0">
-                <a:solidFill>
-                  <a:srgbClr val="474E67"/>
-                </a:solidFill>
-                <a:latin typeface="Segoe UI"/>
-              </a:rPr>
-              <a:t>★★</a:t>
-            </a:r>
-          </a:p>
-        </p:txBody>
-      </p:sp>
-      <p:sp>
-        <p:nvSpPr>
-          <p:cNvPr id="41" name="TakeawayBand"/>
+      </p:cxnSp>
+      <p:sp>
+        <p:nvSpPr>
+          <p:cNvPr id="61" name="TakeawayBand"/>
           <p:cNvSpPr/>
           <p:nvPr/>
         </p:nvSpPr>
@@ -12436,20 +11820,6 @@
             <a:noFill/>
           </a:ln>
         </p:spPr>
-        <p:style>
-          <a:lnRef idx="1">
-            <a:schemeClr val="accent1"/>
-          </a:lnRef>
-          <a:fillRef idx="3">
-            <a:schemeClr val="accent1"/>
-          </a:fillRef>
-          <a:effectRef idx="2">
-            <a:schemeClr val="accent1"/>
-          </a:effectRef>
-          <a:fontRef idx="minor">
-            <a:schemeClr val="lt1"/>
-          </a:fontRef>
-        </p:style>
         <p:txBody>
           <a:bodyPr rtlCol="0" anchor="ctr"/>
           <a:lstStyle/>
@@ -12460,7 +11830,7 @@
       </p:sp>
       <p:sp>
         <p:nvSpPr>
-          <p:cNvPr id="42" name="TakeawayBandText"/>
+          <p:cNvPr id="62" name="TakeawayBandText"/>
           <p:cNvSpPr txBox="1"/>
           <p:nvPr/>
         </p:nvSpPr>
@@ -12584,20 +11954,6 @@
             <a:noFill/>
           </a:ln>
         </p:spPr>
-        <p:style>
-          <a:lnRef idx="1">
-            <a:schemeClr val="accent1"/>
-          </a:lnRef>
-          <a:fillRef idx="3">
-            <a:schemeClr val="accent1"/>
-          </a:fillRef>
-          <a:effectRef idx="2">
-            <a:schemeClr val="accent1"/>
-          </a:effectRef>
-          <a:fontRef idx="minor">
-            <a:schemeClr val="lt1"/>
-          </a:fontRef>
-        </p:style>
         <p:txBody>
           <a:bodyPr rtlCol="0" anchor="ctr"/>
           <a:lstStyle/>
@@ -12627,20 +11983,6 @@
             <a:noFill/>
           </a:ln>
         </p:spPr>
-        <p:style>
-          <a:lnRef idx="1">
-            <a:schemeClr val="accent1"/>
-          </a:lnRef>
-          <a:fillRef idx="3">
-            <a:schemeClr val="accent1"/>
-          </a:fillRef>
-          <a:effectRef idx="2">
-            <a:schemeClr val="accent1"/>
-          </a:effectRef>
-          <a:fontRef idx="minor">
-            <a:schemeClr val="lt1"/>
-          </a:fontRef>
-        </p:style>
         <p:txBody>
           <a:bodyPr rtlCol="0" anchor="ctr"/>
           <a:lstStyle/>
@@ -12742,20 +12084,6 @@
             <a:noFill/>
           </a:ln>
         </p:spPr>
-        <p:style>
-          <a:lnRef idx="1">
-            <a:schemeClr val="accent1"/>
-          </a:lnRef>
-          <a:fillRef idx="3">
-            <a:schemeClr val="accent1"/>
-          </a:fillRef>
-          <a:effectRef idx="2">
-            <a:schemeClr val="accent1"/>
-          </a:effectRef>
-          <a:fontRef idx="minor">
-            <a:schemeClr val="lt1"/>
-          </a:fontRef>
-        </p:style>
         <p:txBody>
           <a:bodyPr rtlCol="0" anchor="ctr"/>
           <a:lstStyle/>
@@ -12866,20 +12194,6 @@
             <a:noFill/>
           </a:ln>
         </p:spPr>
-        <p:style>
-          <a:lnRef idx="1">
-            <a:schemeClr val="accent1"/>
-          </a:lnRef>
-          <a:fillRef idx="3">
-            <a:schemeClr val="accent1"/>
-          </a:fillRef>
-          <a:effectRef idx="2">
-            <a:schemeClr val="accent1"/>
-          </a:effectRef>
-          <a:fontRef idx="minor">
-            <a:schemeClr val="lt1"/>
-          </a:fontRef>
-        </p:style>
         <p:txBody>
           <a:bodyPr rtlCol="0" anchor="ctr"/>
           <a:lstStyle/>
@@ -12990,20 +12304,6 @@
             <a:noFill/>
           </a:ln>
         </p:spPr>
-        <p:style>
-          <a:lnRef idx="1">
-            <a:schemeClr val="accent1"/>
-          </a:lnRef>
-          <a:fillRef idx="3">
-            <a:schemeClr val="accent1"/>
-          </a:fillRef>
-          <a:effectRef idx="2">
-            <a:schemeClr val="accent1"/>
-          </a:effectRef>
-          <a:fontRef idx="minor">
-            <a:schemeClr val="lt1"/>
-          </a:fontRef>
-        </p:style>
         <p:txBody>
           <a:bodyPr rtlCol="0" anchor="ctr"/>
           <a:lstStyle/>
@@ -13105,20 +12405,6 @@
             <a:noFill/>
           </a:ln>
         </p:spPr>
-        <p:style>
-          <a:lnRef idx="1">
-            <a:schemeClr val="accent1"/>
-          </a:lnRef>
-          <a:fillRef idx="3">
-            <a:schemeClr val="accent1"/>
-          </a:fillRef>
-          <a:effectRef idx="2">
-            <a:schemeClr val="accent1"/>
-          </a:effectRef>
-          <a:fontRef idx="minor">
-            <a:schemeClr val="lt1"/>
-          </a:fontRef>
-        </p:style>
         <p:txBody>
           <a:bodyPr rtlCol="0" anchor="ctr"/>
           <a:lstStyle/>
@@ -13229,20 +12515,6 @@
             <a:noFill/>
           </a:ln>
         </p:spPr>
-        <p:style>
-          <a:lnRef idx="1">
-            <a:schemeClr val="accent1"/>
-          </a:lnRef>
-          <a:fillRef idx="3">
-            <a:schemeClr val="accent1"/>
-          </a:fillRef>
-          <a:effectRef idx="2">
-            <a:schemeClr val="accent1"/>
-          </a:effectRef>
-          <a:fontRef idx="minor">
-            <a:schemeClr val="lt1"/>
-          </a:fontRef>
-        </p:style>
         <p:txBody>
           <a:bodyPr rtlCol="0" anchor="ctr"/>
           <a:lstStyle/>
@@ -13353,20 +12625,6 @@
             <a:noFill/>
           </a:ln>
         </p:spPr>
-        <p:style>
-          <a:lnRef idx="1">
-            <a:schemeClr val="accent1"/>
-          </a:lnRef>
-          <a:fillRef idx="3">
-            <a:schemeClr val="accent1"/>
-          </a:fillRef>
-          <a:effectRef idx="2">
-            <a:schemeClr val="accent1"/>
-          </a:effectRef>
-          <a:fontRef idx="minor">
-            <a:schemeClr val="lt1"/>
-          </a:fontRef>
-        </p:style>
         <p:txBody>
           <a:bodyPr rtlCol="0" anchor="ctr"/>
           <a:lstStyle/>
@@ -13471,12 +12729,12 @@
           <a:noFill/>
         </p:spPr>
         <p:txBody>
-          <a:bodyPr wrap="square" lIns="45720" rIns="45720" anchor="t">
-            <a:spAutoFit/>
-          </a:bodyPr>
-          <a:lstStyle/>
-          <a:p>
-            <a:pPr algn="l"/>
+          <a:bodyPr wrap="square" lIns="45720" rIns="45720" anchor="ctr">
+            <a:spAutoFit/>
+          </a:bodyPr>
+          <a:lstStyle/>
+          <a:p>
+            <a:pPr algn="ctr"/>
             <a:r>
               <a:rPr sz="1200" b="1" i="1">
                 <a:solidFill>
@@ -13565,20 +12823,6 @@
             <a:noFill/>
           </a:ln>
         </p:spPr>
-        <p:style>
-          <a:lnRef idx="1">
-            <a:schemeClr val="accent1"/>
-          </a:lnRef>
-          <a:fillRef idx="3">
-            <a:schemeClr val="accent1"/>
-          </a:fillRef>
-          <a:effectRef idx="2">
-            <a:schemeClr val="accent1"/>
-          </a:effectRef>
-          <a:fontRef idx="minor">
-            <a:schemeClr val="lt1"/>
-          </a:fontRef>
-        </p:style>
         <p:txBody>
           <a:bodyPr rtlCol="0" anchor="ctr"/>
           <a:lstStyle/>
@@ -13689,20 +12933,6 @@
             <a:noFill/>
           </a:ln>
         </p:spPr>
-        <p:style>
-          <a:lnRef idx="1">
-            <a:schemeClr val="accent1"/>
-          </a:lnRef>
-          <a:fillRef idx="3">
-            <a:schemeClr val="accent1"/>
-          </a:fillRef>
-          <a:effectRef idx="2">
-            <a:schemeClr val="accent1"/>
-          </a:effectRef>
-          <a:fontRef idx="minor">
-            <a:schemeClr val="lt1"/>
-          </a:fontRef>
-        </p:style>
         <p:txBody>
           <a:bodyPr rtlCol="0" anchor="ctr"/>
           <a:lstStyle/>
@@ -13813,20 +13043,6 @@
             <a:noFill/>
           </a:ln>
         </p:spPr>
-        <p:style>
-          <a:lnRef idx="1">
-            <a:schemeClr val="accent1"/>
-          </a:lnRef>
-          <a:fillRef idx="3">
-            <a:schemeClr val="accent1"/>
-          </a:fillRef>
-          <a:effectRef idx="2">
-            <a:schemeClr val="accent1"/>
-          </a:effectRef>
-          <a:fontRef idx="minor">
-            <a:schemeClr val="lt1"/>
-          </a:fontRef>
-        </p:style>
         <p:txBody>
           <a:bodyPr rtlCol="0" anchor="ctr"/>
           <a:lstStyle/>
@@ -13937,20 +13153,6 @@
             <a:noFill/>
           </a:ln>
         </p:spPr>
-        <p:style>
-          <a:lnRef idx="1">
-            <a:schemeClr val="accent1"/>
-          </a:lnRef>
-          <a:fillRef idx="3">
-            <a:schemeClr val="accent1"/>
-          </a:fillRef>
-          <a:effectRef idx="2">
-            <a:schemeClr val="accent1"/>
-          </a:effectRef>
-          <a:fontRef idx="minor">
-            <a:schemeClr val="lt1"/>
-          </a:fontRef>
-        </p:style>
         <p:txBody>
           <a:bodyPr rtlCol="0" anchor="ctr"/>
           <a:lstStyle/>
@@ -14061,20 +13263,6 @@
             <a:noFill/>
           </a:ln>
         </p:spPr>
-        <p:style>
-          <a:lnRef idx="1">
-            <a:schemeClr val="accent1"/>
-          </a:lnRef>
-          <a:fillRef idx="3">
-            <a:schemeClr val="accent1"/>
-          </a:fillRef>
-          <a:effectRef idx="2">
-            <a:schemeClr val="accent1"/>
-          </a:effectRef>
-          <a:fontRef idx="minor">
-            <a:schemeClr val="lt1"/>
-          </a:fontRef>
-        </p:style>
         <p:txBody>
           <a:bodyPr rtlCol="0" anchor="ctr"/>
           <a:lstStyle/>
@@ -14159,20 +13347,6 @@
             <a:noFill/>
           </a:ln>
         </p:spPr>
-        <p:style>
-          <a:lnRef idx="1">
-            <a:schemeClr val="accent1"/>
-          </a:lnRef>
-          <a:fillRef idx="3">
-            <a:schemeClr val="accent1"/>
-          </a:fillRef>
-          <a:effectRef idx="2">
-            <a:schemeClr val="accent1"/>
-          </a:effectRef>
-          <a:fontRef idx="minor">
-            <a:schemeClr val="lt1"/>
-          </a:fontRef>
-        </p:style>
         <p:txBody>
           <a:bodyPr rtlCol="0" anchor="ctr"/>
           <a:lstStyle/>
@@ -14316,20 +13490,6 @@
             <a:noFill/>
           </a:ln>
         </p:spPr>
-        <p:style>
-          <a:lnRef idx="1">
-            <a:schemeClr val="accent1"/>
-          </a:lnRef>
-          <a:fillRef idx="3">
-            <a:schemeClr val="accent1"/>
-          </a:fillRef>
-          <a:effectRef idx="2">
-            <a:schemeClr val="accent1"/>
-          </a:effectRef>
-          <a:fontRef idx="minor">
-            <a:schemeClr val="lt1"/>
-          </a:fontRef>
-        </p:style>
         <p:txBody>
           <a:bodyPr rtlCol="0" anchor="ctr"/>
           <a:lstStyle/>
@@ -14359,20 +13519,6 @@
             <a:noFill/>
           </a:ln>
         </p:spPr>
-        <p:style>
-          <a:lnRef idx="1">
-            <a:schemeClr val="accent1"/>
-          </a:lnRef>
-          <a:fillRef idx="3">
-            <a:schemeClr val="accent1"/>
-          </a:fillRef>
-          <a:effectRef idx="2">
-            <a:schemeClr val="accent1"/>
-          </a:effectRef>
-          <a:fontRef idx="minor">
-            <a:schemeClr val="lt1"/>
-          </a:fontRef>
-        </p:style>
         <p:txBody>
           <a:bodyPr rtlCol="0" anchor="ctr"/>
           <a:lstStyle/>
@@ -14586,20 +13732,6 @@
             <a:noFill/>
           </a:ln>
         </p:spPr>
-        <p:style>
-          <a:lnRef idx="1">
-            <a:schemeClr val="accent1"/>
-          </a:lnRef>
-          <a:fillRef idx="3">
-            <a:schemeClr val="accent1"/>
-          </a:fillRef>
-          <a:effectRef idx="2">
-            <a:schemeClr val="accent1"/>
-          </a:effectRef>
-          <a:fontRef idx="minor">
-            <a:schemeClr val="lt1"/>
-          </a:fontRef>
-        </p:style>
         <p:txBody>
           <a:bodyPr rtlCol="0" anchor="ctr"/>
           <a:lstStyle/>
@@ -14629,20 +13761,6 @@
             <a:noFill/>
           </a:ln>
         </p:spPr>
-        <p:style>
-          <a:lnRef idx="1">
-            <a:schemeClr val="accent1"/>
-          </a:lnRef>
-          <a:fillRef idx="3">
-            <a:schemeClr val="accent1"/>
-          </a:fillRef>
-          <a:effectRef idx="2">
-            <a:schemeClr val="accent1"/>
-          </a:effectRef>
-          <a:fontRef idx="minor">
-            <a:schemeClr val="lt1"/>
-          </a:fontRef>
-        </p:style>
         <p:txBody>
           <a:bodyPr rtlCol="0" anchor="ctr"/>
           <a:lstStyle/>
@@ -14718,20 +13836,6 @@
             <a:noFill/>
           </a:ln>
         </p:spPr>
-        <p:style>
-          <a:lnRef idx="1">
-            <a:schemeClr val="accent1"/>
-          </a:lnRef>
-          <a:fillRef idx="3">
-            <a:schemeClr val="accent1"/>
-          </a:fillRef>
-          <a:effectRef idx="2">
-            <a:schemeClr val="accent1"/>
-          </a:effectRef>
-          <a:fontRef idx="minor">
-            <a:schemeClr val="lt1"/>
-          </a:fontRef>
-        </p:style>
         <p:txBody>
           <a:bodyPr rtlCol="0" anchor="ctr"/>
           <a:lstStyle/>
@@ -14763,20 +13867,6 @@
             <a:noFill/>
           </a:ln>
         </p:spPr>
-        <p:style>
-          <a:lnRef idx="1">
-            <a:schemeClr val="accent1"/>
-          </a:lnRef>
-          <a:fillRef idx="3">
-            <a:schemeClr val="accent1"/>
-          </a:fillRef>
-          <a:effectRef idx="2">
-            <a:schemeClr val="accent1"/>
-          </a:effectRef>
-          <a:fontRef idx="minor">
-            <a:schemeClr val="lt1"/>
-          </a:fontRef>
-        </p:style>
         <p:txBody>
           <a:bodyPr rtlCol="0" anchor="ctr"/>
           <a:lstStyle/>
@@ -14922,20 +14012,6 @@
             <a:noFill/>
           </a:ln>
         </p:spPr>
-        <p:style>
-          <a:lnRef idx="1">
-            <a:schemeClr val="accent1"/>
-          </a:lnRef>
-          <a:fillRef idx="3">
-            <a:schemeClr val="accent1"/>
-          </a:fillRef>
-          <a:effectRef idx="2">
-            <a:schemeClr val="accent1"/>
-          </a:effectRef>
-          <a:fontRef idx="minor">
-            <a:schemeClr val="lt1"/>
-          </a:fontRef>
-        </p:style>
         <p:txBody>
           <a:bodyPr rtlCol="0" anchor="ctr"/>
           <a:lstStyle/>
@@ -14967,20 +14043,6 @@
             <a:noFill/>
           </a:ln>
         </p:spPr>
-        <p:style>
-          <a:lnRef idx="1">
-            <a:schemeClr val="accent1"/>
-          </a:lnRef>
-          <a:fillRef idx="3">
-            <a:schemeClr val="accent1"/>
-          </a:fillRef>
-          <a:effectRef idx="2">
-            <a:schemeClr val="accent1"/>
-          </a:effectRef>
-          <a:fontRef idx="minor">
-            <a:schemeClr val="lt1"/>
-          </a:fontRef>
-        </p:style>
         <p:txBody>
           <a:bodyPr rtlCol="0" anchor="ctr"/>
           <a:lstStyle/>
@@ -15126,20 +14188,6 @@
             <a:noFill/>
           </a:ln>
         </p:spPr>
-        <p:style>
-          <a:lnRef idx="1">
-            <a:schemeClr val="accent1"/>
-          </a:lnRef>
-          <a:fillRef idx="3">
-            <a:schemeClr val="accent1"/>
-          </a:fillRef>
-          <a:effectRef idx="2">
-            <a:schemeClr val="accent1"/>
-          </a:effectRef>
-          <a:fontRef idx="minor">
-            <a:schemeClr val="lt1"/>
-          </a:fontRef>
-        </p:style>
         <p:txBody>
           <a:bodyPr rtlCol="0" anchor="ctr"/>
           <a:lstStyle/>
@@ -15171,20 +14219,6 @@
             <a:noFill/>
           </a:ln>
         </p:spPr>
-        <p:style>
-          <a:lnRef idx="1">
-            <a:schemeClr val="accent1"/>
-          </a:lnRef>
-          <a:fillRef idx="3">
-            <a:schemeClr val="accent1"/>
-          </a:fillRef>
-          <a:effectRef idx="2">
-            <a:schemeClr val="accent1"/>
-          </a:effectRef>
-          <a:fontRef idx="minor">
-            <a:schemeClr val="lt1"/>
-          </a:fontRef>
-        </p:style>
         <p:txBody>
           <a:bodyPr rtlCol="0" anchor="ctr"/>
           <a:lstStyle/>
@@ -15330,20 +14364,6 @@
             <a:noFill/>
           </a:ln>
         </p:spPr>
-        <p:style>
-          <a:lnRef idx="1">
-            <a:schemeClr val="accent1"/>
-          </a:lnRef>
-          <a:fillRef idx="3">
-            <a:schemeClr val="accent1"/>
-          </a:fillRef>
-          <a:effectRef idx="2">
-            <a:schemeClr val="accent1"/>
-          </a:effectRef>
-          <a:fontRef idx="minor">
-            <a:schemeClr val="lt1"/>
-          </a:fontRef>
-        </p:style>
         <p:txBody>
           <a:bodyPr rtlCol="0" anchor="ctr"/>
           <a:lstStyle/>
@@ -15375,20 +14395,6 @@
             <a:noFill/>
           </a:ln>
         </p:spPr>
-        <p:style>
-          <a:lnRef idx="1">
-            <a:schemeClr val="accent1"/>
-          </a:lnRef>
-          <a:fillRef idx="3">
-            <a:schemeClr val="accent1"/>
-          </a:fillRef>
-          <a:effectRef idx="2">
-            <a:schemeClr val="accent1"/>
-          </a:effectRef>
-          <a:fontRef idx="minor">
-            <a:schemeClr val="lt1"/>
-          </a:fontRef>
-        </p:style>
         <p:txBody>
           <a:bodyPr rtlCol="0" anchor="ctr"/>
           <a:lstStyle/>
@@ -15534,20 +14540,6 @@
             <a:noFill/>
           </a:ln>
         </p:spPr>
-        <p:style>
-          <a:lnRef idx="1">
-            <a:schemeClr val="accent1"/>
-          </a:lnRef>
-          <a:fillRef idx="3">
-            <a:schemeClr val="accent1"/>
-          </a:fillRef>
-          <a:effectRef idx="2">
-            <a:schemeClr val="accent1"/>
-          </a:effectRef>
-          <a:fontRef idx="minor">
-            <a:schemeClr val="lt1"/>
-          </a:fontRef>
-        </p:style>
         <p:txBody>
           <a:bodyPr rtlCol="0" anchor="ctr"/>
           <a:lstStyle/>
@@ -15579,20 +14571,6 @@
             <a:noFill/>
           </a:ln>
         </p:spPr>
-        <p:style>
-          <a:lnRef idx="1">
-            <a:schemeClr val="accent1"/>
-          </a:lnRef>
-          <a:fillRef idx="3">
-            <a:schemeClr val="accent1"/>
-          </a:fillRef>
-          <a:effectRef idx="2">
-            <a:schemeClr val="accent1"/>
-          </a:effectRef>
-          <a:fontRef idx="minor">
-            <a:schemeClr val="lt1"/>
-          </a:fontRef>
-        </p:style>
         <p:txBody>
           <a:bodyPr rtlCol="0" anchor="ctr"/>
           <a:lstStyle/>
@@ -15712,20 +14690,6 @@
             <a:noFill/>
           </a:ln>
         </p:spPr>
-        <p:style>
-          <a:lnRef idx="1">
-            <a:schemeClr val="accent1"/>
-          </a:lnRef>
-          <a:fillRef idx="3">
-            <a:schemeClr val="accent1"/>
-          </a:fillRef>
-          <a:effectRef idx="2">
-            <a:schemeClr val="accent1"/>
-          </a:effectRef>
-          <a:fontRef idx="minor">
-            <a:schemeClr val="lt1"/>
-          </a:fontRef>
-        </p:style>
         <p:txBody>
           <a:bodyPr rtlCol="0" anchor="ctr"/>
           <a:lstStyle/>
@@ -15860,20 +14824,6 @@
             <a:noFill/>
           </a:ln>
         </p:spPr>
-        <p:style>
-          <a:lnRef idx="1">
-            <a:schemeClr val="accent1"/>
-          </a:lnRef>
-          <a:fillRef idx="3">
-            <a:schemeClr val="accent1"/>
-          </a:fillRef>
-          <a:effectRef idx="2">
-            <a:schemeClr val="accent1"/>
-          </a:effectRef>
-          <a:fontRef idx="minor">
-            <a:schemeClr val="lt1"/>
-          </a:fontRef>
-        </p:style>
         <p:txBody>
           <a:bodyPr rtlCol="0" anchor="ctr"/>
           <a:lstStyle/>
@@ -15903,20 +14853,6 @@
             <a:noFill/>
           </a:ln>
         </p:spPr>
-        <p:style>
-          <a:lnRef idx="1">
-            <a:schemeClr val="accent1"/>
-          </a:lnRef>
-          <a:fillRef idx="3">
-            <a:schemeClr val="accent1"/>
-          </a:fillRef>
-          <a:effectRef idx="2">
-            <a:schemeClr val="accent1"/>
-          </a:effectRef>
-          <a:fontRef idx="minor">
-            <a:schemeClr val="lt1"/>
-          </a:fontRef>
-        </p:style>
         <p:txBody>
           <a:bodyPr rtlCol="0" anchor="ctr"/>
           <a:lstStyle/>
@@ -16020,20 +14956,6 @@
             </a:solidFill>
           </a:ln>
         </p:spPr>
-        <p:style>
-          <a:lnRef idx="1">
-            <a:schemeClr val="accent1"/>
-          </a:lnRef>
-          <a:fillRef idx="3">
-            <a:schemeClr val="accent1"/>
-          </a:fillRef>
-          <a:effectRef idx="2">
-            <a:schemeClr val="accent1"/>
-          </a:effectRef>
-          <a:fontRef idx="minor">
-            <a:schemeClr val="lt1"/>
-          </a:fontRef>
-        </p:style>
         <p:txBody>
           <a:bodyPr rtlCol="0" anchor="ctr"/>
           <a:lstStyle/>
@@ -16063,20 +14985,6 @@
             <a:noFill/>
           </a:ln>
         </p:spPr>
-        <p:style>
-          <a:lnRef idx="1">
-            <a:schemeClr val="accent1"/>
-          </a:lnRef>
-          <a:fillRef idx="3">
-            <a:schemeClr val="accent1"/>
-          </a:fillRef>
-          <a:effectRef idx="2">
-            <a:schemeClr val="accent1"/>
-          </a:effectRef>
-          <a:fontRef idx="minor">
-            <a:schemeClr val="lt1"/>
-          </a:fontRef>
-        </p:style>
         <p:txBody>
           <a:bodyPr rtlCol="0" anchor="ctr"/>
           <a:lstStyle/>
@@ -16238,20 +15146,6 @@
             <a:prstDash val="dash"/>
           </a:ln>
         </p:spPr>
-        <p:style>
-          <a:lnRef idx="2">
-            <a:schemeClr val="accent1"/>
-          </a:lnRef>
-          <a:fillRef idx="0">
-            <a:schemeClr val="accent1"/>
-          </a:fillRef>
-          <a:effectRef idx="1">
-            <a:schemeClr val="accent1"/>
-          </a:effectRef>
-          <a:fontRef idx="minor">
-            <a:schemeClr val="tx1"/>
-          </a:fontRef>
-        </p:style>
       </p:cxnSp>
       <p:sp>
         <p:nvSpPr>
@@ -16384,20 +15278,6 @@
             </a:solidFill>
           </a:ln>
         </p:spPr>
-        <p:style>
-          <a:lnRef idx="1">
-            <a:schemeClr val="accent1"/>
-          </a:lnRef>
-          <a:fillRef idx="3">
-            <a:schemeClr val="accent1"/>
-          </a:fillRef>
-          <a:effectRef idx="2">
-            <a:schemeClr val="accent1"/>
-          </a:effectRef>
-          <a:fontRef idx="minor">
-            <a:schemeClr val="lt1"/>
-          </a:fontRef>
-        </p:style>
         <p:txBody>
           <a:bodyPr rtlCol="0" anchor="ctr"/>
           <a:lstStyle/>
@@ -16427,20 +15307,6 @@
             <a:noFill/>
           </a:ln>
         </p:spPr>
-        <p:style>
-          <a:lnRef idx="1">
-            <a:schemeClr val="accent1"/>
-          </a:lnRef>
-          <a:fillRef idx="3">
-            <a:schemeClr val="accent1"/>
-          </a:fillRef>
-          <a:effectRef idx="2">
-            <a:schemeClr val="accent1"/>
-          </a:effectRef>
-          <a:fontRef idx="minor">
-            <a:schemeClr val="lt1"/>
-          </a:fontRef>
-        </p:style>
         <p:txBody>
           <a:bodyPr rtlCol="0" anchor="ctr"/>
           <a:lstStyle/>
@@ -16602,20 +15468,6 @@
             <a:prstDash val="dash"/>
           </a:ln>
         </p:spPr>
-        <p:style>
-          <a:lnRef idx="2">
-            <a:schemeClr val="accent1"/>
-          </a:lnRef>
-          <a:fillRef idx="0">
-            <a:schemeClr val="accent1"/>
-          </a:fillRef>
-          <a:effectRef idx="1">
-            <a:schemeClr val="accent1"/>
-          </a:effectRef>
-          <a:fontRef idx="minor">
-            <a:schemeClr val="tx1"/>
-          </a:fontRef>
-        </p:style>
       </p:cxnSp>
       <p:sp>
         <p:nvSpPr>
@@ -16730,20 +15582,6 @@
             </a:solidFill>
           </a:ln>
         </p:spPr>
-        <p:style>
-          <a:lnRef idx="1">
-            <a:schemeClr val="accent1"/>
-          </a:lnRef>
-          <a:fillRef idx="3">
-            <a:schemeClr val="accent1"/>
-          </a:fillRef>
-          <a:effectRef idx="2">
-            <a:schemeClr val="accent1"/>
-          </a:effectRef>
-          <a:fontRef idx="minor">
-            <a:schemeClr val="lt1"/>
-          </a:fontRef>
-        </p:style>
         <p:txBody>
           <a:bodyPr rtlCol="0" anchor="ctr"/>
           <a:lstStyle/>
@@ -16773,20 +15611,6 @@
             <a:noFill/>
           </a:ln>
         </p:spPr>
-        <p:style>
-          <a:lnRef idx="1">
-            <a:schemeClr val="accent1"/>
-          </a:lnRef>
-          <a:fillRef idx="3">
-            <a:schemeClr val="accent1"/>
-          </a:fillRef>
-          <a:effectRef idx="2">
-            <a:schemeClr val="accent1"/>
-          </a:effectRef>
-          <a:fontRef idx="minor">
-            <a:schemeClr val="lt1"/>
-          </a:fontRef>
-        </p:style>
         <p:txBody>
           <a:bodyPr rtlCol="0" anchor="ctr"/>
           <a:lstStyle/>
@@ -16948,20 +15772,6 @@
             <a:prstDash val="dash"/>
           </a:ln>
         </p:spPr>
-        <p:style>
-          <a:lnRef idx="2">
-            <a:schemeClr val="accent1"/>
-          </a:lnRef>
-          <a:fillRef idx="0">
-            <a:schemeClr val="accent1"/>
-          </a:fillRef>
-          <a:effectRef idx="1">
-            <a:schemeClr val="accent1"/>
-          </a:effectRef>
-          <a:fontRef idx="minor">
-            <a:schemeClr val="tx1"/>
-          </a:fontRef>
-        </p:style>
       </p:cxnSp>
       <p:sp>
         <p:nvSpPr>
@@ -17076,20 +15886,6 @@
             </a:solidFill>
           </a:ln>
         </p:spPr>
-        <p:style>
-          <a:lnRef idx="1">
-            <a:schemeClr val="accent1"/>
-          </a:lnRef>
-          <a:fillRef idx="3">
-            <a:schemeClr val="accent1"/>
-          </a:fillRef>
-          <a:effectRef idx="2">
-            <a:schemeClr val="accent1"/>
-          </a:effectRef>
-          <a:fontRef idx="minor">
-            <a:schemeClr val="lt1"/>
-          </a:fontRef>
-        </p:style>
         <p:txBody>
           <a:bodyPr rtlCol="0" anchor="ctr"/>
           <a:lstStyle/>
@@ -17119,20 +15915,6 @@
             <a:noFill/>
           </a:ln>
         </p:spPr>
-        <p:style>
-          <a:lnRef idx="1">
-            <a:schemeClr val="accent1"/>
-          </a:lnRef>
-          <a:fillRef idx="3">
-            <a:schemeClr val="accent1"/>
-          </a:fillRef>
-          <a:effectRef idx="2">
-            <a:schemeClr val="accent1"/>
-          </a:effectRef>
-          <a:fontRef idx="minor">
-            <a:schemeClr val="lt1"/>
-          </a:fontRef>
-        </p:style>
         <p:txBody>
           <a:bodyPr rtlCol="0" anchor="ctr"/>
           <a:lstStyle/>
@@ -17285,20 +16067,6 @@
             <a:prstDash val="dash"/>
           </a:ln>
         </p:spPr>
-        <p:style>
-          <a:lnRef idx="2">
-            <a:schemeClr val="accent1"/>
-          </a:lnRef>
-          <a:fillRef idx="0">
-            <a:schemeClr val="accent1"/>
-          </a:fillRef>
-          <a:effectRef idx="1">
-            <a:schemeClr val="accent1"/>
-          </a:effectRef>
-          <a:fontRef idx="minor">
-            <a:schemeClr val="tx1"/>
-          </a:fontRef>
-        </p:style>
       </p:cxnSp>
       <p:sp>
         <p:nvSpPr>
@@ -17413,20 +16181,6 @@
             </a:solidFill>
           </a:ln>
         </p:spPr>
-        <p:style>
-          <a:lnRef idx="1">
-            <a:schemeClr val="accent1"/>
-          </a:lnRef>
-          <a:fillRef idx="3">
-            <a:schemeClr val="accent1"/>
-          </a:fillRef>
-          <a:effectRef idx="2">
-            <a:schemeClr val="accent1"/>
-          </a:effectRef>
-          <a:fontRef idx="minor">
-            <a:schemeClr val="lt1"/>
-          </a:fontRef>
-        </p:style>
         <p:txBody>
           <a:bodyPr rtlCol="0" anchor="ctr"/>
           <a:lstStyle/>
@@ -17456,20 +16210,6 @@
             <a:noFill/>
           </a:ln>
         </p:spPr>
-        <p:style>
-          <a:lnRef idx="1">
-            <a:schemeClr val="accent1"/>
-          </a:lnRef>
-          <a:fillRef idx="3">
-            <a:schemeClr val="accent1"/>
-          </a:fillRef>
-          <a:effectRef idx="2">
-            <a:schemeClr val="accent1"/>
-          </a:effectRef>
-          <a:fontRef idx="minor">
-            <a:schemeClr val="lt1"/>
-          </a:fontRef>
-        </p:style>
         <p:txBody>
           <a:bodyPr rtlCol="0" anchor="ctr"/>
           <a:lstStyle/>
@@ -17631,20 +16371,6 @@
             <a:prstDash val="dash"/>
           </a:ln>
         </p:spPr>
-        <p:style>
-          <a:lnRef idx="2">
-            <a:schemeClr val="accent1"/>
-          </a:lnRef>
-          <a:fillRef idx="0">
-            <a:schemeClr val="accent1"/>
-          </a:fillRef>
-          <a:effectRef idx="1">
-            <a:schemeClr val="accent1"/>
-          </a:effectRef>
-          <a:fontRef idx="minor">
-            <a:schemeClr val="tx1"/>
-          </a:fontRef>
-        </p:style>
       </p:cxnSp>
       <p:sp>
         <p:nvSpPr>
@@ -17759,20 +16485,6 @@
             </a:solidFill>
           </a:ln>
         </p:spPr>
-        <p:style>
-          <a:lnRef idx="1">
-            <a:schemeClr val="accent1"/>
-          </a:lnRef>
-          <a:fillRef idx="3">
-            <a:schemeClr val="accent1"/>
-          </a:fillRef>
-          <a:effectRef idx="2">
-            <a:schemeClr val="accent1"/>
-          </a:effectRef>
-          <a:fontRef idx="minor">
-            <a:schemeClr val="lt1"/>
-          </a:fontRef>
-        </p:style>
         <p:txBody>
           <a:bodyPr rtlCol="0" anchor="ctr"/>
           <a:lstStyle/>
@@ -17802,20 +16514,6 @@
             <a:noFill/>
           </a:ln>
         </p:spPr>
-        <p:style>
-          <a:lnRef idx="1">
-            <a:schemeClr val="accent1"/>
-          </a:lnRef>
-          <a:fillRef idx="3">
-            <a:schemeClr val="accent1"/>
-          </a:fillRef>
-          <a:effectRef idx="2">
-            <a:schemeClr val="accent1"/>
-          </a:effectRef>
-          <a:fontRef idx="minor">
-            <a:schemeClr val="lt1"/>
-          </a:fontRef>
-        </p:style>
         <p:txBody>
           <a:bodyPr rtlCol="0" anchor="ctr"/>
           <a:lstStyle/>
@@ -17977,20 +16675,6 @@
             <a:prstDash val="dash"/>
           </a:ln>
         </p:spPr>
-        <p:style>
-          <a:lnRef idx="2">
-            <a:schemeClr val="accent1"/>
-          </a:lnRef>
-          <a:fillRef idx="0">
-            <a:schemeClr val="accent1"/>
-          </a:fillRef>
-          <a:effectRef idx="1">
-            <a:schemeClr val="accent1"/>
-          </a:effectRef>
-          <a:fontRef idx="minor">
-            <a:schemeClr val="tx1"/>
-          </a:fontRef>
-        </p:style>
       </p:cxnSp>
       <p:sp>
         <p:nvSpPr>

--- a/test_corretion_elements_graphiques.pptx
+++ b/test_corretion_elements_graphiques.pptx
@@ -12714,8 +12714,8 @@
       </p:sp>
       <p:sp>
         <p:nvSpPr>
-          <p:cNvPr id="25" name="S07_SECTION_LABEL"/>
-          <p:cNvSpPr txBox="1"/>
+          <p:cNvPr id="25" name="Rectangle 24"/>
+          <p:cNvSpPr/>
           <p:nvPr/>
         </p:nvSpPr>
         <p:spPr>
@@ -12726,6 +12726,35 @@
           <a:prstGeom prst="rect">
             <a:avLst/>
           </a:prstGeom>
+          <a:solidFill>
+            <a:srgbClr val="F2F2F2"/>
+          </a:solidFill>
+          <a:ln>
+            <a:noFill/>
+          </a:ln>
+        </p:spPr>
+        <p:txBody>
+          <a:bodyPr rtlCol="0" anchor="ctr"/>
+          <a:lstStyle/>
+          <a:p>
+            <a:pPr algn="ctr"/>
+          </a:p>
+        </p:txBody>
+      </p:sp>
+      <p:sp>
+        <p:nvSpPr>
+          <p:cNvPr id="26" name="S07_SECTION_LABEL"/>
+          <p:cNvSpPr txBox="1"/>
+          <p:nvPr/>
+        </p:nvSpPr>
+        <p:spPr>
+          <a:xfrm>
+            <a:off x="392400" y="3060000"/>
+            <a:ext cx="11188800" cy="421200"/>
+          </a:xfrm>
+          <a:prstGeom prst="rect">
+            <a:avLst/>
+          </a:prstGeom>
           <a:noFill/>
         </p:spPr>
         <p:txBody>
@@ -12738,7 +12767,7 @@
             <a:r>
               <a:rPr sz="1200" b="1" i="1">
                 <a:solidFill>
-                  <a:srgbClr val="474E67"/>
+                  <a:srgbClr val="070E1D"/>
                 </a:solidFill>
                 <a:latin typeface="Segoe UI"/>
               </a:rPr>
@@ -12747,7 +12776,7 @@
             <a:r>
               <a:rPr sz="1200" b="1" i="1">
                 <a:solidFill>
-                  <a:srgbClr val="474E67"/>
+                  <a:srgbClr val="070E1D"/>
                 </a:solidFill>
                 <a:latin typeface="Segoe UI"/>
               </a:rPr>
@@ -12758,7 +12787,7 @@
       </p:sp>
       <p:sp>
         <p:nvSpPr>
-          <p:cNvPr id="26" name="S07_BAR_1_LABEL"/>
+          <p:cNvPr id="27" name="S07_BAR_1_LABEL"/>
           <p:cNvSpPr txBox="1"/>
           <p:nvPr/>
         </p:nvSpPr>
@@ -12802,7 +12831,7 @@
       </p:sp>
       <p:sp>
         <p:nvSpPr>
-          <p:cNvPr id="27" name="S07_BAR_1_BAR"/>
+          <p:cNvPr id="28" name="S07_BAR_1_BAR"/>
           <p:cNvSpPr/>
           <p:nvPr/>
         </p:nvSpPr>
@@ -12813,7 +12842,7 @@
           </a:xfrm>
           <a:prstGeom prst="roundRect">
             <a:avLst>
-              <a:gd name="adj" fmla="val 10000"/>
+              <a:gd name="adj" fmla="val 50000"/>
             </a:avLst>
           </a:prstGeom>
           <a:solidFill>
@@ -12833,7 +12862,7 @@
       </p:sp>
       <p:sp>
         <p:nvSpPr>
-          <p:cNvPr id="28" name="S07_BAR_1_VALUE"/>
+          <p:cNvPr id="29" name="S07_BAR_1_VALUE"/>
           <p:cNvSpPr txBox="1"/>
           <p:nvPr/>
         </p:nvSpPr>
@@ -12868,7 +12897,7 @@
       </p:sp>
       <p:sp>
         <p:nvSpPr>
-          <p:cNvPr id="29" name="S07_BAR_2_LABEL"/>
+          <p:cNvPr id="30" name="S07_BAR_2_LABEL"/>
           <p:cNvSpPr txBox="1"/>
           <p:nvPr/>
         </p:nvSpPr>
@@ -12912,7 +12941,7 @@
       </p:sp>
       <p:sp>
         <p:nvSpPr>
-          <p:cNvPr id="30" name="S07_BAR_2_BAR"/>
+          <p:cNvPr id="31" name="S07_BAR_2_BAR"/>
           <p:cNvSpPr/>
           <p:nvPr/>
         </p:nvSpPr>
@@ -12923,7 +12952,7 @@
           </a:xfrm>
           <a:prstGeom prst="roundRect">
             <a:avLst>
-              <a:gd name="adj" fmla="val 10000"/>
+              <a:gd name="adj" fmla="val 50000"/>
             </a:avLst>
           </a:prstGeom>
           <a:solidFill>
@@ -12943,7 +12972,7 @@
       </p:sp>
       <p:sp>
         <p:nvSpPr>
-          <p:cNvPr id="31" name="S07_BAR_2_VALUE"/>
+          <p:cNvPr id="32" name="S07_BAR_2_VALUE"/>
           <p:cNvSpPr txBox="1"/>
           <p:nvPr/>
         </p:nvSpPr>
@@ -12978,7 +13007,7 @@
       </p:sp>
       <p:sp>
         <p:nvSpPr>
-          <p:cNvPr id="32" name="S07_BAR_3_LABEL"/>
+          <p:cNvPr id="33" name="S07_BAR_3_LABEL"/>
           <p:cNvSpPr txBox="1"/>
           <p:nvPr/>
         </p:nvSpPr>
@@ -13022,7 +13051,7 @@
       </p:sp>
       <p:sp>
         <p:nvSpPr>
-          <p:cNvPr id="33" name="S07_BAR_3_BAR"/>
+          <p:cNvPr id="34" name="S07_BAR_3_BAR"/>
           <p:cNvSpPr/>
           <p:nvPr/>
         </p:nvSpPr>
@@ -13033,7 +13062,7 @@
           </a:xfrm>
           <a:prstGeom prst="roundRect">
             <a:avLst>
-              <a:gd name="adj" fmla="val 10000"/>
+              <a:gd name="adj" fmla="val 50000"/>
             </a:avLst>
           </a:prstGeom>
           <a:solidFill>
@@ -13053,7 +13082,7 @@
       </p:sp>
       <p:sp>
         <p:nvSpPr>
-          <p:cNvPr id="34" name="S07_BAR_3_VALUE"/>
+          <p:cNvPr id="35" name="S07_BAR_3_VALUE"/>
           <p:cNvSpPr txBox="1"/>
           <p:nvPr/>
         </p:nvSpPr>
@@ -13088,7 +13117,7 @@
       </p:sp>
       <p:sp>
         <p:nvSpPr>
-          <p:cNvPr id="35" name="S07_BAR_4_LABEL"/>
+          <p:cNvPr id="36" name="S07_BAR_4_LABEL"/>
           <p:cNvSpPr txBox="1"/>
           <p:nvPr/>
         </p:nvSpPr>
@@ -13132,7 +13161,7 @@
       </p:sp>
       <p:sp>
         <p:nvSpPr>
-          <p:cNvPr id="36" name="S07_BAR_4_BAR"/>
+          <p:cNvPr id="37" name="S07_BAR_4_BAR"/>
           <p:cNvSpPr/>
           <p:nvPr/>
         </p:nvSpPr>
@@ -13143,7 +13172,7 @@
           </a:xfrm>
           <a:prstGeom prst="roundRect">
             <a:avLst>
-              <a:gd name="adj" fmla="val 10000"/>
+              <a:gd name="adj" fmla="val 50000"/>
             </a:avLst>
           </a:prstGeom>
           <a:solidFill>
@@ -13163,7 +13192,7 @@
       </p:sp>
       <p:sp>
         <p:nvSpPr>
-          <p:cNvPr id="37" name="S07_BAR_4_VALUE"/>
+          <p:cNvPr id="38" name="S07_BAR_4_VALUE"/>
           <p:cNvSpPr txBox="1"/>
           <p:nvPr/>
         </p:nvSpPr>
@@ -13198,7 +13227,7 @@
       </p:sp>
       <p:sp>
         <p:nvSpPr>
-          <p:cNvPr id="38" name="S07_BAR_5_LABEL"/>
+          <p:cNvPr id="39" name="S07_BAR_5_LABEL"/>
           <p:cNvSpPr txBox="1"/>
           <p:nvPr/>
         </p:nvSpPr>
@@ -13242,7 +13271,7 @@
       </p:sp>
       <p:sp>
         <p:nvSpPr>
-          <p:cNvPr id="39" name="S07_BAR_5_BAR"/>
+          <p:cNvPr id="40" name="S07_BAR_5_BAR"/>
           <p:cNvSpPr/>
           <p:nvPr/>
         </p:nvSpPr>
@@ -13253,7 +13282,7 @@
           </a:xfrm>
           <a:prstGeom prst="roundRect">
             <a:avLst>
-              <a:gd name="adj" fmla="val 10000"/>
+              <a:gd name="adj" fmla="val 50000"/>
             </a:avLst>
           </a:prstGeom>
           <a:solidFill>
@@ -13273,7 +13302,7 @@
       </p:sp>
       <p:sp>
         <p:nvSpPr>
-          <p:cNvPr id="40" name="S07_BAR_5_VALUE"/>
+          <p:cNvPr id="41" name="S07_BAR_5_VALUE"/>
           <p:cNvSpPr txBox="1"/>
           <p:nvPr/>
         </p:nvSpPr>
@@ -13308,7 +13337,7 @@
       </p:sp>
       <p:sp>
         <p:nvSpPr>
-          <p:cNvPr id="41" name="TakeawayBand"/>
+          <p:cNvPr id="42" name="TakeawayBand"/>
           <p:cNvSpPr/>
           <p:nvPr/>
         </p:nvSpPr>
@@ -13357,7 +13386,7 @@
       </p:sp>
       <p:sp>
         <p:nvSpPr>
-          <p:cNvPr id="42" name="TakeawayBandText"/>
+          <p:cNvPr id="43" name="TakeawayBandText"/>
           <p:cNvSpPr txBox="1"/>
           <p:nvPr/>
         </p:nvSpPr>
@@ -13658,12 +13687,12 @@
           <a:noFill/>
         </p:spPr>
         <p:txBody>
-          <a:bodyPr wrap="square" lIns="45720" rIns="45720" anchor="t">
-            <a:spAutoFit/>
-          </a:bodyPr>
-          <a:lstStyle/>
-          <a:p>
-            <a:pPr algn="ctr"/>
+          <a:bodyPr wrap="square" lIns="45720" rIns="45720" anchor="ctr">
+            <a:spAutoFit/>
+          </a:bodyPr>
+          <a:lstStyle/>
+          <a:p>
+            <a:pPr algn="l"/>
             <a:r>
               <a:rPr sz="1000" b="0" i="0">
                 <a:solidFill>
@@ -13693,12 +13722,12 @@
           <a:noFill/>
         </p:spPr>
         <p:txBody>
-          <a:bodyPr wrap="square" lIns="45720" rIns="45720" anchor="t">
-            <a:spAutoFit/>
-          </a:bodyPr>
-          <a:lstStyle/>
-          <a:p>
-            <a:pPr algn="ctr"/>
+          <a:bodyPr wrap="square" lIns="45720" rIns="45720" anchor="ctr">
+            <a:spAutoFit/>
+          </a:bodyPr>
+          <a:lstStyle/>
+          <a:p>
+            <a:pPr algn="l"/>
             <a:r>
               <a:rPr sz="1000" b="0" i="0">
                 <a:solidFill>
@@ -13826,7 +13855,7 @@
           </a:xfrm>
           <a:prstGeom prst="roundRect">
             <a:avLst>
-              <a:gd name="adj" fmla="val 10000"/>
+              <a:gd name="adj" fmla="val 30000"/>
             </a:avLst>
           </a:prstGeom>
           <a:solidFill>
@@ -13857,7 +13886,7 @@
           </a:xfrm>
           <a:prstGeom prst="roundRect">
             <a:avLst>
-              <a:gd name="adj" fmla="val 10000"/>
+              <a:gd name="adj" fmla="val 30000"/>
             </a:avLst>
           </a:prstGeom>
           <a:solidFill>
@@ -14002,7 +14031,7 @@
           </a:xfrm>
           <a:prstGeom prst="roundRect">
             <a:avLst>
-              <a:gd name="adj" fmla="val 10000"/>
+              <a:gd name="adj" fmla="val 30000"/>
             </a:avLst>
           </a:prstGeom>
           <a:solidFill>
@@ -14033,7 +14062,7 @@
           </a:xfrm>
           <a:prstGeom prst="roundRect">
             <a:avLst>
-              <a:gd name="adj" fmla="val 10000"/>
+              <a:gd name="adj" fmla="val 30000"/>
             </a:avLst>
           </a:prstGeom>
           <a:solidFill>
@@ -14178,7 +14207,7 @@
           </a:xfrm>
           <a:prstGeom prst="roundRect">
             <a:avLst>
-              <a:gd name="adj" fmla="val 10000"/>
+              <a:gd name="adj" fmla="val 30000"/>
             </a:avLst>
           </a:prstGeom>
           <a:solidFill>
@@ -14209,7 +14238,7 @@
           </a:xfrm>
           <a:prstGeom prst="roundRect">
             <a:avLst>
-              <a:gd name="adj" fmla="val 10000"/>
+              <a:gd name="adj" fmla="val 30000"/>
             </a:avLst>
           </a:prstGeom>
           <a:solidFill>
@@ -14354,7 +14383,7 @@
           </a:xfrm>
           <a:prstGeom prst="roundRect">
             <a:avLst>
-              <a:gd name="adj" fmla="val 10000"/>
+              <a:gd name="adj" fmla="val 30000"/>
             </a:avLst>
           </a:prstGeom>
           <a:solidFill>
@@ -14385,7 +14414,7 @@
           </a:xfrm>
           <a:prstGeom prst="roundRect">
             <a:avLst>
-              <a:gd name="adj" fmla="val 10000"/>
+              <a:gd name="adj" fmla="val 30000"/>
             </a:avLst>
           </a:prstGeom>
           <a:solidFill>
@@ -14530,7 +14559,7 @@
           </a:xfrm>
           <a:prstGeom prst="roundRect">
             <a:avLst>
-              <a:gd name="adj" fmla="val 10000"/>
+              <a:gd name="adj" fmla="val 30000"/>
             </a:avLst>
           </a:prstGeom>
           <a:solidFill>
@@ -14561,7 +14590,7 @@
           </a:xfrm>
           <a:prstGeom prst="roundRect">
             <a:avLst>
-              <a:gd name="adj" fmla="val 10000"/>
+              <a:gd name="adj" fmla="val 30000"/>
             </a:avLst>
           </a:prstGeom>
           <a:solidFill>
@@ -14756,7 +14785,7 @@
     <p:bg>
       <p:bgPr>
         <a:solidFill>
-          <a:srgbClr val="FFFFFF"/>
+          <a:srgbClr val="EFF1F6"/>
         </a:solidFill>
         <a:effectLst/>
       </p:bgPr>
@@ -14940,7 +14969,7 @@
         <p:spPr>
           <a:xfrm>
             <a:off x="151200" y="1260000"/>
-            <a:ext cx="3798000" cy="2106000"/>
+            <a:ext cx="3920400" cy="2304000"/>
           </a:xfrm>
           <a:prstGeom prst="roundRect">
             <a:avLst>
@@ -14975,21 +15004,32 @@
             <a:off x="198000" y="1440000"/>
             <a:ext cx="306000" cy="306000"/>
           </a:xfrm>
-          <a:prstGeom prst="ellipse">
-            <a:avLst/>
+          <a:prstGeom prst="roundRect">
+            <a:avLst>
+              <a:gd name="adj" fmla="val 15000"/>
+            </a:avLst>
           </a:prstGeom>
           <a:solidFill>
-            <a:srgbClr val="6A5D79"/>
+            <a:srgbClr val="BBB4C4"/>
           </a:solidFill>
           <a:ln>
             <a:noFill/>
           </a:ln>
         </p:spPr>
         <p:txBody>
-          <a:bodyPr rtlCol="0" anchor="ctr"/>
+          <a:bodyPr rtlCol="0" anchor="ctr" wrap="square" lIns="45720" rIns="45720"/>
           <a:lstStyle/>
           <a:p>
             <a:pPr algn="ctr"/>
+            <a:r>
+              <a:rPr sz="1800" b="1" i="0">
+                <a:solidFill>
+                  <a:srgbClr val="6A5D79"/>
+                </a:solidFill>
+                <a:latin typeface="Wingdings"/>
+              </a:rPr>
+              <a:t>L</a:t>
+            </a:r>
           </a:p>
         </p:txBody>
       </p:sp>
@@ -15040,28 +15080,33 @@
       <p:sp>
         <p:nvSpPr>
           <p:cNvPr id="10" name="S09_RISK_1_LEVEL"/>
-          <p:cNvSpPr txBox="1"/>
+          <p:cNvSpPr/>
           <p:nvPr/>
         </p:nvSpPr>
         <p:spPr>
           <a:xfrm>
             <a:off x="583200" y="1663200"/>
-            <a:ext cx="1440000" cy="190800"/>
-          </a:xfrm>
-          <a:prstGeom prst="rect">
-            <a:avLst/>
-          </a:prstGeom>
-          <a:noFill/>
-        </p:spPr>
-        <p:txBody>
-          <a:bodyPr wrap="square" lIns="45720" rIns="45720" anchor="t">
-            <a:spAutoFit/>
-          </a:bodyPr>
-          <a:lstStyle/>
-          <a:p>
-            <a:pPr algn="l"/>
-            <a:r>
-              <a:rPr sz="1000" b="1" i="0" cap="small">
+            <a:ext cx="892800" cy="190800"/>
+          </a:xfrm>
+          <a:prstGeom prst="roundRect">
+            <a:avLst>
+              <a:gd name="adj" fmla="val 15000"/>
+            </a:avLst>
+          </a:prstGeom>
+          <a:solidFill>
+            <a:srgbClr val="FF9797"/>
+          </a:solidFill>
+          <a:ln>
+            <a:noFill/>
+          </a:ln>
+        </p:spPr>
+        <p:txBody>
+          <a:bodyPr rtlCol="0" anchor="ctr" wrap="square" lIns="45720" rIns="45720"/>
+          <a:lstStyle/>
+          <a:p>
+            <a:pPr algn="ctr"/>
+            <a:r>
+              <a:rPr sz="1000" b="0" i="0" cap="small">
                 <a:solidFill>
                   <a:srgbClr val="C00000"/>
                 </a:solidFill>
@@ -15081,7 +15126,7 @@
         <p:spPr>
           <a:xfrm>
             <a:off x="223200" y="1908000"/>
-            <a:ext cx="3654000" cy="432000"/>
+            <a:ext cx="3776400" cy="432000"/>
           </a:xfrm>
           <a:prstGeom prst="rect">
             <a:avLst/>
@@ -15134,7 +15179,7 @@
         <p:spPr>
           <a:xfrm>
             <a:off x="223200" y="2448000"/>
-            <a:ext cx="3654000" cy="0"/>
+            <a:ext cx="3776400" cy="0"/>
           </a:xfrm>
           <a:prstGeom prst="line">
             <a:avLst/>
@@ -15150,7 +15195,7 @@
       <p:sp>
         <p:nvSpPr>
           <p:cNvPr id="13" name="S09_RISK_1_ACTION_TAG"/>
-          <p:cNvSpPr txBox="1"/>
+          <p:cNvSpPr/>
           <p:nvPr/>
         </p:nvSpPr>
         <p:spPr>
@@ -15158,20 +15203,25 @@
             <a:off x="223200" y="2556000"/>
             <a:ext cx="615600" cy="190800"/>
           </a:xfrm>
-          <a:prstGeom prst="rect">
-            <a:avLst/>
-          </a:prstGeom>
-          <a:noFill/>
-        </p:spPr>
-        <p:txBody>
-          <a:bodyPr wrap="square" lIns="45720" rIns="45720" anchor="t">
-            <a:spAutoFit/>
-          </a:bodyPr>
-          <a:lstStyle/>
-          <a:p>
-            <a:pPr algn="l"/>
-            <a:r>
-              <a:rPr sz="1000" b="1" i="0" cap="small">
+          <a:prstGeom prst="roundRect">
+            <a:avLst>
+              <a:gd name="adj" fmla="val 15000"/>
+            </a:avLst>
+          </a:prstGeom>
+          <a:solidFill>
+            <a:srgbClr val="DDE7CF"/>
+          </a:solidFill>
+          <a:ln>
+            <a:noFill/>
+          </a:ln>
+        </p:spPr>
+        <p:txBody>
+          <a:bodyPr rtlCol="0" anchor="ctr" wrap="square" lIns="45720" rIns="45720"/>
+          <a:lstStyle/>
+          <a:p>
+            <a:pPr algn="ctr"/>
+            <a:r>
+              <a:rPr sz="1000" b="0" i="0" cap="small">
                 <a:solidFill>
                   <a:srgbClr val="8DAC95"/>
                 </a:solidFill>
@@ -15191,15 +15241,15 @@
         <p:spPr>
           <a:xfrm>
             <a:off x="907200" y="2556000"/>
-            <a:ext cx="2970000" cy="360000"/>
-          </a:xfrm>
-          <a:prstGeom prst="rect">
-            <a:avLst/>
-          </a:prstGeom>
-          <a:noFill/>
-        </p:spPr>
-        <p:txBody>
-          <a:bodyPr wrap="square" lIns="45720" rIns="45720" anchor="t">
+            <a:ext cx="3092400" cy="360000"/>
+          </a:xfrm>
+          <a:prstGeom prst="rect">
+            <a:avLst/>
+          </a:prstGeom>
+          <a:noFill/>
+        </p:spPr>
+        <p:txBody>
+          <a:bodyPr wrap="square" lIns="45720" rIns="45720" tIns="0" anchor="t">
             <a:spAutoFit/>
           </a:bodyPr>
           <a:lstStyle/>
@@ -15262,7 +15312,7 @@
         <p:spPr>
           <a:xfrm>
             <a:off x="4165200" y="1260000"/>
-            <a:ext cx="3798000" cy="2106000"/>
+            <a:ext cx="3920400" cy="2304000"/>
           </a:xfrm>
           <a:prstGeom prst="roundRect">
             <a:avLst>
@@ -15297,21 +15347,32 @@
             <a:off x="4212000" y="1440000"/>
             <a:ext cx="306000" cy="306000"/>
           </a:xfrm>
-          <a:prstGeom prst="ellipse">
-            <a:avLst/>
+          <a:prstGeom prst="roundRect">
+            <a:avLst>
+              <a:gd name="adj" fmla="val 15000"/>
+            </a:avLst>
           </a:prstGeom>
           <a:solidFill>
-            <a:srgbClr val="6A5D79"/>
+            <a:srgbClr val="BBB4C4"/>
           </a:solidFill>
           <a:ln>
             <a:noFill/>
           </a:ln>
         </p:spPr>
         <p:txBody>
-          <a:bodyPr rtlCol="0" anchor="ctr"/>
+          <a:bodyPr rtlCol="0" anchor="ctr" wrap="square" lIns="45720" rIns="45720"/>
           <a:lstStyle/>
           <a:p>
             <a:pPr algn="ctr"/>
+            <a:r>
+              <a:rPr sz="1800" b="1" i="0">
+                <a:solidFill>
+                  <a:srgbClr val="6A5D79"/>
+                </a:solidFill>
+                <a:latin typeface="Wingdings"/>
+              </a:rPr>
+              <a:t>L</a:t>
+            </a:r>
           </a:p>
         </p:txBody>
       </p:sp>
@@ -15362,28 +15423,33 @@
       <p:sp>
         <p:nvSpPr>
           <p:cNvPr id="18" name="S09_RISK_2_LEVEL"/>
-          <p:cNvSpPr txBox="1"/>
+          <p:cNvSpPr/>
           <p:nvPr/>
         </p:nvSpPr>
         <p:spPr>
           <a:xfrm>
             <a:off x="4597200" y="1663200"/>
-            <a:ext cx="1440000" cy="190800"/>
-          </a:xfrm>
-          <a:prstGeom prst="rect">
-            <a:avLst/>
-          </a:prstGeom>
-          <a:noFill/>
-        </p:spPr>
-        <p:txBody>
-          <a:bodyPr wrap="square" lIns="45720" rIns="45720" anchor="t">
-            <a:spAutoFit/>
-          </a:bodyPr>
-          <a:lstStyle/>
-          <a:p>
-            <a:pPr algn="l"/>
-            <a:r>
-              <a:rPr sz="1000" b="1" i="0" cap="small">
+            <a:ext cx="892800" cy="190800"/>
+          </a:xfrm>
+          <a:prstGeom prst="roundRect">
+            <a:avLst>
+              <a:gd name="adj" fmla="val 15000"/>
+            </a:avLst>
+          </a:prstGeom>
+          <a:solidFill>
+            <a:srgbClr val="FEE3CA"/>
+          </a:solidFill>
+          <a:ln>
+            <a:noFill/>
+          </a:ln>
+        </p:spPr>
+        <p:txBody>
+          <a:bodyPr rtlCol="0" anchor="ctr" wrap="square" lIns="45720" rIns="45720"/>
+          <a:lstStyle/>
+          <a:p>
+            <a:pPr algn="ctr"/>
+            <a:r>
+              <a:rPr sz="1000" b="0" i="0" cap="small">
                 <a:solidFill>
                   <a:srgbClr val="FDA85B"/>
                 </a:solidFill>
@@ -15403,7 +15469,7 @@
         <p:spPr>
           <a:xfrm>
             <a:off x="4237200" y="1908000"/>
-            <a:ext cx="3654000" cy="432000"/>
+            <a:ext cx="3776400" cy="432000"/>
           </a:xfrm>
           <a:prstGeom prst="rect">
             <a:avLst/>
@@ -15456,7 +15522,7 @@
         <p:spPr>
           <a:xfrm>
             <a:off x="4237200" y="2448000"/>
-            <a:ext cx="3654000" cy="0"/>
+            <a:ext cx="3776400" cy="0"/>
           </a:xfrm>
           <a:prstGeom prst="line">
             <a:avLst/>
@@ -15472,7 +15538,7 @@
       <p:sp>
         <p:nvSpPr>
           <p:cNvPr id="21" name="S09_RISK_2_ACTION_TAG"/>
-          <p:cNvSpPr txBox="1"/>
+          <p:cNvSpPr/>
           <p:nvPr/>
         </p:nvSpPr>
         <p:spPr>
@@ -15480,20 +15546,25 @@
             <a:off x="4237200" y="2556000"/>
             <a:ext cx="615600" cy="190800"/>
           </a:xfrm>
-          <a:prstGeom prst="rect">
-            <a:avLst/>
-          </a:prstGeom>
-          <a:noFill/>
-        </p:spPr>
-        <p:txBody>
-          <a:bodyPr wrap="square" lIns="45720" rIns="45720" anchor="t">
-            <a:spAutoFit/>
-          </a:bodyPr>
-          <a:lstStyle/>
-          <a:p>
-            <a:pPr algn="l"/>
-            <a:r>
-              <a:rPr sz="1000" b="1" i="0" cap="small">
+          <a:prstGeom prst="roundRect">
+            <a:avLst>
+              <a:gd name="adj" fmla="val 15000"/>
+            </a:avLst>
+          </a:prstGeom>
+          <a:solidFill>
+            <a:srgbClr val="DDE7CF"/>
+          </a:solidFill>
+          <a:ln>
+            <a:noFill/>
+          </a:ln>
+        </p:spPr>
+        <p:txBody>
+          <a:bodyPr rtlCol="0" anchor="ctr" wrap="square" lIns="45720" rIns="45720"/>
+          <a:lstStyle/>
+          <a:p>
+            <a:pPr algn="ctr"/>
+            <a:r>
+              <a:rPr sz="1000" b="0" i="0" cap="small">
                 <a:solidFill>
                   <a:srgbClr val="8DAC95"/>
                 </a:solidFill>
@@ -15513,15 +15584,15 @@
         <p:spPr>
           <a:xfrm>
             <a:off x="4921200" y="2556000"/>
-            <a:ext cx="2970000" cy="360000"/>
-          </a:xfrm>
-          <a:prstGeom prst="rect">
-            <a:avLst/>
-          </a:prstGeom>
-          <a:noFill/>
-        </p:spPr>
-        <p:txBody>
-          <a:bodyPr wrap="square" lIns="45720" rIns="45720" anchor="t">
+            <a:ext cx="3092400" cy="360000"/>
+          </a:xfrm>
+          <a:prstGeom prst="rect">
+            <a:avLst/>
+          </a:prstGeom>
+          <a:noFill/>
+        </p:spPr>
+        <p:txBody>
+          <a:bodyPr wrap="square" lIns="45720" rIns="45720" tIns="0" anchor="t">
             <a:spAutoFit/>
           </a:bodyPr>
           <a:lstStyle/>
@@ -15566,7 +15637,7 @@
         <p:spPr>
           <a:xfrm>
             <a:off x="8175600" y="1260000"/>
-            <a:ext cx="3798000" cy="2106000"/>
+            <a:ext cx="3920400" cy="2304000"/>
           </a:xfrm>
           <a:prstGeom prst="roundRect">
             <a:avLst>
@@ -15601,21 +15672,32 @@
             <a:off x="8222400" y="1440000"/>
             <a:ext cx="306000" cy="306000"/>
           </a:xfrm>
-          <a:prstGeom prst="ellipse">
-            <a:avLst/>
+          <a:prstGeom prst="roundRect">
+            <a:avLst>
+              <a:gd name="adj" fmla="val 15000"/>
+            </a:avLst>
           </a:prstGeom>
           <a:solidFill>
-            <a:srgbClr val="6A5D79"/>
+            <a:srgbClr val="BBB4C4"/>
           </a:solidFill>
           <a:ln>
             <a:noFill/>
           </a:ln>
         </p:spPr>
         <p:txBody>
-          <a:bodyPr rtlCol="0" anchor="ctr"/>
+          <a:bodyPr rtlCol="0" anchor="ctr" wrap="square" lIns="45720" rIns="45720"/>
           <a:lstStyle/>
           <a:p>
             <a:pPr algn="ctr"/>
+            <a:r>
+              <a:rPr sz="1800" b="1" i="0">
+                <a:solidFill>
+                  <a:srgbClr val="6A5D79"/>
+                </a:solidFill>
+                <a:latin typeface="Wingdings"/>
+              </a:rPr>
+              <a:t>L</a:t>
+            </a:r>
           </a:p>
         </p:txBody>
       </p:sp>
@@ -15666,28 +15748,33 @@
       <p:sp>
         <p:nvSpPr>
           <p:cNvPr id="26" name="S09_RISK_3_LEVEL"/>
-          <p:cNvSpPr txBox="1"/>
+          <p:cNvSpPr/>
           <p:nvPr/>
         </p:nvSpPr>
         <p:spPr>
           <a:xfrm>
             <a:off x="8607600" y="1663200"/>
-            <a:ext cx="1440000" cy="190800"/>
-          </a:xfrm>
-          <a:prstGeom prst="rect">
-            <a:avLst/>
-          </a:prstGeom>
-          <a:noFill/>
-        </p:spPr>
-        <p:txBody>
-          <a:bodyPr wrap="square" lIns="45720" rIns="45720" anchor="t">
-            <a:spAutoFit/>
-          </a:bodyPr>
-          <a:lstStyle/>
-          <a:p>
-            <a:pPr algn="l"/>
-            <a:r>
-              <a:rPr sz="1000" b="1" i="0" cap="small">
+            <a:ext cx="892800" cy="190800"/>
+          </a:xfrm>
+          <a:prstGeom prst="roundRect">
+            <a:avLst>
+              <a:gd name="adj" fmla="val 15000"/>
+            </a:avLst>
+          </a:prstGeom>
+          <a:solidFill>
+            <a:srgbClr val="FEE3CA"/>
+          </a:solidFill>
+          <a:ln>
+            <a:noFill/>
+          </a:ln>
+        </p:spPr>
+        <p:txBody>
+          <a:bodyPr rtlCol="0" anchor="ctr" wrap="square" lIns="45720" rIns="45720"/>
+          <a:lstStyle/>
+          <a:p>
+            <a:pPr algn="ctr"/>
+            <a:r>
+              <a:rPr sz="1000" b="0" i="0" cap="small">
                 <a:solidFill>
                   <a:srgbClr val="FDA85B"/>
                 </a:solidFill>
@@ -15707,7 +15794,7 @@
         <p:spPr>
           <a:xfrm>
             <a:off x="8247600" y="1908000"/>
-            <a:ext cx="3654000" cy="432000"/>
+            <a:ext cx="3776400" cy="432000"/>
           </a:xfrm>
           <a:prstGeom prst="rect">
             <a:avLst/>
@@ -15760,7 +15847,7 @@
         <p:spPr>
           <a:xfrm>
             <a:off x="8247600" y="2448000"/>
-            <a:ext cx="3654000" cy="0"/>
+            <a:ext cx="3776400" cy="0"/>
           </a:xfrm>
           <a:prstGeom prst="line">
             <a:avLst/>
@@ -15776,7 +15863,7 @@
       <p:sp>
         <p:nvSpPr>
           <p:cNvPr id="29" name="S09_RISK_3_ACTION_TAG"/>
-          <p:cNvSpPr txBox="1"/>
+          <p:cNvSpPr/>
           <p:nvPr/>
         </p:nvSpPr>
         <p:spPr>
@@ -15784,20 +15871,25 @@
             <a:off x="8247600" y="2556000"/>
             <a:ext cx="615600" cy="190800"/>
           </a:xfrm>
-          <a:prstGeom prst="rect">
-            <a:avLst/>
-          </a:prstGeom>
-          <a:noFill/>
-        </p:spPr>
-        <p:txBody>
-          <a:bodyPr wrap="square" lIns="45720" rIns="45720" anchor="t">
-            <a:spAutoFit/>
-          </a:bodyPr>
-          <a:lstStyle/>
-          <a:p>
-            <a:pPr algn="l"/>
-            <a:r>
-              <a:rPr sz="1000" b="1" i="0" cap="small">
+          <a:prstGeom prst="roundRect">
+            <a:avLst>
+              <a:gd name="adj" fmla="val 15000"/>
+            </a:avLst>
+          </a:prstGeom>
+          <a:solidFill>
+            <a:srgbClr val="DDE7CF"/>
+          </a:solidFill>
+          <a:ln>
+            <a:noFill/>
+          </a:ln>
+        </p:spPr>
+        <p:txBody>
+          <a:bodyPr rtlCol="0" anchor="ctr" wrap="square" lIns="45720" rIns="45720"/>
+          <a:lstStyle/>
+          <a:p>
+            <a:pPr algn="ctr"/>
+            <a:r>
+              <a:rPr sz="1000" b="0" i="0" cap="small">
                 <a:solidFill>
                   <a:srgbClr val="8DAC95"/>
                 </a:solidFill>
@@ -15817,15 +15909,15 @@
         <p:spPr>
           <a:xfrm>
             <a:off x="8931600" y="2556000"/>
-            <a:ext cx="2970000" cy="360000"/>
-          </a:xfrm>
-          <a:prstGeom prst="rect">
-            <a:avLst/>
-          </a:prstGeom>
-          <a:noFill/>
-        </p:spPr>
-        <p:txBody>
-          <a:bodyPr wrap="square" lIns="45720" rIns="45720" anchor="t">
+            <a:ext cx="3092400" cy="360000"/>
+          </a:xfrm>
+          <a:prstGeom prst="rect">
+            <a:avLst/>
+          </a:prstGeom>
+          <a:noFill/>
+        </p:spPr>
+        <p:txBody>
+          <a:bodyPr wrap="square" lIns="45720" rIns="45720" tIns="0" anchor="t">
             <a:spAutoFit/>
           </a:bodyPr>
           <a:lstStyle/>
@@ -15870,7 +15962,7 @@
         <p:spPr>
           <a:xfrm>
             <a:off x="151200" y="3708000"/>
-            <a:ext cx="3798000" cy="2106000"/>
+            <a:ext cx="3920400" cy="2304000"/>
           </a:xfrm>
           <a:prstGeom prst="roundRect">
             <a:avLst>
@@ -15905,21 +15997,32 @@
             <a:off x="198000" y="3888000"/>
             <a:ext cx="306000" cy="306000"/>
           </a:xfrm>
-          <a:prstGeom prst="ellipse">
-            <a:avLst/>
+          <a:prstGeom prst="roundRect">
+            <a:avLst>
+              <a:gd name="adj" fmla="val 15000"/>
+            </a:avLst>
           </a:prstGeom>
           <a:solidFill>
-            <a:srgbClr val="FBCC58"/>
+            <a:srgbClr val="FEF4DA"/>
           </a:solidFill>
           <a:ln>
             <a:noFill/>
           </a:ln>
         </p:spPr>
         <p:txBody>
-          <a:bodyPr rtlCol="0" anchor="ctr"/>
+          <a:bodyPr rtlCol="0" anchor="ctr" wrap="square" lIns="45720" rIns="45720"/>
           <a:lstStyle/>
           <a:p>
             <a:pPr algn="ctr"/>
+            <a:r>
+              <a:rPr sz="1800" b="1" i="0">
+                <a:solidFill>
+                  <a:srgbClr val="FBCC58"/>
+                </a:solidFill>
+                <a:latin typeface="Wingdings"/>
+              </a:rPr>
+              <a:t>J</a:t>
+            </a:r>
           </a:p>
         </p:txBody>
       </p:sp>
@@ -15970,28 +16073,33 @@
       <p:sp>
         <p:nvSpPr>
           <p:cNvPr id="34" name="S09_OPP_1_LEVEL"/>
-          <p:cNvSpPr txBox="1"/>
+          <p:cNvSpPr/>
           <p:nvPr/>
         </p:nvSpPr>
         <p:spPr>
           <a:xfrm>
             <a:off x="583200" y="4111200"/>
-            <a:ext cx="1440000" cy="190800"/>
-          </a:xfrm>
-          <a:prstGeom prst="rect">
-            <a:avLst/>
-          </a:prstGeom>
-          <a:noFill/>
-        </p:spPr>
-        <p:txBody>
-          <a:bodyPr wrap="square" lIns="45720" rIns="45720" anchor="t">
-            <a:spAutoFit/>
-          </a:bodyPr>
-          <a:lstStyle/>
-          <a:p>
-            <a:pPr algn="l"/>
-            <a:r>
-              <a:rPr sz="1000" b="1" i="0" cap="small">
+            <a:ext cx="892800" cy="190800"/>
+          </a:xfrm>
+          <a:prstGeom prst="roundRect">
+            <a:avLst>
+              <a:gd name="adj" fmla="val 15000"/>
+            </a:avLst>
+          </a:prstGeom>
+          <a:solidFill>
+            <a:srgbClr val="69FFAD"/>
+          </a:solidFill>
+          <a:ln>
+            <a:noFill/>
+          </a:ln>
+        </p:spPr>
+        <p:txBody>
+          <a:bodyPr rtlCol="0" anchor="ctr" wrap="square" lIns="45720" rIns="45720"/>
+          <a:lstStyle/>
+          <a:p>
+            <a:pPr algn="ctr"/>
+            <a:r>
+              <a:rPr sz="1000" b="0" i="0" cap="small">
                 <a:solidFill>
                   <a:srgbClr val="00B050"/>
                 </a:solidFill>
@@ -16011,7 +16119,7 @@
         <p:spPr>
           <a:xfrm>
             <a:off x="223200" y="4356000"/>
-            <a:ext cx="3654000" cy="432000"/>
+            <a:ext cx="3776400" cy="432000"/>
           </a:xfrm>
           <a:prstGeom prst="rect">
             <a:avLst/>
@@ -16055,7 +16163,7 @@
         <p:spPr>
           <a:xfrm>
             <a:off x="223200" y="4896000"/>
-            <a:ext cx="3654000" cy="0"/>
+            <a:ext cx="3776400" cy="0"/>
           </a:xfrm>
           <a:prstGeom prst="line">
             <a:avLst/>
@@ -16071,7 +16179,7 @@
       <p:sp>
         <p:nvSpPr>
           <p:cNvPr id="37" name="S09_OPP_1_ACTION_TAG"/>
-          <p:cNvSpPr txBox="1"/>
+          <p:cNvSpPr/>
           <p:nvPr/>
         </p:nvSpPr>
         <p:spPr>
@@ -16079,20 +16187,25 @@
             <a:off x="223200" y="5004000"/>
             <a:ext cx="615600" cy="190800"/>
           </a:xfrm>
-          <a:prstGeom prst="rect">
-            <a:avLst/>
-          </a:prstGeom>
-          <a:noFill/>
-        </p:spPr>
-        <p:txBody>
-          <a:bodyPr wrap="square" lIns="45720" rIns="45720" anchor="t">
-            <a:spAutoFit/>
-          </a:bodyPr>
-          <a:lstStyle/>
-          <a:p>
-            <a:pPr algn="l"/>
-            <a:r>
-              <a:rPr sz="1000" b="1" i="0" cap="small">
+          <a:prstGeom prst="roundRect">
+            <a:avLst>
+              <a:gd name="adj" fmla="val 15000"/>
+            </a:avLst>
+          </a:prstGeom>
+          <a:solidFill>
+            <a:srgbClr val="DDE7CF"/>
+          </a:solidFill>
+          <a:ln>
+            <a:noFill/>
+          </a:ln>
+        </p:spPr>
+        <p:txBody>
+          <a:bodyPr rtlCol="0" anchor="ctr" wrap="square" lIns="45720" rIns="45720"/>
+          <a:lstStyle/>
+          <a:p>
+            <a:pPr algn="ctr"/>
+            <a:r>
+              <a:rPr sz="1000" b="0" i="0" cap="small">
                 <a:solidFill>
                   <a:srgbClr val="8DAC95"/>
                 </a:solidFill>
@@ -16112,15 +16225,15 @@
         <p:spPr>
           <a:xfrm>
             <a:off x="907200" y="5004000"/>
-            <a:ext cx="2970000" cy="360000"/>
-          </a:xfrm>
-          <a:prstGeom prst="rect">
-            <a:avLst/>
-          </a:prstGeom>
-          <a:noFill/>
-        </p:spPr>
-        <p:txBody>
-          <a:bodyPr wrap="square" lIns="45720" rIns="45720" anchor="t">
+            <a:ext cx="3092400" cy="360000"/>
+          </a:xfrm>
+          <a:prstGeom prst="rect">
+            <a:avLst/>
+          </a:prstGeom>
+          <a:noFill/>
+        </p:spPr>
+        <p:txBody>
+          <a:bodyPr wrap="square" lIns="45720" rIns="45720" tIns="0" anchor="t">
             <a:spAutoFit/>
           </a:bodyPr>
           <a:lstStyle/>
@@ -16165,7 +16278,7 @@
         <p:spPr>
           <a:xfrm>
             <a:off x="4165200" y="3708000"/>
-            <a:ext cx="3798000" cy="2106000"/>
+            <a:ext cx="3920400" cy="2304000"/>
           </a:xfrm>
           <a:prstGeom prst="roundRect">
             <a:avLst>
@@ -16200,21 +16313,32 @@
             <a:off x="4212000" y="3888000"/>
             <a:ext cx="306000" cy="306000"/>
           </a:xfrm>
-          <a:prstGeom prst="ellipse">
-            <a:avLst/>
+          <a:prstGeom prst="roundRect">
+            <a:avLst>
+              <a:gd name="adj" fmla="val 15000"/>
+            </a:avLst>
           </a:prstGeom>
           <a:solidFill>
-            <a:srgbClr val="FBCC58"/>
+            <a:srgbClr val="FEF4DA"/>
           </a:solidFill>
           <a:ln>
             <a:noFill/>
           </a:ln>
         </p:spPr>
         <p:txBody>
-          <a:bodyPr rtlCol="0" anchor="ctr"/>
+          <a:bodyPr rtlCol="0" anchor="ctr" wrap="square" lIns="45720" rIns="45720"/>
           <a:lstStyle/>
           <a:p>
             <a:pPr algn="ctr"/>
+            <a:r>
+              <a:rPr sz="1800" b="1" i="0">
+                <a:solidFill>
+                  <a:srgbClr val="FBCC58"/>
+                </a:solidFill>
+                <a:latin typeface="Wingdings"/>
+              </a:rPr>
+              <a:t>J</a:t>
+            </a:r>
           </a:p>
         </p:txBody>
       </p:sp>
@@ -16265,28 +16389,33 @@
       <p:sp>
         <p:nvSpPr>
           <p:cNvPr id="42" name="S09_OPP_2_LEVEL"/>
-          <p:cNvSpPr txBox="1"/>
+          <p:cNvSpPr/>
           <p:nvPr/>
         </p:nvSpPr>
         <p:spPr>
           <a:xfrm>
             <a:off x="4597200" y="4111200"/>
-            <a:ext cx="1440000" cy="190800"/>
-          </a:xfrm>
-          <a:prstGeom prst="rect">
-            <a:avLst/>
-          </a:prstGeom>
-          <a:noFill/>
-        </p:spPr>
-        <p:txBody>
-          <a:bodyPr wrap="square" lIns="45720" rIns="45720" anchor="t">
-            <a:spAutoFit/>
-          </a:bodyPr>
-          <a:lstStyle/>
-          <a:p>
-            <a:pPr algn="l"/>
-            <a:r>
-              <a:rPr sz="1000" b="1" i="0" cap="small">
+            <a:ext cx="892800" cy="190800"/>
+          </a:xfrm>
+          <a:prstGeom prst="roundRect">
+            <a:avLst>
+              <a:gd name="adj" fmla="val 15000"/>
+            </a:avLst>
+          </a:prstGeom>
+          <a:solidFill>
+            <a:srgbClr val="69FFAD"/>
+          </a:solidFill>
+          <a:ln>
+            <a:noFill/>
+          </a:ln>
+        </p:spPr>
+        <p:txBody>
+          <a:bodyPr rtlCol="0" anchor="ctr" wrap="square" lIns="45720" rIns="45720"/>
+          <a:lstStyle/>
+          <a:p>
+            <a:pPr algn="ctr"/>
+            <a:r>
+              <a:rPr sz="1000" b="0" i="0" cap="small">
                 <a:solidFill>
                   <a:srgbClr val="00B050"/>
                 </a:solidFill>
@@ -16306,7 +16435,7 @@
         <p:spPr>
           <a:xfrm>
             <a:off x="4237200" y="4356000"/>
-            <a:ext cx="3654000" cy="432000"/>
+            <a:ext cx="3776400" cy="432000"/>
           </a:xfrm>
           <a:prstGeom prst="rect">
             <a:avLst/>
@@ -16359,7 +16488,7 @@
         <p:spPr>
           <a:xfrm>
             <a:off x="4237200" y="4896000"/>
-            <a:ext cx="3654000" cy="0"/>
+            <a:ext cx="3776400" cy="0"/>
           </a:xfrm>
           <a:prstGeom prst="line">
             <a:avLst/>
@@ -16375,7 +16504,7 @@
       <p:sp>
         <p:nvSpPr>
           <p:cNvPr id="45" name="S09_OPP_2_ACTION_TAG"/>
-          <p:cNvSpPr txBox="1"/>
+          <p:cNvSpPr/>
           <p:nvPr/>
         </p:nvSpPr>
         <p:spPr>
@@ -16383,20 +16512,25 @@
             <a:off x="4237200" y="5004000"/>
             <a:ext cx="615600" cy="190800"/>
           </a:xfrm>
-          <a:prstGeom prst="rect">
-            <a:avLst/>
-          </a:prstGeom>
-          <a:noFill/>
-        </p:spPr>
-        <p:txBody>
-          <a:bodyPr wrap="square" lIns="45720" rIns="45720" anchor="t">
-            <a:spAutoFit/>
-          </a:bodyPr>
-          <a:lstStyle/>
-          <a:p>
-            <a:pPr algn="l"/>
-            <a:r>
-              <a:rPr sz="1000" b="1" i="0" cap="small">
+          <a:prstGeom prst="roundRect">
+            <a:avLst>
+              <a:gd name="adj" fmla="val 15000"/>
+            </a:avLst>
+          </a:prstGeom>
+          <a:solidFill>
+            <a:srgbClr val="DDE7CF"/>
+          </a:solidFill>
+          <a:ln>
+            <a:noFill/>
+          </a:ln>
+        </p:spPr>
+        <p:txBody>
+          <a:bodyPr rtlCol="0" anchor="ctr" wrap="square" lIns="45720" rIns="45720"/>
+          <a:lstStyle/>
+          <a:p>
+            <a:pPr algn="ctr"/>
+            <a:r>
+              <a:rPr sz="1000" b="0" i="0" cap="small">
                 <a:solidFill>
                   <a:srgbClr val="8DAC95"/>
                 </a:solidFill>
@@ -16416,15 +16550,15 @@
         <p:spPr>
           <a:xfrm>
             <a:off x="4921200" y="5004000"/>
-            <a:ext cx="2970000" cy="360000"/>
-          </a:xfrm>
-          <a:prstGeom prst="rect">
-            <a:avLst/>
-          </a:prstGeom>
-          <a:noFill/>
-        </p:spPr>
-        <p:txBody>
-          <a:bodyPr wrap="square" lIns="45720" rIns="45720" anchor="t">
+            <a:ext cx="3092400" cy="360000"/>
+          </a:xfrm>
+          <a:prstGeom prst="rect">
+            <a:avLst/>
+          </a:prstGeom>
+          <a:noFill/>
+        </p:spPr>
+        <p:txBody>
+          <a:bodyPr wrap="square" lIns="45720" rIns="45720" tIns="0" anchor="t">
             <a:spAutoFit/>
           </a:bodyPr>
           <a:lstStyle/>
@@ -16469,7 +16603,7 @@
         <p:spPr>
           <a:xfrm>
             <a:off x="8175600" y="3708000"/>
-            <a:ext cx="3798000" cy="2106000"/>
+            <a:ext cx="3920400" cy="2304000"/>
           </a:xfrm>
           <a:prstGeom prst="roundRect">
             <a:avLst>
@@ -16504,21 +16638,32 @@
             <a:off x="8222400" y="3888000"/>
             <a:ext cx="306000" cy="306000"/>
           </a:xfrm>
-          <a:prstGeom prst="ellipse">
-            <a:avLst/>
+          <a:prstGeom prst="roundRect">
+            <a:avLst>
+              <a:gd name="adj" fmla="val 15000"/>
+            </a:avLst>
           </a:prstGeom>
           <a:solidFill>
-            <a:srgbClr val="FBCC58"/>
+            <a:srgbClr val="FEF4DA"/>
           </a:solidFill>
           <a:ln>
             <a:noFill/>
           </a:ln>
         </p:spPr>
         <p:txBody>
-          <a:bodyPr rtlCol="0" anchor="ctr"/>
+          <a:bodyPr rtlCol="0" anchor="ctr" wrap="square" lIns="45720" rIns="45720"/>
           <a:lstStyle/>
           <a:p>
             <a:pPr algn="ctr"/>
+            <a:r>
+              <a:rPr sz="1800" b="1" i="0">
+                <a:solidFill>
+                  <a:srgbClr val="FBCC58"/>
+                </a:solidFill>
+                <a:latin typeface="Wingdings"/>
+              </a:rPr>
+              <a:t>J</a:t>
+            </a:r>
           </a:p>
         </p:txBody>
       </p:sp>
@@ -16569,28 +16714,33 @@
       <p:sp>
         <p:nvSpPr>
           <p:cNvPr id="50" name="S09_OPP_3_LEVEL"/>
-          <p:cNvSpPr txBox="1"/>
+          <p:cNvSpPr/>
           <p:nvPr/>
         </p:nvSpPr>
         <p:spPr>
           <a:xfrm>
             <a:off x="8607600" y="4111200"/>
-            <a:ext cx="1440000" cy="190800"/>
-          </a:xfrm>
-          <a:prstGeom prst="rect">
-            <a:avLst/>
-          </a:prstGeom>
-          <a:noFill/>
-        </p:spPr>
-        <p:txBody>
-          <a:bodyPr wrap="square" lIns="45720" rIns="45720" anchor="t">
-            <a:spAutoFit/>
-          </a:bodyPr>
-          <a:lstStyle/>
-          <a:p>
-            <a:pPr algn="l"/>
-            <a:r>
-              <a:rPr sz="1000" b="1" i="0" cap="small">
+            <a:ext cx="892800" cy="190800"/>
+          </a:xfrm>
+          <a:prstGeom prst="roundRect">
+            <a:avLst>
+              <a:gd name="adj" fmla="val 15000"/>
+            </a:avLst>
+          </a:prstGeom>
+          <a:solidFill>
+            <a:srgbClr val="FFFF85"/>
+          </a:solidFill>
+          <a:ln>
+            <a:noFill/>
+          </a:ln>
+        </p:spPr>
+        <p:txBody>
+          <a:bodyPr rtlCol="0" anchor="ctr" wrap="square" lIns="45720" rIns="45720"/>
+          <a:lstStyle/>
+          <a:p>
+            <a:pPr algn="ctr"/>
+            <a:r>
+              <a:rPr sz="1000" b="0" i="0" cap="small">
                 <a:solidFill>
                   <a:srgbClr val="A8A400"/>
                 </a:solidFill>
@@ -16610,7 +16760,7 @@
         <p:spPr>
           <a:xfrm>
             <a:off x="8247600" y="4356000"/>
-            <a:ext cx="3654000" cy="432000"/>
+            <a:ext cx="3776400" cy="432000"/>
           </a:xfrm>
           <a:prstGeom prst="rect">
             <a:avLst/>
@@ -16663,7 +16813,7 @@
         <p:spPr>
           <a:xfrm>
             <a:off x="8247600" y="4896000"/>
-            <a:ext cx="3654000" cy="0"/>
+            <a:ext cx="3776400" cy="0"/>
           </a:xfrm>
           <a:prstGeom prst="line">
             <a:avLst/>
@@ -16679,7 +16829,7 @@
       <p:sp>
         <p:nvSpPr>
           <p:cNvPr id="53" name="S09_OPP_3_ACTION_TAG"/>
-          <p:cNvSpPr txBox="1"/>
+          <p:cNvSpPr/>
           <p:nvPr/>
         </p:nvSpPr>
         <p:spPr>
@@ -16687,20 +16837,25 @@
             <a:off x="8247600" y="5004000"/>
             <a:ext cx="615600" cy="190800"/>
           </a:xfrm>
-          <a:prstGeom prst="rect">
-            <a:avLst/>
-          </a:prstGeom>
-          <a:noFill/>
-        </p:spPr>
-        <p:txBody>
-          <a:bodyPr wrap="square" lIns="45720" rIns="45720" anchor="t">
-            <a:spAutoFit/>
-          </a:bodyPr>
-          <a:lstStyle/>
-          <a:p>
-            <a:pPr algn="l"/>
-            <a:r>
-              <a:rPr sz="1000" b="1" i="0" cap="small">
+          <a:prstGeom prst="roundRect">
+            <a:avLst>
+              <a:gd name="adj" fmla="val 15000"/>
+            </a:avLst>
+          </a:prstGeom>
+          <a:solidFill>
+            <a:srgbClr val="DDE7CF"/>
+          </a:solidFill>
+          <a:ln>
+            <a:noFill/>
+          </a:ln>
+        </p:spPr>
+        <p:txBody>
+          <a:bodyPr rtlCol="0" anchor="ctr" wrap="square" lIns="45720" rIns="45720"/>
+          <a:lstStyle/>
+          <a:p>
+            <a:pPr algn="ctr"/>
+            <a:r>
+              <a:rPr sz="1000" b="0" i="0" cap="small">
                 <a:solidFill>
                   <a:srgbClr val="8DAC95"/>
                 </a:solidFill>
@@ -16720,15 +16875,15 @@
         <p:spPr>
           <a:xfrm>
             <a:off x="8931600" y="5004000"/>
-            <a:ext cx="2970000" cy="360000"/>
-          </a:xfrm>
-          <a:prstGeom prst="rect">
-            <a:avLst/>
-          </a:prstGeom>
-          <a:noFill/>
-        </p:spPr>
-        <p:txBody>
-          <a:bodyPr wrap="square" lIns="45720" rIns="45720" anchor="t">
+            <a:ext cx="3092400" cy="360000"/>
+          </a:xfrm>
+          <a:prstGeom prst="rect">
+            <a:avLst/>
+          </a:prstGeom>
+          <a:noFill/>
+        </p:spPr>
+        <p:txBody>
+          <a:bodyPr wrap="square" lIns="45720" rIns="45720" tIns="0" anchor="t">
             <a:spAutoFit/>
           </a:bodyPr>
           <a:lstStyle/>

--- a/test_corretion_elements_graphiques.pptx
+++ b/test_corretion_elements_graphiques.pptx
@@ -14968,7 +14968,7 @@
         </p:nvSpPr>
         <p:spPr>
           <a:xfrm>
-            <a:off x="151200" y="1260000"/>
+            <a:off x="121859" y="1260000"/>
             <a:ext cx="3920400" cy="2304000"/>
           </a:xfrm>
           <a:prstGeom prst="roundRect">
@@ -15001,7 +15001,7 @@
         </p:nvSpPr>
         <p:spPr>
           <a:xfrm>
-            <a:off x="198000" y="1440000"/>
+            <a:off x="168659" y="1440000"/>
             <a:ext cx="306000" cy="306000"/>
           </a:xfrm>
           <a:prstGeom prst="roundRect">
@@ -15041,7 +15041,7 @@
         </p:nvSpPr>
         <p:spPr>
           <a:xfrm>
-            <a:off x="583200" y="1386000"/>
+            <a:off x="553859" y="1386000"/>
             <a:ext cx="3240000" cy="277200"/>
           </a:xfrm>
           <a:prstGeom prst="rect">
@@ -15050,7 +15050,7 @@
           <a:noFill/>
         </p:spPr>
         <p:txBody>
-          <a:bodyPr wrap="square" lIns="45720" rIns="45720" anchor="t">
+          <a:bodyPr wrap="square" lIns="0" rIns="45720" anchor="t">
             <a:spAutoFit/>
           </a:bodyPr>
           <a:lstStyle/>
@@ -15085,7 +15085,7 @@
         </p:nvSpPr>
         <p:spPr>
           <a:xfrm>
-            <a:off x="583200" y="1663200"/>
+            <a:off x="553859" y="1663200"/>
             <a:ext cx="892800" cy="190800"/>
           </a:xfrm>
           <a:prstGeom prst="roundRect">
@@ -15125,7 +15125,7 @@
         </p:nvSpPr>
         <p:spPr>
           <a:xfrm>
-            <a:off x="223200" y="1908000"/>
+            <a:off x="168659" y="1908000"/>
             <a:ext cx="3776400" cy="432000"/>
           </a:xfrm>
           <a:prstGeom prst="rect">
@@ -15134,7 +15134,7 @@
           <a:noFill/>
         </p:spPr>
         <p:txBody>
-          <a:bodyPr wrap="square" lIns="45720" rIns="45720" anchor="t">
+          <a:bodyPr wrap="square" lIns="0" rIns="45720" anchor="t">
             <a:spAutoFit/>
           </a:bodyPr>
           <a:lstStyle/>
@@ -15178,7 +15178,7 @@
         </p:nvCxnSpPr>
         <p:spPr>
           <a:xfrm>
-            <a:off x="223200" y="2448000"/>
+            <a:off x="193859" y="2448000"/>
             <a:ext cx="3776400" cy="0"/>
           </a:xfrm>
           <a:prstGeom prst="line">
@@ -15200,7 +15200,7 @@
         </p:nvSpPr>
         <p:spPr>
           <a:xfrm>
-            <a:off x="223200" y="2556000"/>
+            <a:off x="193859" y="2556000"/>
             <a:ext cx="615600" cy="190800"/>
           </a:xfrm>
           <a:prstGeom prst="roundRect">
@@ -15240,7 +15240,7 @@
         </p:nvSpPr>
         <p:spPr>
           <a:xfrm>
-            <a:off x="907200" y="2556000"/>
+            <a:off x="877859" y="2556000"/>
             <a:ext cx="3092400" cy="360000"/>
           </a:xfrm>
           <a:prstGeom prst="rect">
@@ -15311,7 +15311,7 @@
         </p:nvSpPr>
         <p:spPr>
           <a:xfrm>
-            <a:off x="4165200" y="1260000"/>
+            <a:off x="4135859" y="1260000"/>
             <a:ext cx="3920400" cy="2304000"/>
           </a:xfrm>
           <a:prstGeom prst="roundRect">
@@ -15344,7 +15344,7 @@
         </p:nvSpPr>
         <p:spPr>
           <a:xfrm>
-            <a:off x="4212000" y="1440000"/>
+            <a:off x="4182659" y="1440000"/>
             <a:ext cx="306000" cy="306000"/>
           </a:xfrm>
           <a:prstGeom prst="roundRect">
@@ -15384,7 +15384,7 @@
         </p:nvSpPr>
         <p:spPr>
           <a:xfrm>
-            <a:off x="4597200" y="1386000"/>
+            <a:off x="4567859" y="1386000"/>
             <a:ext cx="3240000" cy="277200"/>
           </a:xfrm>
           <a:prstGeom prst="rect">
@@ -15393,7 +15393,7 @@
           <a:noFill/>
         </p:spPr>
         <p:txBody>
-          <a:bodyPr wrap="square" lIns="45720" rIns="45720" anchor="t">
+          <a:bodyPr wrap="square" lIns="0" rIns="45720" anchor="t">
             <a:spAutoFit/>
           </a:bodyPr>
           <a:lstStyle/>
@@ -15428,7 +15428,7 @@
         </p:nvSpPr>
         <p:spPr>
           <a:xfrm>
-            <a:off x="4597200" y="1663200"/>
+            <a:off x="4567859" y="1663200"/>
             <a:ext cx="892800" cy="190800"/>
           </a:xfrm>
           <a:prstGeom prst="roundRect">
@@ -15468,7 +15468,7 @@
         </p:nvSpPr>
         <p:spPr>
           <a:xfrm>
-            <a:off x="4237200" y="1908000"/>
+            <a:off x="4182659" y="1908000"/>
             <a:ext cx="3776400" cy="432000"/>
           </a:xfrm>
           <a:prstGeom prst="rect">
@@ -15477,7 +15477,7 @@
           <a:noFill/>
         </p:spPr>
         <p:txBody>
-          <a:bodyPr wrap="square" lIns="45720" rIns="45720" anchor="t">
+          <a:bodyPr wrap="square" lIns="0" rIns="45720" anchor="t">
             <a:spAutoFit/>
           </a:bodyPr>
           <a:lstStyle/>
@@ -15521,7 +15521,7 @@
         </p:nvCxnSpPr>
         <p:spPr>
           <a:xfrm>
-            <a:off x="4237200" y="2448000"/>
+            <a:off x="4207859" y="2448000"/>
             <a:ext cx="3776400" cy="0"/>
           </a:xfrm>
           <a:prstGeom prst="line">
@@ -15543,7 +15543,7 @@
         </p:nvSpPr>
         <p:spPr>
           <a:xfrm>
-            <a:off x="4237200" y="2556000"/>
+            <a:off x="4207859" y="2556000"/>
             <a:ext cx="615600" cy="190800"/>
           </a:xfrm>
           <a:prstGeom prst="roundRect">
@@ -15583,7 +15583,7 @@
         </p:nvSpPr>
         <p:spPr>
           <a:xfrm>
-            <a:off x="4921200" y="2556000"/>
+            <a:off x="4891859" y="2556000"/>
             <a:ext cx="3092400" cy="360000"/>
           </a:xfrm>
           <a:prstGeom prst="rect">
@@ -15636,7 +15636,7 @@
         </p:nvSpPr>
         <p:spPr>
           <a:xfrm>
-            <a:off x="8175600" y="1260000"/>
+            <a:off x="8149859" y="1260000"/>
             <a:ext cx="3920400" cy="2304000"/>
           </a:xfrm>
           <a:prstGeom prst="roundRect">
@@ -15669,7 +15669,7 @@
         </p:nvSpPr>
         <p:spPr>
           <a:xfrm>
-            <a:off x="8222400" y="1440000"/>
+            <a:off x="8196659" y="1440000"/>
             <a:ext cx="306000" cy="306000"/>
           </a:xfrm>
           <a:prstGeom prst="roundRect">
@@ -15709,7 +15709,7 @@
         </p:nvSpPr>
         <p:spPr>
           <a:xfrm>
-            <a:off x="8607600" y="1386000"/>
+            <a:off x="8581859" y="1386000"/>
             <a:ext cx="3240000" cy="277200"/>
           </a:xfrm>
           <a:prstGeom prst="rect">
@@ -15718,7 +15718,7 @@
           <a:noFill/>
         </p:spPr>
         <p:txBody>
-          <a:bodyPr wrap="square" lIns="45720" rIns="45720" anchor="t">
+          <a:bodyPr wrap="square" lIns="0" rIns="45720" anchor="t">
             <a:spAutoFit/>
           </a:bodyPr>
           <a:lstStyle/>
@@ -15753,7 +15753,7 @@
         </p:nvSpPr>
         <p:spPr>
           <a:xfrm>
-            <a:off x="8607600" y="1663200"/>
+            <a:off x="8581859" y="1663200"/>
             <a:ext cx="892800" cy="190800"/>
           </a:xfrm>
           <a:prstGeom prst="roundRect">
@@ -15793,7 +15793,7 @@
         </p:nvSpPr>
         <p:spPr>
           <a:xfrm>
-            <a:off x="8247600" y="1908000"/>
+            <a:off x="8196659" y="1908000"/>
             <a:ext cx="3776400" cy="432000"/>
           </a:xfrm>
           <a:prstGeom prst="rect">
@@ -15802,7 +15802,7 @@
           <a:noFill/>
         </p:spPr>
         <p:txBody>
-          <a:bodyPr wrap="square" lIns="45720" rIns="45720" anchor="t">
+          <a:bodyPr wrap="square" lIns="0" rIns="45720" anchor="t">
             <a:spAutoFit/>
           </a:bodyPr>
           <a:lstStyle/>
@@ -15846,7 +15846,7 @@
         </p:nvCxnSpPr>
         <p:spPr>
           <a:xfrm>
-            <a:off x="8247600" y="2448000"/>
+            <a:off x="8221859" y="2448000"/>
             <a:ext cx="3776400" cy="0"/>
           </a:xfrm>
           <a:prstGeom prst="line">
@@ -15868,7 +15868,7 @@
         </p:nvSpPr>
         <p:spPr>
           <a:xfrm>
-            <a:off x="8247600" y="2556000"/>
+            <a:off x="8221859" y="2556000"/>
             <a:ext cx="615600" cy="190800"/>
           </a:xfrm>
           <a:prstGeom prst="roundRect">
@@ -15908,7 +15908,7 @@
         </p:nvSpPr>
         <p:spPr>
           <a:xfrm>
-            <a:off x="8931600" y="2556000"/>
+            <a:off x="8905860" y="2556000"/>
             <a:ext cx="3092400" cy="360000"/>
           </a:xfrm>
           <a:prstGeom prst="rect">
@@ -15961,7 +15961,7 @@
         </p:nvSpPr>
         <p:spPr>
           <a:xfrm>
-            <a:off x="151200" y="3708000"/>
+            <a:off x="121859" y="3708000"/>
             <a:ext cx="3920400" cy="2304000"/>
           </a:xfrm>
           <a:prstGeom prst="roundRect">
@@ -15994,7 +15994,7 @@
         </p:nvSpPr>
         <p:spPr>
           <a:xfrm>
-            <a:off x="198000" y="3888000"/>
+            <a:off x="168659" y="3888000"/>
             <a:ext cx="306000" cy="306000"/>
           </a:xfrm>
           <a:prstGeom prst="roundRect">
@@ -16034,7 +16034,7 @@
         </p:nvSpPr>
         <p:spPr>
           <a:xfrm>
-            <a:off x="583200" y="3834000"/>
+            <a:off x="553859" y="3834000"/>
             <a:ext cx="3240000" cy="277200"/>
           </a:xfrm>
           <a:prstGeom prst="rect">
@@ -16043,7 +16043,7 @@
           <a:noFill/>
         </p:spPr>
         <p:txBody>
-          <a:bodyPr wrap="square" lIns="45720" rIns="45720" anchor="t">
+          <a:bodyPr wrap="square" lIns="0" rIns="45720" anchor="t">
             <a:spAutoFit/>
           </a:bodyPr>
           <a:lstStyle/>
@@ -16078,7 +16078,7 @@
         </p:nvSpPr>
         <p:spPr>
           <a:xfrm>
-            <a:off x="583200" y="4111200"/>
+            <a:off x="553859" y="4111200"/>
             <a:ext cx="892800" cy="190800"/>
           </a:xfrm>
           <a:prstGeom prst="roundRect">
@@ -16118,7 +16118,7 @@
         </p:nvSpPr>
         <p:spPr>
           <a:xfrm>
-            <a:off x="223200" y="4356000"/>
+            <a:off x="168659" y="4356000"/>
             <a:ext cx="3776400" cy="432000"/>
           </a:xfrm>
           <a:prstGeom prst="rect">
@@ -16127,7 +16127,7 @@
           <a:noFill/>
         </p:spPr>
         <p:txBody>
-          <a:bodyPr wrap="square" lIns="45720" rIns="45720" anchor="t">
+          <a:bodyPr wrap="square" lIns="0" rIns="45720" anchor="t">
             <a:spAutoFit/>
           </a:bodyPr>
           <a:lstStyle/>
@@ -16162,7 +16162,7 @@
         </p:nvCxnSpPr>
         <p:spPr>
           <a:xfrm>
-            <a:off x="223200" y="4896000"/>
+            <a:off x="193859" y="4896000"/>
             <a:ext cx="3776400" cy="0"/>
           </a:xfrm>
           <a:prstGeom prst="line">
@@ -16184,7 +16184,7 @@
         </p:nvSpPr>
         <p:spPr>
           <a:xfrm>
-            <a:off x="223200" y="5004000"/>
+            <a:off x="193859" y="5004000"/>
             <a:ext cx="615600" cy="190800"/>
           </a:xfrm>
           <a:prstGeom prst="roundRect">
@@ -16224,7 +16224,7 @@
         </p:nvSpPr>
         <p:spPr>
           <a:xfrm>
-            <a:off x="907200" y="5004000"/>
+            <a:off x="877859" y="5004000"/>
             <a:ext cx="3092400" cy="360000"/>
           </a:xfrm>
           <a:prstGeom prst="rect">
@@ -16277,7 +16277,7 @@
         </p:nvSpPr>
         <p:spPr>
           <a:xfrm>
-            <a:off x="4165200" y="3708000"/>
+            <a:off x="4135859" y="3708000"/>
             <a:ext cx="3920400" cy="2304000"/>
           </a:xfrm>
           <a:prstGeom prst="roundRect">
@@ -16310,7 +16310,7 @@
         </p:nvSpPr>
         <p:spPr>
           <a:xfrm>
-            <a:off x="4212000" y="3888000"/>
+            <a:off x="4182659" y="3888000"/>
             <a:ext cx="306000" cy="306000"/>
           </a:xfrm>
           <a:prstGeom prst="roundRect">
@@ -16350,7 +16350,7 @@
         </p:nvSpPr>
         <p:spPr>
           <a:xfrm>
-            <a:off x="4597200" y="3834000"/>
+            <a:off x="4567859" y="3834000"/>
             <a:ext cx="3240000" cy="277200"/>
           </a:xfrm>
           <a:prstGeom prst="rect">
@@ -16359,7 +16359,7 @@
           <a:noFill/>
         </p:spPr>
         <p:txBody>
-          <a:bodyPr wrap="square" lIns="45720" rIns="45720" anchor="t">
+          <a:bodyPr wrap="square" lIns="0" rIns="45720" anchor="t">
             <a:spAutoFit/>
           </a:bodyPr>
           <a:lstStyle/>
@@ -16394,7 +16394,7 @@
         </p:nvSpPr>
         <p:spPr>
           <a:xfrm>
-            <a:off x="4597200" y="4111200"/>
+            <a:off x="4567859" y="4111200"/>
             <a:ext cx="892800" cy="190800"/>
           </a:xfrm>
           <a:prstGeom prst="roundRect">
@@ -16434,7 +16434,7 @@
         </p:nvSpPr>
         <p:spPr>
           <a:xfrm>
-            <a:off x="4237200" y="4356000"/>
+            <a:off x="4182659" y="4356000"/>
             <a:ext cx="3776400" cy="432000"/>
           </a:xfrm>
           <a:prstGeom prst="rect">
@@ -16443,7 +16443,7 @@
           <a:noFill/>
         </p:spPr>
         <p:txBody>
-          <a:bodyPr wrap="square" lIns="45720" rIns="45720" anchor="t">
+          <a:bodyPr wrap="square" lIns="0" rIns="45720" anchor="t">
             <a:spAutoFit/>
           </a:bodyPr>
           <a:lstStyle/>
@@ -16487,7 +16487,7 @@
         </p:nvCxnSpPr>
         <p:spPr>
           <a:xfrm>
-            <a:off x="4237200" y="4896000"/>
+            <a:off x="4207859" y="4896000"/>
             <a:ext cx="3776400" cy="0"/>
           </a:xfrm>
           <a:prstGeom prst="line">
@@ -16509,7 +16509,7 @@
         </p:nvSpPr>
         <p:spPr>
           <a:xfrm>
-            <a:off x="4237200" y="5004000"/>
+            <a:off x="4207859" y="5004000"/>
             <a:ext cx="615600" cy="190800"/>
           </a:xfrm>
           <a:prstGeom prst="roundRect">
@@ -16549,7 +16549,7 @@
         </p:nvSpPr>
         <p:spPr>
           <a:xfrm>
-            <a:off x="4921200" y="5004000"/>
+            <a:off x="4891859" y="5004000"/>
             <a:ext cx="3092400" cy="360000"/>
           </a:xfrm>
           <a:prstGeom prst="rect">
@@ -16602,7 +16602,7 @@
         </p:nvSpPr>
         <p:spPr>
           <a:xfrm>
-            <a:off x="8175600" y="3708000"/>
+            <a:off x="8149859" y="3708000"/>
             <a:ext cx="3920400" cy="2304000"/>
           </a:xfrm>
           <a:prstGeom prst="roundRect">
@@ -16635,7 +16635,7 @@
         </p:nvSpPr>
         <p:spPr>
           <a:xfrm>
-            <a:off x="8222400" y="3888000"/>
+            <a:off x="8196659" y="3888000"/>
             <a:ext cx="306000" cy="306000"/>
           </a:xfrm>
           <a:prstGeom prst="roundRect">
@@ -16675,7 +16675,7 @@
         </p:nvSpPr>
         <p:spPr>
           <a:xfrm>
-            <a:off x="8607600" y="3834000"/>
+            <a:off x="8581859" y="3834000"/>
             <a:ext cx="3240000" cy="277200"/>
           </a:xfrm>
           <a:prstGeom prst="rect">
@@ -16684,7 +16684,7 @@
           <a:noFill/>
         </p:spPr>
         <p:txBody>
-          <a:bodyPr wrap="square" lIns="45720" rIns="45720" anchor="t">
+          <a:bodyPr wrap="square" lIns="0" rIns="45720" anchor="t">
             <a:spAutoFit/>
           </a:bodyPr>
           <a:lstStyle/>
@@ -16719,7 +16719,7 @@
         </p:nvSpPr>
         <p:spPr>
           <a:xfrm>
-            <a:off x="8607600" y="4111200"/>
+            <a:off x="8581859" y="4111200"/>
             <a:ext cx="892800" cy="190800"/>
           </a:xfrm>
           <a:prstGeom prst="roundRect">
@@ -16759,7 +16759,7 @@
         </p:nvSpPr>
         <p:spPr>
           <a:xfrm>
-            <a:off x="8247600" y="4356000"/>
+            <a:off x="8196659" y="4356000"/>
             <a:ext cx="3776400" cy="432000"/>
           </a:xfrm>
           <a:prstGeom prst="rect">
@@ -16768,7 +16768,7 @@
           <a:noFill/>
         </p:spPr>
         <p:txBody>
-          <a:bodyPr wrap="square" lIns="45720" rIns="45720" anchor="t">
+          <a:bodyPr wrap="square" lIns="0" rIns="45720" anchor="t">
             <a:spAutoFit/>
           </a:bodyPr>
           <a:lstStyle/>
@@ -16812,7 +16812,7 @@
         </p:nvCxnSpPr>
         <p:spPr>
           <a:xfrm>
-            <a:off x="8247600" y="4896000"/>
+            <a:off x="8221859" y="4896000"/>
             <a:ext cx="3776400" cy="0"/>
           </a:xfrm>
           <a:prstGeom prst="line">
@@ -16834,7 +16834,7 @@
         </p:nvSpPr>
         <p:spPr>
           <a:xfrm>
-            <a:off x="8247600" y="5004000"/>
+            <a:off x="8221859" y="5004000"/>
             <a:ext cx="615600" cy="190800"/>
           </a:xfrm>
           <a:prstGeom prst="roundRect">
@@ -16874,7 +16874,7 @@
         </p:nvSpPr>
         <p:spPr>
           <a:xfrm>
-            <a:off x="8931600" y="5004000"/>
+            <a:off x="8905860" y="5004000"/>
             <a:ext cx="3092400" cy="360000"/>
           </a:xfrm>
           <a:prstGeom prst="rect">

--- a/test_corretion_elements_graphiques.pptx
+++ b/test_corretion_elements_graphiques.pptx
@@ -4329,23 +4329,28 @@
       <p:sp>
         <p:nvSpPr>
           <p:cNvPr id="10" name="S10_PHASE_1_NUMBER"/>
-          <p:cNvSpPr txBox="1"/>
-          <p:nvPr/>
-        </p:nvSpPr>
-        <p:spPr>
-          <a:xfrm>
-            <a:off x="280800" y="1548000"/>
-            <a:ext cx="511200" cy="511200"/>
-          </a:xfrm>
-          <a:prstGeom prst="rect">
-            <a:avLst/>
-          </a:prstGeom>
-          <a:noFill/>
-        </p:spPr>
-        <p:txBody>
-          <a:bodyPr wrap="square" lIns="45720" rIns="45720" anchor="ctr">
-            <a:spAutoFit/>
-          </a:bodyPr>
+          <p:cNvSpPr/>
+          <p:nvPr/>
+        </p:nvSpPr>
+        <p:spPr>
+          <a:xfrm>
+            <a:off x="291600" y="1665000"/>
+            <a:ext cx="410399" cy="410399"/>
+          </a:xfrm>
+          <a:prstGeom prst="ellipse">
+            <a:avLst/>
+          </a:prstGeom>
+          <a:solidFill>
+            <a:srgbClr val="6A5D79"/>
+          </a:solidFill>
+          <a:ln w="28575">
+            <a:solidFill>
+              <a:srgbClr val="FFFFFF"/>
+            </a:solidFill>
+          </a:ln>
+        </p:spPr>
+        <p:txBody>
+          <a:bodyPr rtlCol="0" anchor="ctr" wrap="square" lIns="0" rIns="0" tIns="0" bIns="0"/>
           <a:lstStyle/>
           <a:p>
             <a:pPr algn="ctr"/>
@@ -4354,7 +4359,7 @@
                 <a:solidFill>
                   <a:srgbClr val="FFFFFF"/>
                 </a:solidFill>
-                <a:latin typeface="Calibri"/>
+                <a:latin typeface="Segoe UI"/>
               </a:rPr>
               <a:t>1</a:t>
             </a:r>
@@ -4448,7 +4453,7 @@
         </p:nvSpPr>
         <p:spPr>
           <a:xfrm>
-            <a:off x="399599" y="2340000"/>
+            <a:off x="399599" y="2397599"/>
             <a:ext cx="108000" cy="108000"/>
           </a:xfrm>
           <a:prstGeom prst="ellipse">
@@ -4477,7 +4482,7 @@
         </p:nvSpPr>
         <p:spPr>
           <a:xfrm>
-            <a:off x="586800" y="2268000"/>
+            <a:off x="586800" y="2267999"/>
             <a:ext cx="3268800" cy="367200"/>
           </a:xfrm>
           <a:prstGeom prst="rect">
@@ -4521,7 +4526,7 @@
         </p:nvSpPr>
         <p:spPr>
           <a:xfrm>
-            <a:off x="586800" y="2613600"/>
+            <a:off x="586800" y="2613599"/>
             <a:ext cx="3268800" cy="306000"/>
           </a:xfrm>
           <a:prstGeom prst="rect">
@@ -4574,7 +4579,7 @@
         </p:nvCxnSpPr>
         <p:spPr>
           <a:xfrm>
-            <a:off x="363600" y="2955599"/>
+            <a:off x="363600" y="3358800"/>
             <a:ext cx="3491999" cy="0"/>
           </a:xfrm>
           <a:prstGeom prst="line">
@@ -4595,7 +4600,7 @@
         </p:nvSpPr>
         <p:spPr>
           <a:xfrm>
-            <a:off x="399599" y="3340800"/>
+            <a:off x="399599" y="3524399"/>
             <a:ext cx="108000" cy="108000"/>
           </a:xfrm>
           <a:prstGeom prst="ellipse">
@@ -4624,7 +4629,7 @@
         </p:nvSpPr>
         <p:spPr>
           <a:xfrm>
-            <a:off x="586800" y="3268800"/>
+            <a:off x="586800" y="3394800"/>
             <a:ext cx="3268800" cy="367200"/>
           </a:xfrm>
           <a:prstGeom prst="rect">
@@ -4668,7 +4673,7 @@
         </p:nvSpPr>
         <p:spPr>
           <a:xfrm>
-            <a:off x="586800" y="3614399"/>
+            <a:off x="586800" y="3740400"/>
             <a:ext cx="3268800" cy="306000"/>
           </a:xfrm>
           <a:prstGeom prst="rect">
@@ -4721,7 +4726,7 @@
         </p:nvCxnSpPr>
         <p:spPr>
           <a:xfrm>
-            <a:off x="363600" y="3956399"/>
+            <a:off x="363600" y="4485600"/>
             <a:ext cx="3491999" cy="0"/>
           </a:xfrm>
           <a:prstGeom prst="line">
@@ -4742,7 +4747,7 @@
         </p:nvSpPr>
         <p:spPr>
           <a:xfrm>
-            <a:off x="399599" y="4471200"/>
+            <a:off x="399599" y="4651200"/>
             <a:ext cx="108000" cy="108000"/>
           </a:xfrm>
           <a:prstGeom prst="ellipse">
@@ -4771,7 +4776,7 @@
         </p:nvSpPr>
         <p:spPr>
           <a:xfrm>
-            <a:off x="586800" y="4399200"/>
+            <a:off x="586800" y="4521600"/>
             <a:ext cx="3268800" cy="367200"/>
           </a:xfrm>
           <a:prstGeom prst="rect">
@@ -4815,7 +4820,7 @@
         </p:nvSpPr>
         <p:spPr>
           <a:xfrm>
-            <a:off x="586800" y="4744800"/>
+            <a:off x="586800" y="4867200"/>
             <a:ext cx="3268800" cy="306000"/>
           </a:xfrm>
           <a:prstGeom prst="rect">
@@ -4923,23 +4928,28 @@
       <p:sp>
         <p:nvSpPr>
           <p:cNvPr id="26" name="S10_PHASE_2_NUMBER"/>
-          <p:cNvSpPr txBox="1"/>
-          <p:nvPr/>
-        </p:nvSpPr>
-        <p:spPr>
-          <a:xfrm>
-            <a:off x="4305600" y="1548000"/>
-            <a:ext cx="511200" cy="511200"/>
-          </a:xfrm>
-          <a:prstGeom prst="rect">
-            <a:avLst/>
-          </a:prstGeom>
-          <a:noFill/>
-        </p:spPr>
-        <p:txBody>
-          <a:bodyPr wrap="square" lIns="45720" rIns="45720" anchor="ctr">
-            <a:spAutoFit/>
-          </a:bodyPr>
+          <p:cNvSpPr/>
+          <p:nvPr/>
+        </p:nvSpPr>
+        <p:spPr>
+          <a:xfrm>
+            <a:off x="4276800" y="1665000"/>
+            <a:ext cx="410399" cy="410399"/>
+          </a:xfrm>
+          <a:prstGeom prst="ellipse">
+            <a:avLst/>
+          </a:prstGeom>
+          <a:solidFill>
+            <a:srgbClr val="A25871"/>
+          </a:solidFill>
+          <a:ln w="28575">
+            <a:solidFill>
+              <a:srgbClr val="FFFFFF"/>
+            </a:solidFill>
+          </a:ln>
+        </p:spPr>
+        <p:txBody>
+          <a:bodyPr rtlCol="0" anchor="ctr" wrap="square" lIns="0" rIns="0" tIns="0" bIns="0"/>
           <a:lstStyle/>
           <a:p>
             <a:pPr algn="ctr"/>
@@ -4948,7 +4958,7 @@
                 <a:solidFill>
                   <a:srgbClr val="FFFFFF"/>
                 </a:solidFill>
-                <a:latin typeface="Calibri"/>
+                <a:latin typeface="Segoe UI"/>
               </a:rPr>
               <a:t>2</a:t>
             </a:r>
@@ -5042,7 +5052,7 @@
         </p:nvSpPr>
         <p:spPr>
           <a:xfrm>
-            <a:off x="4384800" y="2340000"/>
+            <a:off x="4384800" y="2397599"/>
             <a:ext cx="108000" cy="108000"/>
           </a:xfrm>
           <a:prstGeom prst="ellipse">
@@ -5071,7 +5081,7 @@
         </p:nvSpPr>
         <p:spPr>
           <a:xfrm>
-            <a:off x="4608000" y="2268000"/>
+            <a:off x="4608000" y="2267999"/>
             <a:ext cx="3268800" cy="367200"/>
           </a:xfrm>
           <a:prstGeom prst="rect">
@@ -5115,7 +5125,7 @@
         </p:nvSpPr>
         <p:spPr>
           <a:xfrm>
-            <a:off x="4608000" y="2613600"/>
+            <a:off x="4608000" y="2613599"/>
             <a:ext cx="3268800" cy="306000"/>
           </a:xfrm>
           <a:prstGeom prst="rect">
@@ -5168,7 +5178,7 @@
         </p:nvCxnSpPr>
         <p:spPr>
           <a:xfrm>
-            <a:off x="4348800" y="2955599"/>
+            <a:off x="4348800" y="3358800"/>
             <a:ext cx="3492000" cy="0"/>
           </a:xfrm>
           <a:prstGeom prst="line">
@@ -5189,7 +5199,7 @@
         </p:nvSpPr>
         <p:spPr>
           <a:xfrm>
-            <a:off x="4384800" y="3340800"/>
+            <a:off x="4384800" y="3524399"/>
             <a:ext cx="108000" cy="108000"/>
           </a:xfrm>
           <a:prstGeom prst="ellipse">
@@ -5218,7 +5228,7 @@
         </p:nvSpPr>
         <p:spPr>
           <a:xfrm>
-            <a:off x="4608000" y="3268800"/>
+            <a:off x="4608000" y="3394800"/>
             <a:ext cx="3268800" cy="367200"/>
           </a:xfrm>
           <a:prstGeom prst="rect">
@@ -5262,7 +5272,7 @@
         </p:nvSpPr>
         <p:spPr>
           <a:xfrm>
-            <a:off x="4608000" y="3614399"/>
+            <a:off x="4608000" y="3740400"/>
             <a:ext cx="3268800" cy="306000"/>
           </a:xfrm>
           <a:prstGeom prst="rect">
@@ -5315,7 +5325,7 @@
         </p:nvCxnSpPr>
         <p:spPr>
           <a:xfrm>
-            <a:off x="4348800" y="3956399"/>
+            <a:off x="4348800" y="4485600"/>
             <a:ext cx="3492000" cy="0"/>
           </a:xfrm>
           <a:prstGeom prst="line">
@@ -5336,7 +5346,7 @@
         </p:nvSpPr>
         <p:spPr>
           <a:xfrm>
-            <a:off x="4384800" y="4471200"/>
+            <a:off x="4384800" y="4651200"/>
             <a:ext cx="108000" cy="108000"/>
           </a:xfrm>
           <a:prstGeom prst="ellipse">
@@ -5365,7 +5375,7 @@
         </p:nvSpPr>
         <p:spPr>
           <a:xfrm>
-            <a:off x="4608000" y="4399200"/>
+            <a:off x="4608000" y="4521600"/>
             <a:ext cx="3268800" cy="367200"/>
           </a:xfrm>
           <a:prstGeom prst="rect">
@@ -5409,7 +5419,7 @@
         </p:nvSpPr>
         <p:spPr>
           <a:xfrm>
-            <a:off x="4608000" y="4744800"/>
+            <a:off x="4608000" y="4867200"/>
             <a:ext cx="3268800" cy="306000"/>
           </a:xfrm>
           <a:prstGeom prst="rect">
@@ -5517,23 +5527,28 @@
       <p:sp>
         <p:nvSpPr>
           <p:cNvPr id="42" name="S10_PHASE_3_NUMBER"/>
-          <p:cNvSpPr txBox="1"/>
-          <p:nvPr/>
-        </p:nvSpPr>
-        <p:spPr>
-          <a:xfrm>
-            <a:off x="8326800" y="1548000"/>
-            <a:ext cx="511200" cy="511200"/>
-          </a:xfrm>
-          <a:prstGeom prst="rect">
-            <a:avLst/>
-          </a:prstGeom>
-          <a:noFill/>
-        </p:spPr>
-        <p:txBody>
-          <a:bodyPr wrap="square" lIns="45720" rIns="45720" anchor="ctr">
-            <a:spAutoFit/>
-          </a:bodyPr>
+          <p:cNvSpPr/>
+          <p:nvPr/>
+        </p:nvSpPr>
+        <p:spPr>
+          <a:xfrm>
+            <a:off x="8301600" y="1665000"/>
+            <a:ext cx="410399" cy="410399"/>
+          </a:xfrm>
+          <a:prstGeom prst="ellipse">
+            <a:avLst/>
+          </a:prstGeom>
+          <a:solidFill>
+            <a:srgbClr val="FDA85B"/>
+          </a:solidFill>
+          <a:ln w="28575">
+            <a:solidFill>
+              <a:srgbClr val="FFFFFF"/>
+            </a:solidFill>
+          </a:ln>
+        </p:spPr>
+        <p:txBody>
+          <a:bodyPr rtlCol="0" anchor="ctr" wrap="square" lIns="0" rIns="0" tIns="0" bIns="0"/>
           <a:lstStyle/>
           <a:p>
             <a:pPr algn="ctr"/>
@@ -5542,7 +5557,7 @@
                 <a:solidFill>
                   <a:srgbClr val="FFFFFF"/>
                 </a:solidFill>
-                <a:latin typeface="Calibri"/>
+                <a:latin typeface="Segoe UI"/>
               </a:rPr>
               <a:t>3</a:t>
             </a:r>
@@ -5627,7 +5642,7 @@
         </p:nvSpPr>
         <p:spPr>
           <a:xfrm>
-            <a:off x="8409600" y="2340000"/>
+            <a:off x="8409600" y="2397599"/>
             <a:ext cx="108000" cy="108000"/>
           </a:xfrm>
           <a:prstGeom prst="ellipse">
@@ -5656,7 +5671,7 @@
         </p:nvSpPr>
         <p:spPr>
           <a:xfrm>
-            <a:off x="8632800" y="2268000"/>
+            <a:off x="8632800" y="2267999"/>
             <a:ext cx="3268800" cy="367200"/>
           </a:xfrm>
           <a:prstGeom prst="rect">
@@ -5700,7 +5715,7 @@
         </p:nvSpPr>
         <p:spPr>
           <a:xfrm>
-            <a:off x="8632800" y="2613600"/>
+            <a:off x="8632800" y="2613599"/>
             <a:ext cx="3268800" cy="306000"/>
           </a:xfrm>
           <a:prstGeom prst="rect">
@@ -5753,7 +5768,7 @@
         </p:nvCxnSpPr>
         <p:spPr>
           <a:xfrm>
-            <a:off x="8373599" y="2955599"/>
+            <a:off x="8373599" y="3358800"/>
             <a:ext cx="3492001" cy="0"/>
           </a:xfrm>
           <a:prstGeom prst="line">
@@ -5774,7 +5789,7 @@
         </p:nvSpPr>
         <p:spPr>
           <a:xfrm>
-            <a:off x="8409600" y="3340800"/>
+            <a:off x="8409600" y="3524399"/>
             <a:ext cx="108000" cy="108000"/>
           </a:xfrm>
           <a:prstGeom prst="ellipse">
@@ -5803,7 +5818,7 @@
         </p:nvSpPr>
         <p:spPr>
           <a:xfrm>
-            <a:off x="8632800" y="3268800"/>
+            <a:off x="8632800" y="3394800"/>
             <a:ext cx="3268800" cy="367200"/>
           </a:xfrm>
           <a:prstGeom prst="rect">
@@ -5847,7 +5862,7 @@
         </p:nvSpPr>
         <p:spPr>
           <a:xfrm>
-            <a:off x="8632800" y="3614399"/>
+            <a:off x="8632800" y="3740400"/>
             <a:ext cx="3268800" cy="306000"/>
           </a:xfrm>
           <a:prstGeom prst="rect">
@@ -5900,7 +5915,7 @@
         </p:nvCxnSpPr>
         <p:spPr>
           <a:xfrm>
-            <a:off x="8373599" y="3956399"/>
+            <a:off x="8373599" y="4485600"/>
             <a:ext cx="3492001" cy="0"/>
           </a:xfrm>
           <a:prstGeom prst="line">
@@ -5921,7 +5936,7 @@
         </p:nvSpPr>
         <p:spPr>
           <a:xfrm>
-            <a:off x="8409600" y="4471200"/>
+            <a:off x="8409600" y="4651200"/>
             <a:ext cx="108000" cy="108000"/>
           </a:xfrm>
           <a:prstGeom prst="ellipse">
@@ -5950,7 +5965,7 @@
         </p:nvSpPr>
         <p:spPr>
           <a:xfrm>
-            <a:off x="8632800" y="4399200"/>
+            <a:off x="8632800" y="4521600"/>
             <a:ext cx="3268800" cy="367200"/>
           </a:xfrm>
           <a:prstGeom prst="rect">
@@ -5985,7 +6000,7 @@
         </p:nvSpPr>
         <p:spPr>
           <a:xfrm>
-            <a:off x="8632800" y="4744800"/>
+            <a:off x="8632800" y="4867200"/>
             <a:ext cx="3268800" cy="306000"/>
           </a:xfrm>
           <a:prstGeom prst="rect">

--- a/test_corretion_elements_graphiques.pptx
+++ b/test_corretion_elements_graphiques.pptx
@@ -4274,7 +4274,7 @@
         </p:nvSpPr>
         <p:spPr>
           <a:xfrm>
-            <a:off x="219600" y="1475999"/>
+            <a:off x="202859" y="1475999"/>
             <a:ext cx="3780000" cy="4136400"/>
           </a:xfrm>
           <a:prstGeom prst="rect">
@@ -4305,7 +4305,7 @@
         </p:nvSpPr>
         <p:spPr>
           <a:xfrm>
-            <a:off x="219600" y="1475999"/>
+            <a:off x="202859" y="1475999"/>
             <a:ext cx="3780000" cy="756000"/>
           </a:xfrm>
           <a:prstGeom prst="rect">
@@ -4334,7 +4334,7 @@
         </p:nvSpPr>
         <p:spPr>
           <a:xfrm>
-            <a:off x="291600" y="1665000"/>
+            <a:off x="274859" y="1665000"/>
             <a:ext cx="410399" cy="410399"/>
           </a:xfrm>
           <a:prstGeom prst="ellipse">
@@ -4374,7 +4374,7 @@
         </p:nvSpPr>
         <p:spPr>
           <a:xfrm>
-            <a:off x="853200" y="1558800"/>
+            <a:off x="836459" y="1558800"/>
             <a:ext cx="3024000" cy="342000"/>
           </a:xfrm>
           <a:prstGeom prst="rect">
@@ -4409,7 +4409,7 @@
         </p:nvSpPr>
         <p:spPr>
           <a:xfrm>
-            <a:off x="853200" y="1890000"/>
+            <a:off x="836459" y="1890000"/>
             <a:ext cx="3024000" cy="291600"/>
           </a:xfrm>
           <a:prstGeom prst="rect">
@@ -4453,7 +4453,7 @@
         </p:nvSpPr>
         <p:spPr>
           <a:xfrm>
-            <a:off x="399599" y="2397599"/>
+            <a:off x="382859" y="2397599"/>
             <a:ext cx="108000" cy="108000"/>
           </a:xfrm>
           <a:prstGeom prst="ellipse">
@@ -4482,7 +4482,7 @@
         </p:nvSpPr>
         <p:spPr>
           <a:xfrm>
-            <a:off x="586800" y="2267999"/>
+            <a:off x="570059" y="2267999"/>
             <a:ext cx="3268800" cy="367200"/>
           </a:xfrm>
           <a:prstGeom prst="rect">
@@ -4526,7 +4526,7 @@
         </p:nvSpPr>
         <p:spPr>
           <a:xfrm>
-            <a:off x="586800" y="2613599"/>
+            <a:off x="570059" y="2613599"/>
             <a:ext cx="3268800" cy="306000"/>
           </a:xfrm>
           <a:prstGeom prst="rect">
@@ -4579,8 +4579,8 @@
         </p:nvCxnSpPr>
         <p:spPr>
           <a:xfrm>
-            <a:off x="363600" y="3358800"/>
-            <a:ext cx="3491999" cy="0"/>
+            <a:off x="346859" y="3358800"/>
+            <a:ext cx="3492000" cy="0"/>
           </a:xfrm>
           <a:prstGeom prst="line">
             <a:avLst/>
@@ -4600,7 +4600,7 @@
         </p:nvSpPr>
         <p:spPr>
           <a:xfrm>
-            <a:off x="399599" y="3524399"/>
+            <a:off x="382859" y="3524399"/>
             <a:ext cx="108000" cy="108000"/>
           </a:xfrm>
           <a:prstGeom prst="ellipse">
@@ -4629,7 +4629,7 @@
         </p:nvSpPr>
         <p:spPr>
           <a:xfrm>
-            <a:off x="586800" y="3394800"/>
+            <a:off x="570059" y="3394800"/>
             <a:ext cx="3268800" cy="367200"/>
           </a:xfrm>
           <a:prstGeom prst="rect">
@@ -4673,7 +4673,7 @@
         </p:nvSpPr>
         <p:spPr>
           <a:xfrm>
-            <a:off x="586800" y="3740400"/>
+            <a:off x="570059" y="3740400"/>
             <a:ext cx="3268800" cy="306000"/>
           </a:xfrm>
           <a:prstGeom prst="rect">
@@ -4726,8 +4726,8 @@
         </p:nvCxnSpPr>
         <p:spPr>
           <a:xfrm>
-            <a:off x="363600" y="4485600"/>
-            <a:ext cx="3491999" cy="0"/>
+            <a:off x="346859" y="4485600"/>
+            <a:ext cx="3492000" cy="0"/>
           </a:xfrm>
           <a:prstGeom prst="line">
             <a:avLst/>
@@ -4747,7 +4747,7 @@
         </p:nvSpPr>
         <p:spPr>
           <a:xfrm>
-            <a:off x="399599" y="4651200"/>
+            <a:off x="382859" y="4651200"/>
             <a:ext cx="108000" cy="108000"/>
           </a:xfrm>
           <a:prstGeom prst="ellipse">
@@ -4776,7 +4776,7 @@
         </p:nvSpPr>
         <p:spPr>
           <a:xfrm>
-            <a:off x="586800" y="4521600"/>
+            <a:off x="570059" y="4521600"/>
             <a:ext cx="3268800" cy="367200"/>
           </a:xfrm>
           <a:prstGeom prst="rect">
@@ -4820,7 +4820,7 @@
         </p:nvSpPr>
         <p:spPr>
           <a:xfrm>
-            <a:off x="586800" y="4867200"/>
+            <a:off x="570059" y="4867200"/>
             <a:ext cx="3268800" cy="306000"/>
           </a:xfrm>
           <a:prstGeom prst="rect">
@@ -4873,7 +4873,7 @@
         </p:nvSpPr>
         <p:spPr>
           <a:xfrm>
-            <a:off x="4204800" y="1475999"/>
+            <a:off x="4206059" y="1475999"/>
             <a:ext cx="3780000" cy="4136400"/>
           </a:xfrm>
           <a:prstGeom prst="rect">
@@ -4904,7 +4904,7 @@
         </p:nvSpPr>
         <p:spPr>
           <a:xfrm>
-            <a:off x="4204800" y="1475999"/>
+            <a:off x="4206059" y="1475999"/>
             <a:ext cx="3780000" cy="756000"/>
           </a:xfrm>
           <a:prstGeom prst="rect">
@@ -4933,7 +4933,7 @@
         </p:nvSpPr>
         <p:spPr>
           <a:xfrm>
-            <a:off x="4276800" y="1665000"/>
+            <a:off x="4278059" y="1665000"/>
             <a:ext cx="410399" cy="410399"/>
           </a:xfrm>
           <a:prstGeom prst="ellipse">
@@ -4973,7 +4973,7 @@
         </p:nvSpPr>
         <p:spPr>
           <a:xfrm>
-            <a:off x="4878000" y="1558800"/>
+            <a:off x="4839659" y="1558800"/>
             <a:ext cx="3024000" cy="342000"/>
           </a:xfrm>
           <a:prstGeom prst="rect">
@@ -5008,7 +5008,7 @@
         </p:nvSpPr>
         <p:spPr>
           <a:xfrm>
-            <a:off x="4878000" y="1890000"/>
+            <a:off x="4839659" y="1890000"/>
             <a:ext cx="3024000" cy="291600"/>
           </a:xfrm>
           <a:prstGeom prst="rect">
@@ -5052,7 +5052,7 @@
         </p:nvSpPr>
         <p:spPr>
           <a:xfrm>
-            <a:off x="4384800" y="2397599"/>
+            <a:off x="4386059" y="2397599"/>
             <a:ext cx="108000" cy="108000"/>
           </a:xfrm>
           <a:prstGeom prst="ellipse">
@@ -5081,7 +5081,7 @@
         </p:nvSpPr>
         <p:spPr>
           <a:xfrm>
-            <a:off x="4608000" y="2267999"/>
+            <a:off x="4573259" y="2267999"/>
             <a:ext cx="3268800" cy="367200"/>
           </a:xfrm>
           <a:prstGeom prst="rect">
@@ -5125,7 +5125,7 @@
         </p:nvSpPr>
         <p:spPr>
           <a:xfrm>
-            <a:off x="4608000" y="2613599"/>
+            <a:off x="4573259" y="2613599"/>
             <a:ext cx="3268800" cy="306000"/>
           </a:xfrm>
           <a:prstGeom prst="rect">
@@ -5178,7 +5178,7 @@
         </p:nvCxnSpPr>
         <p:spPr>
           <a:xfrm>
-            <a:off x="4348800" y="3358800"/>
+            <a:off x="4350059" y="3358800"/>
             <a:ext cx="3492000" cy="0"/>
           </a:xfrm>
           <a:prstGeom prst="line">
@@ -5199,7 +5199,7 @@
         </p:nvSpPr>
         <p:spPr>
           <a:xfrm>
-            <a:off x="4384800" y="3524399"/>
+            <a:off x="4386059" y="3524399"/>
             <a:ext cx="108000" cy="108000"/>
           </a:xfrm>
           <a:prstGeom prst="ellipse">
@@ -5228,7 +5228,7 @@
         </p:nvSpPr>
         <p:spPr>
           <a:xfrm>
-            <a:off x="4608000" y="3394800"/>
+            <a:off x="4573259" y="3394800"/>
             <a:ext cx="3268800" cy="367200"/>
           </a:xfrm>
           <a:prstGeom prst="rect">
@@ -5272,7 +5272,7 @@
         </p:nvSpPr>
         <p:spPr>
           <a:xfrm>
-            <a:off x="4608000" y="3740400"/>
+            <a:off x="4573259" y="3740400"/>
             <a:ext cx="3268800" cy="306000"/>
           </a:xfrm>
           <a:prstGeom prst="rect">
@@ -5325,7 +5325,7 @@
         </p:nvCxnSpPr>
         <p:spPr>
           <a:xfrm>
-            <a:off x="4348800" y="4485600"/>
+            <a:off x="4350059" y="4485600"/>
             <a:ext cx="3492000" cy="0"/>
           </a:xfrm>
           <a:prstGeom prst="line">
@@ -5346,7 +5346,7 @@
         </p:nvSpPr>
         <p:spPr>
           <a:xfrm>
-            <a:off x="4384800" y="4651200"/>
+            <a:off x="4386059" y="4651200"/>
             <a:ext cx="108000" cy="108000"/>
           </a:xfrm>
           <a:prstGeom prst="ellipse">
@@ -5375,7 +5375,7 @@
         </p:nvSpPr>
         <p:spPr>
           <a:xfrm>
-            <a:off x="4608000" y="4521600"/>
+            <a:off x="4573259" y="4521600"/>
             <a:ext cx="3268800" cy="367200"/>
           </a:xfrm>
           <a:prstGeom prst="rect">
@@ -5419,7 +5419,7 @@
         </p:nvSpPr>
         <p:spPr>
           <a:xfrm>
-            <a:off x="4608000" y="4867200"/>
+            <a:off x="4573259" y="4867200"/>
             <a:ext cx="3268800" cy="306000"/>
           </a:xfrm>
           <a:prstGeom prst="rect">
@@ -5472,7 +5472,7 @@
         </p:nvSpPr>
         <p:spPr>
           <a:xfrm>
-            <a:off x="8229600" y="1475999"/>
+            <a:off x="8209259" y="1475999"/>
             <a:ext cx="3780000" cy="4136400"/>
           </a:xfrm>
           <a:prstGeom prst="rect">
@@ -5503,7 +5503,7 @@
         </p:nvSpPr>
         <p:spPr>
           <a:xfrm>
-            <a:off x="8229600" y="1475999"/>
+            <a:off x="8209259" y="1475999"/>
             <a:ext cx="3780000" cy="756000"/>
           </a:xfrm>
           <a:prstGeom prst="rect">
@@ -5532,7 +5532,7 @@
         </p:nvSpPr>
         <p:spPr>
           <a:xfrm>
-            <a:off x="8301600" y="1665000"/>
+            <a:off x="8281259" y="1665000"/>
             <a:ext cx="410399" cy="410399"/>
           </a:xfrm>
           <a:prstGeom prst="ellipse">
@@ -5572,7 +5572,7 @@
         </p:nvSpPr>
         <p:spPr>
           <a:xfrm>
-            <a:off x="8899200" y="1558800"/>
+            <a:off x="8842860" y="1558800"/>
             <a:ext cx="3024000" cy="342000"/>
           </a:xfrm>
           <a:prstGeom prst="rect">
@@ -5607,7 +5607,7 @@
         </p:nvSpPr>
         <p:spPr>
           <a:xfrm>
-            <a:off x="8899200" y="1890000"/>
+            <a:off x="8842860" y="1890000"/>
             <a:ext cx="3024000" cy="291600"/>
           </a:xfrm>
           <a:prstGeom prst="rect">
@@ -5642,7 +5642,7 @@
         </p:nvSpPr>
         <p:spPr>
           <a:xfrm>
-            <a:off x="8409600" y="2397599"/>
+            <a:off x="8389259" y="2397599"/>
             <a:ext cx="108000" cy="108000"/>
           </a:xfrm>
           <a:prstGeom prst="ellipse">
@@ -5671,7 +5671,7 @@
         </p:nvSpPr>
         <p:spPr>
           <a:xfrm>
-            <a:off x="8632800" y="2267999"/>
+            <a:off x="8576459" y="2267999"/>
             <a:ext cx="3268800" cy="367200"/>
           </a:xfrm>
           <a:prstGeom prst="rect">
@@ -5715,7 +5715,7 @@
         </p:nvSpPr>
         <p:spPr>
           <a:xfrm>
-            <a:off x="8632800" y="2613599"/>
+            <a:off x="8576459" y="2613599"/>
             <a:ext cx="3268800" cy="306000"/>
           </a:xfrm>
           <a:prstGeom prst="rect">
@@ -5768,8 +5768,8 @@
         </p:nvCxnSpPr>
         <p:spPr>
           <a:xfrm>
-            <a:off x="8373599" y="3358800"/>
-            <a:ext cx="3492001" cy="0"/>
+            <a:off x="8353259" y="3358800"/>
+            <a:ext cx="3492000" cy="0"/>
           </a:xfrm>
           <a:prstGeom prst="line">
             <a:avLst/>
@@ -5789,7 +5789,7 @@
         </p:nvSpPr>
         <p:spPr>
           <a:xfrm>
-            <a:off x="8409600" y="3524399"/>
+            <a:off x="8389259" y="3524399"/>
             <a:ext cx="108000" cy="108000"/>
           </a:xfrm>
           <a:prstGeom prst="ellipse">
@@ -5818,7 +5818,7 @@
         </p:nvSpPr>
         <p:spPr>
           <a:xfrm>
-            <a:off x="8632800" y="3394800"/>
+            <a:off x="8576459" y="3394800"/>
             <a:ext cx="3268800" cy="367200"/>
           </a:xfrm>
           <a:prstGeom prst="rect">
@@ -5862,7 +5862,7 @@
         </p:nvSpPr>
         <p:spPr>
           <a:xfrm>
-            <a:off x="8632800" y="3740400"/>
+            <a:off x="8576459" y="3740400"/>
             <a:ext cx="3268800" cy="306000"/>
           </a:xfrm>
           <a:prstGeom prst="rect">
@@ -5915,8 +5915,8 @@
         </p:nvCxnSpPr>
         <p:spPr>
           <a:xfrm>
-            <a:off x="8373599" y="4485600"/>
-            <a:ext cx="3492001" cy="0"/>
+            <a:off x="8353259" y="4485600"/>
+            <a:ext cx="3492000" cy="0"/>
           </a:xfrm>
           <a:prstGeom prst="line">
             <a:avLst/>
@@ -5936,7 +5936,7 @@
         </p:nvSpPr>
         <p:spPr>
           <a:xfrm>
-            <a:off x="8409600" y="4651200"/>
+            <a:off x="8389259" y="4651200"/>
             <a:ext cx="108000" cy="108000"/>
           </a:xfrm>
           <a:prstGeom prst="ellipse">
@@ -5965,7 +5965,7 @@
         </p:nvSpPr>
         <p:spPr>
           <a:xfrm>
-            <a:off x="8632800" y="4521600"/>
+            <a:off x="8576459" y="4521600"/>
             <a:ext cx="3268800" cy="367200"/>
           </a:xfrm>
           <a:prstGeom prst="rect">
@@ -6000,7 +6000,7 @@
         </p:nvSpPr>
         <p:spPr>
           <a:xfrm>
-            <a:off x="8632800" y="4867200"/>
+            <a:off x="8576459" y="4867200"/>
             <a:ext cx="3268800" cy="306000"/>
           </a:xfrm>
           <a:prstGeom prst="rect">

--- a/test_corretion_elements_graphiques.pptx
+++ b/test_corretion_elements_graphiques.pptx
@@ -6336,10 +6336,12 @@
         <p:spPr>
           <a:xfrm>
             <a:off x="392400" y="1098000"/>
-            <a:ext cx="36000" cy="1512000"/>
-          </a:xfrm>
-          <a:prstGeom prst="rect">
-            <a:avLst/>
+            <a:ext cx="61200" cy="1371600"/>
+          </a:xfrm>
+          <a:prstGeom prst="roundRect">
+            <a:avLst>
+              <a:gd name="adj" fmla="val 12000"/>
+            </a:avLst>
           </a:prstGeom>
           <a:solidFill>
             <a:srgbClr val="6A5D79"/>
@@ -6356,43 +6358,30 @@
           </a:p>
         </p:txBody>
       </p:sp>
-      <p:sp>
-        <p:nvSpPr>
-          <p:cNvPr id="8" name="S11_BLOCK_1_NUMBER"/>
-          <p:cNvSpPr txBox="1"/>
-          <p:nvPr/>
-        </p:nvSpPr>
-        <p:spPr>
-          <a:xfrm>
-            <a:off x="648000" y="900000"/>
+      <p:pic>
+        <p:nvPicPr>
+          <p:cNvPr id="8" name="S11_BLOCK_1_NUMBER" descr="image.png"/>
+          <p:cNvPicPr>
+            <a:picLocks noChangeAspect="1"/>
+          </p:cNvPicPr>
+          <p:nvPr/>
+        </p:nvPicPr>
+        <p:blipFill>
+          <a:blip r:embed="rId2"/>
+          <a:stretch>
+            <a:fillRect/>
+          </a:stretch>
+        </p:blipFill>
+        <p:spPr>
+          <a:xfrm>
+            <a:off x="648000" y="1188000"/>
             <a:ext cx="1440000" cy="792000"/>
           </a:xfrm>
           <a:prstGeom prst="rect">
             <a:avLst/>
           </a:prstGeom>
-          <a:noFill/>
-        </p:spPr>
-        <p:txBody>
-          <a:bodyPr wrap="square" lIns="45720" rIns="45720" anchor="t">
-            <a:spAutoFit/>
-          </a:bodyPr>
-          <a:lstStyle/>
-          <a:p>
-            <a:pPr algn="l"/>
-            <a:r>
-              <a:rPr sz="7200" b="1" i="0">
-                <a:latin typeface="Segoe UI Black"/>
-                <a:solidFill>
-                  <a:srgbClr val="BBB4C4">
-                    <a:alpha val="40000"/>
-                  </a:srgbClr>
-                </a:solidFill>
-              </a:rPr>
-              <a:t>01</a:t>
-            </a:r>
-          </a:p>
-        </p:txBody>
-      </p:sp>
+        </p:spPr>
+      </p:pic>
       <p:sp>
         <p:nvSpPr>
           <p:cNvPr id="9" name="S11_BLOCK_1_TITLE"/>
@@ -6530,10 +6519,12 @@
         <p:spPr>
           <a:xfrm>
             <a:off x="392400" y="2718000"/>
-            <a:ext cx="36000" cy="1512000"/>
-          </a:xfrm>
-          <a:prstGeom prst="rect">
-            <a:avLst/>
+            <a:ext cx="61200" cy="1371600"/>
+          </a:xfrm>
+          <a:prstGeom prst="roundRect">
+            <a:avLst>
+              <a:gd name="adj" fmla="val 12000"/>
+            </a:avLst>
           </a:prstGeom>
           <a:solidFill>
             <a:srgbClr val="A25871"/>
@@ -6550,43 +6541,30 @@
           </a:p>
         </p:txBody>
       </p:sp>
-      <p:sp>
-        <p:nvSpPr>
-          <p:cNvPr id="12" name="S11_BLOCK_2_NUMBER"/>
-          <p:cNvSpPr txBox="1"/>
-          <p:nvPr/>
-        </p:nvSpPr>
-        <p:spPr>
-          <a:xfrm>
-            <a:off x="648000" y="2520000"/>
+      <p:pic>
+        <p:nvPicPr>
+          <p:cNvPr id="12" name="S11_BLOCK_2_NUMBER" descr="image.png"/>
+          <p:cNvPicPr>
+            <a:picLocks noChangeAspect="1"/>
+          </p:cNvPicPr>
+          <p:nvPr/>
+        </p:nvPicPr>
+        <p:blipFill>
+          <a:blip r:embed="rId3"/>
+          <a:stretch>
+            <a:fillRect/>
+          </a:stretch>
+        </p:blipFill>
+        <p:spPr>
+          <a:xfrm>
+            <a:off x="648000" y="2818800"/>
             <a:ext cx="1440000" cy="792000"/>
           </a:xfrm>
           <a:prstGeom prst="rect">
             <a:avLst/>
           </a:prstGeom>
-          <a:noFill/>
-        </p:spPr>
-        <p:txBody>
-          <a:bodyPr wrap="square" lIns="45720" rIns="45720" anchor="t">
-            <a:spAutoFit/>
-          </a:bodyPr>
-          <a:lstStyle/>
-          <a:p>
-            <a:pPr algn="l"/>
-            <a:r>
-              <a:rPr sz="7200" b="1" i="0">
-                <a:latin typeface="Segoe UI Black"/>
-                <a:solidFill>
-                  <a:srgbClr val="D5B3BE">
-                    <a:alpha val="40000"/>
-                  </a:srgbClr>
-                </a:solidFill>
-              </a:rPr>
-              <a:t>02</a:t>
-            </a:r>
-          </a:p>
-        </p:txBody>
-      </p:sp>
+        </p:spPr>
+      </p:pic>
       <p:sp>
         <p:nvSpPr>
           <p:cNvPr id="13" name="S11_BLOCK_2_TITLE"/>
@@ -6715,10 +6693,12 @@
         <p:spPr>
           <a:xfrm>
             <a:off x="392400" y="4338000"/>
-            <a:ext cx="36000" cy="1512000"/>
-          </a:xfrm>
-          <a:prstGeom prst="rect">
-            <a:avLst/>
+            <a:ext cx="61200" cy="1371600"/>
+          </a:xfrm>
+          <a:prstGeom prst="roundRect">
+            <a:avLst>
+              <a:gd name="adj" fmla="val 12000"/>
+            </a:avLst>
           </a:prstGeom>
           <a:solidFill>
             <a:srgbClr val="FDA85B"/>
@@ -6735,43 +6715,30 @@
           </a:p>
         </p:txBody>
       </p:sp>
-      <p:sp>
-        <p:nvSpPr>
-          <p:cNvPr id="16" name="S11_BLOCK_3_NUMBER"/>
-          <p:cNvSpPr txBox="1"/>
-          <p:nvPr/>
-        </p:nvSpPr>
-        <p:spPr>
-          <a:xfrm>
-            <a:off x="648000" y="4140000"/>
+      <p:pic>
+        <p:nvPicPr>
+          <p:cNvPr id="16" name="S11_BLOCK_3_NUMBER" descr="image.png"/>
+          <p:cNvPicPr>
+            <a:picLocks noChangeAspect="1"/>
+          </p:cNvPicPr>
+          <p:nvPr/>
+        </p:nvPicPr>
+        <p:blipFill>
+          <a:blip r:embed="rId4"/>
+          <a:stretch>
+            <a:fillRect/>
+          </a:stretch>
+        </p:blipFill>
+        <p:spPr>
+          <a:xfrm>
+            <a:off x="648000" y="4428000"/>
             <a:ext cx="1440000" cy="792000"/>
           </a:xfrm>
           <a:prstGeom prst="rect">
             <a:avLst/>
           </a:prstGeom>
-          <a:noFill/>
-        </p:spPr>
-        <p:txBody>
-          <a:bodyPr wrap="square" lIns="45720" rIns="45720" anchor="t">
-            <a:spAutoFit/>
-          </a:bodyPr>
-          <a:lstStyle/>
-          <a:p>
-            <a:pPr algn="l"/>
-            <a:r>
-              <a:rPr sz="7200" b="1" i="0">
-                <a:latin typeface="Segoe UI Black"/>
-                <a:solidFill>
-                  <a:srgbClr val="FEE3CA">
-                    <a:alpha val="40000"/>
-                  </a:srgbClr>
-                </a:solidFill>
-              </a:rPr>
-              <a:t>03</a:t>
-            </a:r>
-          </a:p>
-        </p:txBody>
-      </p:sp>
+        </p:spPr>
+      </p:pic>
       <p:sp>
         <p:nvSpPr>
           <p:cNvPr id="17" name="S11_BLOCK_3_TITLE"/>

--- a/test_corretion_elements_graphiques.pptx
+++ b/test_corretion_elements_graphiques.pptx
@@ -3123,7 +3123,7 @@
           <a:noFill/>
         </p:spPr>
         <p:txBody>
-          <a:bodyPr wrap="square" lIns="45720" rIns="45720" anchor="ctr">
+          <a:bodyPr wrap="square" lIns="0" rIns="45720" anchor="ctr">
             <a:spAutoFit/>
           </a:bodyPr>
           <a:lstStyle/>
@@ -4076,7 +4076,7 @@
           <a:noFill/>
         </p:spPr>
         <p:txBody>
-          <a:bodyPr wrap="square" lIns="45720" rIns="45720" anchor="ctr">
+          <a:bodyPr wrap="square" lIns="0" rIns="45720" anchor="ctr">
             <a:spAutoFit/>
           </a:bodyPr>
           <a:lstStyle/>
@@ -6181,7 +6181,7 @@
           <a:noFill/>
         </p:spPr>
         <p:txBody>
-          <a:bodyPr wrap="square" lIns="45720" rIns="45720" anchor="ctr">
+          <a:bodyPr wrap="square" lIns="0" rIns="45720" anchor="ctr">
             <a:spAutoFit/>
           </a:bodyPr>
           <a:lstStyle/>
@@ -6335,7 +6335,7 @@
         </p:nvSpPr>
         <p:spPr>
           <a:xfrm>
-            <a:off x="392400" y="1098000"/>
+            <a:off x="392400" y="1152000"/>
             <a:ext cx="61200" cy="1371600"/>
           </a:xfrm>
           <a:prstGeom prst="roundRect">
@@ -6374,7 +6374,7 @@
         </p:blipFill>
         <p:spPr>
           <a:xfrm>
-            <a:off x="648000" y="1188000"/>
+            <a:off x="648000" y="1242000"/>
             <a:ext cx="1440000" cy="792000"/>
           </a:xfrm>
           <a:prstGeom prst="rect">
@@ -6390,7 +6390,7 @@
         </p:nvSpPr>
         <p:spPr>
           <a:xfrm>
-            <a:off x="720000" y="1188000"/>
+            <a:off x="720000" y="1242000"/>
             <a:ext cx="10620000" cy="396000"/>
           </a:xfrm>
           <a:prstGeom prst="rect">
@@ -6443,7 +6443,7 @@
         </p:nvSpPr>
         <p:spPr>
           <a:xfrm>
-            <a:off x="720000" y="1620000"/>
+            <a:off x="720000" y="1674000"/>
             <a:ext cx="10620000" cy="864000"/>
           </a:xfrm>
           <a:prstGeom prst="rect">
@@ -6518,7 +6518,7 @@
         </p:nvSpPr>
         <p:spPr>
           <a:xfrm>
-            <a:off x="392400" y="2718000"/>
+            <a:off x="392400" y="2772000"/>
             <a:ext cx="61200" cy="1371600"/>
           </a:xfrm>
           <a:prstGeom prst="roundRect">
@@ -6557,7 +6557,7 @@
         </p:blipFill>
         <p:spPr>
           <a:xfrm>
-            <a:off x="648000" y="2818800"/>
+            <a:off x="648000" y="2872800"/>
             <a:ext cx="1440000" cy="792000"/>
           </a:xfrm>
           <a:prstGeom prst="rect">
@@ -6573,7 +6573,7 @@
         </p:nvSpPr>
         <p:spPr>
           <a:xfrm>
-            <a:off x="720000" y="2818800"/>
+            <a:off x="720000" y="2872800"/>
             <a:ext cx="10620000" cy="396000"/>
           </a:xfrm>
           <a:prstGeom prst="rect">
@@ -6617,7 +6617,7 @@
         </p:nvSpPr>
         <p:spPr>
           <a:xfrm>
-            <a:off x="720000" y="3250800"/>
+            <a:off x="720000" y="3304800"/>
             <a:ext cx="10620000" cy="864000"/>
           </a:xfrm>
           <a:prstGeom prst="rect">
@@ -6692,7 +6692,7 @@
         </p:nvSpPr>
         <p:spPr>
           <a:xfrm>
-            <a:off x="392400" y="4338000"/>
+            <a:off x="392400" y="4392000"/>
             <a:ext cx="61200" cy="1371600"/>
           </a:xfrm>
           <a:prstGeom prst="roundRect">
@@ -6731,7 +6731,7 @@
         </p:blipFill>
         <p:spPr>
           <a:xfrm>
-            <a:off x="648000" y="4428000"/>
+            <a:off x="648000" y="4482000"/>
             <a:ext cx="1440000" cy="792000"/>
           </a:xfrm>
           <a:prstGeom prst="rect">
@@ -6747,7 +6747,7 @@
         </p:nvSpPr>
         <p:spPr>
           <a:xfrm>
-            <a:off x="720000" y="4428000"/>
+            <a:off x="720000" y="4482000"/>
             <a:ext cx="10620000" cy="396000"/>
           </a:xfrm>
           <a:prstGeom prst="rect">
@@ -6791,7 +6791,7 @@
         </p:nvSpPr>
         <p:spPr>
           <a:xfrm>
-            <a:off x="720000" y="4860000"/>
+            <a:off x="720000" y="4914000"/>
             <a:ext cx="10620000" cy="864000"/>
           </a:xfrm>
           <a:prstGeom prst="rect">
@@ -7003,7 +7003,7 @@
           <a:noFill/>
         </p:spPr>
         <p:txBody>
-          <a:bodyPr wrap="square" lIns="45720" rIns="45720" anchor="ctr">
+          <a:bodyPr wrap="square" lIns="0" rIns="45720" anchor="ctr">
             <a:spAutoFit/>
           </a:bodyPr>
           <a:lstStyle/>
@@ -7157,7 +7157,7 @@
         </p:nvSpPr>
         <p:spPr>
           <a:xfrm>
-            <a:off x="608400" y="1695600"/>
+            <a:off x="607859" y="1695600"/>
             <a:ext cx="36000" cy="3564000"/>
           </a:xfrm>
           <a:prstGeom prst="rect">
@@ -7186,7 +7186,7 @@
         </p:nvSpPr>
         <p:spPr>
           <a:xfrm>
-            <a:off x="849600" y="2545200"/>
+            <a:off x="849059" y="2545200"/>
             <a:ext cx="3240000" cy="957600"/>
           </a:xfrm>
           <a:prstGeom prst="rect">
@@ -7230,7 +7230,7 @@
         </p:nvSpPr>
         <p:spPr>
           <a:xfrm>
-            <a:off x="849600" y="4086000"/>
+            <a:off x="849059" y="4086000"/>
             <a:ext cx="3240000" cy="1126800"/>
           </a:xfrm>
           <a:prstGeom prst="rect">
@@ -7305,7 +7305,7 @@
         </p:nvSpPr>
         <p:spPr>
           <a:xfrm>
-            <a:off x="4359600" y="1695600"/>
+            <a:off x="4355459" y="1695600"/>
             <a:ext cx="36000" cy="3564000"/>
           </a:xfrm>
           <a:prstGeom prst="rect">
@@ -7334,7 +7334,7 @@
         </p:nvSpPr>
         <p:spPr>
           <a:xfrm>
-            <a:off x="4597200" y="2545200"/>
+            <a:off x="4596659" y="2545200"/>
             <a:ext cx="3240000" cy="957600"/>
           </a:xfrm>
           <a:prstGeom prst="rect">
@@ -7378,7 +7378,7 @@
         </p:nvSpPr>
         <p:spPr>
           <a:xfrm>
-            <a:off x="4597200" y="4086000"/>
+            <a:off x="4596659" y="4086000"/>
             <a:ext cx="3240000" cy="1126800"/>
           </a:xfrm>
           <a:prstGeom prst="rect">
@@ -7453,7 +7453,7 @@
         </p:nvSpPr>
         <p:spPr>
           <a:xfrm>
-            <a:off x="8110800" y="1695600"/>
+            <a:off x="8103059" y="1695600"/>
             <a:ext cx="36000" cy="3564000"/>
           </a:xfrm>
           <a:prstGeom prst="rect">
@@ -7482,7 +7482,7 @@
         </p:nvSpPr>
         <p:spPr>
           <a:xfrm>
-            <a:off x="8348400" y="2545200"/>
+            <a:off x="8344260" y="2545200"/>
             <a:ext cx="3240000" cy="957600"/>
           </a:xfrm>
           <a:prstGeom prst="rect">
@@ -7526,7 +7526,7 @@
         </p:nvSpPr>
         <p:spPr>
           <a:xfrm>
-            <a:off x="8348400" y="4086000"/>
+            <a:off x="8344260" y="4086000"/>
             <a:ext cx="3240000" cy="1126800"/>
           </a:xfrm>
           <a:prstGeom prst="rect">
@@ -7636,7 +7636,7 @@
           <a:noFill/>
         </p:spPr>
         <p:txBody>
-          <a:bodyPr wrap="square" lIns="45720" rIns="45720" anchor="ctr">
+          <a:bodyPr wrap="square" lIns="0" rIns="45720" anchor="ctr">
             <a:spAutoFit/>
           </a:bodyPr>
           <a:lstStyle/>
@@ -7790,7 +7790,7 @@
         </p:nvSpPr>
         <p:spPr>
           <a:xfrm rot="10800000">
-            <a:off x="1231200" y="1292400"/>
+            <a:off x="1336859" y="1292400"/>
             <a:ext cx="1080000" cy="1080000"/>
           </a:xfrm>
           <a:prstGeom prst="teardrop">
@@ -7819,7 +7819,7 @@
         </p:nvSpPr>
         <p:spPr>
           <a:xfrm>
-            <a:off x="521999" y="2480400"/>
+            <a:off x="627659" y="2480400"/>
             <a:ext cx="2498400" cy="309600"/>
           </a:xfrm>
           <a:prstGeom prst="rect">
@@ -7863,7 +7863,7 @@
         </p:nvSpPr>
         <p:spPr>
           <a:xfrm rot="10800000">
-            <a:off x="5529600" y="1314000"/>
+            <a:off x="5635260" y="1314000"/>
             <a:ext cx="1080000" cy="1080000"/>
           </a:xfrm>
           <a:prstGeom prst="teardrop">
@@ -7892,7 +7892,7 @@
         </p:nvSpPr>
         <p:spPr>
           <a:xfrm>
-            <a:off x="4820400" y="2502000"/>
+            <a:off x="4926060" y="2502000"/>
             <a:ext cx="2498400" cy="309600"/>
           </a:xfrm>
           <a:prstGeom prst="rect">
@@ -7936,7 +7936,7 @@
         </p:nvSpPr>
         <p:spPr>
           <a:xfrm rot="10800000">
-            <a:off x="9669600" y="1314000"/>
+            <a:off x="9775260" y="1314000"/>
             <a:ext cx="1080000" cy="1080000"/>
           </a:xfrm>
           <a:prstGeom prst="teardrop">
@@ -7965,7 +7965,7 @@
         </p:nvSpPr>
         <p:spPr>
           <a:xfrm>
-            <a:off x="8960400" y="2502000"/>
+            <a:off x="9066060" y="2502000"/>
             <a:ext cx="2498400" cy="309600"/>
           </a:xfrm>
           <a:prstGeom prst="rect">
@@ -8009,7 +8009,7 @@
         </p:nvSpPr>
         <p:spPr>
           <a:xfrm rot="10800000">
-            <a:off x="1245600" y="3927600"/>
+            <a:off x="1351259" y="3927600"/>
             <a:ext cx="1080000" cy="1080000"/>
           </a:xfrm>
           <a:prstGeom prst="teardrop">
@@ -8038,7 +8038,7 @@
         </p:nvSpPr>
         <p:spPr>
           <a:xfrm>
-            <a:off x="536399" y="5115600"/>
+            <a:off x="642059" y="5115600"/>
             <a:ext cx="2498400" cy="309600"/>
           </a:xfrm>
           <a:prstGeom prst="rect">
@@ -8082,7 +8082,7 @@
         </p:nvSpPr>
         <p:spPr>
           <a:xfrm rot="10800000">
-            <a:off x="5472000" y="3927600"/>
+            <a:off x="5577660" y="3927600"/>
             <a:ext cx="1080000" cy="1080000"/>
           </a:xfrm>
           <a:prstGeom prst="teardrop">
@@ -8111,7 +8111,7 @@
         </p:nvSpPr>
         <p:spPr>
           <a:xfrm>
-            <a:off x="4762799" y="5115600"/>
+            <a:off x="4868459" y="5115600"/>
             <a:ext cx="2498400" cy="309600"/>
           </a:xfrm>
           <a:prstGeom prst="rect">
@@ -8155,7 +8155,7 @@
         </p:nvSpPr>
         <p:spPr>
           <a:xfrm rot="10800000">
-            <a:off x="9561600" y="3927600"/>
+            <a:off x="9667259" y="3927600"/>
             <a:ext cx="1080000" cy="1080000"/>
           </a:xfrm>
           <a:prstGeom prst="teardrop">
@@ -8184,7 +8184,7 @@
         </p:nvSpPr>
         <p:spPr>
           <a:xfrm>
-            <a:off x="8852400" y="5115600"/>
+            <a:off x="8958060" y="5115600"/>
             <a:ext cx="2498400" cy="309600"/>
           </a:xfrm>
           <a:prstGeom prst="rect">
@@ -8355,8 +8355,8 @@
         </p:blipFill>
         <p:spPr>
           <a:xfrm>
-            <a:off x="3432059" y="1080000"/>
-            <a:ext cx="5328000" cy="4644000"/>
+            <a:off x="3131459" y="1080000"/>
+            <a:ext cx="5929200" cy="4860000"/>
           </a:xfrm>
           <a:prstGeom prst="rect">
             <a:avLst/>
@@ -8380,7 +8380,7 @@
           <a:noFill/>
         </p:spPr>
         <p:txBody>
-          <a:bodyPr wrap="square" lIns="45720" rIns="45720" anchor="ctr">
+          <a:bodyPr wrap="square" lIns="0" rIns="45720" anchor="ctr">
             <a:spAutoFit/>
           </a:bodyPr>
           <a:lstStyle/>
@@ -8899,7 +8899,7 @@
           <a:noFill/>
         </p:spPr>
         <p:txBody>
-          <a:bodyPr wrap="square" lIns="45720" rIns="45720" anchor="ctr">
+          <a:bodyPr wrap="square" lIns="0" rIns="45720" anchor="ctr">
             <a:spAutoFit/>
           </a:bodyPr>
           <a:lstStyle/>
@@ -9053,8 +9053,8 @@
         </p:nvCxnSpPr>
         <p:spPr>
           <a:xfrm>
-            <a:off x="939600" y="2916000"/>
-            <a:ext cx="2458800" cy="0"/>
+            <a:off x="710459" y="2462400"/>
+            <a:ext cx="2502000" cy="0"/>
           </a:xfrm>
           <a:prstGeom prst="line">
             <a:avLst/>
@@ -9074,8 +9074,8 @@
         </p:nvCxnSpPr>
         <p:spPr>
           <a:xfrm>
-            <a:off x="3729600" y="2916000"/>
-            <a:ext cx="2455200" cy="0"/>
+            <a:off x="3500460" y="2462400"/>
+            <a:ext cx="2502000" cy="0"/>
           </a:xfrm>
           <a:prstGeom prst="line">
             <a:avLst/>
@@ -9095,8 +9095,8 @@
         </p:nvCxnSpPr>
         <p:spPr>
           <a:xfrm>
-            <a:off x="6516000" y="2916000"/>
-            <a:ext cx="2455200" cy="0"/>
+            <a:off x="6290459" y="2462400"/>
+            <a:ext cx="2502001" cy="0"/>
           </a:xfrm>
           <a:prstGeom prst="line">
             <a:avLst/>
@@ -9116,8 +9116,8 @@
         </p:nvSpPr>
         <p:spPr>
           <a:xfrm>
-            <a:off x="608400" y="2750400"/>
-            <a:ext cx="331200" cy="331200"/>
+            <a:off x="566459" y="2390400"/>
+            <a:ext cx="144000" cy="144000"/>
           </a:xfrm>
           <a:prstGeom prst="ellipse">
             <a:avLst/>
@@ -9140,23 +9140,26 @@
       <p:sp>
         <p:nvSpPr>
           <p:cNvPr id="11" name="S05_STEP_1_NUMBER"/>
-          <p:cNvSpPr txBox="1"/>
-          <p:nvPr/>
-        </p:nvSpPr>
-        <p:spPr>
-          <a:xfrm>
-            <a:off x="608400" y="2750400"/>
+          <p:cNvSpPr/>
+          <p:nvPr/>
+        </p:nvSpPr>
+        <p:spPr>
+          <a:xfrm>
+            <a:off x="566459" y="2750400"/>
             <a:ext cx="331200" cy="331200"/>
           </a:xfrm>
-          <a:prstGeom prst="rect">
-            <a:avLst/>
-          </a:prstGeom>
-          <a:noFill/>
-        </p:spPr>
-        <p:txBody>
-          <a:bodyPr wrap="square" lIns="45720" rIns="45720" anchor="ctr">
-            <a:spAutoFit/>
-          </a:bodyPr>
+          <a:prstGeom prst="ellipse">
+            <a:avLst/>
+          </a:prstGeom>
+          <a:solidFill>
+            <a:srgbClr val="6A5D79"/>
+          </a:solidFill>
+          <a:ln>
+            <a:noFill/>
+          </a:ln>
+        </p:spPr>
+        <p:txBody>
+          <a:bodyPr rtlCol="0" anchor="ctr" wrap="square" lIns="0" rIns="0" tIns="0" bIns="0"/>
           <a:lstStyle/>
           <a:p>
             <a:pPr algn="ctr"/>
@@ -9180,7 +9183,7 @@
         </p:nvSpPr>
         <p:spPr>
           <a:xfrm>
-            <a:off x="608400" y="3193199"/>
+            <a:off x="566459" y="3193199"/>
             <a:ext cx="2689200" cy="223200"/>
           </a:xfrm>
           <a:prstGeom prst="rect">
@@ -9224,7 +9227,7 @@
         </p:nvSpPr>
         <p:spPr>
           <a:xfrm>
-            <a:off x="608400" y="3456000"/>
+            <a:off x="566459" y="3456000"/>
             <a:ext cx="2689200" cy="288000"/>
           </a:xfrm>
           <a:prstGeom prst="rect">
@@ -9259,7 +9262,7 @@
         </p:nvSpPr>
         <p:spPr>
           <a:xfrm>
-            <a:off x="608400" y="3794399"/>
+            <a:off x="566459" y="3794399"/>
             <a:ext cx="2689200" cy="694800"/>
           </a:xfrm>
           <a:prstGeom prst="rect">
@@ -9334,8 +9337,8 @@
         </p:nvSpPr>
         <p:spPr>
           <a:xfrm>
-            <a:off x="3398400" y="2750400"/>
-            <a:ext cx="331200" cy="331200"/>
+            <a:off x="3356459" y="2390400"/>
+            <a:ext cx="144000" cy="144000"/>
           </a:xfrm>
           <a:prstGeom prst="ellipse">
             <a:avLst/>
@@ -9358,23 +9361,26 @@
       <p:sp>
         <p:nvSpPr>
           <p:cNvPr id="16" name="S05_STEP_2_NUMBER"/>
-          <p:cNvSpPr txBox="1"/>
-          <p:nvPr/>
-        </p:nvSpPr>
-        <p:spPr>
-          <a:xfrm>
-            <a:off x="3398400" y="2750400"/>
+          <p:cNvSpPr/>
+          <p:nvPr/>
+        </p:nvSpPr>
+        <p:spPr>
+          <a:xfrm>
+            <a:off x="3356459" y="2750400"/>
             <a:ext cx="331200" cy="331200"/>
           </a:xfrm>
-          <a:prstGeom prst="rect">
-            <a:avLst/>
-          </a:prstGeom>
-          <a:noFill/>
-        </p:spPr>
-        <p:txBody>
-          <a:bodyPr wrap="square" lIns="45720" rIns="45720" anchor="ctr">
-            <a:spAutoFit/>
-          </a:bodyPr>
+          <a:prstGeom prst="ellipse">
+            <a:avLst/>
+          </a:prstGeom>
+          <a:solidFill>
+            <a:srgbClr val="A25871"/>
+          </a:solidFill>
+          <a:ln>
+            <a:noFill/>
+          </a:ln>
+        </p:spPr>
+        <p:txBody>
+          <a:bodyPr rtlCol="0" anchor="ctr" wrap="square" lIns="0" rIns="0" tIns="0" bIns="0"/>
           <a:lstStyle/>
           <a:p>
             <a:pPr algn="ctr"/>
@@ -9398,7 +9404,7 @@
         </p:nvSpPr>
         <p:spPr>
           <a:xfrm>
-            <a:off x="3398400" y="3193199"/>
+            <a:off x="3356459" y="3193199"/>
             <a:ext cx="2689200" cy="223200"/>
           </a:xfrm>
           <a:prstGeom prst="rect">
@@ -9442,7 +9448,7 @@
         </p:nvSpPr>
         <p:spPr>
           <a:xfrm>
-            <a:off x="3398400" y="3456000"/>
+            <a:off x="3356459" y="3456000"/>
             <a:ext cx="2689200" cy="288000"/>
           </a:xfrm>
           <a:prstGeom prst="rect">
@@ -9477,7 +9483,7 @@
         </p:nvSpPr>
         <p:spPr>
           <a:xfrm>
-            <a:off x="3398400" y="3794399"/>
+            <a:off x="3356459" y="3794399"/>
             <a:ext cx="2689200" cy="694800"/>
           </a:xfrm>
           <a:prstGeom prst="rect">
@@ -9552,8 +9558,8 @@
         </p:nvSpPr>
         <p:spPr>
           <a:xfrm>
-            <a:off x="6184800" y="2750400"/>
-            <a:ext cx="331200" cy="331200"/>
+            <a:off x="6146460" y="2390400"/>
+            <a:ext cx="144000" cy="144000"/>
           </a:xfrm>
           <a:prstGeom prst="ellipse">
             <a:avLst/>
@@ -9576,23 +9582,26 @@
       <p:sp>
         <p:nvSpPr>
           <p:cNvPr id="21" name="S05_STEP_3_NUMBER"/>
-          <p:cNvSpPr txBox="1"/>
-          <p:nvPr/>
-        </p:nvSpPr>
-        <p:spPr>
-          <a:xfrm>
-            <a:off x="6184800" y="2750400"/>
+          <p:cNvSpPr/>
+          <p:nvPr/>
+        </p:nvSpPr>
+        <p:spPr>
+          <a:xfrm>
+            <a:off x="6146460" y="2750400"/>
             <a:ext cx="331200" cy="331200"/>
           </a:xfrm>
-          <a:prstGeom prst="rect">
-            <a:avLst/>
-          </a:prstGeom>
-          <a:noFill/>
-        </p:spPr>
-        <p:txBody>
-          <a:bodyPr wrap="square" lIns="45720" rIns="45720" anchor="ctr">
-            <a:spAutoFit/>
-          </a:bodyPr>
+          <a:prstGeom prst="ellipse">
+            <a:avLst/>
+          </a:prstGeom>
+          <a:solidFill>
+            <a:srgbClr val="D4737A"/>
+          </a:solidFill>
+          <a:ln>
+            <a:noFill/>
+          </a:ln>
+        </p:spPr>
+        <p:txBody>
+          <a:bodyPr rtlCol="0" anchor="ctr" wrap="square" lIns="0" rIns="0" tIns="0" bIns="0"/>
           <a:lstStyle/>
           <a:p>
             <a:pPr algn="ctr"/>
@@ -9616,7 +9625,7 @@
         </p:nvSpPr>
         <p:spPr>
           <a:xfrm>
-            <a:off x="6184800" y="3193199"/>
+            <a:off x="6146460" y="3193199"/>
             <a:ext cx="2689200" cy="223200"/>
           </a:xfrm>
           <a:prstGeom prst="rect">
@@ -9660,7 +9669,7 @@
         </p:nvSpPr>
         <p:spPr>
           <a:xfrm>
-            <a:off x="6184800" y="3456000"/>
+            <a:off x="6146460" y="3456000"/>
             <a:ext cx="2689200" cy="288000"/>
           </a:xfrm>
           <a:prstGeom prst="rect">
@@ -9695,7 +9704,7 @@
         </p:nvSpPr>
         <p:spPr>
           <a:xfrm>
-            <a:off x="6184800" y="3794399"/>
+            <a:off x="6146460" y="3794399"/>
             <a:ext cx="2689200" cy="694800"/>
           </a:xfrm>
           <a:prstGeom prst="rect">
@@ -9770,8 +9779,8 @@
         </p:nvSpPr>
         <p:spPr>
           <a:xfrm>
-            <a:off x="8971200" y="2750400"/>
-            <a:ext cx="331200" cy="331200"/>
+            <a:off x="8936460" y="2390400"/>
+            <a:ext cx="144000" cy="144000"/>
           </a:xfrm>
           <a:prstGeom prst="ellipse">
             <a:avLst/>
@@ -9794,23 +9803,26 @@
       <p:sp>
         <p:nvSpPr>
           <p:cNvPr id="26" name="S05_STEP_4_NUMBER"/>
-          <p:cNvSpPr txBox="1"/>
-          <p:nvPr/>
-        </p:nvSpPr>
-        <p:spPr>
-          <a:xfrm>
-            <a:off x="8971200" y="2750400"/>
+          <p:cNvSpPr/>
+          <p:nvPr/>
+        </p:nvSpPr>
+        <p:spPr>
+          <a:xfrm>
+            <a:off x="8936460" y="2750400"/>
             <a:ext cx="331200" cy="331200"/>
           </a:xfrm>
-          <a:prstGeom prst="rect">
-            <a:avLst/>
-          </a:prstGeom>
-          <a:noFill/>
-        </p:spPr>
-        <p:txBody>
-          <a:bodyPr wrap="square" lIns="45720" rIns="45720" anchor="ctr">
-            <a:spAutoFit/>
-          </a:bodyPr>
+          <a:prstGeom prst="ellipse">
+            <a:avLst/>
+          </a:prstGeom>
+          <a:solidFill>
+            <a:srgbClr val="FDA85B"/>
+          </a:solidFill>
+          <a:ln>
+            <a:noFill/>
+          </a:ln>
+        </p:spPr>
+        <p:txBody>
+          <a:bodyPr rtlCol="0" anchor="ctr" wrap="square" lIns="0" rIns="0" tIns="0" bIns="0"/>
           <a:lstStyle/>
           <a:p>
             <a:pPr algn="ctr"/>
@@ -9834,7 +9846,7 @@
         </p:nvSpPr>
         <p:spPr>
           <a:xfrm>
-            <a:off x="8971200" y="3193199"/>
+            <a:off x="8936460" y="3193199"/>
             <a:ext cx="2689200" cy="223200"/>
           </a:xfrm>
           <a:prstGeom prst="rect">
@@ -9878,7 +9890,7 @@
         </p:nvSpPr>
         <p:spPr>
           <a:xfrm>
-            <a:off x="8971200" y="3456000"/>
+            <a:off x="8936460" y="3456000"/>
             <a:ext cx="2689200" cy="288000"/>
           </a:xfrm>
           <a:prstGeom prst="rect">
@@ -9913,7 +9925,7 @@
         </p:nvSpPr>
         <p:spPr>
           <a:xfrm>
-            <a:off x="8971200" y="3794399"/>
+            <a:off x="8936460" y="3794399"/>
             <a:ext cx="2689200" cy="694800"/>
           </a:xfrm>
           <a:prstGeom prst="rect">
@@ -10023,7 +10035,7 @@
           <a:noFill/>
         </p:spPr>
         <p:txBody>
-          <a:bodyPr wrap="square" lIns="45720" rIns="45720" anchor="ctr">
+          <a:bodyPr wrap="square" lIns="0" rIns="45720" anchor="ctr">
             <a:spAutoFit/>
           </a:bodyPr>
           <a:lstStyle/>
@@ -10177,7 +10189,7 @@
         </p:nvSpPr>
         <p:spPr>
           <a:xfrm>
-            <a:off x="547200" y="1897199"/>
+            <a:off x="375659" y="1897199"/>
             <a:ext cx="3625200" cy="457200"/>
           </a:xfrm>
           <a:prstGeom prst="rect">
@@ -10206,7 +10218,7 @@
         </p:nvSpPr>
         <p:spPr>
           <a:xfrm>
-            <a:off x="547200" y="1897199"/>
+            <a:off x="375659" y="1897199"/>
             <a:ext cx="3625200" cy="457200"/>
           </a:xfrm>
           <a:prstGeom prst="rect">
@@ -10241,7 +10253,7 @@
         </p:nvSpPr>
         <p:spPr>
           <a:xfrm>
-            <a:off x="4172400" y="1897199"/>
+            <a:off x="4000859" y="1897199"/>
             <a:ext cx="2095200" cy="457200"/>
           </a:xfrm>
           <a:prstGeom prst="rect">
@@ -10270,7 +10282,7 @@
         </p:nvSpPr>
         <p:spPr>
           <a:xfrm>
-            <a:off x="4172400" y="1897199"/>
+            <a:off x="4000859" y="1897199"/>
             <a:ext cx="2095200" cy="457200"/>
           </a:xfrm>
           <a:prstGeom prst="rect">
@@ -10305,7 +10317,7 @@
         </p:nvSpPr>
         <p:spPr>
           <a:xfrm>
-            <a:off x="6256800" y="1897199"/>
+            <a:off x="6096059" y="1897199"/>
             <a:ext cx="1764000" cy="457200"/>
           </a:xfrm>
           <a:prstGeom prst="rect">
@@ -10334,7 +10346,7 @@
         </p:nvSpPr>
         <p:spPr>
           <a:xfrm>
-            <a:off x="6256800" y="1897199"/>
+            <a:off x="6096059" y="1897199"/>
             <a:ext cx="1764000" cy="457200"/>
           </a:xfrm>
           <a:prstGeom prst="rect">
@@ -10369,7 +10381,7 @@
         </p:nvSpPr>
         <p:spPr>
           <a:xfrm>
-            <a:off x="8013600" y="1897199"/>
+            <a:off x="7860060" y="1897199"/>
             <a:ext cx="2329200" cy="457200"/>
           </a:xfrm>
           <a:prstGeom prst="rect">
@@ -10398,7 +10410,7 @@
         </p:nvSpPr>
         <p:spPr>
           <a:xfrm>
-            <a:off x="8013600" y="1897199"/>
+            <a:off x="7860060" y="1897199"/>
             <a:ext cx="2329200" cy="457200"/>
           </a:xfrm>
           <a:prstGeom prst="rect">
@@ -10433,7 +10445,7 @@
         </p:nvSpPr>
         <p:spPr>
           <a:xfrm>
-            <a:off x="10332000" y="1897199"/>
+            <a:off x="10189260" y="1897199"/>
             <a:ext cx="1627199" cy="457200"/>
           </a:xfrm>
           <a:prstGeom prst="rect">
@@ -10462,7 +10474,7 @@
         </p:nvSpPr>
         <p:spPr>
           <a:xfrm>
-            <a:off x="10332000" y="1897199"/>
+            <a:off x="10189260" y="1897199"/>
             <a:ext cx="1627199" cy="457200"/>
           </a:xfrm>
           <a:prstGeom prst="rect">
@@ -10497,8 +10509,8 @@
         </p:nvSpPr>
         <p:spPr>
           <a:xfrm>
-            <a:off x="547200" y="2361600"/>
-            <a:ext cx="11383200" cy="503999"/>
+            <a:off x="375659" y="2361600"/>
+            <a:ext cx="11440800" cy="503999"/>
           </a:xfrm>
           <a:prstGeom prst="rect">
             <a:avLst/>
@@ -10526,7 +10538,7 @@
         </p:nvSpPr>
         <p:spPr>
           <a:xfrm>
-            <a:off x="547200" y="2361600"/>
+            <a:off x="375659" y="2361600"/>
             <a:ext cx="3625200" cy="503999"/>
           </a:xfrm>
           <a:prstGeom prst="rect">
@@ -10570,8 +10582,8 @@
         </p:nvCxnSpPr>
         <p:spPr>
           <a:xfrm>
-            <a:off x="547200" y="2865599"/>
-            <a:ext cx="11383200" cy="0"/>
+            <a:off x="375659" y="2865599"/>
+            <a:ext cx="11440800" cy="0"/>
           </a:xfrm>
           <a:prstGeom prst="line">
             <a:avLst/>
@@ -10591,7 +10603,7 @@
         </p:nvSpPr>
         <p:spPr>
           <a:xfrm>
-            <a:off x="4172400" y="2361600"/>
+            <a:off x="4000859" y="2361600"/>
             <a:ext cx="2095200" cy="503999"/>
           </a:xfrm>
           <a:prstGeom prst="rect">
@@ -10626,8 +10638,8 @@
         </p:nvCxnSpPr>
         <p:spPr>
           <a:xfrm>
-            <a:off x="547200" y="2865599"/>
-            <a:ext cx="11383200" cy="0"/>
+            <a:off x="375659" y="2865599"/>
+            <a:ext cx="11440800" cy="0"/>
           </a:xfrm>
           <a:prstGeom prst="line">
             <a:avLst/>
@@ -10647,7 +10659,7 @@
         </p:nvSpPr>
         <p:spPr>
           <a:xfrm>
-            <a:off x="6256800" y="2361600"/>
+            <a:off x="6096059" y="2361600"/>
             <a:ext cx="1764000" cy="503999"/>
           </a:xfrm>
           <a:prstGeom prst="rect">
@@ -10682,8 +10694,8 @@
         </p:nvCxnSpPr>
         <p:spPr>
           <a:xfrm>
-            <a:off x="547200" y="2865599"/>
-            <a:ext cx="11383200" cy="0"/>
+            <a:off x="375659" y="2865599"/>
+            <a:ext cx="11440800" cy="0"/>
           </a:xfrm>
           <a:prstGeom prst="line">
             <a:avLst/>
@@ -10703,7 +10715,7 @@
         </p:nvSpPr>
         <p:spPr>
           <a:xfrm>
-            <a:off x="8013600" y="2361600"/>
+            <a:off x="7860060" y="2361600"/>
             <a:ext cx="2329200" cy="503999"/>
           </a:xfrm>
           <a:prstGeom prst="rect">
@@ -10738,8 +10750,8 @@
         </p:nvCxnSpPr>
         <p:spPr>
           <a:xfrm>
-            <a:off x="547200" y="2865599"/>
-            <a:ext cx="11383200" cy="0"/>
+            <a:off x="375659" y="2865599"/>
+            <a:ext cx="11440800" cy="0"/>
           </a:xfrm>
           <a:prstGeom prst="line">
             <a:avLst/>
@@ -10759,7 +10771,7 @@
         </p:nvSpPr>
         <p:spPr>
           <a:xfrm>
-            <a:off x="10332000" y="2361600"/>
+            <a:off x="10189260" y="2361600"/>
             <a:ext cx="1627199" cy="503999"/>
           </a:xfrm>
           <a:prstGeom prst="rect">
@@ -10794,8 +10806,8 @@
         </p:nvCxnSpPr>
         <p:spPr>
           <a:xfrm>
-            <a:off x="547200" y="2865599"/>
-            <a:ext cx="11383200" cy="0"/>
+            <a:off x="375659" y="2865599"/>
+            <a:ext cx="11440800" cy="0"/>
           </a:xfrm>
           <a:prstGeom prst="line">
             <a:avLst/>
@@ -10815,8 +10827,8 @@
         </p:nvSpPr>
         <p:spPr>
           <a:xfrm>
-            <a:off x="547200" y="2869200"/>
-            <a:ext cx="11383200" cy="503999"/>
+            <a:off x="375659" y="2869200"/>
+            <a:ext cx="11440800" cy="503999"/>
           </a:xfrm>
           <a:prstGeom prst="rect">
             <a:avLst/>
@@ -10844,7 +10856,7 @@
         </p:nvSpPr>
         <p:spPr>
           <a:xfrm>
-            <a:off x="547200" y="2869200"/>
+            <a:off x="375659" y="2869200"/>
             <a:ext cx="3625200" cy="503999"/>
           </a:xfrm>
           <a:prstGeom prst="rect">
@@ -10888,8 +10900,8 @@
         </p:nvCxnSpPr>
         <p:spPr>
           <a:xfrm>
-            <a:off x="547200" y="3373199"/>
-            <a:ext cx="11383200" cy="0"/>
+            <a:off x="375659" y="3373199"/>
+            <a:ext cx="11440800" cy="0"/>
           </a:xfrm>
           <a:prstGeom prst="line">
             <a:avLst/>
@@ -10909,7 +10921,7 @@
         </p:nvSpPr>
         <p:spPr>
           <a:xfrm>
-            <a:off x="4172400" y="2869200"/>
+            <a:off x="4000859" y="2869200"/>
             <a:ext cx="2095200" cy="503999"/>
           </a:xfrm>
           <a:prstGeom prst="rect">
@@ -10944,8 +10956,8 @@
         </p:nvCxnSpPr>
         <p:spPr>
           <a:xfrm>
-            <a:off x="547200" y="3373199"/>
-            <a:ext cx="11383200" cy="0"/>
+            <a:off x="375659" y="3373199"/>
+            <a:ext cx="11440800" cy="0"/>
           </a:xfrm>
           <a:prstGeom prst="line">
             <a:avLst/>
@@ -10965,7 +10977,7 @@
         </p:nvSpPr>
         <p:spPr>
           <a:xfrm>
-            <a:off x="6256800" y="2869200"/>
+            <a:off x="6096059" y="2869200"/>
             <a:ext cx="1764000" cy="503999"/>
           </a:xfrm>
           <a:prstGeom prst="rect">
@@ -11000,8 +11012,8 @@
         </p:nvCxnSpPr>
         <p:spPr>
           <a:xfrm>
-            <a:off x="547200" y="3373199"/>
-            <a:ext cx="11383200" cy="0"/>
+            <a:off x="375659" y="3373199"/>
+            <a:ext cx="11440800" cy="0"/>
           </a:xfrm>
           <a:prstGeom prst="line">
             <a:avLst/>
@@ -11021,7 +11033,7 @@
         </p:nvSpPr>
         <p:spPr>
           <a:xfrm>
-            <a:off x="8013600" y="2869200"/>
+            <a:off x="7860060" y="2869200"/>
             <a:ext cx="2329200" cy="503999"/>
           </a:xfrm>
           <a:prstGeom prst="rect">
@@ -11056,8 +11068,8 @@
         </p:nvCxnSpPr>
         <p:spPr>
           <a:xfrm>
-            <a:off x="547200" y="3373199"/>
-            <a:ext cx="11383200" cy="0"/>
+            <a:off x="375659" y="3373199"/>
+            <a:ext cx="11440800" cy="0"/>
           </a:xfrm>
           <a:prstGeom prst="line">
             <a:avLst/>
@@ -11077,7 +11089,7 @@
         </p:nvSpPr>
         <p:spPr>
           <a:xfrm>
-            <a:off x="10332000" y="2869200"/>
+            <a:off x="10189260" y="2869200"/>
             <a:ext cx="1627199" cy="503999"/>
           </a:xfrm>
           <a:prstGeom prst="rect">
@@ -11112,8 +11124,8 @@
         </p:nvCxnSpPr>
         <p:spPr>
           <a:xfrm>
-            <a:off x="547200" y="3373199"/>
-            <a:ext cx="11383200" cy="0"/>
+            <a:off x="375659" y="3373199"/>
+            <a:ext cx="11440800" cy="0"/>
           </a:xfrm>
           <a:prstGeom prst="line">
             <a:avLst/>
@@ -11133,8 +11145,8 @@
         </p:nvSpPr>
         <p:spPr>
           <a:xfrm>
-            <a:off x="547200" y="3376800"/>
-            <a:ext cx="11383200" cy="503999"/>
+            <a:off x="375659" y="3376800"/>
+            <a:ext cx="11440800" cy="503999"/>
           </a:xfrm>
           <a:prstGeom prst="rect">
             <a:avLst/>
@@ -11162,7 +11174,7 @@
         </p:nvSpPr>
         <p:spPr>
           <a:xfrm>
-            <a:off x="547200" y="3376800"/>
+            <a:off x="375659" y="3376800"/>
             <a:ext cx="3625200" cy="503999"/>
           </a:xfrm>
           <a:prstGeom prst="rect">
@@ -11206,8 +11218,8 @@
         </p:nvCxnSpPr>
         <p:spPr>
           <a:xfrm>
-            <a:off x="547200" y="3880800"/>
-            <a:ext cx="11383200" cy="0"/>
+            <a:off x="375659" y="3880800"/>
+            <a:ext cx="11440800" cy="0"/>
           </a:xfrm>
           <a:prstGeom prst="line">
             <a:avLst/>
@@ -11227,7 +11239,7 @@
         </p:nvSpPr>
         <p:spPr>
           <a:xfrm>
-            <a:off x="4172400" y="3376800"/>
+            <a:off x="4000859" y="3376800"/>
             <a:ext cx="2095200" cy="503999"/>
           </a:xfrm>
           <a:prstGeom prst="rect">
@@ -11262,8 +11274,8 @@
         </p:nvCxnSpPr>
         <p:spPr>
           <a:xfrm>
-            <a:off x="547200" y="3880800"/>
-            <a:ext cx="11383200" cy="0"/>
+            <a:off x="375659" y="3880800"/>
+            <a:ext cx="11440800" cy="0"/>
           </a:xfrm>
           <a:prstGeom prst="line">
             <a:avLst/>
@@ -11283,7 +11295,7 @@
         </p:nvSpPr>
         <p:spPr>
           <a:xfrm>
-            <a:off x="6256800" y="3376800"/>
+            <a:off x="6096059" y="3376800"/>
             <a:ext cx="1764000" cy="503999"/>
           </a:xfrm>
           <a:prstGeom prst="rect">
@@ -11318,8 +11330,8 @@
         </p:nvCxnSpPr>
         <p:spPr>
           <a:xfrm>
-            <a:off x="547200" y="3880800"/>
-            <a:ext cx="11383200" cy="0"/>
+            <a:off x="375659" y="3880800"/>
+            <a:ext cx="11440800" cy="0"/>
           </a:xfrm>
           <a:prstGeom prst="line">
             <a:avLst/>
@@ -11339,7 +11351,7 @@
         </p:nvSpPr>
         <p:spPr>
           <a:xfrm>
-            <a:off x="8013600" y="3376800"/>
+            <a:off x="7860060" y="3376800"/>
             <a:ext cx="2329200" cy="503999"/>
           </a:xfrm>
           <a:prstGeom prst="rect">
@@ -11374,8 +11386,8 @@
         </p:nvCxnSpPr>
         <p:spPr>
           <a:xfrm>
-            <a:off x="547200" y="3880800"/>
-            <a:ext cx="11383200" cy="0"/>
+            <a:off x="375659" y="3880800"/>
+            <a:ext cx="11440800" cy="0"/>
           </a:xfrm>
           <a:prstGeom prst="line">
             <a:avLst/>
@@ -11395,7 +11407,7 @@
         </p:nvSpPr>
         <p:spPr>
           <a:xfrm>
-            <a:off x="10332000" y="3376800"/>
+            <a:off x="10189260" y="3376800"/>
             <a:ext cx="1627199" cy="503999"/>
           </a:xfrm>
           <a:prstGeom prst="rect">
@@ -11430,8 +11442,8 @@
         </p:nvCxnSpPr>
         <p:spPr>
           <a:xfrm>
-            <a:off x="547200" y="3880800"/>
-            <a:ext cx="11383200" cy="0"/>
+            <a:off x="375659" y="3880800"/>
+            <a:ext cx="11440800" cy="0"/>
           </a:xfrm>
           <a:prstGeom prst="line">
             <a:avLst/>
@@ -11451,8 +11463,8 @@
         </p:nvSpPr>
         <p:spPr>
           <a:xfrm>
-            <a:off x="547200" y="3884399"/>
-            <a:ext cx="11383200" cy="503999"/>
+            <a:off x="375659" y="3884399"/>
+            <a:ext cx="11440800" cy="503999"/>
           </a:xfrm>
           <a:prstGeom prst="rect">
             <a:avLst/>
@@ -11480,7 +11492,7 @@
         </p:nvSpPr>
         <p:spPr>
           <a:xfrm>
-            <a:off x="547200" y="3884399"/>
+            <a:off x="375659" y="3884399"/>
             <a:ext cx="3625200" cy="503999"/>
           </a:xfrm>
           <a:prstGeom prst="rect">
@@ -11524,8 +11536,8 @@
         </p:nvCxnSpPr>
         <p:spPr>
           <a:xfrm>
-            <a:off x="547200" y="4388400"/>
-            <a:ext cx="11383200" cy="0"/>
+            <a:off x="375659" y="4388400"/>
+            <a:ext cx="11440800" cy="0"/>
           </a:xfrm>
           <a:prstGeom prst="line">
             <a:avLst/>
@@ -11545,7 +11557,7 @@
         </p:nvSpPr>
         <p:spPr>
           <a:xfrm>
-            <a:off x="4172400" y="3884399"/>
+            <a:off x="4000859" y="3884399"/>
             <a:ext cx="2095200" cy="503999"/>
           </a:xfrm>
           <a:prstGeom prst="rect">
@@ -11580,8 +11592,8 @@
         </p:nvCxnSpPr>
         <p:spPr>
           <a:xfrm>
-            <a:off x="547200" y="4388400"/>
-            <a:ext cx="11383200" cy="0"/>
+            <a:off x="375659" y="4388400"/>
+            <a:ext cx="11440800" cy="0"/>
           </a:xfrm>
           <a:prstGeom prst="line">
             <a:avLst/>
@@ -11601,7 +11613,7 @@
         </p:nvSpPr>
         <p:spPr>
           <a:xfrm>
-            <a:off x="6256800" y="3884399"/>
+            <a:off x="6096059" y="3884399"/>
             <a:ext cx="1764000" cy="503999"/>
           </a:xfrm>
           <a:prstGeom prst="rect">
@@ -11636,8 +11648,8 @@
         </p:nvCxnSpPr>
         <p:spPr>
           <a:xfrm>
-            <a:off x="547200" y="4388400"/>
-            <a:ext cx="11383200" cy="0"/>
+            <a:off x="375659" y="4388400"/>
+            <a:ext cx="11440800" cy="0"/>
           </a:xfrm>
           <a:prstGeom prst="line">
             <a:avLst/>
@@ -11657,7 +11669,7 @@
         </p:nvSpPr>
         <p:spPr>
           <a:xfrm>
-            <a:off x="8013600" y="3884399"/>
+            <a:off x="7860060" y="3884399"/>
             <a:ext cx="2329200" cy="503999"/>
           </a:xfrm>
           <a:prstGeom prst="rect">
@@ -11692,8 +11704,8 @@
         </p:nvCxnSpPr>
         <p:spPr>
           <a:xfrm>
-            <a:off x="547200" y="4388400"/>
-            <a:ext cx="11383200" cy="0"/>
+            <a:off x="375659" y="4388400"/>
+            <a:ext cx="11440800" cy="0"/>
           </a:xfrm>
           <a:prstGeom prst="line">
             <a:avLst/>
@@ -11713,7 +11725,7 @@
         </p:nvSpPr>
         <p:spPr>
           <a:xfrm>
-            <a:off x="10332000" y="3884399"/>
+            <a:off x="10189260" y="3884399"/>
             <a:ext cx="1627199" cy="503999"/>
           </a:xfrm>
           <a:prstGeom prst="rect">
@@ -11748,8 +11760,8 @@
         </p:nvCxnSpPr>
         <p:spPr>
           <a:xfrm>
-            <a:off x="547200" y="4388400"/>
-            <a:ext cx="11383200" cy="0"/>
+            <a:off x="375659" y="4388400"/>
+            <a:ext cx="11440800" cy="0"/>
           </a:xfrm>
           <a:prstGeom prst="line">
             <a:avLst/>
@@ -11897,7 +11909,7 @@
           <a:noFill/>
         </p:spPr>
         <p:txBody>
-          <a:bodyPr wrap="square" lIns="45720" rIns="45720" anchor="ctr">
+          <a:bodyPr wrap="square" lIns="0" rIns="45720" anchor="ctr">
             <a:spAutoFit/>
           </a:bodyPr>
           <a:lstStyle/>
@@ -12051,7 +12063,7 @@
         </p:nvSpPr>
         <p:spPr>
           <a:xfrm>
-            <a:off x="381600" y="1335600"/>
+            <a:off x="498059" y="1335600"/>
             <a:ext cx="1800000" cy="1598400"/>
           </a:xfrm>
           <a:prstGeom prst="roundRect">
@@ -12082,7 +12094,7 @@
         </p:nvSpPr>
         <p:spPr>
           <a:xfrm>
-            <a:off x="421200" y="1720800"/>
+            <a:off x="537659" y="1720800"/>
             <a:ext cx="1728000" cy="648000"/>
           </a:xfrm>
           <a:prstGeom prst="rect">
@@ -12117,7 +12129,7 @@
         </p:nvSpPr>
         <p:spPr>
           <a:xfrm>
-            <a:off x="421200" y="2394000"/>
+            <a:off x="537659" y="2394000"/>
             <a:ext cx="1728000" cy="262800"/>
           </a:xfrm>
           <a:prstGeom prst="rect">
@@ -12161,7 +12173,7 @@
         </p:nvSpPr>
         <p:spPr>
           <a:xfrm>
-            <a:off x="2264400" y="1335600"/>
+            <a:off x="2377259" y="1335600"/>
             <a:ext cx="1800000" cy="1598400"/>
           </a:xfrm>
           <a:prstGeom prst="roundRect">
@@ -12192,7 +12204,7 @@
         </p:nvSpPr>
         <p:spPr>
           <a:xfrm>
-            <a:off x="2304000" y="1720800"/>
+            <a:off x="2416859" y="1720800"/>
             <a:ext cx="1728000" cy="648000"/>
           </a:xfrm>
           <a:prstGeom prst="rect">
@@ -12227,7 +12239,7 @@
         </p:nvSpPr>
         <p:spPr>
           <a:xfrm>
-            <a:off x="2304000" y="2394000"/>
+            <a:off x="2416859" y="2394000"/>
             <a:ext cx="1728000" cy="262800"/>
           </a:xfrm>
           <a:prstGeom prst="rect">
@@ -12271,7 +12283,7 @@
         </p:nvSpPr>
         <p:spPr>
           <a:xfrm>
-            <a:off x="4143600" y="1335600"/>
+            <a:off x="4256459" y="1335600"/>
             <a:ext cx="1800000" cy="1598400"/>
           </a:xfrm>
           <a:prstGeom prst="roundRect">
@@ -12302,7 +12314,7 @@
         </p:nvSpPr>
         <p:spPr>
           <a:xfrm>
-            <a:off x="4183199" y="1720800"/>
+            <a:off x="4296059" y="1720800"/>
             <a:ext cx="1728000" cy="648000"/>
           </a:xfrm>
           <a:prstGeom prst="rect">
@@ -12337,7 +12349,7 @@
         </p:nvSpPr>
         <p:spPr>
           <a:xfrm>
-            <a:off x="4183199" y="2394000"/>
+            <a:off x="4296059" y="2394000"/>
             <a:ext cx="1728000" cy="262800"/>
           </a:xfrm>
           <a:prstGeom prst="rect">
@@ -12372,7 +12384,7 @@
         </p:nvSpPr>
         <p:spPr>
           <a:xfrm>
-            <a:off x="6022800" y="1335600"/>
+            <a:off x="6135659" y="1335600"/>
             <a:ext cx="1800000" cy="1598400"/>
           </a:xfrm>
           <a:prstGeom prst="roundRect">
@@ -12403,7 +12415,7 @@
         </p:nvSpPr>
         <p:spPr>
           <a:xfrm>
-            <a:off x="6062400" y="1720800"/>
+            <a:off x="6175259" y="1720800"/>
             <a:ext cx="1728000" cy="648000"/>
           </a:xfrm>
           <a:prstGeom prst="rect">
@@ -12438,7 +12450,7 @@
         </p:nvSpPr>
         <p:spPr>
           <a:xfrm>
-            <a:off x="6062400" y="2394000"/>
+            <a:off x="6175259" y="2394000"/>
             <a:ext cx="1728000" cy="262800"/>
           </a:xfrm>
           <a:prstGeom prst="rect">
@@ -12482,7 +12494,7 @@
         </p:nvSpPr>
         <p:spPr>
           <a:xfrm>
-            <a:off x="7902000" y="1335600"/>
+            <a:off x="8014859" y="1335600"/>
             <a:ext cx="1800000" cy="1598400"/>
           </a:xfrm>
           <a:prstGeom prst="roundRect">
@@ -12513,7 +12525,7 @@
         </p:nvSpPr>
         <p:spPr>
           <a:xfrm>
-            <a:off x="7941600" y="1720800"/>
+            <a:off x="8054459" y="1720800"/>
             <a:ext cx="1728000" cy="648000"/>
           </a:xfrm>
           <a:prstGeom prst="rect">
@@ -12548,7 +12560,7 @@
         </p:nvSpPr>
         <p:spPr>
           <a:xfrm>
-            <a:off x="7941600" y="2394000"/>
+            <a:off x="8054459" y="2394000"/>
             <a:ext cx="1728000" cy="262800"/>
           </a:xfrm>
           <a:prstGeom prst="rect">
@@ -12592,7 +12604,7 @@
         </p:nvSpPr>
         <p:spPr>
           <a:xfrm>
-            <a:off x="9784800" y="1335600"/>
+            <a:off x="9894059" y="1335600"/>
             <a:ext cx="1800000" cy="1598400"/>
           </a:xfrm>
           <a:prstGeom prst="roundRect">
@@ -12623,7 +12635,7 @@
         </p:nvSpPr>
         <p:spPr>
           <a:xfrm>
-            <a:off x="9824400" y="1720800"/>
+            <a:off x="9933659" y="1720800"/>
             <a:ext cx="1728000" cy="648000"/>
           </a:xfrm>
           <a:prstGeom prst="rect">
@@ -12658,7 +12670,7 @@
         </p:nvSpPr>
         <p:spPr>
           <a:xfrm>
-            <a:off x="9824400" y="2394000"/>
+            <a:off x="9933659" y="2394000"/>
             <a:ext cx="1728000" cy="262800"/>
           </a:xfrm>
           <a:prstGeom prst="rect">
@@ -12702,7 +12714,7 @@
         </p:nvSpPr>
         <p:spPr>
           <a:xfrm>
-            <a:off x="392400" y="3060000"/>
+            <a:off x="501659" y="3060000"/>
             <a:ext cx="11188800" cy="421200"/>
           </a:xfrm>
           <a:prstGeom prst="rect">
@@ -12731,7 +12743,7 @@
         </p:nvSpPr>
         <p:spPr>
           <a:xfrm>
-            <a:off x="392400" y="3060000"/>
+            <a:off x="501659" y="3060000"/>
             <a:ext cx="11188800" cy="421200"/>
           </a:xfrm>
           <a:prstGeom prst="rect">
@@ -12775,7 +12787,7 @@
         </p:nvSpPr>
         <p:spPr>
           <a:xfrm>
-            <a:off x="381600" y="3632400"/>
+            <a:off x="498059" y="3632400"/>
             <a:ext cx="2498400" cy="349200"/>
           </a:xfrm>
           <a:prstGeom prst="rect">
@@ -12819,8 +12831,8 @@
         </p:nvSpPr>
         <p:spPr>
           <a:xfrm>
-            <a:off x="2951999" y="3704399"/>
-            <a:ext cx="7343999" cy="198000"/>
+            <a:off x="3068459" y="3704399"/>
+            <a:ext cx="6811560" cy="198000"/>
           </a:xfrm>
           <a:prstGeom prst="roundRect">
             <a:avLst>
@@ -12850,7 +12862,7 @@
         </p:nvSpPr>
         <p:spPr>
           <a:xfrm>
-            <a:off x="10332000" y="3668400"/>
+            <a:off x="11118060" y="3668400"/>
             <a:ext cx="576000" cy="270000"/>
           </a:xfrm>
           <a:prstGeom prst="rect">
@@ -12885,7 +12897,7 @@
         </p:nvSpPr>
         <p:spPr>
           <a:xfrm>
-            <a:off x="381600" y="4104000"/>
+            <a:off x="498059" y="4104000"/>
             <a:ext cx="2498400" cy="349200"/>
           </a:xfrm>
           <a:prstGeom prst="rect">
@@ -12929,8 +12941,8 @@
         </p:nvSpPr>
         <p:spPr>
           <a:xfrm>
-            <a:off x="2951999" y="4176000"/>
-            <a:ext cx="5356800" cy="198000"/>
+            <a:off x="3068459" y="4176000"/>
+            <a:ext cx="4968431" cy="198000"/>
           </a:xfrm>
           <a:prstGeom prst="roundRect">
             <a:avLst>
@@ -12960,7 +12972,7 @@
         </p:nvSpPr>
         <p:spPr>
           <a:xfrm>
-            <a:off x="8344800" y="4140000"/>
+            <a:off x="11118060" y="4140000"/>
             <a:ext cx="576000" cy="270000"/>
           </a:xfrm>
           <a:prstGeom prst="rect">
@@ -12995,7 +13007,7 @@
         </p:nvSpPr>
         <p:spPr>
           <a:xfrm>
-            <a:off x="381600" y="4564800"/>
+            <a:off x="498059" y="4564800"/>
             <a:ext cx="2498400" cy="349200"/>
           </a:xfrm>
           <a:prstGeom prst="rect">
@@ -13039,8 +13051,8 @@
         </p:nvSpPr>
         <p:spPr>
           <a:xfrm>
-            <a:off x="2951999" y="4636800"/>
-            <a:ext cx="3542400" cy="198000"/>
+            <a:off x="3068459" y="4636800"/>
+            <a:ext cx="3285575" cy="198000"/>
           </a:xfrm>
           <a:prstGeom prst="roundRect">
             <a:avLst>
@@ -13070,7 +13082,7 @@
         </p:nvSpPr>
         <p:spPr>
           <a:xfrm>
-            <a:off x="6530400" y="4600800"/>
+            <a:off x="11118060" y="4600800"/>
             <a:ext cx="576000" cy="270000"/>
           </a:xfrm>
           <a:prstGeom prst="rect">
@@ -13105,7 +13117,7 @@
         </p:nvSpPr>
         <p:spPr>
           <a:xfrm>
-            <a:off x="381600" y="5025600"/>
+            <a:off x="498059" y="5025600"/>
             <a:ext cx="2498400" cy="349200"/>
           </a:xfrm>
           <a:prstGeom prst="rect">
@@ -13149,8 +13161,8 @@
         </p:nvSpPr>
         <p:spPr>
           <a:xfrm>
-            <a:off x="2951999" y="5097600"/>
-            <a:ext cx="6739200" cy="198000"/>
+            <a:off x="3068459" y="5097600"/>
+            <a:ext cx="6250608" cy="198000"/>
           </a:xfrm>
           <a:prstGeom prst="roundRect">
             <a:avLst>
@@ -13180,7 +13192,7 @@
         </p:nvSpPr>
         <p:spPr>
           <a:xfrm>
-            <a:off x="9727200" y="5061600"/>
+            <a:off x="11118060" y="5061600"/>
             <a:ext cx="576000" cy="270000"/>
           </a:xfrm>
           <a:prstGeom prst="rect">
@@ -13215,7 +13227,7 @@
         </p:nvSpPr>
         <p:spPr>
           <a:xfrm>
-            <a:off x="381600" y="5464800"/>
+            <a:off x="498059" y="5464800"/>
             <a:ext cx="2498400" cy="349200"/>
           </a:xfrm>
           <a:prstGeom prst="rect">
@@ -13259,8 +13271,8 @@
         </p:nvSpPr>
         <p:spPr>
           <a:xfrm>
-            <a:off x="2951999" y="5536800"/>
-            <a:ext cx="7776000" cy="198000"/>
+            <a:off x="3068459" y="5536800"/>
+            <a:ext cx="7212240" cy="198000"/>
           </a:xfrm>
           <a:prstGeom prst="roundRect">
             <a:avLst>
@@ -13290,7 +13302,7 @@
         </p:nvSpPr>
         <p:spPr>
           <a:xfrm>
-            <a:off x="10764000" y="5500800"/>
+            <a:off x="11118060" y="5500800"/>
             <a:ext cx="576000" cy="270000"/>
           </a:xfrm>
           <a:prstGeom prst="rect">
@@ -13462,7 +13474,7 @@
           <a:noFill/>
         </p:spPr>
         <p:txBody>
-          <a:bodyPr wrap="square" lIns="45720" rIns="45720" anchor="ctr">
+          <a:bodyPr wrap="square" lIns="0" rIns="45720" anchor="ctr">
             <a:spAutoFit/>
           </a:bodyPr>
           <a:lstStyle/>
@@ -14796,7 +14808,7 @@
           <a:noFill/>
         </p:spPr>
         <p:txBody>
-          <a:bodyPr wrap="square" lIns="45720" rIns="45720" anchor="ctr">
+          <a:bodyPr wrap="square" lIns="0" rIns="45720" anchor="ctr">
             <a:spAutoFit/>
           </a:bodyPr>
           <a:lstStyle/>

--- a/test_corretion_elements_graphiques.pptx
+++ b/test_corretion_elements_graphiques.pptx
@@ -3223,7 +3223,7 @@
           <a:p>
             <a:pPr algn="l"/>
             <a:r>
-              <a:rPr sz="650" b="0" i="0">
+              <a:rPr sz="900" b="0" i="0">
                 <a:solidFill>
                   <a:srgbClr val="A8A8B5"/>
                 </a:solidFill>
@@ -3258,20 +3258,44 @@
           <a:p>
             <a:pPr algn="l"/>
             <a:r>
-              <a:rPr sz="900" b="1" i="0">
+              <a:rPr sz="900" b="0" i="0">
                 <a:solidFill>
                   <a:srgbClr val="7D7B8D"/>
                 </a:solidFill>
                 <a:latin typeface="Segoe UI"/>
               </a:rPr>
-              <a:t>01/11</a:t>
-            </a:r>
-          </a:p>
-        </p:txBody>
-      </p:sp>
-      <p:sp>
-        <p:nvSpPr>
-          <p:cNvPr id="7" name="LeftAccentBar"/>
+              <a:t>01        |</a:t>
+            </a:r>
+          </a:p>
+        </p:txBody>
+      </p:sp>
+      <p:pic>
+        <p:nvPicPr>
+          <p:cNvPr id="7" name="Picture 6" descr="safran_logo.png"/>
+          <p:cNvPicPr>
+            <a:picLocks noChangeAspect="1"/>
+          </p:cNvPicPr>
+          <p:nvPr/>
+        </p:nvPicPr>
+        <p:blipFill>
+          <a:blip r:embed="rId2"/>
+          <a:stretch>
+            <a:fillRect/>
+          </a:stretch>
+        </p:blipFill>
+        <p:spPr>
+          <a:xfrm>
+            <a:off x="10717200" y="6447600"/>
+            <a:ext cx="1090800" cy="230400"/>
+          </a:xfrm>
+          <a:prstGeom prst="rect">
+            <a:avLst/>
+          </a:prstGeom>
+        </p:spPr>
+      </p:pic>
+      <p:sp>
+        <p:nvSpPr>
+          <p:cNvPr id="8" name="LeftAccentBar"/>
           <p:cNvSpPr/>
           <p:nvPr/>
         </p:nvSpPr>
@@ -3300,7 +3324,7 @@
       </p:sp>
       <p:sp>
         <p:nvSpPr>
-          <p:cNvPr id="8" name="S01_MANIFESTO"/>
+          <p:cNvPr id="9" name="S01_MANIFESTO"/>
           <p:cNvSpPr txBox="1"/>
           <p:nvPr/>
         </p:nvSpPr>
@@ -3393,7 +3417,7 @@
       </p:sp>
       <p:sp>
         <p:nvSpPr>
-          <p:cNvPr id="9" name="S01_BODY"/>
+          <p:cNvPr id="10" name="S01_BODY"/>
           <p:cNvSpPr txBox="1"/>
           <p:nvPr/>
         </p:nvSpPr>
@@ -3486,7 +3510,7 @@
       </p:sp>
       <p:sp>
         <p:nvSpPr>
-          <p:cNvPr id="10" name="KpiAccent_1"/>
+          <p:cNvPr id="11" name="KpiAccent_1"/>
           <p:cNvSpPr/>
           <p:nvPr/>
         </p:nvSpPr>
@@ -3515,7 +3539,7 @@
       </p:sp>
       <p:sp>
         <p:nvSpPr>
-          <p:cNvPr id="11" name="S01_STAT_1_VALUE"/>
+          <p:cNvPr id="12" name="S01_STAT_1_VALUE"/>
           <p:cNvSpPr txBox="1"/>
           <p:nvPr/>
         </p:nvSpPr>
@@ -3550,7 +3574,7 @@
       </p:sp>
       <p:sp>
         <p:nvSpPr>
-          <p:cNvPr id="12" name="S01_STAT_1_LABEL"/>
+          <p:cNvPr id="13" name="S01_STAT_1_LABEL"/>
           <p:cNvSpPr txBox="1"/>
           <p:nvPr/>
         </p:nvSpPr>
@@ -3594,7 +3618,7 @@
       </p:sp>
       <p:sp>
         <p:nvSpPr>
-          <p:cNvPr id="13" name="S01_STAT_1_SUBLABEL"/>
+          <p:cNvPr id="14" name="S01_STAT_1_SUBLABEL"/>
           <p:cNvSpPr txBox="1"/>
           <p:nvPr/>
         </p:nvSpPr>
@@ -3638,7 +3662,7 @@
       </p:sp>
       <p:sp>
         <p:nvSpPr>
-          <p:cNvPr id="14" name="KpiAccent_2"/>
+          <p:cNvPr id="15" name="KpiAccent_2"/>
           <p:cNvSpPr/>
           <p:nvPr/>
         </p:nvSpPr>
@@ -3667,7 +3691,7 @@
       </p:sp>
       <p:sp>
         <p:nvSpPr>
-          <p:cNvPr id="15" name="S01_STAT_2_VALUE"/>
+          <p:cNvPr id="16" name="S01_STAT_2_VALUE"/>
           <p:cNvSpPr txBox="1"/>
           <p:nvPr/>
         </p:nvSpPr>
@@ -3702,7 +3726,7 @@
       </p:sp>
       <p:sp>
         <p:nvSpPr>
-          <p:cNvPr id="16" name="S01_STAT_2_LABEL"/>
+          <p:cNvPr id="17" name="S01_STAT_2_LABEL"/>
           <p:cNvSpPr txBox="1"/>
           <p:nvPr/>
         </p:nvSpPr>
@@ -3746,7 +3770,7 @@
       </p:sp>
       <p:sp>
         <p:nvSpPr>
-          <p:cNvPr id="17" name="S01_STAT_2_SUBLABEL"/>
+          <p:cNvPr id="18" name="S01_STAT_2_SUBLABEL"/>
           <p:cNvSpPr txBox="1"/>
           <p:nvPr/>
         </p:nvSpPr>
@@ -3790,7 +3814,7 @@
       </p:sp>
       <p:sp>
         <p:nvSpPr>
-          <p:cNvPr id="18" name="KpiAccent_3"/>
+          <p:cNvPr id="19" name="KpiAccent_3"/>
           <p:cNvSpPr/>
           <p:nvPr/>
         </p:nvSpPr>
@@ -3819,7 +3843,7 @@
       </p:sp>
       <p:sp>
         <p:nvSpPr>
-          <p:cNvPr id="19" name="S01_STAT_3_VALUE"/>
+          <p:cNvPr id="20" name="S01_STAT_3_VALUE"/>
           <p:cNvSpPr txBox="1"/>
           <p:nvPr/>
         </p:nvSpPr>
@@ -3854,7 +3878,7 @@
       </p:sp>
       <p:sp>
         <p:nvSpPr>
-          <p:cNvPr id="20" name="S01_STAT_3_LABEL"/>
+          <p:cNvPr id="21" name="S01_STAT_3_LABEL"/>
           <p:cNvSpPr txBox="1"/>
           <p:nvPr/>
         </p:nvSpPr>
@@ -3898,7 +3922,7 @@
       </p:sp>
       <p:sp>
         <p:nvSpPr>
-          <p:cNvPr id="21" name="S01_STAT_3_SUBLABEL"/>
+          <p:cNvPr id="22" name="S01_STAT_3_SUBLABEL"/>
           <p:cNvSpPr txBox="1"/>
           <p:nvPr/>
         </p:nvSpPr>
@@ -3942,13 +3966,13 @@
       </p:sp>
       <p:sp>
         <p:nvSpPr>
-          <p:cNvPr id="22" name="TakeawayBand"/>
+          <p:cNvPr id="23" name="TakeawayBand"/>
           <p:cNvSpPr/>
           <p:nvPr/>
         </p:nvSpPr>
         <p:spPr>
           <a:xfrm>
-            <a:off x="392400" y="6073200"/>
+            <a:off x="392400" y="6037200"/>
             <a:ext cx="11412000" cy="396000"/>
           </a:xfrm>
           <a:prstGeom prst="rect">
@@ -3991,13 +4015,13 @@
       </p:sp>
       <p:sp>
         <p:nvSpPr>
-          <p:cNvPr id="23" name="TakeawayBandText"/>
-          <p:cNvSpPr txBox="1"/>
-          <p:nvPr/>
-        </p:nvSpPr>
-        <p:spPr>
-          <a:xfrm>
-            <a:off x="392400" y="6073200"/>
+          <p:cNvPr id="24" name="TakeawayBandText"/>
+          <p:cNvSpPr txBox="1"/>
+          <p:nvPr/>
+        </p:nvSpPr>
+        <p:spPr>
+          <a:xfrm>
+            <a:off x="392400" y="6037200"/>
             <a:ext cx="11412000" cy="396000"/>
           </a:xfrm>
           <a:prstGeom prst="rect">
@@ -4176,7 +4200,7 @@
           <a:p>
             <a:pPr algn="l"/>
             <a:r>
-              <a:rPr sz="650" b="0" i="0">
+              <a:rPr sz="900" b="0" i="0">
                 <a:solidFill>
                   <a:srgbClr val="A8A8B5"/>
                 </a:solidFill>
@@ -4211,20 +4235,44 @@
           <a:p>
             <a:pPr algn="l"/>
             <a:r>
-              <a:rPr sz="900" b="1" i="0">
+              <a:rPr sz="900" b="0" i="0">
                 <a:solidFill>
                   <a:srgbClr val="7D7B8D"/>
                 </a:solidFill>
                 <a:latin typeface="Segoe UI"/>
               </a:rPr>
-              <a:t>10/11</a:t>
-            </a:r>
-          </a:p>
-        </p:txBody>
-      </p:sp>
-      <p:sp>
-        <p:nvSpPr>
-          <p:cNvPr id="7" name="S10_DATE"/>
+              <a:t>10        |</a:t>
+            </a:r>
+          </a:p>
+        </p:txBody>
+      </p:sp>
+      <p:pic>
+        <p:nvPicPr>
+          <p:cNvPr id="7" name="Picture 6" descr="safran_logo.png"/>
+          <p:cNvPicPr>
+            <a:picLocks noChangeAspect="1"/>
+          </p:cNvPicPr>
+          <p:nvPr/>
+        </p:nvPicPr>
+        <p:blipFill>
+          <a:blip r:embed="rId2"/>
+          <a:stretch>
+            <a:fillRect/>
+          </a:stretch>
+        </p:blipFill>
+        <p:spPr>
+          <a:xfrm>
+            <a:off x="10717200" y="6447600"/>
+            <a:ext cx="1090800" cy="230400"/>
+          </a:xfrm>
+          <a:prstGeom prst="rect">
+            <a:avLst/>
+          </a:prstGeom>
+        </p:spPr>
+      </p:pic>
+      <p:sp>
+        <p:nvSpPr>
+          <p:cNvPr id="8" name="S10_DATE"/>
           <p:cNvSpPr txBox="1"/>
           <p:nvPr/>
         </p:nvSpPr>
@@ -4268,7 +4316,7 @@
       </p:sp>
       <p:sp>
         <p:nvSpPr>
-          <p:cNvPr id="8" name="S10_PHASE_1_CARD"/>
+          <p:cNvPr id="9" name="S10_PHASE_1_CARD"/>
           <p:cNvSpPr/>
           <p:nvPr/>
         </p:nvSpPr>
@@ -4299,7 +4347,7 @@
       </p:sp>
       <p:sp>
         <p:nvSpPr>
-          <p:cNvPr id="9" name="S10_PHASE_1_BAND"/>
+          <p:cNvPr id="10" name="S10_PHASE_1_BAND"/>
           <p:cNvSpPr/>
           <p:nvPr/>
         </p:nvSpPr>
@@ -4328,7 +4376,7 @@
       </p:sp>
       <p:sp>
         <p:nvSpPr>
-          <p:cNvPr id="10" name="S10_PHASE_1_NUMBER"/>
+          <p:cNvPr id="11" name="S10_PHASE_1_NUMBER"/>
           <p:cNvSpPr/>
           <p:nvPr/>
         </p:nvSpPr>
@@ -4368,7 +4416,7 @@
       </p:sp>
       <p:sp>
         <p:nvSpPr>
-          <p:cNvPr id="11" name="S10_PHASE_1_TITLE"/>
+          <p:cNvPr id="12" name="S10_PHASE_1_TITLE"/>
           <p:cNvSpPr txBox="1"/>
           <p:nvPr/>
         </p:nvSpPr>
@@ -4403,7 +4451,7 @@
       </p:sp>
       <p:sp>
         <p:nvSpPr>
-          <p:cNvPr id="12" name="S10_PHASE_1_SUBTITLE"/>
+          <p:cNvPr id="13" name="S10_PHASE_1_SUBTITLE"/>
           <p:cNvSpPr txBox="1"/>
           <p:nvPr/>
         </p:nvSpPr>
@@ -4447,7 +4495,7 @@
       </p:sp>
       <p:sp>
         <p:nvSpPr>
-          <p:cNvPr id="13" name="S10_PHASE_1_ITEM_1_BULLET"/>
+          <p:cNvPr id="14" name="S10_PHASE_1_ITEM_1_BULLET"/>
           <p:cNvSpPr/>
           <p:nvPr/>
         </p:nvSpPr>
@@ -4476,7 +4524,7 @@
       </p:sp>
       <p:sp>
         <p:nvSpPr>
-          <p:cNvPr id="14" name="S10_PHASE_1_ITEM_1_TITLE"/>
+          <p:cNvPr id="15" name="S10_PHASE_1_ITEM_1_TITLE"/>
           <p:cNvSpPr txBox="1"/>
           <p:nvPr/>
         </p:nvSpPr>
@@ -4520,7 +4568,7 @@
       </p:sp>
       <p:sp>
         <p:nvSpPr>
-          <p:cNvPr id="15" name="S10_PHASE_1_ITEM_1_BODY"/>
+          <p:cNvPr id="16" name="S10_PHASE_1_ITEM_1_BODY"/>
           <p:cNvSpPr txBox="1"/>
           <p:nvPr/>
         </p:nvSpPr>
@@ -4573,7 +4621,7 @@
       </p:sp>
       <p:cxnSp>
         <p:nvCxnSpPr>
-          <p:cNvPr id="16" name="Connector 15"/>
+          <p:cNvPr id="17" name="Connector 16"/>
           <p:cNvCxnSpPr/>
           <p:nvPr/>
         </p:nvCxnSpPr>
@@ -4594,7 +4642,7 @@
       </p:cxnSp>
       <p:sp>
         <p:nvSpPr>
-          <p:cNvPr id="17" name="S10_PHASE_1_ITEM_2_BULLET"/>
+          <p:cNvPr id="18" name="S10_PHASE_1_ITEM_2_BULLET"/>
           <p:cNvSpPr/>
           <p:nvPr/>
         </p:nvSpPr>
@@ -4623,7 +4671,7 @@
       </p:sp>
       <p:sp>
         <p:nvSpPr>
-          <p:cNvPr id="18" name="S10_PHASE_1_ITEM_2_TITLE"/>
+          <p:cNvPr id="19" name="S10_PHASE_1_ITEM_2_TITLE"/>
           <p:cNvSpPr txBox="1"/>
           <p:nvPr/>
         </p:nvSpPr>
@@ -4667,7 +4715,7 @@
       </p:sp>
       <p:sp>
         <p:nvSpPr>
-          <p:cNvPr id="19" name="S10_PHASE_1_ITEM_2_BODY"/>
+          <p:cNvPr id="20" name="S10_PHASE_1_ITEM_2_BODY"/>
           <p:cNvSpPr txBox="1"/>
           <p:nvPr/>
         </p:nvSpPr>
@@ -4720,7 +4768,7 @@
       </p:sp>
       <p:cxnSp>
         <p:nvCxnSpPr>
-          <p:cNvPr id="20" name="Connector 19"/>
+          <p:cNvPr id="21" name="Connector 20"/>
           <p:cNvCxnSpPr/>
           <p:nvPr/>
         </p:nvCxnSpPr>
@@ -4741,7 +4789,7 @@
       </p:cxnSp>
       <p:sp>
         <p:nvSpPr>
-          <p:cNvPr id="21" name="S10_PHASE_1_ITEM_3_BULLET"/>
+          <p:cNvPr id="22" name="S10_PHASE_1_ITEM_3_BULLET"/>
           <p:cNvSpPr/>
           <p:nvPr/>
         </p:nvSpPr>
@@ -4770,7 +4818,7 @@
       </p:sp>
       <p:sp>
         <p:nvSpPr>
-          <p:cNvPr id="22" name="S10_PHASE_1_ITEM_3_TITLE"/>
+          <p:cNvPr id="23" name="S10_PHASE_1_ITEM_3_TITLE"/>
           <p:cNvSpPr txBox="1"/>
           <p:nvPr/>
         </p:nvSpPr>
@@ -4814,7 +4862,7 @@
       </p:sp>
       <p:sp>
         <p:nvSpPr>
-          <p:cNvPr id="23" name="S10_PHASE_1_ITEM_3_BODY"/>
+          <p:cNvPr id="24" name="S10_PHASE_1_ITEM_3_BODY"/>
           <p:cNvSpPr txBox="1"/>
           <p:nvPr/>
         </p:nvSpPr>
@@ -4867,7 +4915,7 @@
       </p:sp>
       <p:sp>
         <p:nvSpPr>
-          <p:cNvPr id="24" name="S10_PHASE_2_CARD"/>
+          <p:cNvPr id="25" name="S10_PHASE_2_CARD"/>
           <p:cNvSpPr/>
           <p:nvPr/>
         </p:nvSpPr>
@@ -4898,7 +4946,7 @@
       </p:sp>
       <p:sp>
         <p:nvSpPr>
-          <p:cNvPr id="25" name="S10_PHASE_2_BAND"/>
+          <p:cNvPr id="26" name="S10_PHASE_2_BAND"/>
           <p:cNvSpPr/>
           <p:nvPr/>
         </p:nvSpPr>
@@ -4927,7 +4975,7 @@
       </p:sp>
       <p:sp>
         <p:nvSpPr>
-          <p:cNvPr id="26" name="S10_PHASE_2_NUMBER"/>
+          <p:cNvPr id="27" name="S10_PHASE_2_NUMBER"/>
           <p:cNvSpPr/>
           <p:nvPr/>
         </p:nvSpPr>
@@ -4967,7 +5015,7 @@
       </p:sp>
       <p:sp>
         <p:nvSpPr>
-          <p:cNvPr id="27" name="S10_PHASE_2_TITLE"/>
+          <p:cNvPr id="28" name="S10_PHASE_2_TITLE"/>
           <p:cNvSpPr txBox="1"/>
           <p:nvPr/>
         </p:nvSpPr>
@@ -5002,7 +5050,7 @@
       </p:sp>
       <p:sp>
         <p:nvSpPr>
-          <p:cNvPr id="28" name="S10_PHASE_2_SUBTITLE"/>
+          <p:cNvPr id="29" name="S10_PHASE_2_SUBTITLE"/>
           <p:cNvSpPr txBox="1"/>
           <p:nvPr/>
         </p:nvSpPr>
@@ -5046,7 +5094,7 @@
       </p:sp>
       <p:sp>
         <p:nvSpPr>
-          <p:cNvPr id="29" name="S10_PHASE_2_ITEM_1_BULLET"/>
+          <p:cNvPr id="30" name="S10_PHASE_2_ITEM_1_BULLET"/>
           <p:cNvSpPr/>
           <p:nvPr/>
         </p:nvSpPr>
@@ -5075,7 +5123,7 @@
       </p:sp>
       <p:sp>
         <p:nvSpPr>
-          <p:cNvPr id="30" name="S10_PHASE_2_ITEM_1_TITLE"/>
+          <p:cNvPr id="31" name="S10_PHASE_2_ITEM_1_TITLE"/>
           <p:cNvSpPr txBox="1"/>
           <p:nvPr/>
         </p:nvSpPr>
@@ -5119,7 +5167,7 @@
       </p:sp>
       <p:sp>
         <p:nvSpPr>
-          <p:cNvPr id="31" name="S10_PHASE_2_ITEM_1_BODY"/>
+          <p:cNvPr id="32" name="S10_PHASE_2_ITEM_1_BODY"/>
           <p:cNvSpPr txBox="1"/>
           <p:nvPr/>
         </p:nvSpPr>
@@ -5172,7 +5220,7 @@
       </p:sp>
       <p:cxnSp>
         <p:nvCxnSpPr>
-          <p:cNvPr id="32" name="Connector 31"/>
+          <p:cNvPr id="33" name="Connector 32"/>
           <p:cNvCxnSpPr/>
           <p:nvPr/>
         </p:nvCxnSpPr>
@@ -5193,7 +5241,7 @@
       </p:cxnSp>
       <p:sp>
         <p:nvSpPr>
-          <p:cNvPr id="33" name="S10_PHASE_2_ITEM_2_BULLET"/>
+          <p:cNvPr id="34" name="S10_PHASE_2_ITEM_2_BULLET"/>
           <p:cNvSpPr/>
           <p:nvPr/>
         </p:nvSpPr>
@@ -5222,7 +5270,7 @@
       </p:sp>
       <p:sp>
         <p:nvSpPr>
-          <p:cNvPr id="34" name="S10_PHASE_2_ITEM_2_TITLE"/>
+          <p:cNvPr id="35" name="S10_PHASE_2_ITEM_2_TITLE"/>
           <p:cNvSpPr txBox="1"/>
           <p:nvPr/>
         </p:nvSpPr>
@@ -5266,7 +5314,7 @@
       </p:sp>
       <p:sp>
         <p:nvSpPr>
-          <p:cNvPr id="35" name="S10_PHASE_2_ITEM_2_BODY"/>
+          <p:cNvPr id="36" name="S10_PHASE_2_ITEM_2_BODY"/>
           <p:cNvSpPr txBox="1"/>
           <p:nvPr/>
         </p:nvSpPr>
@@ -5319,7 +5367,7 @@
       </p:sp>
       <p:cxnSp>
         <p:nvCxnSpPr>
-          <p:cNvPr id="36" name="Connector 35"/>
+          <p:cNvPr id="37" name="Connector 36"/>
           <p:cNvCxnSpPr/>
           <p:nvPr/>
         </p:nvCxnSpPr>
@@ -5340,7 +5388,7 @@
       </p:cxnSp>
       <p:sp>
         <p:nvSpPr>
-          <p:cNvPr id="37" name="S10_PHASE_2_ITEM_3_BULLET"/>
+          <p:cNvPr id="38" name="S10_PHASE_2_ITEM_3_BULLET"/>
           <p:cNvSpPr/>
           <p:nvPr/>
         </p:nvSpPr>
@@ -5369,7 +5417,7 @@
       </p:sp>
       <p:sp>
         <p:nvSpPr>
-          <p:cNvPr id="38" name="S10_PHASE_2_ITEM_3_TITLE"/>
+          <p:cNvPr id="39" name="S10_PHASE_2_ITEM_3_TITLE"/>
           <p:cNvSpPr txBox="1"/>
           <p:nvPr/>
         </p:nvSpPr>
@@ -5413,7 +5461,7 @@
       </p:sp>
       <p:sp>
         <p:nvSpPr>
-          <p:cNvPr id="39" name="S10_PHASE_2_ITEM_3_BODY"/>
+          <p:cNvPr id="40" name="S10_PHASE_2_ITEM_3_BODY"/>
           <p:cNvSpPr txBox="1"/>
           <p:nvPr/>
         </p:nvSpPr>
@@ -5466,7 +5514,7 @@
       </p:sp>
       <p:sp>
         <p:nvSpPr>
-          <p:cNvPr id="40" name="S10_PHASE_3_CARD"/>
+          <p:cNvPr id="41" name="S10_PHASE_3_CARD"/>
           <p:cNvSpPr/>
           <p:nvPr/>
         </p:nvSpPr>
@@ -5497,7 +5545,7 @@
       </p:sp>
       <p:sp>
         <p:nvSpPr>
-          <p:cNvPr id="41" name="S10_PHASE_3_BAND"/>
+          <p:cNvPr id="42" name="S10_PHASE_3_BAND"/>
           <p:cNvSpPr/>
           <p:nvPr/>
         </p:nvSpPr>
@@ -5526,7 +5574,7 @@
       </p:sp>
       <p:sp>
         <p:nvSpPr>
-          <p:cNvPr id="42" name="S10_PHASE_3_NUMBER"/>
+          <p:cNvPr id="43" name="S10_PHASE_3_NUMBER"/>
           <p:cNvSpPr/>
           <p:nvPr/>
         </p:nvSpPr>
@@ -5566,7 +5614,7 @@
       </p:sp>
       <p:sp>
         <p:nvSpPr>
-          <p:cNvPr id="43" name="S10_PHASE_3_TITLE"/>
+          <p:cNvPr id="44" name="S10_PHASE_3_TITLE"/>
           <p:cNvSpPr txBox="1"/>
           <p:nvPr/>
         </p:nvSpPr>
@@ -5601,7 +5649,7 @@
       </p:sp>
       <p:sp>
         <p:nvSpPr>
-          <p:cNvPr id="44" name="S10_PHASE_3_SUBTITLE"/>
+          <p:cNvPr id="45" name="S10_PHASE_3_SUBTITLE"/>
           <p:cNvSpPr txBox="1"/>
           <p:nvPr/>
         </p:nvSpPr>
@@ -5636,7 +5684,7 @@
       </p:sp>
       <p:sp>
         <p:nvSpPr>
-          <p:cNvPr id="45" name="S10_PHASE_3_ITEM_1_BULLET"/>
+          <p:cNvPr id="46" name="S10_PHASE_3_ITEM_1_BULLET"/>
           <p:cNvSpPr/>
           <p:nvPr/>
         </p:nvSpPr>
@@ -5665,7 +5713,7 @@
       </p:sp>
       <p:sp>
         <p:nvSpPr>
-          <p:cNvPr id="46" name="S10_PHASE_3_ITEM_1_TITLE"/>
+          <p:cNvPr id="47" name="S10_PHASE_3_ITEM_1_TITLE"/>
           <p:cNvSpPr txBox="1"/>
           <p:nvPr/>
         </p:nvSpPr>
@@ -5709,7 +5757,7 @@
       </p:sp>
       <p:sp>
         <p:nvSpPr>
-          <p:cNvPr id="47" name="S10_PHASE_3_ITEM_1_BODY"/>
+          <p:cNvPr id="48" name="S10_PHASE_3_ITEM_1_BODY"/>
           <p:cNvSpPr txBox="1"/>
           <p:nvPr/>
         </p:nvSpPr>
@@ -5762,7 +5810,7 @@
       </p:sp>
       <p:cxnSp>
         <p:nvCxnSpPr>
-          <p:cNvPr id="48" name="Connector 47"/>
+          <p:cNvPr id="49" name="Connector 48"/>
           <p:cNvCxnSpPr/>
           <p:nvPr/>
         </p:nvCxnSpPr>
@@ -5783,7 +5831,7 @@
       </p:cxnSp>
       <p:sp>
         <p:nvSpPr>
-          <p:cNvPr id="49" name="S10_PHASE_3_ITEM_2_BULLET"/>
+          <p:cNvPr id="50" name="S10_PHASE_3_ITEM_2_BULLET"/>
           <p:cNvSpPr/>
           <p:nvPr/>
         </p:nvSpPr>
@@ -5812,7 +5860,7 @@
       </p:sp>
       <p:sp>
         <p:nvSpPr>
-          <p:cNvPr id="50" name="S10_PHASE_3_ITEM_2_TITLE"/>
+          <p:cNvPr id="51" name="S10_PHASE_3_ITEM_2_TITLE"/>
           <p:cNvSpPr txBox="1"/>
           <p:nvPr/>
         </p:nvSpPr>
@@ -5856,7 +5904,7 @@
       </p:sp>
       <p:sp>
         <p:nvSpPr>
-          <p:cNvPr id="51" name="S10_PHASE_3_ITEM_2_BODY"/>
+          <p:cNvPr id="52" name="S10_PHASE_3_ITEM_2_BODY"/>
           <p:cNvSpPr txBox="1"/>
           <p:nvPr/>
         </p:nvSpPr>
@@ -5909,7 +5957,7 @@
       </p:sp>
       <p:cxnSp>
         <p:nvCxnSpPr>
-          <p:cNvPr id="52" name="Connector 51"/>
+          <p:cNvPr id="53" name="Connector 52"/>
           <p:cNvCxnSpPr/>
           <p:nvPr/>
         </p:nvCxnSpPr>
@@ -5930,7 +5978,7 @@
       </p:cxnSp>
       <p:sp>
         <p:nvSpPr>
-          <p:cNvPr id="53" name="S10_PHASE_3_ITEM_3_BULLET"/>
+          <p:cNvPr id="54" name="S10_PHASE_3_ITEM_3_BULLET"/>
           <p:cNvSpPr/>
           <p:nvPr/>
         </p:nvSpPr>
@@ -5959,7 +6007,7 @@
       </p:sp>
       <p:sp>
         <p:nvSpPr>
-          <p:cNvPr id="54" name="S10_PHASE_3_ITEM_3_TITLE"/>
+          <p:cNvPr id="55" name="S10_PHASE_3_ITEM_3_TITLE"/>
           <p:cNvSpPr txBox="1"/>
           <p:nvPr/>
         </p:nvSpPr>
@@ -5994,7 +6042,7 @@
       </p:sp>
       <p:sp>
         <p:nvSpPr>
-          <p:cNvPr id="55" name="S10_PHASE_3_ITEM_3_BODY"/>
+          <p:cNvPr id="56" name="S10_PHASE_3_ITEM_3_BODY"/>
           <p:cNvSpPr txBox="1"/>
           <p:nvPr/>
         </p:nvSpPr>
@@ -6047,13 +6095,13 @@
       </p:sp>
       <p:sp>
         <p:nvSpPr>
-          <p:cNvPr id="56" name="TakeawayBand"/>
+          <p:cNvPr id="57" name="TakeawayBand"/>
           <p:cNvSpPr/>
           <p:nvPr/>
         </p:nvSpPr>
         <p:spPr>
           <a:xfrm>
-            <a:off x="392400" y="6073200"/>
+            <a:off x="392400" y="6037200"/>
             <a:ext cx="11412000" cy="396000"/>
           </a:xfrm>
           <a:prstGeom prst="rect">
@@ -6096,13 +6144,13 @@
       </p:sp>
       <p:sp>
         <p:nvSpPr>
-          <p:cNvPr id="57" name="TakeawayBandText"/>
-          <p:cNvSpPr txBox="1"/>
-          <p:nvPr/>
-        </p:nvSpPr>
-        <p:spPr>
-          <a:xfrm>
-            <a:off x="392400" y="6073200"/>
+          <p:cNvPr id="58" name="TakeawayBandText"/>
+          <p:cNvSpPr txBox="1"/>
+          <p:nvPr/>
+        </p:nvSpPr>
+        <p:spPr>
+          <a:xfrm>
+            <a:off x="392400" y="6037200"/>
             <a:ext cx="11412000" cy="396000"/>
           </a:xfrm>
           <a:prstGeom prst="rect">
@@ -6281,7 +6329,7 @@
           <a:p>
             <a:pPr algn="l"/>
             <a:r>
-              <a:rPr sz="650" b="0" i="0">
+              <a:rPr sz="900" b="0" i="0">
                 <a:solidFill>
                   <a:srgbClr val="A8A8B5"/>
                 </a:solidFill>
@@ -6316,51 +6364,20 @@
           <a:p>
             <a:pPr algn="l"/>
             <a:r>
-              <a:rPr sz="900" b="1" i="0">
+              <a:rPr sz="900" b="0" i="0">
                 <a:solidFill>
                   <a:srgbClr val="7D7B8D"/>
                 </a:solidFill>
                 <a:latin typeface="Segoe UI"/>
               </a:rPr>
-              <a:t>11/11</a:t>
-            </a:r>
-          </a:p>
-        </p:txBody>
-      </p:sp>
-      <p:sp>
-        <p:nvSpPr>
-          <p:cNvPr id="7" name="S11_BLOCK_1_ACCENT_BAR"/>
-          <p:cNvSpPr/>
-          <p:nvPr/>
-        </p:nvSpPr>
-        <p:spPr>
-          <a:xfrm>
-            <a:off x="392400" y="1152000"/>
-            <a:ext cx="61200" cy="1371600"/>
-          </a:xfrm>
-          <a:prstGeom prst="roundRect">
-            <a:avLst>
-              <a:gd name="adj" fmla="val 12000"/>
-            </a:avLst>
-          </a:prstGeom>
-          <a:solidFill>
-            <a:srgbClr val="6A5D79"/>
-          </a:solidFill>
-          <a:ln>
-            <a:noFill/>
-          </a:ln>
-        </p:spPr>
-        <p:txBody>
-          <a:bodyPr rtlCol="0" anchor="ctr"/>
-          <a:lstStyle/>
-          <a:p>
-            <a:pPr algn="ctr"/>
+              <a:t>11        |</a:t>
+            </a:r>
           </a:p>
         </p:txBody>
       </p:sp>
       <p:pic>
         <p:nvPicPr>
-          <p:cNvPr id="8" name="S11_BLOCK_1_NUMBER" descr="image.png"/>
+          <p:cNvPr id="7" name="Picture 6" descr="safran_logo.png"/>
           <p:cNvPicPr>
             <a:picLocks noChangeAspect="1"/>
           </p:cNvPicPr>
@@ -6374,8 +6391,8 @@
         </p:blipFill>
         <p:spPr>
           <a:xfrm>
-            <a:off x="648000" y="1242000"/>
-            <a:ext cx="1440000" cy="792000"/>
+            <a:off x="10717200" y="6447600"/>
+            <a:ext cx="1090800" cy="230400"/>
           </a:xfrm>
           <a:prstGeom prst="rect">
             <a:avLst/>
@@ -6384,141 +6401,13 @@
       </p:pic>
       <p:sp>
         <p:nvSpPr>
-          <p:cNvPr id="9" name="S11_BLOCK_1_TITLE"/>
-          <p:cNvSpPr txBox="1"/>
-          <p:nvPr/>
-        </p:nvSpPr>
-        <p:spPr>
-          <a:xfrm>
-            <a:off x="720000" y="1242000"/>
-            <a:ext cx="10620000" cy="396000"/>
-          </a:xfrm>
-          <a:prstGeom prst="rect">
-            <a:avLst/>
-          </a:prstGeom>
-          <a:noFill/>
-        </p:spPr>
-        <p:txBody>
-          <a:bodyPr wrap="square" lIns="45720" rIns="45720" anchor="t">
-            <a:spAutoFit/>
-          </a:bodyPr>
-          <a:lstStyle/>
-          <a:p>
-            <a:pPr algn="l"/>
-            <a:r>
-              <a:rPr sz="1800" b="1" i="0">
-                <a:solidFill>
-                  <a:srgbClr val="6A5D79"/>
-                </a:solidFill>
-                <a:latin typeface="Segoe UI"/>
-              </a:rPr>
-              <a:t>Ce que le </a:t>
-            </a:r>
-            <a:r>
-              <a:rPr sz="1800" b="1" i="0">
-                <a:solidFill>
-                  <a:srgbClr val="6A5D79"/>
-                </a:solidFill>
-                <a:latin typeface="Segoe UI"/>
-              </a:rPr>
-              <a:t>pilote</a:t>
-            </a:r>
-            <a:r>
-              <a:rPr sz="1800" b="1" i="0">
-                <a:solidFill>
-                  <a:srgbClr val="6A5D79"/>
-                </a:solidFill>
-                <a:latin typeface="Segoe UI"/>
-              </a:rPr>
-              <a:t> prouve</a:t>
-            </a:r>
-          </a:p>
-        </p:txBody>
-      </p:sp>
-      <p:sp>
-        <p:nvSpPr>
-          <p:cNvPr id="10" name="S11_BLOCK_1_BODY"/>
-          <p:cNvSpPr txBox="1"/>
-          <p:nvPr/>
-        </p:nvSpPr>
-        <p:spPr>
-          <a:xfrm>
-            <a:off x="720000" y="1674000"/>
-            <a:ext cx="10620000" cy="864000"/>
-          </a:xfrm>
-          <a:prstGeom prst="rect">
-            <a:avLst/>
-          </a:prstGeom>
-          <a:noFill/>
-        </p:spPr>
-        <p:txBody>
-          <a:bodyPr wrap="square" lIns="45720" rIns="45720" anchor="t">
-            <a:spAutoFit/>
-          </a:bodyPr>
-          <a:lstStyle/>
-          <a:p>
-            <a:pPr algn="l">
-              <a:lnSpc>
-                <a:spcPct val="130000"/>
-              </a:lnSpc>
-            </a:pPr>
-            <a:r>
-              <a:rPr sz="1400" b="0" i="0">
-                <a:solidFill>
-                  <a:srgbClr val="474E67"/>
-                </a:solidFill>
-                <a:latin typeface="Segoe UI Light"/>
-              </a:rPr>
-              <a:t>Le dispositif </a:t>
-            </a:r>
-            <a:r>
-              <a:rPr sz="1400" b="1" i="0">
-                <a:solidFill>
-                  <a:srgbClr val="474E67"/>
-                </a:solidFill>
-                <a:latin typeface="Segoe UI"/>
-              </a:rPr>
-              <a:t>réduit le temps d'arbitrage</a:t>
-            </a:r>
-            <a:r>
-              <a:rPr sz="1400" b="0" i="0">
-                <a:solidFill>
-                  <a:srgbClr val="474E67"/>
-                </a:solidFill>
-                <a:latin typeface="Segoe UI Light"/>
-              </a:rPr>
-              <a:t> et rend les </a:t>
-            </a:r>
-            <a:r>
-              <a:rPr sz="1400" b="1" i="0">
-                <a:solidFill>
-                  <a:srgbClr val="474E67"/>
-                </a:solidFill>
-                <a:latin typeface="Segoe UI"/>
-              </a:rPr>
-              <a:t>points de blocage visibles</a:t>
-            </a:r>
-            <a:r>
-              <a:rPr sz="1400" b="0" i="0">
-                <a:solidFill>
-                  <a:srgbClr val="474E67"/>
-                </a:solidFill>
-                <a:latin typeface="Segoe UI Light"/>
-              </a:rPr>
-              <a:t>.</a:t>
-            </a:r>
-          </a:p>
-        </p:txBody>
-      </p:sp>
-      <p:sp>
-        <p:nvSpPr>
-          <p:cNvPr id="11" name="S11_BLOCK_2_ACCENT_BAR"/>
+          <p:cNvPr id="8" name="S11_BLOCK_1_ACCENT_BAR"/>
           <p:cNvSpPr/>
           <p:nvPr/>
         </p:nvSpPr>
         <p:spPr>
           <a:xfrm>
-            <a:off x="392400" y="2772000"/>
+            <a:off x="392400" y="1152000"/>
             <a:ext cx="61200" cy="1371600"/>
           </a:xfrm>
           <a:prstGeom prst="roundRect">
@@ -6527,7 +6416,7 @@
             </a:avLst>
           </a:prstGeom>
           <a:solidFill>
-            <a:srgbClr val="A25871"/>
+            <a:srgbClr val="6A5D79"/>
           </a:solidFill>
           <a:ln>
             <a:noFill/>
@@ -6543,7 +6432,7 @@
       </p:sp>
       <p:pic>
         <p:nvPicPr>
-          <p:cNvPr id="12" name="S11_BLOCK_2_NUMBER" descr="image.png"/>
+          <p:cNvPr id="9" name="S11_BLOCK_1_NUMBER" descr="image.png"/>
           <p:cNvPicPr>
             <a:picLocks noChangeAspect="1"/>
           </p:cNvPicPr>
@@ -6557,7 +6446,7 @@
         </p:blipFill>
         <p:spPr>
           <a:xfrm>
-            <a:off x="648000" y="2872800"/>
+            <a:off x="648000" y="1242000"/>
             <a:ext cx="1440000" cy="792000"/>
           </a:xfrm>
           <a:prstGeom prst="rect">
@@ -6567,13 +6456,13 @@
       </p:pic>
       <p:sp>
         <p:nvSpPr>
-          <p:cNvPr id="13" name="S11_BLOCK_2_TITLE"/>
-          <p:cNvSpPr txBox="1"/>
-          <p:nvPr/>
-        </p:nvSpPr>
-        <p:spPr>
-          <a:xfrm>
-            <a:off x="720000" y="2872800"/>
+          <p:cNvPr id="10" name="S11_BLOCK_1_TITLE"/>
+          <p:cNvSpPr txBox="1"/>
+          <p:nvPr/>
+        </p:nvSpPr>
+        <p:spPr>
+          <a:xfrm>
+            <a:off x="720000" y="1242000"/>
             <a:ext cx="10620000" cy="396000"/>
           </a:xfrm>
           <a:prstGeom prst="rect">
@@ -6591,33 +6480,42 @@
             <a:r>
               <a:rPr sz="1800" b="1" i="0">
                 <a:solidFill>
-                  <a:srgbClr val="A25871"/>
-                </a:solidFill>
-                <a:latin typeface="Segoe UI"/>
-              </a:rPr>
-              <a:t>Ce qui change pour les </a:t>
+                  <a:srgbClr val="6A5D79"/>
+                </a:solidFill>
+                <a:latin typeface="Segoe UI"/>
+              </a:rPr>
+              <a:t>Ce que le </a:t>
             </a:r>
             <a:r>
               <a:rPr sz="1800" b="1" i="0">
                 <a:solidFill>
-                  <a:srgbClr val="A25871"/>
-                </a:solidFill>
-                <a:latin typeface="Segoe UI"/>
-              </a:rPr>
-              <a:t>équipes</a:t>
-            </a:r>
-          </a:p>
-        </p:txBody>
-      </p:sp>
-      <p:sp>
-        <p:nvSpPr>
-          <p:cNvPr id="14" name="S11_BLOCK_2_BODY"/>
-          <p:cNvSpPr txBox="1"/>
-          <p:nvPr/>
-        </p:nvSpPr>
-        <p:spPr>
-          <a:xfrm>
-            <a:off x="720000" y="3304800"/>
+                  <a:srgbClr val="6A5D79"/>
+                </a:solidFill>
+                <a:latin typeface="Segoe UI"/>
+              </a:rPr>
+              <a:t>pilote</a:t>
+            </a:r>
+            <a:r>
+              <a:rPr sz="1800" b="1" i="0">
+                <a:solidFill>
+                  <a:srgbClr val="6A5D79"/>
+                </a:solidFill>
+                <a:latin typeface="Segoe UI"/>
+              </a:rPr>
+              <a:t> prouve</a:t>
+            </a:r>
+          </a:p>
+        </p:txBody>
+      </p:sp>
+      <p:sp>
+        <p:nvSpPr>
+          <p:cNvPr id="11" name="S11_BLOCK_1_BODY"/>
+          <p:cNvSpPr txBox="1"/>
+          <p:nvPr/>
+        </p:nvSpPr>
+        <p:spPr>
+          <a:xfrm>
+            <a:off x="720000" y="1674000"/>
             <a:ext cx="10620000" cy="864000"/>
           </a:xfrm>
           <a:prstGeom prst="rect">
@@ -6643,7 +6541,7 @@
                 </a:solidFill>
                 <a:latin typeface="Segoe UI Light"/>
               </a:rPr>
-              <a:t>Les équipes disposent d'une </a:t>
+              <a:t>Le dispositif </a:t>
             </a:r>
             <a:r>
               <a:rPr sz="1400" b="1" i="0">
@@ -6652,7 +6550,7 @@
                 </a:solidFill>
                 <a:latin typeface="Segoe UI"/>
               </a:rPr>
-              <a:t>cadence stable</a:t>
+              <a:t>réduit le temps d'arbitrage</a:t>
             </a:r>
             <a:r>
               <a:rPr sz="1400" b="0" i="0">
@@ -6661,7 +6559,7 @@
                 </a:solidFill>
                 <a:latin typeface="Segoe UI Light"/>
               </a:rPr>
-              <a:t>, de </a:t>
+              <a:t> et rend les </a:t>
             </a:r>
             <a:r>
               <a:rPr sz="1400" b="1" i="0">
@@ -6670,7 +6568,7 @@
                 </a:solidFill>
                 <a:latin typeface="Segoe UI"/>
               </a:rPr>
-              <a:t>décisions plus rapides</a:t>
+              <a:t>points de blocage visibles</a:t>
             </a:r>
             <a:r>
               <a:rPr sz="1400" b="0" i="0">
@@ -6679,20 +6577,20 @@
                 </a:solidFill>
                 <a:latin typeface="Segoe UI Light"/>
               </a:rPr>
-              <a:t> et d'un espace clair pour remonter les irritants.</a:t>
-            </a:r>
-          </a:p>
-        </p:txBody>
-      </p:sp>
-      <p:sp>
-        <p:nvSpPr>
-          <p:cNvPr id="15" name="S11_BLOCK_3_ACCENT_BAR"/>
+              <a:t>.</a:t>
+            </a:r>
+          </a:p>
+        </p:txBody>
+      </p:sp>
+      <p:sp>
+        <p:nvSpPr>
+          <p:cNvPr id="12" name="S11_BLOCK_2_ACCENT_BAR"/>
           <p:cNvSpPr/>
           <p:nvPr/>
         </p:nvSpPr>
         <p:spPr>
           <a:xfrm>
-            <a:off x="392400" y="4392000"/>
+            <a:off x="392400" y="2772000"/>
             <a:ext cx="61200" cy="1371600"/>
           </a:xfrm>
           <a:prstGeom prst="roundRect">
@@ -6701,7 +6599,7 @@
             </a:avLst>
           </a:prstGeom>
           <a:solidFill>
-            <a:srgbClr val="FDA85B"/>
+            <a:srgbClr val="A25871"/>
           </a:solidFill>
           <a:ln>
             <a:noFill/>
@@ -6717,7 +6615,7 @@
       </p:sp>
       <p:pic>
         <p:nvPicPr>
-          <p:cNvPr id="16" name="S11_BLOCK_3_NUMBER" descr="image.png"/>
+          <p:cNvPr id="13" name="S11_BLOCK_2_NUMBER" descr="image.png"/>
           <p:cNvPicPr>
             <a:picLocks noChangeAspect="1"/>
           </p:cNvPicPr>
@@ -6731,7 +6629,7 @@
         </p:blipFill>
         <p:spPr>
           <a:xfrm>
-            <a:off x="648000" y="4482000"/>
+            <a:off x="648000" y="2872800"/>
             <a:ext cx="1440000" cy="792000"/>
           </a:xfrm>
           <a:prstGeom prst="rect">
@@ -6741,13 +6639,13 @@
       </p:pic>
       <p:sp>
         <p:nvSpPr>
-          <p:cNvPr id="17" name="S11_BLOCK_3_TITLE"/>
-          <p:cNvSpPr txBox="1"/>
-          <p:nvPr/>
-        </p:nvSpPr>
-        <p:spPr>
-          <a:xfrm>
-            <a:off x="720000" y="4482000"/>
+          <p:cNvPr id="14" name="S11_BLOCK_2_TITLE"/>
+          <p:cNvSpPr txBox="1"/>
+          <p:nvPr/>
+        </p:nvSpPr>
+        <p:spPr>
+          <a:xfrm>
+            <a:off x="720000" y="2872800"/>
             <a:ext cx="10620000" cy="396000"/>
           </a:xfrm>
           <a:prstGeom prst="rect">
@@ -6765,33 +6663,33 @@
             <a:r>
               <a:rPr sz="1800" b="1" i="0">
                 <a:solidFill>
-                  <a:srgbClr val="FDA85B"/>
-                </a:solidFill>
-                <a:latin typeface="Segoe UI"/>
-              </a:rPr>
-              <a:t>Ce que nous </a:t>
+                  <a:srgbClr val="A25871"/>
+                </a:solidFill>
+                <a:latin typeface="Segoe UI"/>
+              </a:rPr>
+              <a:t>Ce qui change pour les </a:t>
             </a:r>
             <a:r>
               <a:rPr sz="1800" b="1" i="0">
                 <a:solidFill>
-                  <a:srgbClr val="FDA85B"/>
-                </a:solidFill>
-                <a:latin typeface="Segoe UI"/>
-              </a:rPr>
-              <a:t>proposons</a:t>
-            </a:r>
-          </a:p>
-        </p:txBody>
-      </p:sp>
-      <p:sp>
-        <p:nvSpPr>
-          <p:cNvPr id="18" name="S11_BLOCK_3_BODY"/>
-          <p:cNvSpPr txBox="1"/>
-          <p:nvPr/>
-        </p:nvSpPr>
-        <p:spPr>
-          <a:xfrm>
-            <a:off x="720000" y="4914000"/>
+                  <a:srgbClr val="A25871"/>
+                </a:solidFill>
+                <a:latin typeface="Segoe UI"/>
+              </a:rPr>
+              <a:t>équipes</a:t>
+            </a:r>
+          </a:p>
+        </p:txBody>
+      </p:sp>
+      <p:sp>
+        <p:nvSpPr>
+          <p:cNvPr id="15" name="S11_BLOCK_2_BODY"/>
+          <p:cNvSpPr txBox="1"/>
+          <p:nvPr/>
+        </p:nvSpPr>
+        <p:spPr>
+          <a:xfrm>
+            <a:off x="720000" y="3304800"/>
             <a:ext cx="10620000" cy="864000"/>
           </a:xfrm>
           <a:prstGeom prst="rect">
@@ -6817,6 +6715,180 @@
                 </a:solidFill>
                 <a:latin typeface="Segoe UI Light"/>
               </a:rPr>
+              <a:t>Les équipes disposent d'une </a:t>
+            </a:r>
+            <a:r>
+              <a:rPr sz="1400" b="1" i="0">
+                <a:solidFill>
+                  <a:srgbClr val="474E67"/>
+                </a:solidFill>
+                <a:latin typeface="Segoe UI"/>
+              </a:rPr>
+              <a:t>cadence stable</a:t>
+            </a:r>
+            <a:r>
+              <a:rPr sz="1400" b="0" i="0">
+                <a:solidFill>
+                  <a:srgbClr val="474E67"/>
+                </a:solidFill>
+                <a:latin typeface="Segoe UI Light"/>
+              </a:rPr>
+              <a:t>, de </a:t>
+            </a:r>
+            <a:r>
+              <a:rPr sz="1400" b="1" i="0">
+                <a:solidFill>
+                  <a:srgbClr val="474E67"/>
+                </a:solidFill>
+                <a:latin typeface="Segoe UI"/>
+              </a:rPr>
+              <a:t>décisions plus rapides</a:t>
+            </a:r>
+            <a:r>
+              <a:rPr sz="1400" b="0" i="0">
+                <a:solidFill>
+                  <a:srgbClr val="474E67"/>
+                </a:solidFill>
+                <a:latin typeface="Segoe UI Light"/>
+              </a:rPr>
+              <a:t> et d'un espace clair pour remonter les irritants.</a:t>
+            </a:r>
+          </a:p>
+        </p:txBody>
+      </p:sp>
+      <p:sp>
+        <p:nvSpPr>
+          <p:cNvPr id="16" name="S11_BLOCK_3_ACCENT_BAR"/>
+          <p:cNvSpPr/>
+          <p:nvPr/>
+        </p:nvSpPr>
+        <p:spPr>
+          <a:xfrm>
+            <a:off x="392400" y="4392000"/>
+            <a:ext cx="61200" cy="1371600"/>
+          </a:xfrm>
+          <a:prstGeom prst="roundRect">
+            <a:avLst>
+              <a:gd name="adj" fmla="val 12000"/>
+            </a:avLst>
+          </a:prstGeom>
+          <a:solidFill>
+            <a:srgbClr val="FDA85B"/>
+          </a:solidFill>
+          <a:ln>
+            <a:noFill/>
+          </a:ln>
+        </p:spPr>
+        <p:txBody>
+          <a:bodyPr rtlCol="0" anchor="ctr"/>
+          <a:lstStyle/>
+          <a:p>
+            <a:pPr algn="ctr"/>
+          </a:p>
+        </p:txBody>
+      </p:sp>
+      <p:pic>
+        <p:nvPicPr>
+          <p:cNvPr id="17" name="S11_BLOCK_3_NUMBER" descr="image.png"/>
+          <p:cNvPicPr>
+            <a:picLocks noChangeAspect="1"/>
+          </p:cNvPicPr>
+          <p:nvPr/>
+        </p:nvPicPr>
+        <p:blipFill>
+          <a:blip r:embed="rId5"/>
+          <a:stretch>
+            <a:fillRect/>
+          </a:stretch>
+        </p:blipFill>
+        <p:spPr>
+          <a:xfrm>
+            <a:off x="648000" y="4482000"/>
+            <a:ext cx="1440000" cy="792000"/>
+          </a:xfrm>
+          <a:prstGeom prst="rect">
+            <a:avLst/>
+          </a:prstGeom>
+        </p:spPr>
+      </p:pic>
+      <p:sp>
+        <p:nvSpPr>
+          <p:cNvPr id="18" name="S11_BLOCK_3_TITLE"/>
+          <p:cNvSpPr txBox="1"/>
+          <p:nvPr/>
+        </p:nvSpPr>
+        <p:spPr>
+          <a:xfrm>
+            <a:off x="720000" y="4482000"/>
+            <a:ext cx="10620000" cy="396000"/>
+          </a:xfrm>
+          <a:prstGeom prst="rect">
+            <a:avLst/>
+          </a:prstGeom>
+          <a:noFill/>
+        </p:spPr>
+        <p:txBody>
+          <a:bodyPr wrap="square" lIns="45720" rIns="45720" anchor="t">
+            <a:spAutoFit/>
+          </a:bodyPr>
+          <a:lstStyle/>
+          <a:p>
+            <a:pPr algn="l"/>
+            <a:r>
+              <a:rPr sz="1800" b="1" i="0">
+                <a:solidFill>
+                  <a:srgbClr val="FDA85B"/>
+                </a:solidFill>
+                <a:latin typeface="Segoe UI"/>
+              </a:rPr>
+              <a:t>Ce que nous </a:t>
+            </a:r>
+            <a:r>
+              <a:rPr sz="1800" b="1" i="0">
+                <a:solidFill>
+                  <a:srgbClr val="FDA85B"/>
+                </a:solidFill>
+                <a:latin typeface="Segoe UI"/>
+              </a:rPr>
+              <a:t>proposons</a:t>
+            </a:r>
+          </a:p>
+        </p:txBody>
+      </p:sp>
+      <p:sp>
+        <p:nvSpPr>
+          <p:cNvPr id="19" name="S11_BLOCK_3_BODY"/>
+          <p:cNvSpPr txBox="1"/>
+          <p:nvPr/>
+        </p:nvSpPr>
+        <p:spPr>
+          <a:xfrm>
+            <a:off x="720000" y="4914000"/>
+            <a:ext cx="10620000" cy="864000"/>
+          </a:xfrm>
+          <a:prstGeom prst="rect">
+            <a:avLst/>
+          </a:prstGeom>
+          <a:noFill/>
+        </p:spPr>
+        <p:txBody>
+          <a:bodyPr wrap="square" lIns="45720" rIns="45720" anchor="t">
+            <a:spAutoFit/>
+          </a:bodyPr>
+          <a:lstStyle/>
+          <a:p>
+            <a:pPr algn="l">
+              <a:lnSpc>
+                <a:spcPct val="130000"/>
+              </a:lnSpc>
+            </a:pPr>
+            <a:r>
+              <a:rPr sz="1400" b="0" i="0">
+                <a:solidFill>
+                  <a:srgbClr val="474E67"/>
+                </a:solidFill>
+                <a:latin typeface="Segoe UI Light"/>
+              </a:rPr>
               <a:t>Valider le </a:t>
             </a:r>
             <a:r>
@@ -6860,13 +6932,13 @@
       </p:sp>
       <p:sp>
         <p:nvSpPr>
-          <p:cNvPr id="19" name="TakeawayBand"/>
+          <p:cNvPr id="20" name="TakeawayBand"/>
           <p:cNvSpPr/>
           <p:nvPr/>
         </p:nvSpPr>
         <p:spPr>
           <a:xfrm>
-            <a:off x="392400" y="6073200"/>
+            <a:off x="392400" y="6037200"/>
             <a:ext cx="11412000" cy="396000"/>
           </a:xfrm>
           <a:prstGeom prst="rect">
@@ -6909,13 +6981,13 @@
       </p:sp>
       <p:sp>
         <p:nvSpPr>
-          <p:cNvPr id="20" name="TakeawayBandText"/>
-          <p:cNvSpPr txBox="1"/>
-          <p:nvPr/>
-        </p:nvSpPr>
-        <p:spPr>
-          <a:xfrm>
-            <a:off x="392400" y="6073200"/>
+          <p:cNvPr id="21" name="TakeawayBandText"/>
+          <p:cNvSpPr txBox="1"/>
+          <p:nvPr/>
+        </p:nvSpPr>
+        <p:spPr>
+          <a:xfrm>
+            <a:off x="392400" y="6037200"/>
             <a:ext cx="11412000" cy="396000"/>
           </a:xfrm>
           <a:prstGeom prst="rect">
@@ -7103,7 +7175,7 @@
           <a:p>
             <a:pPr algn="l"/>
             <a:r>
-              <a:rPr sz="650" b="0" i="0">
+              <a:rPr sz="900" b="0" i="0">
                 <a:solidFill>
                   <a:srgbClr val="A8A8B5"/>
                 </a:solidFill>
@@ -7138,20 +7210,44 @@
           <a:p>
             <a:pPr algn="l"/>
             <a:r>
-              <a:rPr sz="900" b="1" i="0">
+              <a:rPr sz="900" b="0" i="0">
                 <a:solidFill>
                   <a:srgbClr val="7D7B8D"/>
                 </a:solidFill>
                 <a:latin typeface="Segoe UI"/>
               </a:rPr>
-              <a:t>02/11</a:t>
-            </a:r>
-          </a:p>
-        </p:txBody>
-      </p:sp>
-      <p:sp>
-        <p:nvSpPr>
-          <p:cNvPr id="7" name="S02_SEP_1"/>
+              <a:t>02        |</a:t>
+            </a:r>
+          </a:p>
+        </p:txBody>
+      </p:sp>
+      <p:pic>
+        <p:nvPicPr>
+          <p:cNvPr id="7" name="Picture 6" descr="safran_logo.png"/>
+          <p:cNvPicPr>
+            <a:picLocks noChangeAspect="1"/>
+          </p:cNvPicPr>
+          <p:nvPr/>
+        </p:nvPicPr>
+        <p:blipFill>
+          <a:blip r:embed="rId2"/>
+          <a:stretch>
+            <a:fillRect/>
+          </a:stretch>
+        </p:blipFill>
+        <p:spPr>
+          <a:xfrm>
+            <a:off x="10717200" y="6447600"/>
+            <a:ext cx="1090800" cy="230400"/>
+          </a:xfrm>
+          <a:prstGeom prst="rect">
+            <a:avLst/>
+          </a:prstGeom>
+        </p:spPr>
+      </p:pic>
+      <p:sp>
+        <p:nvSpPr>
+          <p:cNvPr id="8" name="S02_SEP_1"/>
           <p:cNvSpPr/>
           <p:nvPr/>
         </p:nvSpPr>
@@ -7180,7 +7276,7 @@
       </p:sp>
       <p:sp>
         <p:nvSpPr>
-          <p:cNvPr id="8" name="S02_COL_1_TITLE"/>
+          <p:cNvPr id="9" name="S02_COL_1_TITLE"/>
           <p:cNvSpPr txBox="1"/>
           <p:nvPr/>
         </p:nvSpPr>
@@ -7224,7 +7320,7 @@
       </p:sp>
       <p:sp>
         <p:nvSpPr>
-          <p:cNvPr id="9" name="S02_COL_1_BODY"/>
+          <p:cNvPr id="10" name="S02_COL_1_BODY"/>
           <p:cNvSpPr txBox="1"/>
           <p:nvPr/>
         </p:nvSpPr>
@@ -7299,7 +7395,7 @@
       </p:sp>
       <p:sp>
         <p:nvSpPr>
-          <p:cNvPr id="10" name="S02_SEP_2"/>
+          <p:cNvPr id="11" name="S02_SEP_2"/>
           <p:cNvSpPr/>
           <p:nvPr/>
         </p:nvSpPr>
@@ -7328,7 +7424,7 @@
       </p:sp>
       <p:sp>
         <p:nvSpPr>
-          <p:cNvPr id="11" name="S02_COL_2_TITLE"/>
+          <p:cNvPr id="12" name="S02_COL_2_TITLE"/>
           <p:cNvSpPr txBox="1"/>
           <p:nvPr/>
         </p:nvSpPr>
@@ -7372,7 +7468,7 @@
       </p:sp>
       <p:sp>
         <p:nvSpPr>
-          <p:cNvPr id="12" name="S02_COL_2_BODY"/>
+          <p:cNvPr id="13" name="S02_COL_2_BODY"/>
           <p:cNvSpPr txBox="1"/>
           <p:nvPr/>
         </p:nvSpPr>
@@ -7447,7 +7543,7 @@
       </p:sp>
       <p:sp>
         <p:nvSpPr>
-          <p:cNvPr id="13" name="S02_SEP_3"/>
+          <p:cNvPr id="14" name="S02_SEP_3"/>
           <p:cNvSpPr/>
           <p:nvPr/>
         </p:nvSpPr>
@@ -7476,7 +7572,7 @@
       </p:sp>
       <p:sp>
         <p:nvSpPr>
-          <p:cNvPr id="14" name="S02_COL_3_TITLE"/>
+          <p:cNvPr id="15" name="S02_COL_3_TITLE"/>
           <p:cNvSpPr txBox="1"/>
           <p:nvPr/>
         </p:nvSpPr>
@@ -7520,7 +7616,7 @@
       </p:sp>
       <p:sp>
         <p:nvSpPr>
-          <p:cNvPr id="15" name="S02_COL_3_BODY"/>
+          <p:cNvPr id="16" name="S02_COL_3_BODY"/>
           <p:cNvSpPr txBox="1"/>
           <p:nvPr/>
         </p:nvSpPr>
@@ -7736,7 +7832,7 @@
           <a:p>
             <a:pPr algn="l"/>
             <a:r>
-              <a:rPr sz="650" b="0" i="0">
+              <a:rPr sz="900" b="0" i="0">
                 <a:solidFill>
                   <a:srgbClr val="A8A8B5"/>
                 </a:solidFill>
@@ -7771,27 +7867,51 @@
           <a:p>
             <a:pPr algn="l"/>
             <a:r>
-              <a:rPr sz="900" b="1" i="0">
+              <a:rPr sz="900" b="0" i="0">
                 <a:solidFill>
                   <a:srgbClr val="7D7B8D"/>
                 </a:solidFill>
                 <a:latin typeface="Segoe UI"/>
               </a:rPr>
-              <a:t>03/11</a:t>
-            </a:r>
-          </a:p>
-        </p:txBody>
-      </p:sp>
-      <p:sp>
-        <p:nvSpPr>
-          <p:cNvPr id="7" name="S03_TEARDROP_1"/>
+              <a:t>03        |</a:t>
+            </a:r>
+          </a:p>
+        </p:txBody>
+      </p:sp>
+      <p:pic>
+        <p:nvPicPr>
+          <p:cNvPr id="7" name="Picture 6" descr="safran_logo.png"/>
+          <p:cNvPicPr>
+            <a:picLocks noChangeAspect="1"/>
+          </p:cNvPicPr>
+          <p:nvPr/>
+        </p:nvPicPr>
+        <p:blipFill>
+          <a:blip r:embed="rId2"/>
+          <a:stretch>
+            <a:fillRect/>
+          </a:stretch>
+        </p:blipFill>
+        <p:spPr>
+          <a:xfrm>
+            <a:off x="10717200" y="6447600"/>
+            <a:ext cx="1090800" cy="230400"/>
+          </a:xfrm>
+          <a:prstGeom prst="rect">
+            <a:avLst/>
+          </a:prstGeom>
+        </p:spPr>
+      </p:pic>
+      <p:sp>
+        <p:nvSpPr>
+          <p:cNvPr id="8" name="S03_TEARDROP_1"/>
           <p:cNvSpPr/>
           <p:nvPr/>
         </p:nvSpPr>
         <p:spPr>
           <a:xfrm rot="10800000">
             <a:off x="1336859" y="1292400"/>
-            <a:ext cx="1080000" cy="1080000"/>
+            <a:ext cx="864000" cy="864000"/>
           </a:xfrm>
           <a:prstGeom prst="teardrop">
             <a:avLst/>
@@ -7813,7 +7933,7 @@
       </p:sp>
       <p:sp>
         <p:nvSpPr>
-          <p:cNvPr id="8" name="S03_FACTOR_1_LABEL"/>
+          <p:cNvPr id="9" name="S03_FACTOR_1_LABEL"/>
           <p:cNvSpPr txBox="1"/>
           <p:nvPr/>
         </p:nvSpPr>
@@ -7857,14 +7977,14 @@
       </p:sp>
       <p:sp>
         <p:nvSpPr>
-          <p:cNvPr id="9" name="S03_TEARDROP_2"/>
+          <p:cNvPr id="10" name="S03_TEARDROP_2"/>
           <p:cNvSpPr/>
           <p:nvPr/>
         </p:nvSpPr>
         <p:spPr>
           <a:xfrm rot="10800000">
             <a:off x="5635260" y="1314000"/>
-            <a:ext cx="1080000" cy="1080000"/>
+            <a:ext cx="864000" cy="864000"/>
           </a:xfrm>
           <a:prstGeom prst="teardrop">
             <a:avLst/>
@@ -7886,7 +8006,7 @@
       </p:sp>
       <p:sp>
         <p:nvSpPr>
-          <p:cNvPr id="10" name="S03_FACTOR_2_LABEL"/>
+          <p:cNvPr id="11" name="S03_FACTOR_2_LABEL"/>
           <p:cNvSpPr txBox="1"/>
           <p:nvPr/>
         </p:nvSpPr>
@@ -7930,14 +8050,14 @@
       </p:sp>
       <p:sp>
         <p:nvSpPr>
-          <p:cNvPr id="11" name="S03_TEARDROP_3"/>
+          <p:cNvPr id="12" name="S03_TEARDROP_3"/>
           <p:cNvSpPr/>
           <p:nvPr/>
         </p:nvSpPr>
         <p:spPr>
           <a:xfrm rot="10800000">
             <a:off x="9775260" y="1314000"/>
-            <a:ext cx="1080000" cy="1080000"/>
+            <a:ext cx="864000" cy="864000"/>
           </a:xfrm>
           <a:prstGeom prst="teardrop">
             <a:avLst/>
@@ -7959,7 +8079,7 @@
       </p:sp>
       <p:sp>
         <p:nvSpPr>
-          <p:cNvPr id="12" name="S03_FACTOR_3_LABEL"/>
+          <p:cNvPr id="13" name="S03_FACTOR_3_LABEL"/>
           <p:cNvSpPr txBox="1"/>
           <p:nvPr/>
         </p:nvSpPr>
@@ -8003,14 +8123,14 @@
       </p:sp>
       <p:sp>
         <p:nvSpPr>
-          <p:cNvPr id="13" name="S03_TEARDROP_4"/>
+          <p:cNvPr id="14" name="S03_TEARDROP_4"/>
           <p:cNvSpPr/>
           <p:nvPr/>
         </p:nvSpPr>
         <p:spPr>
           <a:xfrm rot="10800000">
             <a:off x="1351259" y="3927600"/>
-            <a:ext cx="1080000" cy="1080000"/>
+            <a:ext cx="864000" cy="864000"/>
           </a:xfrm>
           <a:prstGeom prst="teardrop">
             <a:avLst/>
@@ -8032,7 +8152,7 @@
       </p:sp>
       <p:sp>
         <p:nvSpPr>
-          <p:cNvPr id="14" name="S03_FACTOR_4_LABEL"/>
+          <p:cNvPr id="15" name="S03_FACTOR_4_LABEL"/>
           <p:cNvSpPr txBox="1"/>
           <p:nvPr/>
         </p:nvSpPr>
@@ -8076,14 +8196,14 @@
       </p:sp>
       <p:sp>
         <p:nvSpPr>
-          <p:cNvPr id="15" name="S03_TEARDROP_5"/>
+          <p:cNvPr id="16" name="S03_TEARDROP_5"/>
           <p:cNvSpPr/>
           <p:nvPr/>
         </p:nvSpPr>
         <p:spPr>
           <a:xfrm rot="10800000">
             <a:off x="5577660" y="3927600"/>
-            <a:ext cx="1080000" cy="1080000"/>
+            <a:ext cx="864000" cy="864000"/>
           </a:xfrm>
           <a:prstGeom prst="teardrop">
             <a:avLst/>
@@ -8105,7 +8225,7 @@
       </p:sp>
       <p:sp>
         <p:nvSpPr>
-          <p:cNvPr id="16" name="S03_FACTOR_5_LABEL"/>
+          <p:cNvPr id="17" name="S03_FACTOR_5_LABEL"/>
           <p:cNvSpPr txBox="1"/>
           <p:nvPr/>
         </p:nvSpPr>
@@ -8149,14 +8269,14 @@
       </p:sp>
       <p:sp>
         <p:nvSpPr>
-          <p:cNvPr id="17" name="S03_TEARDROP_6"/>
+          <p:cNvPr id="18" name="S03_TEARDROP_6"/>
           <p:cNvSpPr/>
           <p:nvPr/>
         </p:nvSpPr>
         <p:spPr>
           <a:xfrm rot="10800000">
             <a:off x="9667259" y="3927600"/>
-            <a:ext cx="1080000" cy="1080000"/>
+            <a:ext cx="864000" cy="864000"/>
           </a:xfrm>
           <a:prstGeom prst="teardrop">
             <a:avLst/>
@@ -8178,7 +8298,7 @@
       </p:sp>
       <p:sp>
         <p:nvSpPr>
-          <p:cNvPr id="18" name="S03_FACTOR_6_LABEL"/>
+          <p:cNvPr id="19" name="S03_FACTOR_6_LABEL"/>
           <p:cNvSpPr txBox="1"/>
           <p:nvPr/>
         </p:nvSpPr>
@@ -8222,13 +8342,13 @@
       </p:sp>
       <p:sp>
         <p:nvSpPr>
-          <p:cNvPr id="19" name="TakeawayBand"/>
+          <p:cNvPr id="20" name="TakeawayBand"/>
           <p:cNvSpPr/>
           <p:nvPr/>
         </p:nvSpPr>
         <p:spPr>
           <a:xfrm>
-            <a:off x="392400" y="6073200"/>
+            <a:off x="392400" y="6037200"/>
             <a:ext cx="11412000" cy="396000"/>
           </a:xfrm>
           <a:prstGeom prst="rect">
@@ -8271,13 +8391,13 @@
       </p:sp>
       <p:sp>
         <p:nvSpPr>
-          <p:cNvPr id="20" name="TakeawayBandText"/>
-          <p:cNvSpPr txBox="1"/>
-          <p:nvPr/>
-        </p:nvSpPr>
-        <p:spPr>
-          <a:xfrm>
-            <a:off x="392400" y="6073200"/>
+          <p:cNvPr id="21" name="TakeawayBandText"/>
+          <p:cNvSpPr txBox="1"/>
+          <p:nvPr/>
+        </p:nvSpPr>
+        <p:spPr>
+          <a:xfrm>
+            <a:off x="392400" y="6037200"/>
             <a:ext cx="11412000" cy="396000"/>
           </a:xfrm>
           <a:prstGeom prst="rect">
@@ -8480,7 +8600,7 @@
           <a:p>
             <a:pPr algn="l"/>
             <a:r>
-              <a:rPr sz="650" b="0" i="0">
+              <a:rPr sz="900" b="0" i="0">
                 <a:solidFill>
                   <a:srgbClr val="A8A8B5"/>
                 </a:solidFill>
@@ -8515,20 +8635,44 @@
           <a:p>
             <a:pPr algn="l"/>
             <a:r>
-              <a:rPr sz="900" b="1" i="0">
+              <a:rPr sz="900" b="0" i="0">
                 <a:solidFill>
                   <a:srgbClr val="7D7B8D"/>
                 </a:solidFill>
                 <a:latin typeface="Segoe UI"/>
               </a:rPr>
-              <a:t>04/11</a:t>
-            </a:r>
-          </a:p>
-        </p:txBody>
-      </p:sp>
-      <p:sp>
-        <p:nvSpPr>
-          <p:cNvPr id="8" name="S04_TOP_LABEL"/>
+              <a:t>04        |</a:t>
+            </a:r>
+          </a:p>
+        </p:txBody>
+      </p:sp>
+      <p:pic>
+        <p:nvPicPr>
+          <p:cNvPr id="8" name="Picture 7" descr="safran_logo.png"/>
+          <p:cNvPicPr>
+            <a:picLocks noChangeAspect="1"/>
+          </p:cNvPicPr>
+          <p:nvPr/>
+        </p:nvPicPr>
+        <p:blipFill>
+          <a:blip r:embed="rId3"/>
+          <a:stretch>
+            <a:fillRect/>
+          </a:stretch>
+        </p:blipFill>
+        <p:spPr>
+          <a:xfrm>
+            <a:off x="10717200" y="6447600"/>
+            <a:ext cx="1090800" cy="230400"/>
+          </a:xfrm>
+          <a:prstGeom prst="rect">
+            <a:avLst/>
+          </a:prstGeom>
+        </p:spPr>
+      </p:pic>
+      <p:sp>
+        <p:nvSpPr>
+          <p:cNvPr id="9" name="S04_TOP_LABEL"/>
           <p:cNvSpPr txBox="1"/>
           <p:nvPr/>
         </p:nvSpPr>
@@ -8563,7 +8707,7 @@
       </p:sp>
       <p:sp>
         <p:nvSpPr>
-          <p:cNvPr id="9" name="S04_TOP_SUBLABEL"/>
+          <p:cNvPr id="10" name="S04_TOP_SUBLABEL"/>
           <p:cNvSpPr txBox="1"/>
           <p:nvPr/>
         </p:nvSpPr>
@@ -8607,7 +8751,7 @@
       </p:sp>
       <p:sp>
         <p:nvSpPr>
-          <p:cNvPr id="10" name="S04_LEFT_LABEL"/>
+          <p:cNvPr id="11" name="S04_LEFT_LABEL"/>
           <p:cNvSpPr txBox="1"/>
           <p:nvPr/>
         </p:nvSpPr>
@@ -8642,7 +8786,7 @@
       </p:sp>
       <p:sp>
         <p:nvSpPr>
-          <p:cNvPr id="11" name="S04_LEFT_SUBLABEL"/>
+          <p:cNvPr id="12" name="S04_LEFT_SUBLABEL"/>
           <p:cNvSpPr txBox="1"/>
           <p:nvPr/>
         </p:nvSpPr>
@@ -8686,7 +8830,7 @@
       </p:sp>
       <p:sp>
         <p:nvSpPr>
-          <p:cNvPr id="12" name="S04_RIGHT_LABEL"/>
+          <p:cNvPr id="13" name="S04_RIGHT_LABEL"/>
           <p:cNvSpPr txBox="1"/>
           <p:nvPr/>
         </p:nvSpPr>
@@ -8721,7 +8865,7 @@
       </p:sp>
       <p:sp>
         <p:nvSpPr>
-          <p:cNvPr id="13" name="S04_RIGHT_SUBLABEL"/>
+          <p:cNvPr id="14" name="S04_RIGHT_SUBLABEL"/>
           <p:cNvSpPr txBox="1"/>
           <p:nvPr/>
         </p:nvSpPr>
@@ -8765,13 +8909,13 @@
       </p:sp>
       <p:sp>
         <p:nvSpPr>
-          <p:cNvPr id="14" name="TakeawayBand"/>
+          <p:cNvPr id="15" name="TakeawayBand"/>
           <p:cNvSpPr/>
           <p:nvPr/>
         </p:nvSpPr>
         <p:spPr>
           <a:xfrm>
-            <a:off x="392400" y="6073200"/>
+            <a:off x="392400" y="6037200"/>
             <a:ext cx="11412000" cy="396000"/>
           </a:xfrm>
           <a:prstGeom prst="rect">
@@ -8814,13 +8958,13 @@
       </p:sp>
       <p:sp>
         <p:nvSpPr>
-          <p:cNvPr id="15" name="TakeawayBandText"/>
-          <p:cNvSpPr txBox="1"/>
-          <p:nvPr/>
-        </p:nvSpPr>
-        <p:spPr>
-          <a:xfrm>
-            <a:off x="392400" y="6073200"/>
+          <p:cNvPr id="16" name="TakeawayBandText"/>
+          <p:cNvSpPr txBox="1"/>
+          <p:nvPr/>
+        </p:nvSpPr>
+        <p:spPr>
+          <a:xfrm>
+            <a:off x="392400" y="6037200"/>
             <a:ext cx="11412000" cy="396000"/>
           </a:xfrm>
           <a:prstGeom prst="rect">
@@ -8999,7 +9143,7 @@
           <a:p>
             <a:pPr algn="l"/>
             <a:r>
-              <a:rPr sz="650" b="0" i="0">
+              <a:rPr sz="900" b="0" i="0">
                 <a:solidFill>
                   <a:srgbClr val="A8A8B5"/>
                 </a:solidFill>
@@ -9034,20 +9178,44 @@
           <a:p>
             <a:pPr algn="l"/>
             <a:r>
-              <a:rPr sz="900" b="1" i="0">
+              <a:rPr sz="900" b="0" i="0">
                 <a:solidFill>
                   <a:srgbClr val="7D7B8D"/>
                 </a:solidFill>
                 <a:latin typeface="Segoe UI"/>
               </a:rPr>
-              <a:t>05/11</a:t>
-            </a:r>
-          </a:p>
-        </p:txBody>
-      </p:sp>
+              <a:t>05        |</a:t>
+            </a:r>
+          </a:p>
+        </p:txBody>
+      </p:sp>
+      <p:pic>
+        <p:nvPicPr>
+          <p:cNvPr id="7" name="Picture 6" descr="safran_logo.png"/>
+          <p:cNvPicPr>
+            <a:picLocks noChangeAspect="1"/>
+          </p:cNvPicPr>
+          <p:nvPr/>
+        </p:nvPicPr>
+        <p:blipFill>
+          <a:blip r:embed="rId2"/>
+          <a:stretch>
+            <a:fillRect/>
+          </a:stretch>
+        </p:blipFill>
+        <p:spPr>
+          <a:xfrm>
+            <a:off x="10717200" y="6447600"/>
+            <a:ext cx="1090800" cy="230400"/>
+          </a:xfrm>
+          <a:prstGeom prst="rect">
+            <a:avLst/>
+          </a:prstGeom>
+        </p:spPr>
+      </p:pic>
       <p:cxnSp>
         <p:nvCxnSpPr>
-          <p:cNvPr id="7" name="Connector 6"/>
+          <p:cNvPr id="8" name="Connector 7"/>
           <p:cNvCxnSpPr/>
           <p:nvPr/>
         </p:nvCxnSpPr>
@@ -9068,7 +9236,7 @@
       </p:cxnSp>
       <p:cxnSp>
         <p:nvCxnSpPr>
-          <p:cNvPr id="8" name="Connector 7"/>
+          <p:cNvPr id="9" name="Connector 8"/>
           <p:cNvCxnSpPr/>
           <p:nvPr/>
         </p:nvCxnSpPr>
@@ -9089,7 +9257,7 @@
       </p:cxnSp>
       <p:cxnSp>
         <p:nvCxnSpPr>
-          <p:cNvPr id="9" name="Connector 8"/>
+          <p:cNvPr id="10" name="Connector 9"/>
           <p:cNvCxnSpPr/>
           <p:nvPr/>
         </p:nvCxnSpPr>
@@ -9110,7 +9278,7 @@
       </p:cxnSp>
       <p:sp>
         <p:nvSpPr>
-          <p:cNvPr id="10" name="S05_STEP_1_BULLET"/>
+          <p:cNvPr id="11" name="S05_STEP_1_BULLET"/>
           <p:cNvSpPr/>
           <p:nvPr/>
         </p:nvSpPr>
@@ -9139,7 +9307,7 @@
       </p:sp>
       <p:sp>
         <p:nvSpPr>
-          <p:cNvPr id="11" name="S05_STEP_1_NUMBER"/>
+          <p:cNvPr id="12" name="S05_STEP_1_NUMBER"/>
           <p:cNvSpPr/>
           <p:nvPr/>
         </p:nvSpPr>
@@ -9177,7 +9345,7 @@
       </p:sp>
       <p:sp>
         <p:nvSpPr>
-          <p:cNvPr id="12" name="S05_STEP_1_PERIOD"/>
+          <p:cNvPr id="13" name="S05_STEP_1_PERIOD"/>
           <p:cNvSpPr txBox="1"/>
           <p:nvPr/>
         </p:nvSpPr>
@@ -9221,7 +9389,7 @@
       </p:sp>
       <p:sp>
         <p:nvSpPr>
-          <p:cNvPr id="13" name="S05_STEP_1_TITLE"/>
+          <p:cNvPr id="14" name="S05_STEP_1_TITLE"/>
           <p:cNvSpPr txBox="1"/>
           <p:nvPr/>
         </p:nvSpPr>
@@ -9256,7 +9424,7 @@
       </p:sp>
       <p:sp>
         <p:nvSpPr>
-          <p:cNvPr id="14" name="S05_STEP_1_BODY"/>
+          <p:cNvPr id="15" name="S05_STEP_1_BODY"/>
           <p:cNvSpPr txBox="1"/>
           <p:nvPr/>
         </p:nvSpPr>
@@ -9331,7 +9499,7 @@
       </p:sp>
       <p:sp>
         <p:nvSpPr>
-          <p:cNvPr id="15" name="S05_STEP_2_BULLET"/>
+          <p:cNvPr id="16" name="S05_STEP_2_BULLET"/>
           <p:cNvSpPr/>
           <p:nvPr/>
         </p:nvSpPr>
@@ -9360,7 +9528,7 @@
       </p:sp>
       <p:sp>
         <p:nvSpPr>
-          <p:cNvPr id="16" name="S05_STEP_2_NUMBER"/>
+          <p:cNvPr id="17" name="S05_STEP_2_NUMBER"/>
           <p:cNvSpPr/>
           <p:nvPr/>
         </p:nvSpPr>
@@ -9398,7 +9566,7 @@
       </p:sp>
       <p:sp>
         <p:nvSpPr>
-          <p:cNvPr id="17" name="S05_STEP_2_PERIOD"/>
+          <p:cNvPr id="18" name="S05_STEP_2_PERIOD"/>
           <p:cNvSpPr txBox="1"/>
           <p:nvPr/>
         </p:nvSpPr>
@@ -9442,7 +9610,7 @@
       </p:sp>
       <p:sp>
         <p:nvSpPr>
-          <p:cNvPr id="18" name="S05_STEP_2_TITLE"/>
+          <p:cNvPr id="19" name="S05_STEP_2_TITLE"/>
           <p:cNvSpPr txBox="1"/>
           <p:nvPr/>
         </p:nvSpPr>
@@ -9477,7 +9645,7 @@
       </p:sp>
       <p:sp>
         <p:nvSpPr>
-          <p:cNvPr id="19" name="S05_STEP_2_BODY"/>
+          <p:cNvPr id="20" name="S05_STEP_2_BODY"/>
           <p:cNvSpPr txBox="1"/>
           <p:nvPr/>
         </p:nvSpPr>
@@ -9552,7 +9720,7 @@
       </p:sp>
       <p:sp>
         <p:nvSpPr>
-          <p:cNvPr id="20" name="S05_STEP_3_BULLET"/>
+          <p:cNvPr id="21" name="S05_STEP_3_BULLET"/>
           <p:cNvSpPr/>
           <p:nvPr/>
         </p:nvSpPr>
@@ -9581,7 +9749,7 @@
       </p:sp>
       <p:sp>
         <p:nvSpPr>
-          <p:cNvPr id="21" name="S05_STEP_3_NUMBER"/>
+          <p:cNvPr id="22" name="S05_STEP_3_NUMBER"/>
           <p:cNvSpPr/>
           <p:nvPr/>
         </p:nvSpPr>
@@ -9619,7 +9787,7 @@
       </p:sp>
       <p:sp>
         <p:nvSpPr>
-          <p:cNvPr id="22" name="S05_STEP_3_PERIOD"/>
+          <p:cNvPr id="23" name="S05_STEP_3_PERIOD"/>
           <p:cNvSpPr txBox="1"/>
           <p:nvPr/>
         </p:nvSpPr>
@@ -9663,7 +9831,7 @@
       </p:sp>
       <p:sp>
         <p:nvSpPr>
-          <p:cNvPr id="23" name="S05_STEP_3_TITLE"/>
+          <p:cNvPr id="24" name="S05_STEP_3_TITLE"/>
           <p:cNvSpPr txBox="1"/>
           <p:nvPr/>
         </p:nvSpPr>
@@ -9698,7 +9866,7 @@
       </p:sp>
       <p:sp>
         <p:nvSpPr>
-          <p:cNvPr id="24" name="S05_STEP_3_BODY"/>
+          <p:cNvPr id="25" name="S05_STEP_3_BODY"/>
           <p:cNvSpPr txBox="1"/>
           <p:nvPr/>
         </p:nvSpPr>
@@ -9773,7 +9941,7 @@
       </p:sp>
       <p:sp>
         <p:nvSpPr>
-          <p:cNvPr id="25" name="S05_STEP_4_BULLET"/>
+          <p:cNvPr id="26" name="S05_STEP_4_BULLET"/>
           <p:cNvSpPr/>
           <p:nvPr/>
         </p:nvSpPr>
@@ -9802,7 +9970,7 @@
       </p:sp>
       <p:sp>
         <p:nvSpPr>
-          <p:cNvPr id="26" name="S05_STEP_4_NUMBER"/>
+          <p:cNvPr id="27" name="S05_STEP_4_NUMBER"/>
           <p:cNvSpPr/>
           <p:nvPr/>
         </p:nvSpPr>
@@ -9840,7 +10008,7 @@
       </p:sp>
       <p:sp>
         <p:nvSpPr>
-          <p:cNvPr id="27" name="S05_STEP_4_PERIOD"/>
+          <p:cNvPr id="28" name="S05_STEP_4_PERIOD"/>
           <p:cNvSpPr txBox="1"/>
           <p:nvPr/>
         </p:nvSpPr>
@@ -9884,7 +10052,7 @@
       </p:sp>
       <p:sp>
         <p:nvSpPr>
-          <p:cNvPr id="28" name="S05_STEP_4_TITLE"/>
+          <p:cNvPr id="29" name="S05_STEP_4_TITLE"/>
           <p:cNvSpPr txBox="1"/>
           <p:nvPr/>
         </p:nvSpPr>
@@ -9919,7 +10087,7 @@
       </p:sp>
       <p:sp>
         <p:nvSpPr>
-          <p:cNvPr id="29" name="S05_STEP_4_BODY"/>
+          <p:cNvPr id="30" name="S05_STEP_4_BODY"/>
           <p:cNvSpPr txBox="1"/>
           <p:nvPr/>
         </p:nvSpPr>
@@ -10135,7 +10303,7 @@
           <a:p>
             <a:pPr algn="l"/>
             <a:r>
-              <a:rPr sz="650" b="0" i="0">
+              <a:rPr sz="900" b="0" i="0">
                 <a:solidFill>
                   <a:srgbClr val="A8A8B5"/>
                 </a:solidFill>
@@ -10170,20 +10338,44 @@
           <a:p>
             <a:pPr algn="l"/>
             <a:r>
-              <a:rPr sz="900" b="1" i="0">
+              <a:rPr sz="900" b="0" i="0">
                 <a:solidFill>
                   <a:srgbClr val="7D7B8D"/>
                 </a:solidFill>
                 <a:latin typeface="Segoe UI"/>
               </a:rPr>
-              <a:t>06/11</a:t>
-            </a:r>
-          </a:p>
-        </p:txBody>
-      </p:sp>
-      <p:sp>
-        <p:nvSpPr>
-          <p:cNvPr id="7" name="S06_HEADER_1_BG"/>
+              <a:t>06        |</a:t>
+            </a:r>
+          </a:p>
+        </p:txBody>
+      </p:sp>
+      <p:pic>
+        <p:nvPicPr>
+          <p:cNvPr id="7" name="Picture 6" descr="safran_logo.png"/>
+          <p:cNvPicPr>
+            <a:picLocks noChangeAspect="1"/>
+          </p:cNvPicPr>
+          <p:nvPr/>
+        </p:nvPicPr>
+        <p:blipFill>
+          <a:blip r:embed="rId2"/>
+          <a:stretch>
+            <a:fillRect/>
+          </a:stretch>
+        </p:blipFill>
+        <p:spPr>
+          <a:xfrm>
+            <a:off x="10717200" y="6447600"/>
+            <a:ext cx="1090800" cy="230400"/>
+          </a:xfrm>
+          <a:prstGeom prst="rect">
+            <a:avLst/>
+          </a:prstGeom>
+        </p:spPr>
+      </p:pic>
+      <p:sp>
+        <p:nvSpPr>
+          <p:cNvPr id="8" name="S06_HEADER_1_BG"/>
           <p:cNvSpPr/>
           <p:nvPr/>
         </p:nvSpPr>
@@ -10212,7 +10404,7 @@
       </p:sp>
       <p:sp>
         <p:nvSpPr>
-          <p:cNvPr id="8" name="S06_HEADER_C1"/>
+          <p:cNvPr id="9" name="S06_HEADER_C1"/>
           <p:cNvSpPr txBox="1"/>
           <p:nvPr/>
         </p:nvSpPr>
@@ -10247,7 +10439,7 @@
       </p:sp>
       <p:sp>
         <p:nvSpPr>
-          <p:cNvPr id="9" name="S06_HEADER_2_BG"/>
+          <p:cNvPr id="10" name="S06_HEADER_2_BG"/>
           <p:cNvSpPr/>
           <p:nvPr/>
         </p:nvSpPr>
@@ -10276,7 +10468,7 @@
       </p:sp>
       <p:sp>
         <p:nvSpPr>
-          <p:cNvPr id="10" name="S06_HEADER_C2"/>
+          <p:cNvPr id="11" name="S06_HEADER_C2"/>
           <p:cNvSpPr txBox="1"/>
           <p:nvPr/>
         </p:nvSpPr>
@@ -10311,7 +10503,7 @@
       </p:sp>
       <p:sp>
         <p:nvSpPr>
-          <p:cNvPr id="11" name="S06_HEADER_3_BG"/>
+          <p:cNvPr id="12" name="S06_HEADER_3_BG"/>
           <p:cNvSpPr/>
           <p:nvPr/>
         </p:nvSpPr>
@@ -10340,7 +10532,7 @@
       </p:sp>
       <p:sp>
         <p:nvSpPr>
-          <p:cNvPr id="12" name="S06_HEADER_C3"/>
+          <p:cNvPr id="13" name="S06_HEADER_C3"/>
           <p:cNvSpPr txBox="1"/>
           <p:nvPr/>
         </p:nvSpPr>
@@ -10375,7 +10567,7 @@
       </p:sp>
       <p:sp>
         <p:nvSpPr>
-          <p:cNvPr id="13" name="S06_HEADER_4_BG"/>
+          <p:cNvPr id="14" name="S06_HEADER_4_BG"/>
           <p:cNvSpPr/>
           <p:nvPr/>
         </p:nvSpPr>
@@ -10404,7 +10596,7 @@
       </p:sp>
       <p:sp>
         <p:nvSpPr>
-          <p:cNvPr id="14" name="S06_HEADER_C4"/>
+          <p:cNvPr id="15" name="S06_HEADER_C4"/>
           <p:cNvSpPr txBox="1"/>
           <p:nvPr/>
         </p:nvSpPr>
@@ -10439,7 +10631,7 @@
       </p:sp>
       <p:sp>
         <p:nvSpPr>
-          <p:cNvPr id="15" name="S06_HEADER_5_BG"/>
+          <p:cNvPr id="16" name="S06_HEADER_5_BG"/>
           <p:cNvSpPr/>
           <p:nvPr/>
         </p:nvSpPr>
@@ -10468,7 +10660,7 @@
       </p:sp>
       <p:sp>
         <p:nvSpPr>
-          <p:cNvPr id="16" name="S06_HEADER_C5"/>
+          <p:cNvPr id="17" name="S06_HEADER_C5"/>
           <p:cNvSpPr txBox="1"/>
           <p:nvPr/>
         </p:nvSpPr>
@@ -10503,7 +10695,7 @@
       </p:sp>
       <p:sp>
         <p:nvSpPr>
-          <p:cNvPr id="17" name="S06_R1_BG"/>
+          <p:cNvPr id="18" name="S06_R1_BG"/>
           <p:cNvSpPr/>
           <p:nvPr/>
         </p:nvSpPr>
@@ -10532,7 +10724,7 @@
       </p:sp>
       <p:sp>
         <p:nvSpPr>
-          <p:cNvPr id="18" name="S06_R1C1"/>
+          <p:cNvPr id="19" name="S06_R1C1"/>
           <p:cNvSpPr txBox="1"/>
           <p:nvPr/>
         </p:nvSpPr>
@@ -10576,7 +10768,7 @@
       </p:sp>
       <p:cxnSp>
         <p:nvCxnSpPr>
-          <p:cNvPr id="19" name="Connector 18"/>
+          <p:cNvPr id="20" name="Connector 19"/>
           <p:cNvCxnSpPr/>
           <p:nvPr/>
         </p:nvCxnSpPr>
@@ -10597,7 +10789,7 @@
       </p:cxnSp>
       <p:sp>
         <p:nvSpPr>
-          <p:cNvPr id="20" name="S06_R1C2"/>
+          <p:cNvPr id="21" name="S06_R1C2"/>
           <p:cNvSpPr txBox="1"/>
           <p:nvPr/>
         </p:nvSpPr>
@@ -10632,7 +10824,7 @@
       </p:sp>
       <p:cxnSp>
         <p:nvCxnSpPr>
-          <p:cNvPr id="21" name="Connector 20"/>
+          <p:cNvPr id="22" name="Connector 21"/>
           <p:cNvCxnSpPr/>
           <p:nvPr/>
         </p:nvCxnSpPr>
@@ -10653,7 +10845,7 @@
       </p:cxnSp>
       <p:sp>
         <p:nvSpPr>
-          <p:cNvPr id="22" name="S06_R1C3"/>
+          <p:cNvPr id="23" name="S06_R1C3"/>
           <p:cNvSpPr txBox="1"/>
           <p:nvPr/>
         </p:nvSpPr>
@@ -10688,7 +10880,7 @@
       </p:sp>
       <p:cxnSp>
         <p:nvCxnSpPr>
-          <p:cNvPr id="23" name="Connector 22"/>
+          <p:cNvPr id="24" name="Connector 23"/>
           <p:cNvCxnSpPr/>
           <p:nvPr/>
         </p:nvCxnSpPr>
@@ -10709,7 +10901,7 @@
       </p:cxnSp>
       <p:sp>
         <p:nvSpPr>
-          <p:cNvPr id="24" name="S06_R1C4"/>
+          <p:cNvPr id="25" name="S06_R1C4"/>
           <p:cNvSpPr txBox="1"/>
           <p:nvPr/>
         </p:nvSpPr>
@@ -10744,7 +10936,7 @@
       </p:sp>
       <p:cxnSp>
         <p:nvCxnSpPr>
-          <p:cNvPr id="25" name="Connector 24"/>
+          <p:cNvPr id="26" name="Connector 25"/>
           <p:cNvCxnSpPr/>
           <p:nvPr/>
         </p:nvCxnSpPr>
@@ -10765,7 +10957,7 @@
       </p:cxnSp>
       <p:sp>
         <p:nvSpPr>
-          <p:cNvPr id="26" name="S06_R1C5"/>
+          <p:cNvPr id="27" name="S06_R1C5"/>
           <p:cNvSpPr txBox="1"/>
           <p:nvPr/>
         </p:nvSpPr>
@@ -10800,7 +10992,7 @@
       </p:sp>
       <p:cxnSp>
         <p:nvCxnSpPr>
-          <p:cNvPr id="27" name="Connector 26"/>
+          <p:cNvPr id="28" name="Connector 27"/>
           <p:cNvCxnSpPr/>
           <p:nvPr/>
         </p:nvCxnSpPr>
@@ -10821,7 +11013,7 @@
       </p:cxnSp>
       <p:sp>
         <p:nvSpPr>
-          <p:cNvPr id="28" name="S06_R2_BG"/>
+          <p:cNvPr id="29" name="S06_R2_BG"/>
           <p:cNvSpPr/>
           <p:nvPr/>
         </p:nvSpPr>
@@ -10850,7 +11042,7 @@
       </p:sp>
       <p:sp>
         <p:nvSpPr>
-          <p:cNvPr id="29" name="S06_R2C1"/>
+          <p:cNvPr id="30" name="S06_R2C1"/>
           <p:cNvSpPr txBox="1"/>
           <p:nvPr/>
         </p:nvSpPr>
@@ -10894,7 +11086,7 @@
       </p:sp>
       <p:cxnSp>
         <p:nvCxnSpPr>
-          <p:cNvPr id="30" name="Connector 29"/>
+          <p:cNvPr id="31" name="Connector 30"/>
           <p:cNvCxnSpPr/>
           <p:nvPr/>
         </p:nvCxnSpPr>
@@ -10915,7 +11107,7 @@
       </p:cxnSp>
       <p:sp>
         <p:nvSpPr>
-          <p:cNvPr id="31" name="S06_R2C2"/>
+          <p:cNvPr id="32" name="S06_R2C2"/>
           <p:cNvSpPr txBox="1"/>
           <p:nvPr/>
         </p:nvSpPr>
@@ -10950,7 +11142,7 @@
       </p:sp>
       <p:cxnSp>
         <p:nvCxnSpPr>
-          <p:cNvPr id="32" name="Connector 31"/>
+          <p:cNvPr id="33" name="Connector 32"/>
           <p:cNvCxnSpPr/>
           <p:nvPr/>
         </p:nvCxnSpPr>
@@ -10971,7 +11163,7 @@
       </p:cxnSp>
       <p:sp>
         <p:nvSpPr>
-          <p:cNvPr id="33" name="S06_R2C3"/>
+          <p:cNvPr id="34" name="S06_R2C3"/>
           <p:cNvSpPr txBox="1"/>
           <p:nvPr/>
         </p:nvSpPr>
@@ -11006,7 +11198,7 @@
       </p:sp>
       <p:cxnSp>
         <p:nvCxnSpPr>
-          <p:cNvPr id="34" name="Connector 33"/>
+          <p:cNvPr id="35" name="Connector 34"/>
           <p:cNvCxnSpPr/>
           <p:nvPr/>
         </p:nvCxnSpPr>
@@ -11027,7 +11219,7 @@
       </p:cxnSp>
       <p:sp>
         <p:nvSpPr>
-          <p:cNvPr id="35" name="S06_R2C4"/>
+          <p:cNvPr id="36" name="S06_R2C4"/>
           <p:cNvSpPr txBox="1"/>
           <p:nvPr/>
         </p:nvSpPr>
@@ -11062,7 +11254,7 @@
       </p:sp>
       <p:cxnSp>
         <p:nvCxnSpPr>
-          <p:cNvPr id="36" name="Connector 35"/>
+          <p:cNvPr id="37" name="Connector 36"/>
           <p:cNvCxnSpPr/>
           <p:nvPr/>
         </p:nvCxnSpPr>
@@ -11083,7 +11275,7 @@
       </p:cxnSp>
       <p:sp>
         <p:nvSpPr>
-          <p:cNvPr id="37" name="S06_R2C5"/>
+          <p:cNvPr id="38" name="S06_R2C5"/>
           <p:cNvSpPr txBox="1"/>
           <p:nvPr/>
         </p:nvSpPr>
@@ -11118,7 +11310,7 @@
       </p:sp>
       <p:cxnSp>
         <p:nvCxnSpPr>
-          <p:cNvPr id="38" name="Connector 37"/>
+          <p:cNvPr id="39" name="Connector 38"/>
           <p:cNvCxnSpPr/>
           <p:nvPr/>
         </p:nvCxnSpPr>
@@ -11139,7 +11331,7 @@
       </p:cxnSp>
       <p:sp>
         <p:nvSpPr>
-          <p:cNvPr id="39" name="S06_R3_BG"/>
+          <p:cNvPr id="40" name="S06_R3_BG"/>
           <p:cNvSpPr/>
           <p:nvPr/>
         </p:nvSpPr>
@@ -11168,7 +11360,7 @@
       </p:sp>
       <p:sp>
         <p:nvSpPr>
-          <p:cNvPr id="40" name="S06_R3C1"/>
+          <p:cNvPr id="41" name="S06_R3C1"/>
           <p:cNvSpPr txBox="1"/>
           <p:nvPr/>
         </p:nvSpPr>
@@ -11212,7 +11404,7 @@
       </p:sp>
       <p:cxnSp>
         <p:nvCxnSpPr>
-          <p:cNvPr id="41" name="Connector 40"/>
+          <p:cNvPr id="42" name="Connector 41"/>
           <p:cNvCxnSpPr/>
           <p:nvPr/>
         </p:nvCxnSpPr>
@@ -11233,7 +11425,7 @@
       </p:cxnSp>
       <p:sp>
         <p:nvSpPr>
-          <p:cNvPr id="42" name="S06_R3C2"/>
+          <p:cNvPr id="43" name="S06_R3C2"/>
           <p:cNvSpPr txBox="1"/>
           <p:nvPr/>
         </p:nvSpPr>
@@ -11268,7 +11460,7 @@
       </p:sp>
       <p:cxnSp>
         <p:nvCxnSpPr>
-          <p:cNvPr id="43" name="Connector 42"/>
+          <p:cNvPr id="44" name="Connector 43"/>
           <p:cNvCxnSpPr/>
           <p:nvPr/>
         </p:nvCxnSpPr>
@@ -11289,7 +11481,7 @@
       </p:cxnSp>
       <p:sp>
         <p:nvSpPr>
-          <p:cNvPr id="44" name="S06_R3C3"/>
+          <p:cNvPr id="45" name="S06_R3C3"/>
           <p:cNvSpPr txBox="1"/>
           <p:nvPr/>
         </p:nvSpPr>
@@ -11324,7 +11516,7 @@
       </p:sp>
       <p:cxnSp>
         <p:nvCxnSpPr>
-          <p:cNvPr id="45" name="Connector 44"/>
+          <p:cNvPr id="46" name="Connector 45"/>
           <p:cNvCxnSpPr/>
           <p:nvPr/>
         </p:nvCxnSpPr>
@@ -11345,7 +11537,7 @@
       </p:cxnSp>
       <p:sp>
         <p:nvSpPr>
-          <p:cNvPr id="46" name="S06_R3C4"/>
+          <p:cNvPr id="47" name="S06_R3C4"/>
           <p:cNvSpPr txBox="1"/>
           <p:nvPr/>
         </p:nvSpPr>
@@ -11380,7 +11572,7 @@
       </p:sp>
       <p:cxnSp>
         <p:nvCxnSpPr>
-          <p:cNvPr id="47" name="Connector 46"/>
+          <p:cNvPr id="48" name="Connector 47"/>
           <p:cNvCxnSpPr/>
           <p:nvPr/>
         </p:nvCxnSpPr>
@@ -11401,7 +11593,7 @@
       </p:cxnSp>
       <p:sp>
         <p:nvSpPr>
-          <p:cNvPr id="48" name="S06_R3C5"/>
+          <p:cNvPr id="49" name="S06_R3C5"/>
           <p:cNvSpPr txBox="1"/>
           <p:nvPr/>
         </p:nvSpPr>
@@ -11436,7 +11628,7 @@
       </p:sp>
       <p:cxnSp>
         <p:nvCxnSpPr>
-          <p:cNvPr id="49" name="Connector 48"/>
+          <p:cNvPr id="50" name="Connector 49"/>
           <p:cNvCxnSpPr/>
           <p:nvPr/>
         </p:nvCxnSpPr>
@@ -11457,7 +11649,7 @@
       </p:cxnSp>
       <p:sp>
         <p:nvSpPr>
-          <p:cNvPr id="50" name="S06_R4_BG"/>
+          <p:cNvPr id="51" name="S06_R4_BG"/>
           <p:cNvSpPr/>
           <p:nvPr/>
         </p:nvSpPr>
@@ -11486,7 +11678,7 @@
       </p:sp>
       <p:sp>
         <p:nvSpPr>
-          <p:cNvPr id="51" name="S06_R4C1"/>
+          <p:cNvPr id="52" name="S06_R4C1"/>
           <p:cNvSpPr txBox="1"/>
           <p:nvPr/>
         </p:nvSpPr>
@@ -11530,7 +11722,7 @@
       </p:sp>
       <p:cxnSp>
         <p:nvCxnSpPr>
-          <p:cNvPr id="52" name="Connector 51"/>
+          <p:cNvPr id="53" name="Connector 52"/>
           <p:cNvCxnSpPr/>
           <p:nvPr/>
         </p:nvCxnSpPr>
@@ -11551,7 +11743,7 @@
       </p:cxnSp>
       <p:sp>
         <p:nvSpPr>
-          <p:cNvPr id="53" name="S06_R4C2"/>
+          <p:cNvPr id="54" name="S06_R4C2"/>
           <p:cNvSpPr txBox="1"/>
           <p:nvPr/>
         </p:nvSpPr>
@@ -11586,7 +11778,7 @@
       </p:sp>
       <p:cxnSp>
         <p:nvCxnSpPr>
-          <p:cNvPr id="54" name="Connector 53"/>
+          <p:cNvPr id="55" name="Connector 54"/>
           <p:cNvCxnSpPr/>
           <p:nvPr/>
         </p:nvCxnSpPr>
@@ -11607,7 +11799,7 @@
       </p:cxnSp>
       <p:sp>
         <p:nvSpPr>
-          <p:cNvPr id="55" name="S06_R4C3"/>
+          <p:cNvPr id="56" name="S06_R4C3"/>
           <p:cNvSpPr txBox="1"/>
           <p:nvPr/>
         </p:nvSpPr>
@@ -11642,7 +11834,7 @@
       </p:sp>
       <p:cxnSp>
         <p:nvCxnSpPr>
-          <p:cNvPr id="56" name="Connector 55"/>
+          <p:cNvPr id="57" name="Connector 56"/>
           <p:cNvCxnSpPr/>
           <p:nvPr/>
         </p:nvCxnSpPr>
@@ -11663,7 +11855,7 @@
       </p:cxnSp>
       <p:sp>
         <p:nvSpPr>
-          <p:cNvPr id="57" name="S06_R4C4"/>
+          <p:cNvPr id="58" name="S06_R4C4"/>
           <p:cNvSpPr txBox="1"/>
           <p:nvPr/>
         </p:nvSpPr>
@@ -11698,7 +11890,7 @@
       </p:sp>
       <p:cxnSp>
         <p:nvCxnSpPr>
-          <p:cNvPr id="58" name="Connector 57"/>
+          <p:cNvPr id="59" name="Connector 58"/>
           <p:cNvCxnSpPr/>
           <p:nvPr/>
         </p:nvCxnSpPr>
@@ -11719,7 +11911,7 @@
       </p:cxnSp>
       <p:sp>
         <p:nvSpPr>
-          <p:cNvPr id="59" name="S06_R4C5"/>
+          <p:cNvPr id="60" name="S06_R4C5"/>
           <p:cNvSpPr txBox="1"/>
           <p:nvPr/>
         </p:nvSpPr>
@@ -11754,7 +11946,7 @@
       </p:sp>
       <p:cxnSp>
         <p:nvCxnSpPr>
-          <p:cNvPr id="60" name="Connector 59"/>
+          <p:cNvPr id="61" name="Connector 60"/>
           <p:cNvCxnSpPr/>
           <p:nvPr/>
         </p:nvCxnSpPr>
@@ -11775,13 +11967,13 @@
       </p:cxnSp>
       <p:sp>
         <p:nvSpPr>
-          <p:cNvPr id="61" name="TakeawayBand"/>
+          <p:cNvPr id="62" name="TakeawayBand"/>
           <p:cNvSpPr/>
           <p:nvPr/>
         </p:nvSpPr>
         <p:spPr>
           <a:xfrm>
-            <a:off x="392400" y="6073200"/>
+            <a:off x="392400" y="6037200"/>
             <a:ext cx="11412000" cy="396000"/>
           </a:xfrm>
           <a:prstGeom prst="rect">
@@ -11824,13 +12016,13 @@
       </p:sp>
       <p:sp>
         <p:nvSpPr>
-          <p:cNvPr id="62" name="TakeawayBandText"/>
-          <p:cNvSpPr txBox="1"/>
-          <p:nvPr/>
-        </p:nvSpPr>
-        <p:spPr>
-          <a:xfrm>
-            <a:off x="392400" y="6073200"/>
+          <p:cNvPr id="63" name="TakeawayBandText"/>
+          <p:cNvSpPr txBox="1"/>
+          <p:nvPr/>
+        </p:nvSpPr>
+        <p:spPr>
+          <a:xfrm>
+            <a:off x="392400" y="6037200"/>
             <a:ext cx="11412000" cy="396000"/>
           </a:xfrm>
           <a:prstGeom prst="rect">
@@ -12009,7 +12201,7 @@
           <a:p>
             <a:pPr algn="l"/>
             <a:r>
-              <a:rPr sz="650" b="0" i="0">
+              <a:rPr sz="900" b="0" i="0">
                 <a:solidFill>
                   <a:srgbClr val="A8A8B5"/>
                 </a:solidFill>
@@ -12044,20 +12236,44 @@
           <a:p>
             <a:pPr algn="l"/>
             <a:r>
-              <a:rPr sz="900" b="1" i="0">
+              <a:rPr sz="900" b="0" i="0">
                 <a:solidFill>
                   <a:srgbClr val="7D7B8D"/>
                 </a:solidFill>
                 <a:latin typeface="Segoe UI"/>
               </a:rPr>
-              <a:t>07/11</a:t>
-            </a:r>
-          </a:p>
-        </p:txBody>
-      </p:sp>
-      <p:sp>
-        <p:nvSpPr>
-          <p:cNvPr id="7" name="S07_KPI_1_CARD"/>
+              <a:t>07        |</a:t>
+            </a:r>
+          </a:p>
+        </p:txBody>
+      </p:sp>
+      <p:pic>
+        <p:nvPicPr>
+          <p:cNvPr id="7" name="Picture 6" descr="safran_logo.png"/>
+          <p:cNvPicPr>
+            <a:picLocks noChangeAspect="1"/>
+          </p:cNvPicPr>
+          <p:nvPr/>
+        </p:nvPicPr>
+        <p:blipFill>
+          <a:blip r:embed="rId2"/>
+          <a:stretch>
+            <a:fillRect/>
+          </a:stretch>
+        </p:blipFill>
+        <p:spPr>
+          <a:xfrm>
+            <a:off x="10717200" y="6447600"/>
+            <a:ext cx="1090800" cy="230400"/>
+          </a:xfrm>
+          <a:prstGeom prst="rect">
+            <a:avLst/>
+          </a:prstGeom>
+        </p:spPr>
+      </p:pic>
+      <p:sp>
+        <p:nvSpPr>
+          <p:cNvPr id="8" name="S07_KPI_1_CARD"/>
           <p:cNvSpPr/>
           <p:nvPr/>
         </p:nvSpPr>
@@ -12088,7 +12304,7 @@
       </p:sp>
       <p:sp>
         <p:nvSpPr>
-          <p:cNvPr id="8" name="S07_KPI_1_LABEL"/>
+          <p:cNvPr id="9" name="S07_KPI_1_LABEL"/>
           <p:cNvSpPr txBox="1"/>
           <p:nvPr/>
         </p:nvSpPr>
@@ -12123,7 +12339,7 @@
       </p:sp>
       <p:sp>
         <p:nvSpPr>
-          <p:cNvPr id="9" name="S07_KPI_1_SUBLABEL"/>
+          <p:cNvPr id="10" name="S07_KPI_1_SUBLABEL"/>
           <p:cNvSpPr txBox="1"/>
           <p:nvPr/>
         </p:nvSpPr>
@@ -12167,7 +12383,7 @@
       </p:sp>
       <p:sp>
         <p:nvSpPr>
-          <p:cNvPr id="10" name="S07_KPI_2_CARD"/>
+          <p:cNvPr id="11" name="S07_KPI_2_CARD"/>
           <p:cNvSpPr/>
           <p:nvPr/>
         </p:nvSpPr>
@@ -12198,7 +12414,7 @@
       </p:sp>
       <p:sp>
         <p:nvSpPr>
-          <p:cNvPr id="11" name="S07_KPI_2_LABEL"/>
+          <p:cNvPr id="12" name="S07_KPI_2_LABEL"/>
           <p:cNvSpPr txBox="1"/>
           <p:nvPr/>
         </p:nvSpPr>
@@ -12233,7 +12449,7 @@
       </p:sp>
       <p:sp>
         <p:nvSpPr>
-          <p:cNvPr id="12" name="S07_KPI_2_SUBLABEL"/>
+          <p:cNvPr id="13" name="S07_KPI_2_SUBLABEL"/>
           <p:cNvSpPr txBox="1"/>
           <p:nvPr/>
         </p:nvSpPr>
@@ -12277,7 +12493,7 @@
       </p:sp>
       <p:sp>
         <p:nvSpPr>
-          <p:cNvPr id="13" name="S07_KPI_3_CARD"/>
+          <p:cNvPr id="14" name="S07_KPI_3_CARD"/>
           <p:cNvSpPr/>
           <p:nvPr/>
         </p:nvSpPr>
@@ -12308,7 +12524,7 @@
       </p:sp>
       <p:sp>
         <p:nvSpPr>
-          <p:cNvPr id="14" name="S07_KPI_3_LABEL"/>
+          <p:cNvPr id="15" name="S07_KPI_3_LABEL"/>
           <p:cNvSpPr txBox="1"/>
           <p:nvPr/>
         </p:nvSpPr>
@@ -12343,7 +12559,7 @@
       </p:sp>
       <p:sp>
         <p:nvSpPr>
-          <p:cNvPr id="15" name="S07_KPI_3_SUBLABEL"/>
+          <p:cNvPr id="16" name="S07_KPI_3_SUBLABEL"/>
           <p:cNvSpPr txBox="1"/>
           <p:nvPr/>
         </p:nvSpPr>
@@ -12378,7 +12594,7 @@
       </p:sp>
       <p:sp>
         <p:nvSpPr>
-          <p:cNvPr id="16" name="S07_KPI_4_CARD"/>
+          <p:cNvPr id="17" name="S07_KPI_4_CARD"/>
           <p:cNvSpPr/>
           <p:nvPr/>
         </p:nvSpPr>
@@ -12409,7 +12625,7 @@
       </p:sp>
       <p:sp>
         <p:nvSpPr>
-          <p:cNvPr id="17" name="S07_KPI_4_LABEL"/>
+          <p:cNvPr id="18" name="S07_KPI_4_LABEL"/>
           <p:cNvSpPr txBox="1"/>
           <p:nvPr/>
         </p:nvSpPr>
@@ -12444,7 +12660,7 @@
       </p:sp>
       <p:sp>
         <p:nvSpPr>
-          <p:cNvPr id="18" name="S07_KPI_4_SUBLABEL"/>
+          <p:cNvPr id="19" name="S07_KPI_4_SUBLABEL"/>
           <p:cNvSpPr txBox="1"/>
           <p:nvPr/>
         </p:nvSpPr>
@@ -12488,7 +12704,7 @@
       </p:sp>
       <p:sp>
         <p:nvSpPr>
-          <p:cNvPr id="19" name="S07_KPI_5_CARD"/>
+          <p:cNvPr id="20" name="S07_KPI_5_CARD"/>
           <p:cNvSpPr/>
           <p:nvPr/>
         </p:nvSpPr>
@@ -12519,7 +12735,7 @@
       </p:sp>
       <p:sp>
         <p:nvSpPr>
-          <p:cNvPr id="20" name="S07_KPI_5_LABEL"/>
+          <p:cNvPr id="21" name="S07_KPI_5_LABEL"/>
           <p:cNvSpPr txBox="1"/>
           <p:nvPr/>
         </p:nvSpPr>
@@ -12554,7 +12770,7 @@
       </p:sp>
       <p:sp>
         <p:nvSpPr>
-          <p:cNvPr id="21" name="S07_KPI_5_SUBLABEL"/>
+          <p:cNvPr id="22" name="S07_KPI_5_SUBLABEL"/>
           <p:cNvSpPr txBox="1"/>
           <p:nvPr/>
         </p:nvSpPr>
@@ -12598,7 +12814,7 @@
       </p:sp>
       <p:sp>
         <p:nvSpPr>
-          <p:cNvPr id="22" name="S07_KPI_6_CARD"/>
+          <p:cNvPr id="23" name="S07_KPI_6_CARD"/>
           <p:cNvSpPr/>
           <p:nvPr/>
         </p:nvSpPr>
@@ -12629,7 +12845,7 @@
       </p:sp>
       <p:sp>
         <p:nvSpPr>
-          <p:cNvPr id="23" name="S07_KPI_6_LABEL"/>
+          <p:cNvPr id="24" name="S07_KPI_6_LABEL"/>
           <p:cNvSpPr txBox="1"/>
           <p:nvPr/>
         </p:nvSpPr>
@@ -12664,7 +12880,7 @@
       </p:sp>
       <p:sp>
         <p:nvSpPr>
-          <p:cNvPr id="24" name="S07_KPI_6_SUBLABEL"/>
+          <p:cNvPr id="25" name="S07_KPI_6_SUBLABEL"/>
           <p:cNvSpPr txBox="1"/>
           <p:nvPr/>
         </p:nvSpPr>
@@ -12708,7 +12924,7 @@
       </p:sp>
       <p:sp>
         <p:nvSpPr>
-          <p:cNvPr id="25" name="Rectangle 24"/>
+          <p:cNvPr id="26" name="Rectangle 25"/>
           <p:cNvSpPr/>
           <p:nvPr/>
         </p:nvSpPr>
@@ -12737,7 +12953,7 @@
       </p:sp>
       <p:sp>
         <p:nvSpPr>
-          <p:cNvPr id="26" name="S07_SECTION_LABEL"/>
+          <p:cNvPr id="27" name="S07_SECTION_LABEL"/>
           <p:cNvSpPr txBox="1"/>
           <p:nvPr/>
         </p:nvSpPr>
@@ -12781,7 +12997,7 @@
       </p:sp>
       <p:sp>
         <p:nvSpPr>
-          <p:cNvPr id="27" name="S07_BAR_1_LABEL"/>
+          <p:cNvPr id="28" name="S07_BAR_1_LABEL"/>
           <p:cNvSpPr txBox="1"/>
           <p:nvPr/>
         </p:nvSpPr>
@@ -12825,7 +13041,7 @@
       </p:sp>
       <p:sp>
         <p:nvSpPr>
-          <p:cNvPr id="28" name="S07_BAR_1_BAR"/>
+          <p:cNvPr id="29" name="S07_BAR_1_BAR"/>
           <p:cNvSpPr/>
           <p:nvPr/>
         </p:nvSpPr>
@@ -12856,7 +13072,7 @@
       </p:sp>
       <p:sp>
         <p:nvSpPr>
-          <p:cNvPr id="29" name="S07_BAR_1_VALUE"/>
+          <p:cNvPr id="30" name="S07_BAR_1_VALUE"/>
           <p:cNvSpPr txBox="1"/>
           <p:nvPr/>
         </p:nvSpPr>
@@ -12891,7 +13107,7 @@
       </p:sp>
       <p:sp>
         <p:nvSpPr>
-          <p:cNvPr id="30" name="S07_BAR_2_LABEL"/>
+          <p:cNvPr id="31" name="S07_BAR_2_LABEL"/>
           <p:cNvSpPr txBox="1"/>
           <p:nvPr/>
         </p:nvSpPr>
@@ -12935,7 +13151,7 @@
       </p:sp>
       <p:sp>
         <p:nvSpPr>
-          <p:cNvPr id="31" name="S07_BAR_2_BAR"/>
+          <p:cNvPr id="32" name="S07_BAR_2_BAR"/>
           <p:cNvSpPr/>
           <p:nvPr/>
         </p:nvSpPr>
@@ -12966,7 +13182,7 @@
       </p:sp>
       <p:sp>
         <p:nvSpPr>
-          <p:cNvPr id="32" name="S07_BAR_2_VALUE"/>
+          <p:cNvPr id="33" name="S07_BAR_2_VALUE"/>
           <p:cNvSpPr txBox="1"/>
           <p:nvPr/>
         </p:nvSpPr>
@@ -13001,7 +13217,7 @@
       </p:sp>
       <p:sp>
         <p:nvSpPr>
-          <p:cNvPr id="33" name="S07_BAR_3_LABEL"/>
+          <p:cNvPr id="34" name="S07_BAR_3_LABEL"/>
           <p:cNvSpPr txBox="1"/>
           <p:nvPr/>
         </p:nvSpPr>
@@ -13045,7 +13261,7 @@
       </p:sp>
       <p:sp>
         <p:nvSpPr>
-          <p:cNvPr id="34" name="S07_BAR_3_BAR"/>
+          <p:cNvPr id="35" name="S07_BAR_3_BAR"/>
           <p:cNvSpPr/>
           <p:nvPr/>
         </p:nvSpPr>
@@ -13076,7 +13292,7 @@
       </p:sp>
       <p:sp>
         <p:nvSpPr>
-          <p:cNvPr id="35" name="S07_BAR_3_VALUE"/>
+          <p:cNvPr id="36" name="S07_BAR_3_VALUE"/>
           <p:cNvSpPr txBox="1"/>
           <p:nvPr/>
         </p:nvSpPr>
@@ -13111,7 +13327,7 @@
       </p:sp>
       <p:sp>
         <p:nvSpPr>
-          <p:cNvPr id="36" name="S07_BAR_4_LABEL"/>
+          <p:cNvPr id="37" name="S07_BAR_4_LABEL"/>
           <p:cNvSpPr txBox="1"/>
           <p:nvPr/>
         </p:nvSpPr>
@@ -13155,7 +13371,7 @@
       </p:sp>
       <p:sp>
         <p:nvSpPr>
-          <p:cNvPr id="37" name="S07_BAR_4_BAR"/>
+          <p:cNvPr id="38" name="S07_BAR_4_BAR"/>
           <p:cNvSpPr/>
           <p:nvPr/>
         </p:nvSpPr>
@@ -13186,7 +13402,7 @@
       </p:sp>
       <p:sp>
         <p:nvSpPr>
-          <p:cNvPr id="38" name="S07_BAR_4_VALUE"/>
+          <p:cNvPr id="39" name="S07_BAR_4_VALUE"/>
           <p:cNvSpPr txBox="1"/>
           <p:nvPr/>
         </p:nvSpPr>
@@ -13221,7 +13437,7 @@
       </p:sp>
       <p:sp>
         <p:nvSpPr>
-          <p:cNvPr id="39" name="S07_BAR_5_LABEL"/>
+          <p:cNvPr id="40" name="S07_BAR_5_LABEL"/>
           <p:cNvSpPr txBox="1"/>
           <p:nvPr/>
         </p:nvSpPr>
@@ -13265,7 +13481,7 @@
       </p:sp>
       <p:sp>
         <p:nvSpPr>
-          <p:cNvPr id="40" name="S07_BAR_5_BAR"/>
+          <p:cNvPr id="41" name="S07_BAR_5_BAR"/>
           <p:cNvSpPr/>
           <p:nvPr/>
         </p:nvSpPr>
@@ -13296,7 +13512,7 @@
       </p:sp>
       <p:sp>
         <p:nvSpPr>
-          <p:cNvPr id="41" name="S07_BAR_5_VALUE"/>
+          <p:cNvPr id="42" name="S07_BAR_5_VALUE"/>
           <p:cNvSpPr txBox="1"/>
           <p:nvPr/>
         </p:nvSpPr>
@@ -13331,13 +13547,13 @@
       </p:sp>
       <p:sp>
         <p:nvSpPr>
-          <p:cNvPr id="42" name="TakeawayBand"/>
+          <p:cNvPr id="43" name="TakeawayBand"/>
           <p:cNvSpPr/>
           <p:nvPr/>
         </p:nvSpPr>
         <p:spPr>
           <a:xfrm>
-            <a:off x="392400" y="6073200"/>
+            <a:off x="392400" y="6037200"/>
             <a:ext cx="11412000" cy="396000"/>
           </a:xfrm>
           <a:prstGeom prst="rect">
@@ -13380,13 +13596,13 @@
       </p:sp>
       <p:sp>
         <p:nvSpPr>
-          <p:cNvPr id="43" name="TakeawayBandText"/>
-          <p:cNvSpPr txBox="1"/>
-          <p:nvPr/>
-        </p:nvSpPr>
-        <p:spPr>
-          <a:xfrm>
-            <a:off x="392400" y="6073200"/>
+          <p:cNvPr id="44" name="TakeawayBandText"/>
+          <p:cNvSpPr txBox="1"/>
+          <p:nvPr/>
+        </p:nvSpPr>
+        <p:spPr>
+          <a:xfrm>
+            <a:off x="392400" y="6037200"/>
             <a:ext cx="11412000" cy="396000"/>
           </a:xfrm>
           <a:prstGeom prst="rect">
@@ -13574,7 +13790,7 @@
           <a:p>
             <a:pPr algn="l"/>
             <a:r>
-              <a:rPr sz="650" b="0" i="0">
+              <a:rPr sz="900" b="0" i="0">
                 <a:solidFill>
                   <a:srgbClr val="A8A8B5"/>
                 </a:solidFill>
@@ -13609,20 +13825,44 @@
           <a:p>
             <a:pPr algn="l"/>
             <a:r>
-              <a:rPr sz="900" b="1" i="0">
+              <a:rPr sz="900" b="0" i="0">
                 <a:solidFill>
                   <a:srgbClr val="7D7B8D"/>
                 </a:solidFill>
                 <a:latin typeface="Segoe UI"/>
               </a:rPr>
-              <a:t>08/11</a:t>
-            </a:r>
-          </a:p>
-        </p:txBody>
-      </p:sp>
-      <p:sp>
-        <p:nvSpPr>
-          <p:cNvPr id="7" name="S08_SUBTITLE"/>
+              <a:t>08        |</a:t>
+            </a:r>
+          </a:p>
+        </p:txBody>
+      </p:sp>
+      <p:pic>
+        <p:nvPicPr>
+          <p:cNvPr id="7" name="Picture 6" descr="safran_logo.png"/>
+          <p:cNvPicPr>
+            <a:picLocks noChangeAspect="1"/>
+          </p:cNvPicPr>
+          <p:nvPr/>
+        </p:nvPicPr>
+        <p:blipFill>
+          <a:blip r:embed="rId2"/>
+          <a:stretch>
+            <a:fillRect/>
+          </a:stretch>
+        </p:blipFill>
+        <p:spPr>
+          <a:xfrm>
+            <a:off x="10717200" y="6447600"/>
+            <a:ext cx="1090800" cy="230400"/>
+          </a:xfrm>
+          <a:prstGeom prst="rect">
+            <a:avLst/>
+          </a:prstGeom>
+        </p:spPr>
+      </p:pic>
+      <p:sp>
+        <p:nvSpPr>
+          <p:cNvPr id="8" name="S08_SUBTITLE"/>
           <p:cNvSpPr txBox="1"/>
           <p:nvPr/>
         </p:nvSpPr>
@@ -13666,7 +13906,7 @@
       </p:sp>
       <p:sp>
         <p:nvSpPr>
-          <p:cNvPr id="8" name="S08_LEGEND_1"/>
+          <p:cNvPr id="9" name="S08_LEGEND_1"/>
           <p:cNvSpPr txBox="1"/>
           <p:nvPr/>
         </p:nvSpPr>
@@ -13701,7 +13941,7 @@
       </p:sp>
       <p:sp>
         <p:nvSpPr>
-          <p:cNvPr id="9" name="S08_LEGEND_2"/>
+          <p:cNvPr id="10" name="S08_LEGEND_2"/>
           <p:cNvSpPr txBox="1"/>
           <p:nvPr/>
         </p:nvSpPr>
@@ -13736,7 +13976,7 @@
       </p:sp>
       <p:sp>
         <p:nvSpPr>
-          <p:cNvPr id="10" name="S08_LEGEND_1_SQ"/>
+          <p:cNvPr id="11" name="S08_LEGEND_1_SQ"/>
           <p:cNvSpPr/>
           <p:nvPr/>
         </p:nvSpPr>
@@ -13765,7 +14005,7 @@
       </p:sp>
       <p:sp>
         <p:nvSpPr>
-          <p:cNvPr id="11" name="S08_LEGEND_2_SQ"/>
+          <p:cNvPr id="12" name="S08_LEGEND_2_SQ"/>
           <p:cNvSpPr/>
           <p:nvPr/>
         </p:nvSpPr>
@@ -13794,7 +14034,7 @@
       </p:sp>
       <p:sp>
         <p:nvSpPr>
-          <p:cNvPr id="12" name="S08_ROW_1_LABEL"/>
+          <p:cNvPr id="13" name="S08_ROW_1_LABEL"/>
           <p:cNvSpPr txBox="1"/>
           <p:nvPr/>
         </p:nvSpPr>
@@ -13838,7 +14078,7 @@
       </p:sp>
       <p:sp>
         <p:nvSpPr>
-          <p:cNvPr id="13" name="S08_ROW_1_BAR_1"/>
+          <p:cNvPr id="14" name="S08_ROW_1_BAR_1"/>
           <p:cNvSpPr/>
           <p:nvPr/>
         </p:nvSpPr>
@@ -13869,7 +14109,7 @@
       </p:sp>
       <p:sp>
         <p:nvSpPr>
-          <p:cNvPr id="14" name="S08_ROW_1_BAR_2"/>
+          <p:cNvPr id="15" name="S08_ROW_1_BAR_2"/>
           <p:cNvSpPr/>
           <p:nvPr/>
         </p:nvSpPr>
@@ -13900,7 +14140,7 @@
       </p:sp>
       <p:sp>
         <p:nvSpPr>
-          <p:cNvPr id="15" name="S08_ROW_1_VALUE_1"/>
+          <p:cNvPr id="16" name="S08_ROW_1_VALUE_1"/>
           <p:cNvSpPr txBox="1"/>
           <p:nvPr/>
         </p:nvSpPr>
@@ -13935,7 +14175,7 @@
       </p:sp>
       <p:sp>
         <p:nvSpPr>
-          <p:cNvPr id="16" name="S08_ROW_1_VALUE_2"/>
+          <p:cNvPr id="17" name="S08_ROW_1_VALUE_2"/>
           <p:cNvSpPr txBox="1"/>
           <p:nvPr/>
         </p:nvSpPr>
@@ -13970,7 +14210,7 @@
       </p:sp>
       <p:sp>
         <p:nvSpPr>
-          <p:cNvPr id="17" name="S08_ROW_2_LABEL"/>
+          <p:cNvPr id="18" name="S08_ROW_2_LABEL"/>
           <p:cNvSpPr txBox="1"/>
           <p:nvPr/>
         </p:nvSpPr>
@@ -14014,7 +14254,7 @@
       </p:sp>
       <p:sp>
         <p:nvSpPr>
-          <p:cNvPr id="18" name="S08_ROW_2_BAR_1"/>
+          <p:cNvPr id="19" name="S08_ROW_2_BAR_1"/>
           <p:cNvSpPr/>
           <p:nvPr/>
         </p:nvSpPr>
@@ -14045,7 +14285,7 @@
       </p:sp>
       <p:sp>
         <p:nvSpPr>
-          <p:cNvPr id="19" name="S08_ROW_2_BAR_2"/>
+          <p:cNvPr id="20" name="S08_ROW_2_BAR_2"/>
           <p:cNvSpPr/>
           <p:nvPr/>
         </p:nvSpPr>
@@ -14076,7 +14316,7 @@
       </p:sp>
       <p:sp>
         <p:nvSpPr>
-          <p:cNvPr id="20" name="S08_ROW_2_VALUE_1"/>
+          <p:cNvPr id="21" name="S08_ROW_2_VALUE_1"/>
           <p:cNvSpPr txBox="1"/>
           <p:nvPr/>
         </p:nvSpPr>
@@ -14111,7 +14351,7 @@
       </p:sp>
       <p:sp>
         <p:nvSpPr>
-          <p:cNvPr id="21" name="S08_ROW_2_VALUE_2"/>
+          <p:cNvPr id="22" name="S08_ROW_2_VALUE_2"/>
           <p:cNvSpPr txBox="1"/>
           <p:nvPr/>
         </p:nvSpPr>
@@ -14146,7 +14386,7 @@
       </p:sp>
       <p:sp>
         <p:nvSpPr>
-          <p:cNvPr id="22" name="S08_ROW_3_LABEL"/>
+          <p:cNvPr id="23" name="S08_ROW_3_LABEL"/>
           <p:cNvSpPr txBox="1"/>
           <p:nvPr/>
         </p:nvSpPr>
@@ -14190,7 +14430,7 @@
       </p:sp>
       <p:sp>
         <p:nvSpPr>
-          <p:cNvPr id="23" name="S08_ROW_3_BAR_1"/>
+          <p:cNvPr id="24" name="S08_ROW_3_BAR_1"/>
           <p:cNvSpPr/>
           <p:nvPr/>
         </p:nvSpPr>
@@ -14221,7 +14461,7 @@
       </p:sp>
       <p:sp>
         <p:nvSpPr>
-          <p:cNvPr id="24" name="S08_ROW_3_BAR_2"/>
+          <p:cNvPr id="25" name="S08_ROW_3_BAR_2"/>
           <p:cNvSpPr/>
           <p:nvPr/>
         </p:nvSpPr>
@@ -14252,7 +14492,7 @@
       </p:sp>
       <p:sp>
         <p:nvSpPr>
-          <p:cNvPr id="25" name="S08_ROW_3_VALUE_1"/>
+          <p:cNvPr id="26" name="S08_ROW_3_VALUE_1"/>
           <p:cNvSpPr txBox="1"/>
           <p:nvPr/>
         </p:nvSpPr>
@@ -14287,7 +14527,7 @@
       </p:sp>
       <p:sp>
         <p:nvSpPr>
-          <p:cNvPr id="26" name="S08_ROW_3_VALUE_2"/>
+          <p:cNvPr id="27" name="S08_ROW_3_VALUE_2"/>
           <p:cNvSpPr txBox="1"/>
           <p:nvPr/>
         </p:nvSpPr>
@@ -14322,7 +14562,7 @@
       </p:sp>
       <p:sp>
         <p:nvSpPr>
-          <p:cNvPr id="27" name="S08_ROW_4_LABEL"/>
+          <p:cNvPr id="28" name="S08_ROW_4_LABEL"/>
           <p:cNvSpPr txBox="1"/>
           <p:nvPr/>
         </p:nvSpPr>
@@ -14366,7 +14606,7 @@
       </p:sp>
       <p:sp>
         <p:nvSpPr>
-          <p:cNvPr id="28" name="S08_ROW_4_BAR_1"/>
+          <p:cNvPr id="29" name="S08_ROW_4_BAR_1"/>
           <p:cNvSpPr/>
           <p:nvPr/>
         </p:nvSpPr>
@@ -14397,7 +14637,7 @@
       </p:sp>
       <p:sp>
         <p:nvSpPr>
-          <p:cNvPr id="29" name="S08_ROW_4_BAR_2"/>
+          <p:cNvPr id="30" name="S08_ROW_4_BAR_2"/>
           <p:cNvSpPr/>
           <p:nvPr/>
         </p:nvSpPr>
@@ -14428,7 +14668,7 @@
       </p:sp>
       <p:sp>
         <p:nvSpPr>
-          <p:cNvPr id="30" name="S08_ROW_4_VALUE_1"/>
+          <p:cNvPr id="31" name="S08_ROW_4_VALUE_1"/>
           <p:cNvSpPr txBox="1"/>
           <p:nvPr/>
         </p:nvSpPr>
@@ -14463,7 +14703,7 @@
       </p:sp>
       <p:sp>
         <p:nvSpPr>
-          <p:cNvPr id="31" name="S08_ROW_4_VALUE_2"/>
+          <p:cNvPr id="32" name="S08_ROW_4_VALUE_2"/>
           <p:cNvSpPr txBox="1"/>
           <p:nvPr/>
         </p:nvSpPr>
@@ -14498,7 +14738,7 @@
       </p:sp>
       <p:sp>
         <p:nvSpPr>
-          <p:cNvPr id="32" name="S08_ROW_5_LABEL"/>
+          <p:cNvPr id="33" name="S08_ROW_5_LABEL"/>
           <p:cNvSpPr txBox="1"/>
           <p:nvPr/>
         </p:nvSpPr>
@@ -14542,7 +14782,7 @@
       </p:sp>
       <p:sp>
         <p:nvSpPr>
-          <p:cNvPr id="33" name="S08_ROW_5_BAR_1"/>
+          <p:cNvPr id="34" name="S08_ROW_5_BAR_1"/>
           <p:cNvSpPr/>
           <p:nvPr/>
         </p:nvSpPr>
@@ -14573,7 +14813,7 @@
       </p:sp>
       <p:sp>
         <p:nvSpPr>
-          <p:cNvPr id="34" name="S08_ROW_5_BAR_2"/>
+          <p:cNvPr id="35" name="S08_ROW_5_BAR_2"/>
           <p:cNvSpPr/>
           <p:nvPr/>
         </p:nvSpPr>
@@ -14604,7 +14844,7 @@
       </p:sp>
       <p:sp>
         <p:nvSpPr>
-          <p:cNvPr id="35" name="S08_ROW_5_VALUE_1"/>
+          <p:cNvPr id="36" name="S08_ROW_5_VALUE_1"/>
           <p:cNvSpPr txBox="1"/>
           <p:nvPr/>
         </p:nvSpPr>
@@ -14639,7 +14879,7 @@
       </p:sp>
       <p:sp>
         <p:nvSpPr>
-          <p:cNvPr id="36" name="S08_ROW_5_VALUE_2"/>
+          <p:cNvPr id="37" name="S08_ROW_5_VALUE_2"/>
           <p:cNvSpPr txBox="1"/>
           <p:nvPr/>
         </p:nvSpPr>
@@ -14674,13 +14914,13 @@
       </p:sp>
       <p:sp>
         <p:nvSpPr>
-          <p:cNvPr id="37" name="TakeawayBand"/>
+          <p:cNvPr id="38" name="TakeawayBand"/>
           <p:cNvSpPr/>
           <p:nvPr/>
         </p:nvSpPr>
         <p:spPr>
           <a:xfrm>
-            <a:off x="392400" y="6073200"/>
+            <a:off x="392400" y="6037200"/>
             <a:ext cx="11412000" cy="396000"/>
           </a:xfrm>
           <a:prstGeom prst="rect">
@@ -14723,13 +14963,13 @@
       </p:sp>
       <p:sp>
         <p:nvSpPr>
-          <p:cNvPr id="38" name="TakeawayBandText"/>
-          <p:cNvSpPr txBox="1"/>
-          <p:nvPr/>
-        </p:nvSpPr>
-        <p:spPr>
-          <a:xfrm>
-            <a:off x="392400" y="6073200"/>
+          <p:cNvPr id="39" name="TakeawayBandText"/>
+          <p:cNvSpPr txBox="1"/>
+          <p:nvPr/>
+        </p:nvSpPr>
+        <p:spPr>
+          <a:xfrm>
+            <a:off x="392400" y="6037200"/>
             <a:ext cx="11412000" cy="396000"/>
           </a:xfrm>
           <a:prstGeom prst="rect">
@@ -14908,7 +15148,7 @@
           <a:p>
             <a:pPr algn="l"/>
             <a:r>
-              <a:rPr sz="650" b="0" i="0">
+              <a:rPr sz="900" b="0" i="0">
                 <a:solidFill>
                   <a:srgbClr val="A8A8B5"/>
                 </a:solidFill>
@@ -14943,20 +15183,44 @@
           <a:p>
             <a:pPr algn="l"/>
             <a:r>
-              <a:rPr sz="900" b="1" i="0">
+              <a:rPr sz="900" b="0" i="0">
                 <a:solidFill>
                   <a:srgbClr val="7D7B8D"/>
                 </a:solidFill>
                 <a:latin typeface="Segoe UI"/>
               </a:rPr>
-              <a:t>09/11</a:t>
-            </a:r>
-          </a:p>
-        </p:txBody>
-      </p:sp>
-      <p:sp>
-        <p:nvSpPr>
-          <p:cNvPr id="7" name="S09_RISK_1_CARD"/>
+              <a:t>09        |</a:t>
+            </a:r>
+          </a:p>
+        </p:txBody>
+      </p:sp>
+      <p:pic>
+        <p:nvPicPr>
+          <p:cNvPr id="7" name="Picture 6" descr="safran_logo.png"/>
+          <p:cNvPicPr>
+            <a:picLocks noChangeAspect="1"/>
+          </p:cNvPicPr>
+          <p:nvPr/>
+        </p:nvPicPr>
+        <p:blipFill>
+          <a:blip r:embed="rId2"/>
+          <a:stretch>
+            <a:fillRect/>
+          </a:stretch>
+        </p:blipFill>
+        <p:spPr>
+          <a:xfrm>
+            <a:off x="10717200" y="6447600"/>
+            <a:ext cx="1090800" cy="230400"/>
+          </a:xfrm>
+          <a:prstGeom prst="rect">
+            <a:avLst/>
+          </a:prstGeom>
+        </p:spPr>
+      </p:pic>
+      <p:sp>
+        <p:nvSpPr>
+          <p:cNvPr id="8" name="S09_RISK_1_CARD"/>
           <p:cNvSpPr/>
           <p:nvPr/>
         </p:nvSpPr>
@@ -14989,7 +15253,7 @@
       </p:sp>
       <p:sp>
         <p:nvSpPr>
-          <p:cNvPr id="8" name="S09_RISK_1_ICON"/>
+          <p:cNvPr id="9" name="S09_RISK_1_ICON"/>
           <p:cNvSpPr/>
           <p:nvPr/>
         </p:nvSpPr>
@@ -15029,7 +15293,7 @@
       </p:sp>
       <p:sp>
         <p:nvSpPr>
-          <p:cNvPr id="9" name="S09_RISK_1_TITLE"/>
+          <p:cNvPr id="10" name="S09_RISK_1_TITLE"/>
           <p:cNvSpPr txBox="1"/>
           <p:nvPr/>
         </p:nvSpPr>
@@ -15073,7 +15337,7 @@
       </p:sp>
       <p:sp>
         <p:nvSpPr>
-          <p:cNvPr id="10" name="S09_RISK_1_LEVEL"/>
+          <p:cNvPr id="11" name="S09_RISK_1_LEVEL"/>
           <p:cNvSpPr/>
           <p:nvPr/>
         </p:nvSpPr>
@@ -15113,7 +15377,7 @@
       </p:sp>
       <p:sp>
         <p:nvSpPr>
-          <p:cNvPr id="11" name="S09_RISK_1_BODY"/>
+          <p:cNvPr id="12" name="S09_RISK_1_BODY"/>
           <p:cNvSpPr txBox="1"/>
           <p:nvPr/>
         </p:nvSpPr>
@@ -15166,7 +15430,7 @@
       </p:sp>
       <p:cxnSp>
         <p:nvCxnSpPr>
-          <p:cNvPr id="12" name="Connector 11"/>
+          <p:cNvPr id="13" name="Connector 12"/>
           <p:cNvCxnSpPr/>
           <p:nvPr/>
         </p:nvCxnSpPr>
@@ -15188,7 +15452,7 @@
       </p:cxnSp>
       <p:sp>
         <p:nvSpPr>
-          <p:cNvPr id="13" name="S09_RISK_1_ACTION_TAG"/>
+          <p:cNvPr id="14" name="S09_RISK_1_ACTION_TAG"/>
           <p:cNvSpPr/>
           <p:nvPr/>
         </p:nvSpPr>
@@ -15228,7 +15492,7 @@
       </p:sp>
       <p:sp>
         <p:nvSpPr>
-          <p:cNvPr id="14" name="S09_RISK_1_ACTION_BODY"/>
+          <p:cNvPr id="15" name="S09_RISK_1_ACTION_BODY"/>
           <p:cNvSpPr txBox="1"/>
           <p:nvPr/>
         </p:nvSpPr>
@@ -15299,7 +15563,7 @@
       </p:sp>
       <p:sp>
         <p:nvSpPr>
-          <p:cNvPr id="15" name="S09_RISK_2_CARD"/>
+          <p:cNvPr id="16" name="S09_RISK_2_CARD"/>
           <p:cNvSpPr/>
           <p:nvPr/>
         </p:nvSpPr>
@@ -15332,7 +15596,7 @@
       </p:sp>
       <p:sp>
         <p:nvSpPr>
-          <p:cNvPr id="16" name="S09_RISK_2_ICON"/>
+          <p:cNvPr id="17" name="S09_RISK_2_ICON"/>
           <p:cNvSpPr/>
           <p:nvPr/>
         </p:nvSpPr>
@@ -15372,7 +15636,7 @@
       </p:sp>
       <p:sp>
         <p:nvSpPr>
-          <p:cNvPr id="17" name="S09_RISK_2_TITLE"/>
+          <p:cNvPr id="18" name="S09_RISK_2_TITLE"/>
           <p:cNvSpPr txBox="1"/>
           <p:nvPr/>
         </p:nvSpPr>
@@ -15416,7 +15680,7 @@
       </p:sp>
       <p:sp>
         <p:nvSpPr>
-          <p:cNvPr id="18" name="S09_RISK_2_LEVEL"/>
+          <p:cNvPr id="19" name="S09_RISK_2_LEVEL"/>
           <p:cNvSpPr/>
           <p:nvPr/>
         </p:nvSpPr>
@@ -15456,7 +15720,7 @@
       </p:sp>
       <p:sp>
         <p:nvSpPr>
-          <p:cNvPr id="19" name="S09_RISK_2_BODY"/>
+          <p:cNvPr id="20" name="S09_RISK_2_BODY"/>
           <p:cNvSpPr txBox="1"/>
           <p:nvPr/>
         </p:nvSpPr>
@@ -15509,7 +15773,7 @@
       </p:sp>
       <p:cxnSp>
         <p:nvCxnSpPr>
-          <p:cNvPr id="20" name="Connector 19"/>
+          <p:cNvPr id="21" name="Connector 20"/>
           <p:cNvCxnSpPr/>
           <p:nvPr/>
         </p:nvCxnSpPr>
@@ -15531,7 +15795,7 @@
       </p:cxnSp>
       <p:sp>
         <p:nvSpPr>
-          <p:cNvPr id="21" name="S09_RISK_2_ACTION_TAG"/>
+          <p:cNvPr id="22" name="S09_RISK_2_ACTION_TAG"/>
           <p:cNvSpPr/>
           <p:nvPr/>
         </p:nvSpPr>
@@ -15571,7 +15835,7 @@
       </p:sp>
       <p:sp>
         <p:nvSpPr>
-          <p:cNvPr id="22" name="S09_RISK_2_ACTION_BODY"/>
+          <p:cNvPr id="23" name="S09_RISK_2_ACTION_BODY"/>
           <p:cNvSpPr txBox="1"/>
           <p:nvPr/>
         </p:nvSpPr>
@@ -15624,7 +15888,7 @@
       </p:sp>
       <p:sp>
         <p:nvSpPr>
-          <p:cNvPr id="23" name="S09_RISK_3_CARD"/>
+          <p:cNvPr id="24" name="S09_RISK_3_CARD"/>
           <p:cNvSpPr/>
           <p:nvPr/>
         </p:nvSpPr>
@@ -15657,7 +15921,7 @@
       </p:sp>
       <p:sp>
         <p:nvSpPr>
-          <p:cNvPr id="24" name="S09_RISK_3_ICON"/>
+          <p:cNvPr id="25" name="S09_RISK_3_ICON"/>
           <p:cNvSpPr/>
           <p:nvPr/>
         </p:nvSpPr>
@@ -15697,7 +15961,7 @@
       </p:sp>
       <p:sp>
         <p:nvSpPr>
-          <p:cNvPr id="25" name="S09_RISK_3_TITLE"/>
+          <p:cNvPr id="26" name="S09_RISK_3_TITLE"/>
           <p:cNvSpPr txBox="1"/>
           <p:nvPr/>
         </p:nvSpPr>
@@ -15741,7 +16005,7 @@
       </p:sp>
       <p:sp>
         <p:nvSpPr>
-          <p:cNvPr id="26" name="S09_RISK_3_LEVEL"/>
+          <p:cNvPr id="27" name="S09_RISK_3_LEVEL"/>
           <p:cNvSpPr/>
           <p:nvPr/>
         </p:nvSpPr>
@@ -15781,7 +16045,7 @@
       </p:sp>
       <p:sp>
         <p:nvSpPr>
-          <p:cNvPr id="27" name="S09_RISK_3_BODY"/>
+          <p:cNvPr id="28" name="S09_RISK_3_BODY"/>
           <p:cNvSpPr txBox="1"/>
           <p:nvPr/>
         </p:nvSpPr>
@@ -15834,7 +16098,7 @@
       </p:sp>
       <p:cxnSp>
         <p:nvCxnSpPr>
-          <p:cNvPr id="28" name="Connector 27"/>
+          <p:cNvPr id="29" name="Connector 28"/>
           <p:cNvCxnSpPr/>
           <p:nvPr/>
         </p:nvCxnSpPr>
@@ -15856,7 +16120,7 @@
       </p:cxnSp>
       <p:sp>
         <p:nvSpPr>
-          <p:cNvPr id="29" name="S09_RISK_3_ACTION_TAG"/>
+          <p:cNvPr id="30" name="S09_RISK_3_ACTION_TAG"/>
           <p:cNvSpPr/>
           <p:nvPr/>
         </p:nvSpPr>
@@ -15896,7 +16160,7 @@
       </p:sp>
       <p:sp>
         <p:nvSpPr>
-          <p:cNvPr id="30" name="S09_RISK_3_ACTION_BODY"/>
+          <p:cNvPr id="31" name="S09_RISK_3_ACTION_BODY"/>
           <p:cNvSpPr txBox="1"/>
           <p:nvPr/>
         </p:nvSpPr>
@@ -15949,7 +16213,7 @@
       </p:sp>
       <p:sp>
         <p:nvSpPr>
-          <p:cNvPr id="31" name="S09_OPP_1_CARD"/>
+          <p:cNvPr id="32" name="S09_OPP_1_CARD"/>
           <p:cNvSpPr/>
           <p:nvPr/>
         </p:nvSpPr>
@@ -15982,7 +16246,7 @@
       </p:sp>
       <p:sp>
         <p:nvSpPr>
-          <p:cNvPr id="32" name="S09_OPP_1_ICON"/>
+          <p:cNvPr id="33" name="S09_OPP_1_ICON"/>
           <p:cNvSpPr/>
           <p:nvPr/>
         </p:nvSpPr>
@@ -16022,7 +16286,7 @@
       </p:sp>
       <p:sp>
         <p:nvSpPr>
-          <p:cNvPr id="33" name="S09_OPP_1_TITLE"/>
+          <p:cNvPr id="34" name="S09_OPP_1_TITLE"/>
           <p:cNvSpPr txBox="1"/>
           <p:nvPr/>
         </p:nvSpPr>
@@ -16066,7 +16330,7 @@
       </p:sp>
       <p:sp>
         <p:nvSpPr>
-          <p:cNvPr id="34" name="S09_OPP_1_LEVEL"/>
+          <p:cNvPr id="35" name="S09_OPP_1_LEVEL"/>
           <p:cNvSpPr/>
           <p:nvPr/>
         </p:nvSpPr>
@@ -16106,7 +16370,7 @@
       </p:sp>
       <p:sp>
         <p:nvSpPr>
-          <p:cNvPr id="35" name="S09_OPP_1_BODY"/>
+          <p:cNvPr id="36" name="S09_OPP_1_BODY"/>
           <p:cNvSpPr txBox="1"/>
           <p:nvPr/>
         </p:nvSpPr>
@@ -16150,7 +16414,7 @@
       </p:sp>
       <p:cxnSp>
         <p:nvCxnSpPr>
-          <p:cNvPr id="36" name="Connector 35"/>
+          <p:cNvPr id="37" name="Connector 36"/>
           <p:cNvCxnSpPr/>
           <p:nvPr/>
         </p:nvCxnSpPr>
@@ -16172,7 +16436,7 @@
       </p:cxnSp>
       <p:sp>
         <p:nvSpPr>
-          <p:cNvPr id="37" name="S09_OPP_1_ACTION_TAG"/>
+          <p:cNvPr id="38" name="S09_OPP_1_ACTION_TAG"/>
           <p:cNvSpPr/>
           <p:nvPr/>
         </p:nvSpPr>
@@ -16212,7 +16476,7 @@
       </p:sp>
       <p:sp>
         <p:nvSpPr>
-          <p:cNvPr id="38" name="S09_OPP_1_ACTION_BODY"/>
+          <p:cNvPr id="39" name="S09_OPP_1_ACTION_BODY"/>
           <p:cNvSpPr txBox="1"/>
           <p:nvPr/>
         </p:nvSpPr>
@@ -16265,7 +16529,7 @@
       </p:sp>
       <p:sp>
         <p:nvSpPr>
-          <p:cNvPr id="39" name="S09_OPP_2_CARD"/>
+          <p:cNvPr id="40" name="S09_OPP_2_CARD"/>
           <p:cNvSpPr/>
           <p:nvPr/>
         </p:nvSpPr>
@@ -16298,7 +16562,7 @@
       </p:sp>
       <p:sp>
         <p:nvSpPr>
-          <p:cNvPr id="40" name="S09_OPP_2_ICON"/>
+          <p:cNvPr id="41" name="S09_OPP_2_ICON"/>
           <p:cNvSpPr/>
           <p:nvPr/>
         </p:nvSpPr>
@@ -16338,7 +16602,7 @@
       </p:sp>
       <p:sp>
         <p:nvSpPr>
-          <p:cNvPr id="41" name="S09_OPP_2_TITLE"/>
+          <p:cNvPr id="42" name="S09_OPP_2_TITLE"/>
           <p:cNvSpPr txBox="1"/>
           <p:nvPr/>
         </p:nvSpPr>
@@ -16382,7 +16646,7 @@
       </p:sp>
       <p:sp>
         <p:nvSpPr>
-          <p:cNvPr id="42" name="S09_OPP_2_LEVEL"/>
+          <p:cNvPr id="43" name="S09_OPP_2_LEVEL"/>
           <p:cNvSpPr/>
           <p:nvPr/>
         </p:nvSpPr>
@@ -16422,7 +16686,7 @@
       </p:sp>
       <p:sp>
         <p:nvSpPr>
-          <p:cNvPr id="43" name="S09_OPP_2_BODY"/>
+          <p:cNvPr id="44" name="S09_OPP_2_BODY"/>
           <p:cNvSpPr txBox="1"/>
           <p:nvPr/>
         </p:nvSpPr>
@@ -16475,7 +16739,7 @@
       </p:sp>
       <p:cxnSp>
         <p:nvCxnSpPr>
-          <p:cNvPr id="44" name="Connector 43"/>
+          <p:cNvPr id="45" name="Connector 44"/>
           <p:cNvCxnSpPr/>
           <p:nvPr/>
         </p:nvCxnSpPr>
@@ -16497,7 +16761,7 @@
       </p:cxnSp>
       <p:sp>
         <p:nvSpPr>
-          <p:cNvPr id="45" name="S09_OPP_2_ACTION_TAG"/>
+          <p:cNvPr id="46" name="S09_OPP_2_ACTION_TAG"/>
           <p:cNvSpPr/>
           <p:nvPr/>
         </p:nvSpPr>
@@ -16537,7 +16801,7 @@
       </p:sp>
       <p:sp>
         <p:nvSpPr>
-          <p:cNvPr id="46" name="S09_OPP_2_ACTION_BODY"/>
+          <p:cNvPr id="47" name="S09_OPP_2_ACTION_BODY"/>
           <p:cNvSpPr txBox="1"/>
           <p:nvPr/>
         </p:nvSpPr>
@@ -16590,7 +16854,7 @@
       </p:sp>
       <p:sp>
         <p:nvSpPr>
-          <p:cNvPr id="47" name="S09_OPP_3_CARD"/>
+          <p:cNvPr id="48" name="S09_OPP_3_CARD"/>
           <p:cNvSpPr/>
           <p:nvPr/>
         </p:nvSpPr>
@@ -16623,7 +16887,7 @@
       </p:sp>
       <p:sp>
         <p:nvSpPr>
-          <p:cNvPr id="48" name="S09_OPP_3_ICON"/>
+          <p:cNvPr id="49" name="S09_OPP_3_ICON"/>
           <p:cNvSpPr/>
           <p:nvPr/>
         </p:nvSpPr>
@@ -16663,7 +16927,7 @@
       </p:sp>
       <p:sp>
         <p:nvSpPr>
-          <p:cNvPr id="49" name="S09_OPP_3_TITLE"/>
+          <p:cNvPr id="50" name="S09_OPP_3_TITLE"/>
           <p:cNvSpPr txBox="1"/>
           <p:nvPr/>
         </p:nvSpPr>
@@ -16707,7 +16971,7 @@
       </p:sp>
       <p:sp>
         <p:nvSpPr>
-          <p:cNvPr id="50" name="S09_OPP_3_LEVEL"/>
+          <p:cNvPr id="51" name="S09_OPP_3_LEVEL"/>
           <p:cNvSpPr/>
           <p:nvPr/>
         </p:nvSpPr>
@@ -16747,7 +17011,7 @@
       </p:sp>
       <p:sp>
         <p:nvSpPr>
-          <p:cNvPr id="51" name="S09_OPP_3_BODY"/>
+          <p:cNvPr id="52" name="S09_OPP_3_BODY"/>
           <p:cNvSpPr txBox="1"/>
           <p:nvPr/>
         </p:nvSpPr>
@@ -16800,7 +17064,7 @@
       </p:sp>
       <p:cxnSp>
         <p:nvCxnSpPr>
-          <p:cNvPr id="52" name="Connector 51"/>
+          <p:cNvPr id="53" name="Connector 52"/>
           <p:cNvCxnSpPr/>
           <p:nvPr/>
         </p:nvCxnSpPr>
@@ -16822,7 +17086,7 @@
       </p:cxnSp>
       <p:sp>
         <p:nvSpPr>
-          <p:cNvPr id="53" name="S09_OPP_3_ACTION_TAG"/>
+          <p:cNvPr id="54" name="S09_OPP_3_ACTION_TAG"/>
           <p:cNvSpPr/>
           <p:nvPr/>
         </p:nvSpPr>
@@ -16862,7 +17126,7 @@
       </p:sp>
       <p:sp>
         <p:nvSpPr>
-          <p:cNvPr id="54" name="S09_OPP_3_ACTION_BODY"/>
+          <p:cNvPr id="55" name="S09_OPP_3_ACTION_BODY"/>
           <p:cNvSpPr txBox="1"/>
           <p:nvPr/>
         </p:nvSpPr>

--- a/test_corretion_elements_graphiques.pptx
+++ b/test_corretion_elements_graphiques.pptx
@@ -3264,7 +3264,7 @@
                 </a:solidFill>
                 <a:latin typeface="Segoe UI"/>
               </a:rPr>
-              <a:t>01        |</a:t>
+              <a:t>01      |</a:t>
             </a:r>
           </a:p>
         </p:txBody>
@@ -4241,7 +4241,7 @@
                 </a:solidFill>
                 <a:latin typeface="Segoe UI"/>
               </a:rPr>
-              <a:t>10        |</a:t>
+              <a:t>10      |</a:t>
             </a:r>
           </a:p>
         </p:txBody>
@@ -6370,7 +6370,7 @@
                 </a:solidFill>
                 <a:latin typeface="Segoe UI"/>
               </a:rPr>
-              <a:t>11        |</a:t>
+              <a:t>11      |</a:t>
             </a:r>
           </a:p>
         </p:txBody>
@@ -7216,7 +7216,7 @@
                 </a:solidFill>
                 <a:latin typeface="Segoe UI"/>
               </a:rPr>
-              <a:t>02        |</a:t>
+              <a:t>02      |</a:t>
             </a:r>
           </a:p>
         </p:txBody>
@@ -7873,7 +7873,7 @@
                 </a:solidFill>
                 <a:latin typeface="Segoe UI"/>
               </a:rPr>
-              <a:t>03        |</a:t>
+              <a:t>03      |</a:t>
             </a:r>
           </a:p>
         </p:txBody>
@@ -7909,7 +7909,7 @@
           <p:nvPr/>
         </p:nvSpPr>
         <p:spPr>
-          <a:xfrm rot="10800000">
+          <a:xfrm>
             <a:off x="1336859" y="1292400"/>
             <a:ext cx="864000" cy="864000"/>
           </a:xfrm>
@@ -7917,7 +7917,7 @@
             <a:avLst/>
           </a:prstGeom>
           <a:solidFill>
-            <a:srgbClr val="D8DBE8"/>
+            <a:srgbClr val="BABDD0"/>
           </a:solidFill>
           <a:ln>
             <a:noFill/>
@@ -7982,7 +7982,7 @@
           <p:nvPr/>
         </p:nvSpPr>
         <p:spPr>
-          <a:xfrm rot="10800000">
+          <a:xfrm>
             <a:off x="5635260" y="1314000"/>
             <a:ext cx="864000" cy="864000"/>
           </a:xfrm>
@@ -8055,7 +8055,7 @@
           <p:nvPr/>
         </p:nvSpPr>
         <p:spPr>
-          <a:xfrm rot="10800000">
+          <a:xfrm>
             <a:off x="9775260" y="1314000"/>
             <a:ext cx="864000" cy="864000"/>
           </a:xfrm>
@@ -8128,7 +8128,7 @@
           <p:nvPr/>
         </p:nvSpPr>
         <p:spPr>
-          <a:xfrm rot="10800000">
+          <a:xfrm>
             <a:off x="1351259" y="3927600"/>
             <a:ext cx="864000" cy="864000"/>
           </a:xfrm>
@@ -8201,7 +8201,7 @@
           <p:nvPr/>
         </p:nvSpPr>
         <p:spPr>
-          <a:xfrm rot="10800000">
+          <a:xfrm>
             <a:off x="5577660" y="3927600"/>
             <a:ext cx="864000" cy="864000"/>
           </a:xfrm>
@@ -8274,7 +8274,7 @@
           <p:nvPr/>
         </p:nvSpPr>
         <p:spPr>
-          <a:xfrm rot="10800000">
+          <a:xfrm>
             <a:off x="9667259" y="3927600"/>
             <a:ext cx="864000" cy="864000"/>
           </a:xfrm>
@@ -8641,7 +8641,7 @@
                 </a:solidFill>
                 <a:latin typeface="Segoe UI"/>
               </a:rPr>
-              <a:t>04        |</a:t>
+              <a:t>04      |</a:t>
             </a:r>
           </a:p>
         </p:txBody>
@@ -9184,7 +9184,7 @@
                 </a:solidFill>
                 <a:latin typeface="Segoe UI"/>
               </a:rPr>
-              <a:t>05        |</a:t>
+              <a:t>05      |</a:t>
             </a:r>
           </a:p>
         </p:txBody>
@@ -10344,7 +10344,7 @@
                 </a:solidFill>
                 <a:latin typeface="Segoe UI"/>
               </a:rPr>
-              <a:t>06        |</a:t>
+              <a:t>06      |</a:t>
             </a:r>
           </a:p>
         </p:txBody>
@@ -12242,7 +12242,7 @@
                 </a:solidFill>
                 <a:latin typeface="Segoe UI"/>
               </a:rPr>
-              <a:t>07        |</a:t>
+              <a:t>07      |</a:t>
             </a:r>
           </a:p>
         </p:txBody>
@@ -13831,7 +13831,7 @@
                 </a:solidFill>
                 <a:latin typeface="Segoe UI"/>
               </a:rPr>
-              <a:t>08        |</a:t>
+              <a:t>08      |</a:t>
             </a:r>
           </a:p>
         </p:txBody>
@@ -15189,7 +15189,7 @@
                 </a:solidFill>
                 <a:latin typeface="Segoe UI"/>
               </a:rPr>
-              <a:t>09        |</a:t>
+              <a:t>09      |</a:t>
             </a:r>
           </a:p>
         </p:txBody>

--- a/test_corretion_elements_graphiques.pptx
+++ b/test_corretion_elements_graphiques.pptx
@@ -7910,7 +7910,7 @@
         </p:nvSpPr>
         <p:spPr>
           <a:xfrm>
-            <a:off x="1336859" y="1292400"/>
+            <a:off x="1336859" y="1475999"/>
             <a:ext cx="864000" cy="864000"/>
           </a:xfrm>
           <a:prstGeom prst="teardrop">
@@ -7983,7 +7983,7 @@
         </p:nvSpPr>
         <p:spPr>
           <a:xfrm>
-            <a:off x="5635260" y="1314000"/>
+            <a:off x="5635260" y="1475999"/>
             <a:ext cx="864000" cy="864000"/>
           </a:xfrm>
           <a:prstGeom prst="teardrop">
@@ -8012,7 +8012,7 @@
         </p:nvSpPr>
         <p:spPr>
           <a:xfrm>
-            <a:off x="4926060" y="2502000"/>
+            <a:off x="4926060" y="2480400"/>
             <a:ext cx="2498400" cy="309600"/>
           </a:xfrm>
           <a:prstGeom prst="rect">
@@ -8056,7 +8056,7 @@
         </p:nvSpPr>
         <p:spPr>
           <a:xfrm>
-            <a:off x="9775260" y="1314000"/>
+            <a:off x="9775260" y="1475999"/>
             <a:ext cx="864000" cy="864000"/>
           </a:xfrm>
           <a:prstGeom prst="teardrop">
@@ -8085,7 +8085,7 @@
         </p:nvSpPr>
         <p:spPr>
           <a:xfrm>
-            <a:off x="9066060" y="2502000"/>
+            <a:off x="9066060" y="2480400"/>
             <a:ext cx="2498400" cy="309600"/>
           </a:xfrm>
           <a:prstGeom prst="rect">
@@ -8129,7 +8129,7 @@
         </p:nvSpPr>
         <p:spPr>
           <a:xfrm>
-            <a:off x="1351259" y="3927600"/>
+            <a:off x="1336859" y="4111200"/>
             <a:ext cx="864000" cy="864000"/>
           </a:xfrm>
           <a:prstGeom prst="teardrop">
@@ -8158,7 +8158,7 @@
         </p:nvSpPr>
         <p:spPr>
           <a:xfrm>
-            <a:off x="642059" y="5115600"/>
+            <a:off x="627659" y="5115600"/>
             <a:ext cx="2498400" cy="309600"/>
           </a:xfrm>
           <a:prstGeom prst="rect">
@@ -8202,7 +8202,7 @@
         </p:nvSpPr>
         <p:spPr>
           <a:xfrm>
-            <a:off x="5577660" y="3927600"/>
+            <a:off x="5635260" y="4111200"/>
             <a:ext cx="864000" cy="864000"/>
           </a:xfrm>
           <a:prstGeom prst="teardrop">
@@ -8231,7 +8231,7 @@
         </p:nvSpPr>
         <p:spPr>
           <a:xfrm>
-            <a:off x="4868459" y="5115600"/>
+            <a:off x="4926060" y="5115600"/>
             <a:ext cx="2498400" cy="309600"/>
           </a:xfrm>
           <a:prstGeom prst="rect">
@@ -8275,7 +8275,7 @@
         </p:nvSpPr>
         <p:spPr>
           <a:xfrm>
-            <a:off x="9667259" y="3927600"/>
+            <a:off x="9775260" y="4111200"/>
             <a:ext cx="864000" cy="864000"/>
           </a:xfrm>
           <a:prstGeom prst="teardrop">
@@ -8304,7 +8304,7 @@
         </p:nvSpPr>
         <p:spPr>
           <a:xfrm>
-            <a:off x="8958060" y="5115600"/>
+            <a:off x="9066060" y="5115600"/>
             <a:ext cx="2498400" cy="309600"/>
           </a:xfrm>
           <a:prstGeom prst="rect">
